--- a/public/showcase/showcase.pptx
+++ b/public/showcase/showcase.pptx
@@ -29,9 +29,12 @@
     <p:sldId id="277" r:id="rId23"/>
     <p:sldId id="278" r:id="rId24"/>
     <p:sldId id="279" r:id="rId25"/>
+    <p:sldId id="280" r:id="rId26"/>
+    <p:sldId id="281" r:id="rId27"/>
+    <p:sldId id="282" r:id="rId28"/>
   </p:sldIdLst>
   <p:notesMasterIdLst>
-    <p:notesMasterId r:id="rId26"/>
+    <p:notesMasterId r:id="rId29"/>
   </p:notesMasterIdLst>
   <p:sldSz cx="12192000" cy="6858000"/>
   <p:notesSz cx="6858000" cy="12192000"/>
@@ -1957,6 +1960,270 @@
             <a:fld id="{F7021451-1387-4CA6-816F-3879F97B5CBC}" type="slidenum">
               <a:rPr lang="en-US"/>
               <a:t>24</a:t>
+            </a:fld>
+            <a:endParaRPr lang="en-US"/>
+          </a:p>
+        </p:txBody>
+      </p:sp>
+    </p:spTree>
+    <p:extLst>
+      <p:ext uri="{BB962C8B-B14F-4D97-AF65-F5344CB8AC3E}">
+        <p14:creationId xmlns:p14="http://schemas.microsoft.com/office/powerpoint/2010/main" val="1024086991"/>
+      </p:ext>
+    </p:extLst>
+  </p:cSld>
+  <p:clrMapOvr>
+    <a:masterClrMapping/>
+  </p:clrMapOvr>
+</p:notes>
+</file>
+
+<file path=ppt/notesSlides/notesSlide25.xml><?xml version="1.0" encoding="utf-8"?>
+<p:notes xmlns:a="http://schemas.openxmlformats.org/drawingml/2006/main" xmlns:r="http://schemas.openxmlformats.org/officeDocument/2006/relationships" xmlns:p="http://schemas.openxmlformats.org/presentationml/2006/main">
+  <p:cSld>
+    <p:spTree>
+      <p:nvGrpSpPr>
+        <p:cNvPr id="1" name=""/>
+        <p:cNvGrpSpPr/>
+        <p:nvPr/>
+      </p:nvGrpSpPr>
+      <p:grpSpPr>
+        <a:xfrm>
+          <a:off x="0" y="0"/>
+          <a:ext cx="0" cy="0"/>
+          <a:chOff x="0" y="0"/>
+          <a:chExt cx="0" cy="0"/>
+        </a:xfrm>
+      </p:grpSpPr>
+      <p:sp>
+        <p:nvSpPr>
+          <p:cNvPr id="2" name="Slide Image Placeholder 1"/>
+          <p:cNvSpPr>
+            <a:spLocks noGrp="1" noRot="1" noChangeAspect="1"/>
+          </p:cNvSpPr>
+          <p:nvPr>
+            <p:ph type="sldImg"/>
+          </p:nvPr>
+        </p:nvSpPr>
+        <p:spPr/>
+      </p:sp>
+      <p:sp>
+        <p:nvSpPr>
+          <p:cNvPr id="3" name="Notes Placeholder 2"/>
+          <p:cNvSpPr>
+            <a:spLocks noGrp="1"/>
+          </p:cNvSpPr>
+          <p:nvPr>
+            <p:ph type="body" idx="1"/>
+          </p:nvPr>
+        </p:nvSpPr>
+        <p:spPr/>
+        <p:txBody>
+          <a:bodyPr/>
+          <a:lstStyle/>
+          <a:p>
+            <a:r>
+              <a:rPr lang="en-US" dirty="0"/>
+              <a:t/>
+            </a:r>
+            <a:endParaRPr lang="en-US" dirty="0"/>
+          </a:p>
+        </p:txBody>
+      </p:sp>
+      <p:sp>
+        <p:nvSpPr>
+          <p:cNvPr id="4" name="Slide Number Placeholder 3"/>
+          <p:cNvSpPr>
+            <a:spLocks noGrp="1"/>
+          </p:cNvSpPr>
+          <p:nvPr>
+            <p:ph type="sldNum" sz="quarter" idx="10"/>
+          </p:nvPr>
+        </p:nvSpPr>
+        <p:spPr/>
+        <p:txBody>
+          <a:bodyPr/>
+          <a:lstStyle/>
+          <a:p>
+            <a:fld id="{F7021451-1387-4CA6-816F-3879F97B5CBC}" type="slidenum">
+              <a:rPr lang="en-US"/>
+              <a:t>25</a:t>
+            </a:fld>
+            <a:endParaRPr lang="en-US"/>
+          </a:p>
+        </p:txBody>
+      </p:sp>
+    </p:spTree>
+    <p:extLst>
+      <p:ext uri="{BB962C8B-B14F-4D97-AF65-F5344CB8AC3E}">
+        <p14:creationId xmlns:p14="http://schemas.microsoft.com/office/powerpoint/2010/main" val="1024086991"/>
+      </p:ext>
+    </p:extLst>
+  </p:cSld>
+  <p:clrMapOvr>
+    <a:masterClrMapping/>
+  </p:clrMapOvr>
+</p:notes>
+</file>
+
+<file path=ppt/notesSlides/notesSlide26.xml><?xml version="1.0" encoding="utf-8"?>
+<p:notes xmlns:a="http://schemas.openxmlformats.org/drawingml/2006/main" xmlns:r="http://schemas.openxmlformats.org/officeDocument/2006/relationships" xmlns:p="http://schemas.openxmlformats.org/presentationml/2006/main">
+  <p:cSld>
+    <p:spTree>
+      <p:nvGrpSpPr>
+        <p:cNvPr id="1" name=""/>
+        <p:cNvGrpSpPr/>
+        <p:nvPr/>
+      </p:nvGrpSpPr>
+      <p:grpSpPr>
+        <a:xfrm>
+          <a:off x="0" y="0"/>
+          <a:ext cx="0" cy="0"/>
+          <a:chOff x="0" y="0"/>
+          <a:chExt cx="0" cy="0"/>
+        </a:xfrm>
+      </p:grpSpPr>
+      <p:sp>
+        <p:nvSpPr>
+          <p:cNvPr id="2" name="Slide Image Placeholder 1"/>
+          <p:cNvSpPr>
+            <a:spLocks noGrp="1" noRot="1" noChangeAspect="1"/>
+          </p:cNvSpPr>
+          <p:nvPr>
+            <p:ph type="sldImg"/>
+          </p:nvPr>
+        </p:nvSpPr>
+        <p:spPr/>
+      </p:sp>
+      <p:sp>
+        <p:nvSpPr>
+          <p:cNvPr id="3" name="Notes Placeholder 2"/>
+          <p:cNvSpPr>
+            <a:spLocks noGrp="1"/>
+          </p:cNvSpPr>
+          <p:nvPr>
+            <p:ph type="body" idx="1"/>
+          </p:nvPr>
+        </p:nvSpPr>
+        <p:spPr/>
+        <p:txBody>
+          <a:bodyPr/>
+          <a:lstStyle/>
+          <a:p>
+            <a:r>
+              <a:rPr lang="en-US" dirty="0"/>
+              <a:t/>
+            </a:r>
+            <a:endParaRPr lang="en-US" dirty="0"/>
+          </a:p>
+        </p:txBody>
+      </p:sp>
+      <p:sp>
+        <p:nvSpPr>
+          <p:cNvPr id="4" name="Slide Number Placeholder 3"/>
+          <p:cNvSpPr>
+            <a:spLocks noGrp="1"/>
+          </p:cNvSpPr>
+          <p:nvPr>
+            <p:ph type="sldNum" sz="quarter" idx="10"/>
+          </p:nvPr>
+        </p:nvSpPr>
+        <p:spPr/>
+        <p:txBody>
+          <a:bodyPr/>
+          <a:lstStyle/>
+          <a:p>
+            <a:fld id="{F7021451-1387-4CA6-816F-3879F97B5CBC}" type="slidenum">
+              <a:rPr lang="en-US"/>
+              <a:t>26</a:t>
+            </a:fld>
+            <a:endParaRPr lang="en-US"/>
+          </a:p>
+        </p:txBody>
+      </p:sp>
+    </p:spTree>
+    <p:extLst>
+      <p:ext uri="{BB962C8B-B14F-4D97-AF65-F5344CB8AC3E}">
+        <p14:creationId xmlns:p14="http://schemas.microsoft.com/office/powerpoint/2010/main" val="1024086991"/>
+      </p:ext>
+    </p:extLst>
+  </p:cSld>
+  <p:clrMapOvr>
+    <a:masterClrMapping/>
+  </p:clrMapOvr>
+</p:notes>
+</file>
+
+<file path=ppt/notesSlides/notesSlide27.xml><?xml version="1.0" encoding="utf-8"?>
+<p:notes xmlns:a="http://schemas.openxmlformats.org/drawingml/2006/main" xmlns:r="http://schemas.openxmlformats.org/officeDocument/2006/relationships" xmlns:p="http://schemas.openxmlformats.org/presentationml/2006/main">
+  <p:cSld>
+    <p:spTree>
+      <p:nvGrpSpPr>
+        <p:cNvPr id="1" name=""/>
+        <p:cNvGrpSpPr/>
+        <p:nvPr/>
+      </p:nvGrpSpPr>
+      <p:grpSpPr>
+        <a:xfrm>
+          <a:off x="0" y="0"/>
+          <a:ext cx="0" cy="0"/>
+          <a:chOff x="0" y="0"/>
+          <a:chExt cx="0" cy="0"/>
+        </a:xfrm>
+      </p:grpSpPr>
+      <p:sp>
+        <p:nvSpPr>
+          <p:cNvPr id="2" name="Slide Image Placeholder 1"/>
+          <p:cNvSpPr>
+            <a:spLocks noGrp="1" noRot="1" noChangeAspect="1"/>
+          </p:cNvSpPr>
+          <p:nvPr>
+            <p:ph type="sldImg"/>
+          </p:nvPr>
+        </p:nvSpPr>
+        <p:spPr/>
+      </p:sp>
+      <p:sp>
+        <p:nvSpPr>
+          <p:cNvPr id="3" name="Notes Placeholder 2"/>
+          <p:cNvSpPr>
+            <a:spLocks noGrp="1"/>
+          </p:cNvSpPr>
+          <p:nvPr>
+            <p:ph type="body" idx="1"/>
+          </p:nvPr>
+        </p:nvSpPr>
+        <p:spPr/>
+        <p:txBody>
+          <a:bodyPr/>
+          <a:lstStyle/>
+          <a:p>
+            <a:r>
+              <a:rPr lang="en-US" dirty="0"/>
+              <a:t/>
+            </a:r>
+            <a:endParaRPr lang="en-US" dirty="0"/>
+          </a:p>
+        </p:txBody>
+      </p:sp>
+      <p:sp>
+        <p:nvSpPr>
+          <p:cNvPr id="4" name="Slide Number Placeholder 3"/>
+          <p:cNvSpPr>
+            <a:spLocks noGrp="1"/>
+          </p:cNvSpPr>
+          <p:nvPr>
+            <p:ph type="sldNum" sz="quarter" idx="10"/>
+          </p:nvPr>
+        </p:nvSpPr>
+        <p:spPr/>
+        <p:txBody>
+          <a:bodyPr/>
+          <a:lstStyle/>
+          <a:p>
+            <a:fld id="{F7021451-1387-4CA6-816F-3879F97B5CBC}" type="slidenum">
+              <a:rPr lang="en-US"/>
+              <a:t>27</a:t>
             </a:fld>
             <a:endParaRPr lang="en-US"/>
           </a:p>
@@ -3058,7 +3325,7 @@
                 <a:ea typeface="Malgun Gothic" pitchFamily="34" charset="-122"/>
                 <a:cs typeface="Malgun Gothic" pitchFamily="34" charset="-120"/>
               </a:rPr>
-              <a:t>21종</a:t>
+              <a:t>24종</a:t>
             </a:r>
             <a:endParaRPr lang="en-US" sz="1800" dirty="0"/>
           </a:p>
@@ -23432,6 +23699,2705 @@
               <a:t>shortcode</a:t>
             </a:r>
             <a:endParaRPr lang="en-US" sz="800" dirty="0"/>
+          </a:p>
+        </p:txBody>
+      </p:sp>
+    </p:spTree>
+  </p:cSld>
+  <p:clrMapOvr>
+    <a:masterClrMapping/>
+  </p:clrMapOvr>
+</p:sld>
+</file>
+
+<file path=ppt/slides/slide25.xml><?xml version="1.0" encoding="utf-8"?>
+<p:sld xmlns:a="http://schemas.openxmlformats.org/drawingml/2006/main" xmlns:r="http://schemas.openxmlformats.org/officeDocument/2006/relationships" xmlns:p="http://schemas.openxmlformats.org/presentationml/2006/main">
+  <p:cSld name="Slide 25">
+    <p:bg>
+      <p:bgPr>
+        <a:solidFill>
+          <a:srgbClr val="FFFFFF"/>
+        </a:solidFill>
+      </p:bgPr>
+    </p:bg>
+    <p:spTree>
+      <p:nvGrpSpPr>
+        <p:cNvPr id="1" name=""/>
+        <p:cNvGrpSpPr/>
+        <p:nvPr/>
+      </p:nvGrpSpPr>
+      <p:grpSpPr>
+        <a:xfrm>
+          <a:off x="0" y="0"/>
+          <a:ext cx="0" cy="0"/>
+          <a:chOff x="0" y="0"/>
+          <a:chExt cx="0" cy="0"/>
+        </a:xfrm>
+      </p:grpSpPr>
+      <p:sp>
+        <p:nvSpPr>
+          <p:cNvPr id="2" name="Shape 0"/>
+          <p:cNvSpPr/>
+          <p:nvPr/>
+        </p:nvSpPr>
+        <p:spPr>
+          <a:xfrm>
+            <a:off x="0" y="0"/>
+            <a:ext cx="12191695" cy="960120"/>
+          </a:xfrm>
+          <a:prstGeom prst="rect">
+            <a:avLst/>
+          </a:prstGeom>
+          <a:solidFill>
+            <a:srgbClr val="0F172A"/>
+          </a:solidFill>
+          <a:ln w="12700">
+            <a:solidFill>
+              <a:srgbClr val="0F172A"/>
+            </a:solidFill>
+            <a:prstDash val="solid"/>
+          </a:ln>
+        </p:spPr>
+      </p:sp>
+      <p:sp>
+        <p:nvSpPr>
+          <p:cNvPr id="3" name="Shape 1"/>
+          <p:cNvSpPr/>
+          <p:nvPr/>
+        </p:nvSpPr>
+        <p:spPr>
+          <a:xfrm>
+            <a:off x="502920" y="228600"/>
+            <a:ext cx="502920" cy="502920"/>
+          </a:xfrm>
+          <a:prstGeom prst="roundRect">
+            <a:avLst>
+              <a:gd name="adj" fmla="val 18182"/>
+            </a:avLst>
+          </a:prstGeom>
+          <a:solidFill>
+            <a:srgbClr val="10A37F"/>
+          </a:solidFill>
+          <a:ln w="12700">
+            <a:solidFill>
+              <a:srgbClr val="10A37F"/>
+            </a:solidFill>
+            <a:prstDash val="solid"/>
+          </a:ln>
+        </p:spPr>
+      </p:sp>
+      <p:sp>
+        <p:nvSpPr>
+          <p:cNvPr id="4" name="Text 2"/>
+          <p:cNvSpPr/>
+          <p:nvPr/>
+        </p:nvSpPr>
+        <p:spPr>
+          <a:xfrm>
+            <a:off x="502920" y="228600"/>
+            <a:ext cx="502920" cy="502920"/>
+          </a:xfrm>
+          <a:prstGeom prst="rect">
+            <a:avLst/>
+          </a:prstGeom>
+          <a:noFill/>
+          <a:ln/>
+        </p:spPr>
+        <p:txBody>
+          <a:bodyPr wrap="square" rtlCol="0" anchor="ctr"/>
+          <a:lstStyle/>
+          <a:p>
+            <a:pPr algn="ctr" indent="0" marL="0">
+              <a:buNone/>
+            </a:pPr>
+            <a:r>
+              <a:rPr lang="en-US" sz="1600" b="1" dirty="0">
+                <a:solidFill>
+                  <a:srgbClr val="FFFFFF"/>
+                </a:solidFill>
+                <a:latin typeface="Malgun Gothic" pitchFamily="34" charset="0"/>
+                <a:ea typeface="Malgun Gothic" pitchFamily="34" charset="-122"/>
+                <a:cs typeface="Malgun Gothic" pitchFamily="34" charset="-120"/>
+              </a:rPr>
+              <a:t>22</a:t>
+            </a:r>
+            <a:endParaRPr lang="en-US" sz="1600" dirty="0"/>
+          </a:p>
+        </p:txBody>
+      </p:sp>
+      <p:sp>
+        <p:nvSpPr>
+          <p:cNvPr id="5" name="Text 3"/>
+          <p:cNvSpPr/>
+          <p:nvPr/>
+        </p:nvSpPr>
+        <p:spPr>
+          <a:xfrm>
+            <a:off x="1143000" y="0"/>
+            <a:ext cx="10957255" cy="960120"/>
+          </a:xfrm>
+          <a:prstGeom prst="rect">
+            <a:avLst/>
+          </a:prstGeom>
+          <a:noFill/>
+          <a:ln/>
+        </p:spPr>
+        <p:txBody>
+          <a:bodyPr wrap="square" rtlCol="0" anchor="ctr"/>
+          <a:lstStyle/>
+          <a:p>
+            <a:pPr indent="0" marL="0">
+              <a:buNone/>
+            </a:pPr>
+            <a:r>
+              <a:rPr lang="en-US" sz="2200" b="1" dirty="0">
+                <a:solidFill>
+                  <a:srgbClr val="FFFFFF"/>
+                </a:solidFill>
+                <a:latin typeface="Malgun Gothic" pitchFamily="34" charset="0"/>
+                <a:ea typeface="Malgun Gothic" pitchFamily="34" charset="-122"/>
+                <a:cs typeface="Malgun Gothic" pitchFamily="34" charset="-120"/>
+              </a:rPr>
+              <a:t>part-deck</a:t>
+            </a:r>
+            <a:endParaRPr lang="en-US" sz="2200" dirty="0"/>
+          </a:p>
+        </p:txBody>
+      </p:sp>
+      <p:sp>
+        <p:nvSpPr>
+          <p:cNvPr id="6" name="Shape 4"/>
+          <p:cNvSpPr/>
+          <p:nvPr/>
+        </p:nvSpPr>
+        <p:spPr>
+          <a:xfrm>
+            <a:off x="457200" y="1143000"/>
+            <a:ext cx="11277295" cy="4620514"/>
+          </a:xfrm>
+          <a:prstGeom prst="roundRect">
+            <a:avLst>
+              <a:gd name="adj" fmla="val 1583"/>
+            </a:avLst>
+          </a:prstGeom>
+          <a:solidFill>
+            <a:srgbClr val="FFFFFF"/>
+          </a:solidFill>
+          <a:ln w="9525">
+            <a:solidFill>
+              <a:srgbClr val="C8E6DF"/>
+            </a:solidFill>
+            <a:prstDash val="solid"/>
+          </a:ln>
+        </p:spPr>
+      </p:sp>
+      <p:graphicFrame>
+        <p:nvGraphicFramePr>
+          <p:cNvPr id="26" name="Table 0"/>
+          <p:cNvGraphicFramePr>
+            <a:graphicFrameLocks noGrp="1"/>
+          </p:cNvGraphicFramePr>
+          <p:nvPr>
+            <p:extLst>
+              <p:ext uri="{D42A27DB-BD31-4B8C-83A1-F6EECF244321}">
+                <p14:modId xmlns:p14="http://schemas.microsoft.com/office/powerpoint/2010/main" val="1579011935"/>
+              </p:ext>
+            </p:extLst>
+          </p:nvPr>
+        </p:nvGraphicFramePr>
+        <p:xfrm>
+          <a:off x="685800" y="1325880"/>
+          <a:ext cx="10820095" cy="914400"/>
+        </p:xfrm>
+        <a:graphic>
+          <a:graphicData uri="http://schemas.openxmlformats.org/drawingml/2006/table">
+            <a:tbl>
+              <a:tblPr/>
+              <a:tblGrid>
+                <a:gridCol w="5410048"/>
+                <a:gridCol w="5410048"/>
+              </a:tblGrid>
+              <a:tr h="320040">
+                <a:tc>
+                  <a:txBody>
+                    <a:bodyPr/>
+                    <a:lstStyle/>
+                    <a:p>
+                      <a:pPr indent="0" marL="0">
+                        <a:buNone/>
+                      </a:pPr>
+                      <a:r>
+                        <a:rPr lang="en-US" sz="1100" b="1" dirty="0">
+                          <a:solidFill>
+                            <a:srgbClr val="FFFFFF"/>
+                          </a:solidFill>
+                          <a:latin typeface="Malgun Gothic" pitchFamily="34" charset="0"/>
+                          <a:ea typeface="Malgun Gothic" pitchFamily="34" charset="-122"/>
+                          <a:cs typeface="Malgun Gothic" pitchFamily="34" charset="-120"/>
+                        </a:rPr>
+                        <a:t>항목</a:t>
+                      </a:r>
+                      <a:endParaRPr lang="en-US" sz="1100" dirty="0">
+                        <a:latin typeface="Malgun Gothic" charset="0"/>
+                        <a:ea typeface="Malgun Gothic" charset="0"/>
+                        <a:cs typeface="Malgun Gothic" charset="0"/>
+                      </a:endParaRPr>
+                    </a:p>
+                  </a:txBody>
+                  <a:tcPr marL="91440" marR="91440" marT="45720" marB="45720">
+                    <a:lnL w="12700" cap="flat" cmpd="sng" algn="ctr">
+                      <a:solidFill>
+                        <a:srgbClr val="C8E6DF"/>
+                      </a:solidFill>
+                      <a:prstDash val="solid"/>
+                      <a:round/>
+                      <a:headEnd type="none" w="med" len="med"/>
+                      <a:tailEnd type="none" w="med" len="med"/>
+                    </a:lnL>
+                    <a:lnR w="12700" cap="flat" cmpd="sng" algn="ctr">
+                      <a:solidFill>
+                        <a:srgbClr val="C8E6DF"/>
+                      </a:solidFill>
+                      <a:prstDash val="solid"/>
+                      <a:round/>
+                      <a:headEnd type="none" w="med" len="med"/>
+                      <a:tailEnd type="none" w="med" len="med"/>
+                    </a:lnR>
+                    <a:lnT w="12700" cap="flat" cmpd="sng" algn="ctr">
+                      <a:solidFill>
+                        <a:srgbClr val="C8E6DF"/>
+                      </a:solidFill>
+                      <a:prstDash val="solid"/>
+                      <a:round/>
+                      <a:headEnd type="none" w="med" len="med"/>
+                      <a:tailEnd type="none" w="med" len="med"/>
+                    </a:lnT>
+                    <a:lnB w="12700" cap="flat" cmpd="sng" algn="ctr">
+                      <a:solidFill>
+                        <a:srgbClr val="C8E6DF"/>
+                      </a:solidFill>
+                      <a:prstDash val="solid"/>
+                      <a:round/>
+                      <a:headEnd type="none" w="med" len="med"/>
+                      <a:tailEnd type="none" w="med" len="med"/>
+                    </a:lnB>
+                    <a:solidFill>
+                      <a:srgbClr val="10A37F"/>
+                    </a:solidFill>
+                  </a:tcPr>
+                </a:tc>
+                <a:tc>
+                  <a:txBody>
+                    <a:bodyPr/>
+                    <a:lstStyle/>
+                    <a:p>
+                      <a:pPr indent="0" marL="0">
+                        <a:buNone/>
+                      </a:pPr>
+                      <a:r>
+                        <a:rPr lang="en-US" sz="1100" b="1" dirty="0">
+                          <a:solidFill>
+                            <a:srgbClr val="FFFFFF"/>
+                          </a:solidFill>
+                          <a:latin typeface="Malgun Gothic" pitchFamily="34" charset="0"/>
+                          <a:ea typeface="Malgun Gothic" pitchFamily="34" charset="-122"/>
+                          <a:cs typeface="Malgun Gothic" pitchFamily="34" charset="-120"/>
+                        </a:rPr>
+                        <a:t>내용</a:t>
+                      </a:r>
+                      <a:endParaRPr lang="en-US" sz="1100" dirty="0">
+                        <a:latin typeface="Malgun Gothic" charset="0"/>
+                        <a:ea typeface="Malgun Gothic" charset="0"/>
+                        <a:cs typeface="Malgun Gothic" charset="0"/>
+                      </a:endParaRPr>
+                    </a:p>
+                  </a:txBody>
+                  <a:tcPr marL="91440" marR="91440" marT="45720" marB="45720">
+                    <a:lnL w="12700" cap="flat" cmpd="sng" algn="ctr">
+                      <a:solidFill>
+                        <a:srgbClr val="C8E6DF"/>
+                      </a:solidFill>
+                      <a:prstDash val="solid"/>
+                      <a:round/>
+                      <a:headEnd type="none" w="med" len="med"/>
+                      <a:tailEnd type="none" w="med" len="med"/>
+                    </a:lnL>
+                    <a:lnR w="12700" cap="flat" cmpd="sng" algn="ctr">
+                      <a:solidFill>
+                        <a:srgbClr val="C8E6DF"/>
+                      </a:solidFill>
+                      <a:prstDash val="solid"/>
+                      <a:round/>
+                      <a:headEnd type="none" w="med" len="med"/>
+                      <a:tailEnd type="none" w="med" len="med"/>
+                    </a:lnR>
+                    <a:lnT w="12700" cap="flat" cmpd="sng" algn="ctr">
+                      <a:solidFill>
+                        <a:srgbClr val="C8E6DF"/>
+                      </a:solidFill>
+                      <a:prstDash val="solid"/>
+                      <a:round/>
+                      <a:headEnd type="none" w="med" len="med"/>
+                      <a:tailEnd type="none" w="med" len="med"/>
+                    </a:lnT>
+                    <a:lnB w="12700" cap="flat" cmpd="sng" algn="ctr">
+                      <a:solidFill>
+                        <a:srgbClr val="C8E6DF"/>
+                      </a:solidFill>
+                      <a:prstDash val="solid"/>
+                      <a:round/>
+                      <a:headEnd type="none" w="med" len="med"/>
+                      <a:tailEnd type="none" w="med" len="med"/>
+                    </a:lnB>
+                    <a:solidFill>
+                      <a:srgbClr val="10A37F"/>
+                    </a:solidFill>
+                  </a:tcPr>
+                </a:tc>
+              </a:tr>
+              <a:tr h="256032">
+                <a:tc>
+                  <a:txBody>
+                    <a:bodyPr/>
+                    <a:lstStyle/>
+                    <a:p>
+                      <a:pPr indent="0" marL="0">
+                        <a:buNone/>
+                      </a:pPr>
+                      <a:r>
+                        <a:rPr lang="en-US" sz="1000" dirty="0">
+                          <a:solidFill>
+                            <a:srgbClr val="475569"/>
+                          </a:solidFill>
+                          <a:latin typeface="Malgun Gothic" pitchFamily="34" charset="0"/>
+                          <a:ea typeface="Malgun Gothic" pitchFamily="34" charset="-122"/>
+                          <a:cs typeface="Malgun Gothic" pitchFamily="34" charset="-120"/>
+                        </a:rPr>
+                        <a:t>숏코드 명</a:t>
+                      </a:r>
+                      <a:endParaRPr lang="en-US" sz="1000" dirty="0">
+                        <a:latin typeface="Malgun Gothic" charset="0"/>
+                        <a:ea typeface="Malgun Gothic" charset="0"/>
+                        <a:cs typeface="Malgun Gothic" charset="0"/>
+                      </a:endParaRPr>
+                    </a:p>
+                  </a:txBody>
+                  <a:tcPr marL="91440" marR="91440" marT="45720" marB="45720">
+                    <a:lnL w="12700" cap="flat" cmpd="sng" algn="ctr">
+                      <a:solidFill>
+                        <a:srgbClr val="C8E6DF"/>
+                      </a:solidFill>
+                      <a:prstDash val="solid"/>
+                      <a:round/>
+                      <a:headEnd type="none" w="med" len="med"/>
+                      <a:tailEnd type="none" w="med" len="med"/>
+                    </a:lnL>
+                    <a:lnR w="12700" cap="flat" cmpd="sng" algn="ctr">
+                      <a:solidFill>
+                        <a:srgbClr val="C8E6DF"/>
+                      </a:solidFill>
+                      <a:prstDash val="solid"/>
+                      <a:round/>
+                      <a:headEnd type="none" w="med" len="med"/>
+                      <a:tailEnd type="none" w="med" len="med"/>
+                    </a:lnR>
+                    <a:lnT w="12700" cap="flat" cmpd="sng" algn="ctr">
+                      <a:solidFill>
+                        <a:srgbClr val="C8E6DF"/>
+                      </a:solidFill>
+                      <a:prstDash val="solid"/>
+                      <a:round/>
+                      <a:headEnd type="none" w="med" len="med"/>
+                      <a:tailEnd type="none" w="med" len="med"/>
+                    </a:lnT>
+                    <a:lnB w="12700" cap="flat" cmpd="sng" algn="ctr">
+                      <a:solidFill>
+                        <a:srgbClr val="C8E6DF"/>
+                      </a:solidFill>
+                      <a:prstDash val="solid"/>
+                      <a:round/>
+                      <a:headEnd type="none" w="med" len="med"/>
+                      <a:tailEnd type="none" w="med" len="med"/>
+                    </a:lnB>
+                  </a:tcPr>
+                </a:tc>
+                <a:tc>
+                  <a:txBody>
+                    <a:bodyPr/>
+                    <a:lstStyle/>
+                    <a:p>
+                      <a:pPr indent="0" marL="0">
+                        <a:buNone/>
+                      </a:pPr>
+                      <a:r>
+                        <a:rPr lang="en-US" sz="1000" dirty="0">
+                          <a:solidFill>
+                            <a:srgbClr val="475569"/>
+                          </a:solidFill>
+                          <a:latin typeface="Malgun Gothic" pitchFamily="34" charset="0"/>
+                          <a:ea typeface="Malgun Gothic" pitchFamily="34" charset="-122"/>
+                          <a:cs typeface="Malgun Gothic" pitchFamily="34" charset="-120"/>
+                        </a:rPr>
+                        <a:t>part-deck</a:t>
+                      </a:r>
+                      <a:endParaRPr lang="en-US" sz="1000" dirty="0">
+                        <a:latin typeface="Malgun Gothic" charset="0"/>
+                        <a:ea typeface="Malgun Gothic" charset="0"/>
+                        <a:cs typeface="Malgun Gothic" charset="0"/>
+                      </a:endParaRPr>
+                    </a:p>
+                  </a:txBody>
+                  <a:tcPr marL="91440" marR="91440" marT="45720" marB="45720">
+                    <a:lnL w="12700" cap="flat" cmpd="sng" algn="ctr">
+                      <a:solidFill>
+                        <a:srgbClr val="C8E6DF"/>
+                      </a:solidFill>
+                      <a:prstDash val="solid"/>
+                      <a:round/>
+                      <a:headEnd type="none" w="med" len="med"/>
+                      <a:tailEnd type="none" w="med" len="med"/>
+                    </a:lnL>
+                    <a:lnR w="12700" cap="flat" cmpd="sng" algn="ctr">
+                      <a:solidFill>
+                        <a:srgbClr val="C8E6DF"/>
+                      </a:solidFill>
+                      <a:prstDash val="solid"/>
+                      <a:round/>
+                      <a:headEnd type="none" w="med" len="med"/>
+                      <a:tailEnd type="none" w="med" len="med"/>
+                    </a:lnR>
+                    <a:lnT w="12700" cap="flat" cmpd="sng" algn="ctr">
+                      <a:solidFill>
+                        <a:srgbClr val="C8E6DF"/>
+                      </a:solidFill>
+                      <a:prstDash val="solid"/>
+                      <a:round/>
+                      <a:headEnd type="none" w="med" len="med"/>
+                      <a:tailEnd type="none" w="med" len="med"/>
+                    </a:lnT>
+                    <a:lnB w="12700" cap="flat" cmpd="sng" algn="ctr">
+                      <a:solidFill>
+                        <a:srgbClr val="C8E6DF"/>
+                      </a:solidFill>
+                      <a:prstDash val="solid"/>
+                      <a:round/>
+                      <a:headEnd type="none" w="med" len="med"/>
+                      <a:tailEnd type="none" w="med" len="med"/>
+                    </a:lnB>
+                  </a:tcPr>
+                </a:tc>
+              </a:tr>
+              <a:tr h="256032">
+                <a:tc>
+                  <a:txBody>
+                    <a:bodyPr/>
+                    <a:lstStyle/>
+                    <a:p>
+                      <a:pPr indent="0" marL="0">
+                        <a:buNone/>
+                      </a:pPr>
+                      <a:r>
+                        <a:rPr lang="en-US" sz="1000" dirty="0">
+                          <a:solidFill>
+                            <a:srgbClr val="475569"/>
+                          </a:solidFill>
+                          <a:latin typeface="Malgun Gothic" pitchFamily="34" charset="0"/>
+                          <a:ea typeface="Malgun Gothic" pitchFamily="34" charset="-122"/>
+                          <a:cs typeface="Malgun Gothic" pitchFamily="34" charset="-120"/>
+                        </a:rPr>
+                        <a:t>구현내용</a:t>
+                      </a:r>
+                      <a:endParaRPr lang="en-US" sz="1000" dirty="0">
+                        <a:latin typeface="Malgun Gothic" charset="0"/>
+                        <a:ea typeface="Malgun Gothic" charset="0"/>
+                        <a:cs typeface="Malgun Gothic" charset="0"/>
+                      </a:endParaRPr>
+                    </a:p>
+                  </a:txBody>
+                  <a:tcPr marL="91440" marR="91440" marT="45720" marB="45720">
+                    <a:lnL w="12700" cap="flat" cmpd="sng" algn="ctr">
+                      <a:solidFill>
+                        <a:srgbClr val="C8E6DF"/>
+                      </a:solidFill>
+                      <a:prstDash val="solid"/>
+                      <a:round/>
+                      <a:headEnd type="none" w="med" len="med"/>
+                      <a:tailEnd type="none" w="med" len="med"/>
+                    </a:lnL>
+                    <a:lnR w="12700" cap="flat" cmpd="sng" algn="ctr">
+                      <a:solidFill>
+                        <a:srgbClr val="C8E6DF"/>
+                      </a:solidFill>
+                      <a:prstDash val="solid"/>
+                      <a:round/>
+                      <a:headEnd type="none" w="med" len="med"/>
+                      <a:tailEnd type="none" w="med" len="med"/>
+                    </a:lnR>
+                    <a:lnT w="12700" cap="flat" cmpd="sng" algn="ctr">
+                      <a:solidFill>
+                        <a:srgbClr val="C8E6DF"/>
+                      </a:solidFill>
+                      <a:prstDash val="solid"/>
+                      <a:round/>
+                      <a:headEnd type="none" w="med" len="med"/>
+                      <a:tailEnd type="none" w="med" len="med"/>
+                    </a:lnT>
+                    <a:lnB w="12700" cap="flat" cmpd="sng" algn="ctr">
+                      <a:solidFill>
+                        <a:srgbClr val="C8E6DF"/>
+                      </a:solidFill>
+                      <a:prstDash val="solid"/>
+                      <a:round/>
+                      <a:headEnd type="none" w="med" len="med"/>
+                      <a:tailEnd type="none" w="med" len="med"/>
+                    </a:lnB>
+                  </a:tcPr>
+                </a:tc>
+                <a:tc>
+                  <a:txBody>
+                    <a:bodyPr/>
+                    <a:lstStyle/>
+                    <a:p>
+                      <a:pPr indent="0" marL="0">
+                        <a:buNone/>
+                      </a:pPr>
+                      <a:r>
+                        <a:rPr lang="en-US" sz="1000" dirty="0">
+                          <a:solidFill>
+                            <a:srgbClr val="475569"/>
+                          </a:solidFill>
+                          <a:latin typeface="Malgun Gothic" pitchFamily="34" charset="0"/>
+                          <a:ea typeface="Malgun Gothic" pitchFamily="34" charset="-122"/>
+                          <a:cs typeface="Malgun Gothic" pitchFamily="34" charset="-120"/>
+                        </a:rPr>
+                        <a:t>시리즈 가이드북 등 목차용 대단원(부, Part)을 알리는 헤더 숏코드입니다. HSL 브랜드 컬러가 다이내믹하게 적용됩니다.</a:t>
+                      </a:r>
+                      <a:endParaRPr lang="en-US" sz="1000" dirty="0">
+                        <a:latin typeface="Malgun Gothic" charset="0"/>
+                        <a:ea typeface="Malgun Gothic" charset="0"/>
+                        <a:cs typeface="Malgun Gothic" charset="0"/>
+                      </a:endParaRPr>
+                    </a:p>
+                  </a:txBody>
+                  <a:tcPr marL="91440" marR="91440" marT="45720" marB="45720">
+                    <a:lnL w="12700" cap="flat" cmpd="sng" algn="ctr">
+                      <a:solidFill>
+                        <a:srgbClr val="C8E6DF"/>
+                      </a:solidFill>
+                      <a:prstDash val="solid"/>
+                      <a:round/>
+                      <a:headEnd type="none" w="med" len="med"/>
+                      <a:tailEnd type="none" w="med" len="med"/>
+                    </a:lnL>
+                    <a:lnR w="12700" cap="flat" cmpd="sng" algn="ctr">
+                      <a:solidFill>
+                        <a:srgbClr val="C8E6DF"/>
+                      </a:solidFill>
+                      <a:prstDash val="solid"/>
+                      <a:round/>
+                      <a:headEnd type="none" w="med" len="med"/>
+                      <a:tailEnd type="none" w="med" len="med"/>
+                    </a:lnR>
+                    <a:lnT w="12700" cap="flat" cmpd="sng" algn="ctr">
+                      <a:solidFill>
+                        <a:srgbClr val="C8E6DF"/>
+                      </a:solidFill>
+                      <a:prstDash val="solid"/>
+                      <a:round/>
+                      <a:headEnd type="none" w="med" len="med"/>
+                      <a:tailEnd type="none" w="med" len="med"/>
+                    </a:lnT>
+                    <a:lnB w="12700" cap="flat" cmpd="sng" algn="ctr">
+                      <a:solidFill>
+                        <a:srgbClr val="C8E6DF"/>
+                      </a:solidFill>
+                      <a:prstDash val="solid"/>
+                      <a:round/>
+                      <a:headEnd type="none" w="med" len="med"/>
+                      <a:tailEnd type="none" w="med" len="med"/>
+                    </a:lnB>
+                  </a:tcPr>
+                </a:tc>
+              </a:tr>
+            </a:tbl>
+          </a:graphicData>
+        </a:graphic>
+      </p:graphicFrame>
+      <p:sp>
+        <p:nvSpPr>
+          <p:cNvPr id="8" name="Text 5"/>
+          <p:cNvSpPr/>
+          <p:nvPr/>
+        </p:nvSpPr>
+        <p:spPr>
+          <a:xfrm>
+            <a:off x="685800" y="2295144"/>
+            <a:ext cx="10820095" cy="237490"/>
+          </a:xfrm>
+          <a:prstGeom prst="rect">
+            <a:avLst/>
+          </a:prstGeom>
+          <a:noFill/>
+          <a:ln/>
+        </p:spPr>
+        <p:txBody>
+          <a:bodyPr wrap="square" rtlCol="0" anchor="t"/>
+          <a:lstStyle/>
+          <a:p>
+            <a:pPr indent="0" marL="0">
+              <a:buNone/>
+            </a:pPr>
+            <a:r>
+              <a:rPr lang="en-US" sz="1100" dirty="0">
+                <a:solidFill>
+                  <a:srgbClr val="475569"/>
+                </a:solidFill>
+                <a:latin typeface="Malgun Gothic" pitchFamily="34" charset="0"/>
+                <a:ea typeface="Malgun Gothic" pitchFamily="34" charset="-122"/>
+                <a:cs typeface="Malgun Gothic" pitchFamily="34" charset="-120"/>
+              </a:rPr>
+              <a:t>숏코드 입력내용</a:t>
+            </a:r>
+            <a:endParaRPr lang="en-US" sz="1100" dirty="0"/>
+          </a:p>
+        </p:txBody>
+      </p:sp>
+      <p:sp>
+        <p:nvSpPr>
+          <p:cNvPr id="9" name="Shape 6"/>
+          <p:cNvSpPr/>
+          <p:nvPr/>
+        </p:nvSpPr>
+        <p:spPr>
+          <a:xfrm>
+            <a:off x="685800" y="2669794"/>
+            <a:ext cx="10820095" cy="2773680"/>
+          </a:xfrm>
+          <a:prstGeom prst="rect">
+            <a:avLst/>
+          </a:prstGeom>
+          <a:solidFill>
+            <a:srgbClr val="0F172A"/>
+          </a:solidFill>
+          <a:ln w="9525">
+            <a:solidFill>
+              <a:srgbClr val="C8E6DF"/>
+            </a:solidFill>
+            <a:prstDash val="solid"/>
+          </a:ln>
+        </p:spPr>
+      </p:sp>
+      <p:sp>
+        <p:nvSpPr>
+          <p:cNvPr id="10" name="Text 7"/>
+          <p:cNvSpPr/>
+          <p:nvPr/>
+        </p:nvSpPr>
+        <p:spPr>
+          <a:xfrm>
+            <a:off x="795528" y="2742946"/>
+            <a:ext cx="10600639" cy="2682240"/>
+          </a:xfrm>
+          <a:prstGeom prst="rect">
+            <a:avLst/>
+          </a:prstGeom>
+          <a:noFill/>
+          <a:ln/>
+        </p:spPr>
+        <p:txBody>
+          <a:bodyPr wrap="square" rtlCol="0" anchor="t"/>
+          <a:lstStyle/>
+          <a:p>
+            <a:pPr indent="0" marL="0">
+              <a:buNone/>
+            </a:pPr>
+            <a:r>
+              <a:rPr lang="en-US" sz="1000" dirty="0">
+                <a:solidFill>
+                  <a:srgbClr val="A8B2D8"/>
+                </a:solidFill>
+                <a:latin typeface="Consolas" pitchFamily="34" charset="0"/>
+                <a:ea typeface="Consolas" pitchFamily="34" charset="-122"/>
+                <a:cs typeface="Consolas" pitchFamily="34" charset="-120"/>
+              </a:rPr>
+              <a:t>\::: part-deck</a:t>
+            </a:r>
+            <a:endParaRPr lang="en-US" sz="1000" dirty="0"/>
+          </a:p>
+          <a:p>
+            <a:pPr indent="0" marL="0">
+              <a:buNone/>
+            </a:pPr>
+            <a:r>
+              <a:rPr lang="en-US" sz="1000" dirty="0">
+                <a:solidFill>
+                  <a:srgbClr val="A8B2D8"/>
+                </a:solidFill>
+                <a:latin typeface="Consolas" pitchFamily="34" charset="0"/>
+                <a:ea typeface="Consolas" pitchFamily="34" charset="-122"/>
+                <a:cs typeface="Consolas" pitchFamily="34" charset="-120"/>
+              </a:rPr>
+              <a:t>- icon: "1부"</a:t>
+            </a:r>
+            <a:endParaRPr lang="en-US" sz="1000" dirty="0"/>
+          </a:p>
+          <a:p>
+            <a:pPr indent="0" marL="0">
+              <a:buNone/>
+            </a:pPr>
+            <a:r>
+              <a:rPr lang="en-US" sz="1000" dirty="0">
+                <a:solidFill>
+                  <a:srgbClr val="A8B2D8"/>
+                </a:solidFill>
+                <a:latin typeface="Consolas" pitchFamily="34" charset="0"/>
+                <a:ea typeface="Consolas" pitchFamily="34" charset="-122"/>
+                <a:cs typeface="Consolas" pitchFamily="34" charset="-120"/>
+              </a:rPr>
+              <a:t>  title: "개념 이해"</a:t>
+            </a:r>
+            <a:endParaRPr lang="en-US" sz="1000" dirty="0"/>
+          </a:p>
+          <a:p>
+            <a:pPr indent="0" marL="0">
+              <a:buNone/>
+            </a:pPr>
+            <a:r>
+              <a:rPr lang="en-US" sz="1000" dirty="0">
+                <a:solidFill>
+                  <a:srgbClr val="A8B2D8"/>
+                </a:solidFill>
+                <a:latin typeface="Consolas" pitchFamily="34" charset="0"/>
+                <a:ea typeface="Consolas" pitchFamily="34" charset="-122"/>
+                <a:cs typeface="Consolas" pitchFamily="34" charset="-120"/>
+              </a:rPr>
+              <a:t>  desc: "바이브코딩과 에이전트 코딩의 작동 원리"</a:t>
+            </a:r>
+            <a:endParaRPr lang="en-US" sz="1000" dirty="0"/>
+          </a:p>
+          <a:p>
+            <a:pPr indent="0" marL="0">
+              <a:buNone/>
+            </a:pPr>
+            <a:r>
+              <a:rPr lang="en-US" sz="1000" dirty="0">
+                <a:solidFill>
+                  <a:srgbClr val="A8B2D8"/>
+                </a:solidFill>
+                <a:latin typeface="Consolas" pitchFamily="34" charset="0"/>
+                <a:ea typeface="Consolas" pitchFamily="34" charset="-122"/>
+                <a:cs typeface="Consolas" pitchFamily="34" charset="-120"/>
+              </a:rPr>
+              <a:t>  tag: "Ch.01–03"</a:t>
+            </a:r>
+            <a:endParaRPr lang="en-US" sz="1000" dirty="0"/>
+          </a:p>
+          <a:p>
+            <a:pPr indent="0" marL="0">
+              <a:buNone/>
+            </a:pPr>
+            <a:r>
+              <a:rPr lang="en-US" sz="1000" dirty="0">
+                <a:solidFill>
+                  <a:srgbClr val="A8B2D8"/>
+                </a:solidFill>
+                <a:latin typeface="Consolas" pitchFamily="34" charset="0"/>
+                <a:ea typeface="Consolas" pitchFamily="34" charset="-122"/>
+                <a:cs typeface="Consolas" pitchFamily="34" charset="-120"/>
+              </a:rPr>
+              <a:t>  color: "#1a3a5c"</a:t>
+            </a:r>
+            <a:endParaRPr lang="en-US" sz="1000" dirty="0"/>
+          </a:p>
+          <a:p>
+            <a:pPr indent="0" marL="0">
+              <a:buNone/>
+            </a:pPr>
+            <a:r>
+              <a:rPr lang="en-US" sz="1000" dirty="0">
+                <a:solidFill>
+                  <a:srgbClr val="A8B2D8"/>
+                </a:solidFill>
+                <a:latin typeface="Consolas" pitchFamily="34" charset="0"/>
+                <a:ea typeface="Consolas" pitchFamily="34" charset="-122"/>
+                <a:cs typeface="Consolas" pitchFamily="34" charset="-120"/>
+              </a:rPr>
+              <a:t>- icon: "2부"</a:t>
+            </a:r>
+            <a:endParaRPr lang="en-US" sz="1000" dirty="0"/>
+          </a:p>
+          <a:p>
+            <a:pPr indent="0" marL="0">
+              <a:buNone/>
+            </a:pPr>
+            <a:r>
+              <a:rPr lang="en-US" sz="1000" dirty="0">
+                <a:solidFill>
+                  <a:srgbClr val="A8B2D8"/>
+                </a:solidFill>
+                <a:latin typeface="Consolas" pitchFamily="34" charset="0"/>
+                <a:ea typeface="Consolas" pitchFamily="34" charset="-122"/>
+                <a:cs typeface="Consolas" pitchFamily="34" charset="-120"/>
+              </a:rPr>
+              <a:t>  title: "AI와 대화하는 법"</a:t>
+            </a:r>
+            <a:endParaRPr lang="en-US" sz="1000" dirty="0"/>
+          </a:p>
+          <a:p>
+            <a:pPr indent="0" marL="0">
+              <a:buNone/>
+            </a:pPr>
+            <a:r>
+              <a:rPr lang="en-US" sz="1000" dirty="0">
+                <a:solidFill>
+                  <a:srgbClr val="A8B2D8"/>
+                </a:solidFill>
+                <a:latin typeface="Consolas" pitchFamily="34" charset="0"/>
+                <a:ea typeface="Consolas" pitchFamily="34" charset="-122"/>
+                <a:cs typeface="Consolas" pitchFamily="34" charset="-120"/>
+              </a:rPr>
+              <a:t>  desc: "프롬프트 설계부터 복잡한 작업 위임까지"</a:t>
+            </a:r>
+            <a:endParaRPr lang="en-US" sz="1000" dirty="0"/>
+          </a:p>
+          <a:p>
+            <a:pPr indent="0" marL="0">
+              <a:buNone/>
+            </a:pPr>
+            <a:r>
+              <a:rPr lang="en-US" sz="1000" dirty="0">
+                <a:solidFill>
+                  <a:srgbClr val="A8B2D8"/>
+                </a:solidFill>
+                <a:latin typeface="Consolas" pitchFamily="34" charset="0"/>
+                <a:ea typeface="Consolas" pitchFamily="34" charset="-122"/>
+                <a:cs typeface="Consolas" pitchFamily="34" charset="-120"/>
+              </a:rPr>
+              <a:t>  tag: "Ch.04–05"</a:t>
+            </a:r>
+            <a:endParaRPr lang="en-US" sz="1000" dirty="0"/>
+          </a:p>
+          <a:p>
+            <a:pPr indent="0" marL="0">
+              <a:buNone/>
+            </a:pPr>
+            <a:r>
+              <a:rPr lang="en-US" sz="1000" dirty="0">
+                <a:solidFill>
+                  <a:srgbClr val="A8B2D8"/>
+                </a:solidFill>
+                <a:latin typeface="Consolas" pitchFamily="34" charset="0"/>
+                <a:ea typeface="Consolas" pitchFamily="34" charset="-122"/>
+                <a:cs typeface="Consolas" pitchFamily="34" charset="-120"/>
+              </a:rPr>
+              <a:t>  color: "#1a4a3a"</a:t>
+            </a:r>
+            <a:endParaRPr lang="en-US" sz="1000" dirty="0"/>
+          </a:p>
+          <a:p>
+            <a:pPr indent="0" marL="0">
+              <a:buNone/>
+            </a:pPr>
+            <a:r>
+              <a:rPr lang="en-US" sz="1000" dirty="0">
+                <a:solidFill>
+                  <a:srgbClr val="A8B2D8"/>
+                </a:solidFill>
+                <a:latin typeface="Consolas" pitchFamily="34" charset="0"/>
+                <a:ea typeface="Consolas" pitchFamily="34" charset="-122"/>
+                <a:cs typeface="Consolas" pitchFamily="34" charset="-120"/>
+              </a:rPr>
+              <a:t>\:::</a:t>
+            </a:r>
+            <a:endParaRPr lang="en-US" sz="1000" dirty="0"/>
+          </a:p>
+        </p:txBody>
+      </p:sp>
+    </p:spTree>
+  </p:cSld>
+  <p:clrMapOvr>
+    <a:masterClrMapping/>
+  </p:clrMapOvr>
+</p:sld>
+</file>
+
+<file path=ppt/slides/slide26.xml><?xml version="1.0" encoding="utf-8"?>
+<p:sld xmlns:a="http://schemas.openxmlformats.org/drawingml/2006/main" xmlns:r="http://schemas.openxmlformats.org/officeDocument/2006/relationships" xmlns:p="http://schemas.openxmlformats.org/presentationml/2006/main">
+  <p:cSld name="Slide 26">
+    <p:bg>
+      <p:bgPr>
+        <a:solidFill>
+          <a:srgbClr val="FFFFFF"/>
+        </a:solidFill>
+      </p:bgPr>
+    </p:bg>
+    <p:spTree>
+      <p:nvGrpSpPr>
+        <p:cNvPr id="1" name=""/>
+        <p:cNvGrpSpPr/>
+        <p:nvPr/>
+      </p:nvGrpSpPr>
+      <p:grpSpPr>
+        <a:xfrm>
+          <a:off x="0" y="0"/>
+          <a:ext cx="0" cy="0"/>
+          <a:chOff x="0" y="0"/>
+          <a:chExt cx="0" cy="0"/>
+        </a:xfrm>
+      </p:grpSpPr>
+      <p:sp>
+        <p:nvSpPr>
+          <p:cNvPr id="2" name="Shape 0"/>
+          <p:cNvSpPr/>
+          <p:nvPr/>
+        </p:nvSpPr>
+        <p:spPr>
+          <a:xfrm>
+            <a:off x="0" y="0"/>
+            <a:ext cx="12191695" cy="960120"/>
+          </a:xfrm>
+          <a:prstGeom prst="rect">
+            <a:avLst/>
+          </a:prstGeom>
+          <a:solidFill>
+            <a:srgbClr val="0F172A"/>
+          </a:solidFill>
+          <a:ln w="12700">
+            <a:solidFill>
+              <a:srgbClr val="0F172A"/>
+            </a:solidFill>
+            <a:prstDash val="solid"/>
+          </a:ln>
+        </p:spPr>
+      </p:sp>
+      <p:sp>
+        <p:nvSpPr>
+          <p:cNvPr id="3" name="Shape 1"/>
+          <p:cNvSpPr/>
+          <p:nvPr/>
+        </p:nvSpPr>
+        <p:spPr>
+          <a:xfrm>
+            <a:off x="502920" y="228600"/>
+            <a:ext cx="502920" cy="502920"/>
+          </a:xfrm>
+          <a:prstGeom prst="roundRect">
+            <a:avLst>
+              <a:gd name="adj" fmla="val 18182"/>
+            </a:avLst>
+          </a:prstGeom>
+          <a:solidFill>
+            <a:srgbClr val="10A37F"/>
+          </a:solidFill>
+          <a:ln w="12700">
+            <a:solidFill>
+              <a:srgbClr val="10A37F"/>
+            </a:solidFill>
+            <a:prstDash val="solid"/>
+          </a:ln>
+        </p:spPr>
+      </p:sp>
+      <p:sp>
+        <p:nvSpPr>
+          <p:cNvPr id="4" name="Text 2"/>
+          <p:cNvSpPr/>
+          <p:nvPr/>
+        </p:nvSpPr>
+        <p:spPr>
+          <a:xfrm>
+            <a:off x="502920" y="228600"/>
+            <a:ext cx="502920" cy="502920"/>
+          </a:xfrm>
+          <a:prstGeom prst="rect">
+            <a:avLst/>
+          </a:prstGeom>
+          <a:noFill/>
+          <a:ln/>
+        </p:spPr>
+        <p:txBody>
+          <a:bodyPr wrap="square" rtlCol="0" anchor="ctr"/>
+          <a:lstStyle/>
+          <a:p>
+            <a:pPr algn="ctr" indent="0" marL="0">
+              <a:buNone/>
+            </a:pPr>
+            <a:r>
+              <a:rPr lang="en-US" sz="1600" b="1" dirty="0">
+                <a:solidFill>
+                  <a:srgbClr val="FFFFFF"/>
+                </a:solidFill>
+                <a:latin typeface="Malgun Gothic" pitchFamily="34" charset="0"/>
+                <a:ea typeface="Malgun Gothic" pitchFamily="34" charset="-122"/>
+                <a:cs typeface="Malgun Gothic" pitchFamily="34" charset="-120"/>
+              </a:rPr>
+              <a:t>23</a:t>
+            </a:r>
+            <a:endParaRPr lang="en-US" sz="1600" dirty="0"/>
+          </a:p>
+        </p:txBody>
+      </p:sp>
+      <p:sp>
+        <p:nvSpPr>
+          <p:cNvPr id="5" name="Text 3"/>
+          <p:cNvSpPr/>
+          <p:nvPr/>
+        </p:nvSpPr>
+        <p:spPr>
+          <a:xfrm>
+            <a:off x="1143000" y="0"/>
+            <a:ext cx="10957255" cy="960120"/>
+          </a:xfrm>
+          <a:prstGeom prst="rect">
+            <a:avLst/>
+          </a:prstGeom>
+          <a:noFill/>
+          <a:ln/>
+        </p:spPr>
+        <p:txBody>
+          <a:bodyPr wrap="square" rtlCol="0" anchor="ctr"/>
+          <a:lstStyle/>
+          <a:p>
+            <a:pPr indent="0" marL="0">
+              <a:buNone/>
+            </a:pPr>
+            <a:r>
+              <a:rPr lang="en-US" sz="2200" b="1" dirty="0">
+                <a:solidFill>
+                  <a:srgbClr val="FFFFFF"/>
+                </a:solidFill>
+                <a:latin typeface="Malgun Gothic" pitchFamily="34" charset="0"/>
+                <a:ea typeface="Malgun Gothic" pitchFamily="34" charset="-122"/>
+                <a:cs typeface="Malgun Gothic" pitchFamily="34" charset="-120"/>
+              </a:rPr>
+              <a:t>chapter-list</a:t>
+            </a:r>
+            <a:endParaRPr lang="en-US" sz="2200" dirty="0"/>
+          </a:p>
+        </p:txBody>
+      </p:sp>
+      <p:sp>
+        <p:nvSpPr>
+          <p:cNvPr id="6" name="Shape 4"/>
+          <p:cNvSpPr/>
+          <p:nvPr/>
+        </p:nvSpPr>
+        <p:spPr>
+          <a:xfrm>
+            <a:off x="457200" y="1143000"/>
+            <a:ext cx="11277295" cy="5052314"/>
+          </a:xfrm>
+          <a:prstGeom prst="roundRect">
+            <a:avLst>
+              <a:gd name="adj" fmla="val 1448"/>
+            </a:avLst>
+          </a:prstGeom>
+          <a:solidFill>
+            <a:srgbClr val="FFFFFF"/>
+          </a:solidFill>
+          <a:ln w="9525">
+            <a:solidFill>
+              <a:srgbClr val="C8E6DF"/>
+            </a:solidFill>
+            <a:prstDash val="solid"/>
+          </a:ln>
+        </p:spPr>
+      </p:sp>
+      <p:graphicFrame>
+        <p:nvGraphicFramePr>
+          <p:cNvPr id="27" name="Table 0"/>
+          <p:cNvGraphicFramePr>
+            <a:graphicFrameLocks noGrp="1"/>
+          </p:cNvGraphicFramePr>
+          <p:nvPr>
+            <p:extLst>
+              <p:ext uri="{D42A27DB-BD31-4B8C-83A1-F6EECF244321}">
+                <p14:modId xmlns:p14="http://schemas.microsoft.com/office/powerpoint/2010/main" val="1579011935"/>
+              </p:ext>
+            </p:extLst>
+          </p:nvPr>
+        </p:nvGraphicFramePr>
+        <p:xfrm>
+          <a:off x="685800" y="1325880"/>
+          <a:ext cx="10820095" cy="914400"/>
+        </p:xfrm>
+        <a:graphic>
+          <a:graphicData uri="http://schemas.openxmlformats.org/drawingml/2006/table">
+            <a:tbl>
+              <a:tblPr/>
+              <a:tblGrid>
+                <a:gridCol w="5410048"/>
+                <a:gridCol w="5410048"/>
+              </a:tblGrid>
+              <a:tr h="320040">
+                <a:tc>
+                  <a:txBody>
+                    <a:bodyPr/>
+                    <a:lstStyle/>
+                    <a:p>
+                      <a:pPr indent="0" marL="0">
+                        <a:buNone/>
+                      </a:pPr>
+                      <a:r>
+                        <a:rPr lang="en-US" sz="1100" b="1" dirty="0">
+                          <a:solidFill>
+                            <a:srgbClr val="FFFFFF"/>
+                          </a:solidFill>
+                          <a:latin typeface="Malgun Gothic" pitchFamily="34" charset="0"/>
+                          <a:ea typeface="Malgun Gothic" pitchFamily="34" charset="-122"/>
+                          <a:cs typeface="Malgun Gothic" pitchFamily="34" charset="-120"/>
+                        </a:rPr>
+                        <a:t>항목</a:t>
+                      </a:r>
+                      <a:endParaRPr lang="en-US" sz="1100" dirty="0">
+                        <a:latin typeface="Malgun Gothic" charset="0"/>
+                        <a:ea typeface="Malgun Gothic" charset="0"/>
+                        <a:cs typeface="Malgun Gothic" charset="0"/>
+                      </a:endParaRPr>
+                    </a:p>
+                  </a:txBody>
+                  <a:tcPr marL="91440" marR="91440" marT="45720" marB="45720">
+                    <a:lnL w="12700" cap="flat" cmpd="sng" algn="ctr">
+                      <a:solidFill>
+                        <a:srgbClr val="C8E6DF"/>
+                      </a:solidFill>
+                      <a:prstDash val="solid"/>
+                      <a:round/>
+                      <a:headEnd type="none" w="med" len="med"/>
+                      <a:tailEnd type="none" w="med" len="med"/>
+                    </a:lnL>
+                    <a:lnR w="12700" cap="flat" cmpd="sng" algn="ctr">
+                      <a:solidFill>
+                        <a:srgbClr val="C8E6DF"/>
+                      </a:solidFill>
+                      <a:prstDash val="solid"/>
+                      <a:round/>
+                      <a:headEnd type="none" w="med" len="med"/>
+                      <a:tailEnd type="none" w="med" len="med"/>
+                    </a:lnR>
+                    <a:lnT w="12700" cap="flat" cmpd="sng" algn="ctr">
+                      <a:solidFill>
+                        <a:srgbClr val="C8E6DF"/>
+                      </a:solidFill>
+                      <a:prstDash val="solid"/>
+                      <a:round/>
+                      <a:headEnd type="none" w="med" len="med"/>
+                      <a:tailEnd type="none" w="med" len="med"/>
+                    </a:lnT>
+                    <a:lnB w="12700" cap="flat" cmpd="sng" algn="ctr">
+                      <a:solidFill>
+                        <a:srgbClr val="C8E6DF"/>
+                      </a:solidFill>
+                      <a:prstDash val="solid"/>
+                      <a:round/>
+                      <a:headEnd type="none" w="med" len="med"/>
+                      <a:tailEnd type="none" w="med" len="med"/>
+                    </a:lnB>
+                    <a:solidFill>
+                      <a:srgbClr val="10A37F"/>
+                    </a:solidFill>
+                  </a:tcPr>
+                </a:tc>
+                <a:tc>
+                  <a:txBody>
+                    <a:bodyPr/>
+                    <a:lstStyle/>
+                    <a:p>
+                      <a:pPr indent="0" marL="0">
+                        <a:buNone/>
+                      </a:pPr>
+                      <a:r>
+                        <a:rPr lang="en-US" sz="1100" b="1" dirty="0">
+                          <a:solidFill>
+                            <a:srgbClr val="FFFFFF"/>
+                          </a:solidFill>
+                          <a:latin typeface="Malgun Gothic" pitchFamily="34" charset="0"/>
+                          <a:ea typeface="Malgun Gothic" pitchFamily="34" charset="-122"/>
+                          <a:cs typeface="Malgun Gothic" pitchFamily="34" charset="-120"/>
+                        </a:rPr>
+                        <a:t>내용</a:t>
+                      </a:r>
+                      <a:endParaRPr lang="en-US" sz="1100" dirty="0">
+                        <a:latin typeface="Malgun Gothic" charset="0"/>
+                        <a:ea typeface="Malgun Gothic" charset="0"/>
+                        <a:cs typeface="Malgun Gothic" charset="0"/>
+                      </a:endParaRPr>
+                    </a:p>
+                  </a:txBody>
+                  <a:tcPr marL="91440" marR="91440" marT="45720" marB="45720">
+                    <a:lnL w="12700" cap="flat" cmpd="sng" algn="ctr">
+                      <a:solidFill>
+                        <a:srgbClr val="C8E6DF"/>
+                      </a:solidFill>
+                      <a:prstDash val="solid"/>
+                      <a:round/>
+                      <a:headEnd type="none" w="med" len="med"/>
+                      <a:tailEnd type="none" w="med" len="med"/>
+                    </a:lnL>
+                    <a:lnR w="12700" cap="flat" cmpd="sng" algn="ctr">
+                      <a:solidFill>
+                        <a:srgbClr val="C8E6DF"/>
+                      </a:solidFill>
+                      <a:prstDash val="solid"/>
+                      <a:round/>
+                      <a:headEnd type="none" w="med" len="med"/>
+                      <a:tailEnd type="none" w="med" len="med"/>
+                    </a:lnR>
+                    <a:lnT w="12700" cap="flat" cmpd="sng" algn="ctr">
+                      <a:solidFill>
+                        <a:srgbClr val="C8E6DF"/>
+                      </a:solidFill>
+                      <a:prstDash val="solid"/>
+                      <a:round/>
+                      <a:headEnd type="none" w="med" len="med"/>
+                      <a:tailEnd type="none" w="med" len="med"/>
+                    </a:lnT>
+                    <a:lnB w="12700" cap="flat" cmpd="sng" algn="ctr">
+                      <a:solidFill>
+                        <a:srgbClr val="C8E6DF"/>
+                      </a:solidFill>
+                      <a:prstDash val="solid"/>
+                      <a:round/>
+                      <a:headEnd type="none" w="med" len="med"/>
+                      <a:tailEnd type="none" w="med" len="med"/>
+                    </a:lnB>
+                    <a:solidFill>
+                      <a:srgbClr val="10A37F"/>
+                    </a:solidFill>
+                  </a:tcPr>
+                </a:tc>
+              </a:tr>
+              <a:tr h="256032">
+                <a:tc>
+                  <a:txBody>
+                    <a:bodyPr/>
+                    <a:lstStyle/>
+                    <a:p>
+                      <a:pPr indent="0" marL="0">
+                        <a:buNone/>
+                      </a:pPr>
+                      <a:r>
+                        <a:rPr lang="en-US" sz="1000" dirty="0">
+                          <a:solidFill>
+                            <a:srgbClr val="475569"/>
+                          </a:solidFill>
+                          <a:latin typeface="Malgun Gothic" pitchFamily="34" charset="0"/>
+                          <a:ea typeface="Malgun Gothic" pitchFamily="34" charset="-122"/>
+                          <a:cs typeface="Malgun Gothic" pitchFamily="34" charset="-120"/>
+                        </a:rPr>
+                        <a:t>숏코드 명</a:t>
+                      </a:r>
+                      <a:endParaRPr lang="en-US" sz="1000" dirty="0">
+                        <a:latin typeface="Malgun Gothic" charset="0"/>
+                        <a:ea typeface="Malgun Gothic" charset="0"/>
+                        <a:cs typeface="Malgun Gothic" charset="0"/>
+                      </a:endParaRPr>
+                    </a:p>
+                  </a:txBody>
+                  <a:tcPr marL="91440" marR="91440" marT="45720" marB="45720">
+                    <a:lnL w="12700" cap="flat" cmpd="sng" algn="ctr">
+                      <a:solidFill>
+                        <a:srgbClr val="C8E6DF"/>
+                      </a:solidFill>
+                      <a:prstDash val="solid"/>
+                      <a:round/>
+                      <a:headEnd type="none" w="med" len="med"/>
+                      <a:tailEnd type="none" w="med" len="med"/>
+                    </a:lnL>
+                    <a:lnR w="12700" cap="flat" cmpd="sng" algn="ctr">
+                      <a:solidFill>
+                        <a:srgbClr val="C8E6DF"/>
+                      </a:solidFill>
+                      <a:prstDash val="solid"/>
+                      <a:round/>
+                      <a:headEnd type="none" w="med" len="med"/>
+                      <a:tailEnd type="none" w="med" len="med"/>
+                    </a:lnR>
+                    <a:lnT w="12700" cap="flat" cmpd="sng" algn="ctr">
+                      <a:solidFill>
+                        <a:srgbClr val="C8E6DF"/>
+                      </a:solidFill>
+                      <a:prstDash val="solid"/>
+                      <a:round/>
+                      <a:headEnd type="none" w="med" len="med"/>
+                      <a:tailEnd type="none" w="med" len="med"/>
+                    </a:lnT>
+                    <a:lnB w="12700" cap="flat" cmpd="sng" algn="ctr">
+                      <a:solidFill>
+                        <a:srgbClr val="C8E6DF"/>
+                      </a:solidFill>
+                      <a:prstDash val="solid"/>
+                      <a:round/>
+                      <a:headEnd type="none" w="med" len="med"/>
+                      <a:tailEnd type="none" w="med" len="med"/>
+                    </a:lnB>
+                  </a:tcPr>
+                </a:tc>
+                <a:tc>
+                  <a:txBody>
+                    <a:bodyPr/>
+                    <a:lstStyle/>
+                    <a:p>
+                      <a:pPr indent="0" marL="0">
+                        <a:buNone/>
+                      </a:pPr>
+                      <a:r>
+                        <a:rPr lang="en-US" sz="1000" dirty="0">
+                          <a:solidFill>
+                            <a:srgbClr val="475569"/>
+                          </a:solidFill>
+                          <a:latin typeface="Malgun Gothic" pitchFamily="34" charset="0"/>
+                          <a:ea typeface="Malgun Gothic" pitchFamily="34" charset="-122"/>
+                          <a:cs typeface="Malgun Gothic" pitchFamily="34" charset="-120"/>
+                        </a:rPr>
+                        <a:t>chapter-list</a:t>
+                      </a:r>
+                      <a:endParaRPr lang="en-US" sz="1000" dirty="0">
+                        <a:latin typeface="Malgun Gothic" charset="0"/>
+                        <a:ea typeface="Malgun Gothic" charset="0"/>
+                        <a:cs typeface="Malgun Gothic" charset="0"/>
+                      </a:endParaRPr>
+                    </a:p>
+                  </a:txBody>
+                  <a:tcPr marL="91440" marR="91440" marT="45720" marB="45720">
+                    <a:lnL w="12700" cap="flat" cmpd="sng" algn="ctr">
+                      <a:solidFill>
+                        <a:srgbClr val="C8E6DF"/>
+                      </a:solidFill>
+                      <a:prstDash val="solid"/>
+                      <a:round/>
+                      <a:headEnd type="none" w="med" len="med"/>
+                      <a:tailEnd type="none" w="med" len="med"/>
+                    </a:lnL>
+                    <a:lnR w="12700" cap="flat" cmpd="sng" algn="ctr">
+                      <a:solidFill>
+                        <a:srgbClr val="C8E6DF"/>
+                      </a:solidFill>
+                      <a:prstDash val="solid"/>
+                      <a:round/>
+                      <a:headEnd type="none" w="med" len="med"/>
+                      <a:tailEnd type="none" w="med" len="med"/>
+                    </a:lnR>
+                    <a:lnT w="12700" cap="flat" cmpd="sng" algn="ctr">
+                      <a:solidFill>
+                        <a:srgbClr val="C8E6DF"/>
+                      </a:solidFill>
+                      <a:prstDash val="solid"/>
+                      <a:round/>
+                      <a:headEnd type="none" w="med" len="med"/>
+                      <a:tailEnd type="none" w="med" len="med"/>
+                    </a:lnT>
+                    <a:lnB w="12700" cap="flat" cmpd="sng" algn="ctr">
+                      <a:solidFill>
+                        <a:srgbClr val="C8E6DF"/>
+                      </a:solidFill>
+                      <a:prstDash val="solid"/>
+                      <a:round/>
+                      <a:headEnd type="none" w="med" len="med"/>
+                      <a:tailEnd type="none" w="med" len="med"/>
+                    </a:lnB>
+                  </a:tcPr>
+                </a:tc>
+              </a:tr>
+              <a:tr h="256032">
+                <a:tc>
+                  <a:txBody>
+                    <a:bodyPr/>
+                    <a:lstStyle/>
+                    <a:p>
+                      <a:pPr indent="0" marL="0">
+                        <a:buNone/>
+                      </a:pPr>
+                      <a:r>
+                        <a:rPr lang="en-US" sz="1000" dirty="0">
+                          <a:solidFill>
+                            <a:srgbClr val="475569"/>
+                          </a:solidFill>
+                          <a:latin typeface="Malgun Gothic" pitchFamily="34" charset="0"/>
+                          <a:ea typeface="Malgun Gothic" pitchFamily="34" charset="-122"/>
+                          <a:cs typeface="Malgun Gothic" pitchFamily="34" charset="-120"/>
+                        </a:rPr>
+                        <a:t>구현내용</a:t>
+                      </a:r>
+                      <a:endParaRPr lang="en-US" sz="1000" dirty="0">
+                        <a:latin typeface="Malgun Gothic" charset="0"/>
+                        <a:ea typeface="Malgun Gothic" charset="0"/>
+                        <a:cs typeface="Malgun Gothic" charset="0"/>
+                      </a:endParaRPr>
+                    </a:p>
+                  </a:txBody>
+                  <a:tcPr marL="91440" marR="91440" marT="45720" marB="45720">
+                    <a:lnL w="12700" cap="flat" cmpd="sng" algn="ctr">
+                      <a:solidFill>
+                        <a:srgbClr val="C8E6DF"/>
+                      </a:solidFill>
+                      <a:prstDash val="solid"/>
+                      <a:round/>
+                      <a:headEnd type="none" w="med" len="med"/>
+                      <a:tailEnd type="none" w="med" len="med"/>
+                    </a:lnL>
+                    <a:lnR w="12700" cap="flat" cmpd="sng" algn="ctr">
+                      <a:solidFill>
+                        <a:srgbClr val="C8E6DF"/>
+                      </a:solidFill>
+                      <a:prstDash val="solid"/>
+                      <a:round/>
+                      <a:headEnd type="none" w="med" len="med"/>
+                      <a:tailEnd type="none" w="med" len="med"/>
+                    </a:lnR>
+                    <a:lnT w="12700" cap="flat" cmpd="sng" algn="ctr">
+                      <a:solidFill>
+                        <a:srgbClr val="C8E6DF"/>
+                      </a:solidFill>
+                      <a:prstDash val="solid"/>
+                      <a:round/>
+                      <a:headEnd type="none" w="med" len="med"/>
+                      <a:tailEnd type="none" w="med" len="med"/>
+                    </a:lnT>
+                    <a:lnB w="12700" cap="flat" cmpd="sng" algn="ctr">
+                      <a:solidFill>
+                        <a:srgbClr val="C8E6DF"/>
+                      </a:solidFill>
+                      <a:prstDash val="solid"/>
+                      <a:round/>
+                      <a:headEnd type="none" w="med" len="med"/>
+                      <a:tailEnd type="none" w="med" len="med"/>
+                    </a:lnB>
+                  </a:tcPr>
+                </a:tc>
+                <a:tc>
+                  <a:txBody>
+                    <a:bodyPr/>
+                    <a:lstStyle/>
+                    <a:p>
+                      <a:pPr indent="0" marL="0">
+                        <a:buNone/>
+                      </a:pPr>
+                      <a:r>
+                        <a:rPr lang="en-US" sz="1000" dirty="0">
+                          <a:solidFill>
+                            <a:srgbClr val="475569"/>
+                          </a:solidFill>
+                          <a:latin typeface="Malgun Gothic" pitchFamily="34" charset="0"/>
+                          <a:ea typeface="Malgun Gothic" pitchFamily="34" charset="-122"/>
+                          <a:cs typeface="Malgun Gothic" pitchFamily="34" charset="-120"/>
+                        </a:rPr>
+                        <a:t>세부 목차 및 챕터 리스트 숏코드입니다. 챕터 번호와 뱃지 속성에 따라 이쁜 HSL 배지 색상이 자동 매핑됩니다.</a:t>
+                      </a:r>
+                      <a:endParaRPr lang="en-US" sz="1000" dirty="0">
+                        <a:latin typeface="Malgun Gothic" charset="0"/>
+                        <a:ea typeface="Malgun Gothic" charset="0"/>
+                        <a:cs typeface="Malgun Gothic" charset="0"/>
+                      </a:endParaRPr>
+                    </a:p>
+                  </a:txBody>
+                  <a:tcPr marL="91440" marR="91440" marT="45720" marB="45720">
+                    <a:lnL w="12700" cap="flat" cmpd="sng" algn="ctr">
+                      <a:solidFill>
+                        <a:srgbClr val="C8E6DF"/>
+                      </a:solidFill>
+                      <a:prstDash val="solid"/>
+                      <a:round/>
+                      <a:headEnd type="none" w="med" len="med"/>
+                      <a:tailEnd type="none" w="med" len="med"/>
+                    </a:lnL>
+                    <a:lnR w="12700" cap="flat" cmpd="sng" algn="ctr">
+                      <a:solidFill>
+                        <a:srgbClr val="C8E6DF"/>
+                      </a:solidFill>
+                      <a:prstDash val="solid"/>
+                      <a:round/>
+                      <a:headEnd type="none" w="med" len="med"/>
+                      <a:tailEnd type="none" w="med" len="med"/>
+                    </a:lnR>
+                    <a:lnT w="12700" cap="flat" cmpd="sng" algn="ctr">
+                      <a:solidFill>
+                        <a:srgbClr val="C8E6DF"/>
+                      </a:solidFill>
+                      <a:prstDash val="solid"/>
+                      <a:round/>
+                      <a:headEnd type="none" w="med" len="med"/>
+                      <a:tailEnd type="none" w="med" len="med"/>
+                    </a:lnT>
+                    <a:lnB w="12700" cap="flat" cmpd="sng" algn="ctr">
+                      <a:solidFill>
+                        <a:srgbClr val="C8E6DF"/>
+                      </a:solidFill>
+                      <a:prstDash val="solid"/>
+                      <a:round/>
+                      <a:headEnd type="none" w="med" len="med"/>
+                      <a:tailEnd type="none" w="med" len="med"/>
+                    </a:lnB>
+                  </a:tcPr>
+                </a:tc>
+              </a:tr>
+            </a:tbl>
+          </a:graphicData>
+        </a:graphic>
+      </p:graphicFrame>
+      <p:sp>
+        <p:nvSpPr>
+          <p:cNvPr id="8" name="Text 5"/>
+          <p:cNvSpPr/>
+          <p:nvPr/>
+        </p:nvSpPr>
+        <p:spPr>
+          <a:xfrm>
+            <a:off x="685800" y="2295144"/>
+            <a:ext cx="10820095" cy="237490"/>
+          </a:xfrm>
+          <a:prstGeom prst="rect">
+            <a:avLst/>
+          </a:prstGeom>
+          <a:noFill/>
+          <a:ln/>
+        </p:spPr>
+        <p:txBody>
+          <a:bodyPr wrap="square" rtlCol="0" anchor="t"/>
+          <a:lstStyle/>
+          <a:p>
+            <a:pPr indent="0" marL="0">
+              <a:buNone/>
+            </a:pPr>
+            <a:r>
+              <a:rPr lang="en-US" sz="1100" dirty="0">
+                <a:solidFill>
+                  <a:srgbClr val="475569"/>
+                </a:solidFill>
+                <a:latin typeface="Malgun Gothic" pitchFamily="34" charset="0"/>
+                <a:ea typeface="Malgun Gothic" pitchFamily="34" charset="-122"/>
+                <a:cs typeface="Malgun Gothic" pitchFamily="34" charset="-120"/>
+              </a:rPr>
+              <a:t>숏코드 입력내용</a:t>
+            </a:r>
+            <a:endParaRPr lang="en-US" sz="1100" dirty="0"/>
+          </a:p>
+        </p:txBody>
+      </p:sp>
+      <p:sp>
+        <p:nvSpPr>
+          <p:cNvPr id="9" name="Shape 6"/>
+          <p:cNvSpPr/>
+          <p:nvPr/>
+        </p:nvSpPr>
+        <p:spPr>
+          <a:xfrm>
+            <a:off x="685800" y="2669794"/>
+            <a:ext cx="10820095" cy="3205480"/>
+          </a:xfrm>
+          <a:prstGeom prst="rect">
+            <a:avLst/>
+          </a:prstGeom>
+          <a:solidFill>
+            <a:srgbClr val="0F172A"/>
+          </a:solidFill>
+          <a:ln w="9525">
+            <a:solidFill>
+              <a:srgbClr val="C8E6DF"/>
+            </a:solidFill>
+            <a:prstDash val="solid"/>
+          </a:ln>
+        </p:spPr>
+      </p:sp>
+      <p:sp>
+        <p:nvSpPr>
+          <p:cNvPr id="10" name="Text 7"/>
+          <p:cNvSpPr/>
+          <p:nvPr/>
+        </p:nvSpPr>
+        <p:spPr>
+          <a:xfrm>
+            <a:off x="795528" y="2742946"/>
+            <a:ext cx="10600639" cy="3114040"/>
+          </a:xfrm>
+          <a:prstGeom prst="rect">
+            <a:avLst/>
+          </a:prstGeom>
+          <a:noFill/>
+          <a:ln/>
+        </p:spPr>
+        <p:txBody>
+          <a:bodyPr wrap="square" rtlCol="0" anchor="t"/>
+          <a:lstStyle/>
+          <a:p>
+            <a:pPr indent="0" marL="0">
+              <a:buNone/>
+            </a:pPr>
+            <a:r>
+              <a:rPr lang="en-US" sz="1000" dirty="0">
+                <a:solidFill>
+                  <a:srgbClr val="A8B2D8"/>
+                </a:solidFill>
+                <a:latin typeface="Consolas" pitchFamily="34" charset="0"/>
+                <a:ea typeface="Consolas" pitchFamily="34" charset="-122"/>
+                <a:cs typeface="Consolas" pitchFamily="34" charset="-120"/>
+              </a:rPr>
+              <a:t>\::: chapter-list</a:t>
+            </a:r>
+            <a:endParaRPr lang="en-US" sz="1000" dirty="0"/>
+          </a:p>
+          <a:p>
+            <a:pPr indent="0" marL="0">
+              <a:buNone/>
+            </a:pPr>
+            <a:r>
+              <a:rPr lang="en-US" sz="1000" dirty="0">
+                <a:solidFill>
+                  <a:srgbClr val="A8B2D8"/>
+                </a:solidFill>
+                <a:latin typeface="Consolas" pitchFamily="34" charset="0"/>
+                <a:ea typeface="Consolas" pitchFamily="34" charset="-122"/>
+                <a:cs typeface="Consolas" pitchFamily="34" charset="-120"/>
+              </a:rPr>
+              <a:t>- icon: "01"</a:t>
+            </a:r>
+            <a:endParaRPr lang="en-US" sz="1000" dirty="0"/>
+          </a:p>
+          <a:p>
+            <a:pPr indent="0" marL="0">
+              <a:buNone/>
+            </a:pPr>
+            <a:r>
+              <a:rPr lang="en-US" sz="1000" dirty="0">
+                <a:solidFill>
+                  <a:srgbClr val="A8B2D8"/>
+                </a:solidFill>
+                <a:latin typeface="Consolas" pitchFamily="34" charset="0"/>
+                <a:ea typeface="Consolas" pitchFamily="34" charset="-122"/>
+                <a:cs typeface="Consolas" pitchFamily="34" charset="-120"/>
+              </a:rPr>
+              <a:t>  title: "바이브코딩이란?"</a:t>
+            </a:r>
+            <a:endParaRPr lang="en-US" sz="1000" dirty="0"/>
+          </a:p>
+          <a:p>
+            <a:pPr indent="0" marL="0">
+              <a:buNone/>
+            </a:pPr>
+            <a:r>
+              <a:rPr lang="en-US" sz="1000" dirty="0">
+                <a:solidFill>
+                  <a:srgbClr val="A8B2D8"/>
+                </a:solidFill>
+                <a:latin typeface="Consolas" pitchFamily="34" charset="0"/>
+                <a:ea typeface="Consolas" pitchFamily="34" charset="-122"/>
+                <a:cs typeface="Consolas" pitchFamily="34" charset="-120"/>
+              </a:rPr>
+              <a:t>  desc: "Karpathy 발언 배경 · 전통 코딩 vs 바이브코딩 · LLM 발전"</a:t>
+            </a:r>
+            <a:endParaRPr lang="en-US" sz="1000" dirty="0"/>
+          </a:p>
+          <a:p>
+            <a:pPr indent="0" marL="0">
+              <a:buNone/>
+            </a:pPr>
+            <a:r>
+              <a:rPr lang="en-US" sz="1000" dirty="0">
+                <a:solidFill>
+                  <a:srgbClr val="A8B2D8"/>
+                </a:solidFill>
+                <a:latin typeface="Consolas" pitchFamily="34" charset="0"/>
+                <a:ea typeface="Consolas" pitchFamily="34" charset="-122"/>
+                <a:cs typeface="Consolas" pitchFamily="34" charset="-120"/>
+              </a:rPr>
+              <a:t>  tag: "개념"</a:t>
+            </a:r>
+            <a:endParaRPr lang="en-US" sz="1000" dirty="0"/>
+          </a:p>
+          <a:p>
+            <a:pPr indent="0" marL="0">
+              <a:buNone/>
+            </a:pPr>
+            <a:r>
+              <a:rPr lang="en-US" sz="1000" dirty="0">
+                <a:solidFill>
+                  <a:srgbClr val="A8B2D8"/>
+                </a:solidFill>
+                <a:latin typeface="Consolas" pitchFamily="34" charset="0"/>
+                <a:ea typeface="Consolas" pitchFamily="34" charset="-122"/>
+                <a:cs typeface="Consolas" pitchFamily="34" charset="-120"/>
+              </a:rPr>
+              <a:t>- icon: "02"</a:t>
+            </a:r>
+            <a:endParaRPr lang="en-US" sz="1000" dirty="0"/>
+          </a:p>
+          <a:p>
+            <a:pPr indent="0" marL="0">
+              <a:buNone/>
+            </a:pPr>
+            <a:r>
+              <a:rPr lang="en-US" sz="1000" dirty="0">
+                <a:solidFill>
+                  <a:srgbClr val="A8B2D8"/>
+                </a:solidFill>
+                <a:latin typeface="Consolas" pitchFamily="34" charset="0"/>
+                <a:ea typeface="Consolas" pitchFamily="34" charset="-122"/>
+                <a:cs typeface="Consolas" pitchFamily="34" charset="-120"/>
+              </a:rPr>
+              <a:t>  title: "에이전트 코딩이란?"</a:t>
+            </a:r>
+            <a:endParaRPr lang="en-US" sz="1000" dirty="0"/>
+          </a:p>
+          <a:p>
+            <a:pPr indent="0" marL="0">
+              <a:buNone/>
+            </a:pPr>
+            <a:r>
+              <a:rPr lang="en-US" sz="1000" dirty="0">
+                <a:solidFill>
+                  <a:srgbClr val="A8B2D8"/>
+                </a:solidFill>
+                <a:latin typeface="Consolas" pitchFamily="34" charset="0"/>
+                <a:ea typeface="Consolas" pitchFamily="34" charset="-122"/>
+                <a:cs typeface="Consolas" pitchFamily="34" charset="-120"/>
+              </a:rPr>
+              <a:t>  desc: "계획→실행→수정 루프 · 레벨 1~5 스펙트럼 · 바이브코딩과 차이"</a:t>
+            </a:r>
+            <a:endParaRPr lang="en-US" sz="1000" dirty="0"/>
+          </a:p>
+          <a:p>
+            <a:pPr indent="0" marL="0">
+              <a:buNone/>
+            </a:pPr>
+            <a:r>
+              <a:rPr lang="en-US" sz="1000" dirty="0">
+                <a:solidFill>
+                  <a:srgbClr val="A8B2D8"/>
+                </a:solidFill>
+                <a:latin typeface="Consolas" pitchFamily="34" charset="0"/>
+                <a:ea typeface="Consolas" pitchFamily="34" charset="-122"/>
+                <a:cs typeface="Consolas" pitchFamily="34" charset="-120"/>
+              </a:rPr>
+              <a:t>  tag: "개념"</a:t>
+            </a:r>
+            <a:endParaRPr lang="en-US" sz="1000" dirty="0"/>
+          </a:p>
+          <a:p>
+            <a:pPr indent="0" marL="0">
+              <a:buNone/>
+            </a:pPr>
+            <a:r>
+              <a:rPr lang="en-US" sz="1000" dirty="0">
+                <a:solidFill>
+                  <a:srgbClr val="A8B2D8"/>
+                </a:solidFill>
+                <a:latin typeface="Consolas" pitchFamily="34" charset="0"/>
+                <a:ea typeface="Consolas" pitchFamily="34" charset="-122"/>
+                <a:cs typeface="Consolas" pitchFamily="34" charset="-120"/>
+              </a:rPr>
+              <a:t>- icon: "04"</a:t>
+            </a:r>
+            <a:endParaRPr lang="en-US" sz="1000" dirty="0"/>
+          </a:p>
+          <a:p>
+            <a:pPr indent="0" marL="0">
+              <a:buNone/>
+            </a:pPr>
+            <a:r>
+              <a:rPr lang="en-US" sz="1000" dirty="0">
+                <a:solidFill>
+                  <a:srgbClr val="A8B2D8"/>
+                </a:solidFill>
+                <a:latin typeface="Consolas" pitchFamily="34" charset="0"/>
+                <a:ea typeface="Consolas" pitchFamily="34" charset="-122"/>
+                <a:cs typeface="Consolas" pitchFamily="34" charset="-120"/>
+              </a:rPr>
+              <a:t>  title: "첫 대화: 프롬프트 설계"</a:t>
+            </a:r>
+            <a:endParaRPr lang="en-US" sz="1000" dirty="0"/>
+          </a:p>
+          <a:p>
+            <a:pPr indent="0" marL="0">
+              <a:buNone/>
+            </a:pPr>
+            <a:r>
+              <a:rPr lang="en-US" sz="1000" dirty="0">
+                <a:solidFill>
+                  <a:srgbClr val="A8B2D8"/>
+                </a:solidFill>
+                <a:latin typeface="Consolas" pitchFamily="34" charset="0"/>
+                <a:ea typeface="Consolas" pitchFamily="34" charset="-122"/>
+                <a:cs typeface="Consolas" pitchFamily="34" charset="-120"/>
+              </a:rPr>
+              <a:t>  desc: "요구사항 명세 · 컨텍스트 주입 전략 · SKILL.md 재사용 지시"</a:t>
+            </a:r>
+            <a:endParaRPr lang="en-US" sz="1000" dirty="0"/>
+          </a:p>
+          <a:p>
+            <a:pPr indent="0" marL="0">
+              <a:buNone/>
+            </a:pPr>
+            <a:r>
+              <a:rPr lang="en-US" sz="1000" dirty="0">
+                <a:solidFill>
+                  <a:srgbClr val="A8B2D8"/>
+                </a:solidFill>
+                <a:latin typeface="Consolas" pitchFamily="34" charset="0"/>
+                <a:ea typeface="Consolas" pitchFamily="34" charset="-122"/>
+                <a:cs typeface="Consolas" pitchFamily="34" charset="-120"/>
+              </a:rPr>
+              <a:t>  tag: "실습"</a:t>
+            </a:r>
+            <a:endParaRPr lang="en-US" sz="1000" dirty="0"/>
+          </a:p>
+          <a:p>
+            <a:pPr indent="0" marL="0">
+              <a:buNone/>
+            </a:pPr>
+            <a:r>
+              <a:rPr lang="en-US" sz="1000" dirty="0">
+                <a:solidFill>
+                  <a:srgbClr val="A8B2D8"/>
+                </a:solidFill>
+                <a:latin typeface="Consolas" pitchFamily="34" charset="0"/>
+                <a:ea typeface="Consolas" pitchFamily="34" charset="-122"/>
+                <a:cs typeface="Consolas" pitchFamily="34" charset="-120"/>
+              </a:rPr>
+              <a:t>\:::</a:t>
+            </a:r>
+            <a:endParaRPr lang="en-US" sz="1000" dirty="0"/>
+          </a:p>
+        </p:txBody>
+      </p:sp>
+    </p:spTree>
+  </p:cSld>
+  <p:clrMapOvr>
+    <a:masterClrMapping/>
+  </p:clrMapOvr>
+</p:sld>
+</file>
+
+<file path=ppt/slides/slide27.xml><?xml version="1.0" encoding="utf-8"?>
+<p:sld xmlns:a="http://schemas.openxmlformats.org/drawingml/2006/main" xmlns:r="http://schemas.openxmlformats.org/officeDocument/2006/relationships" xmlns:p="http://schemas.openxmlformats.org/presentationml/2006/main">
+  <p:cSld name="Slide 27">
+    <p:bg>
+      <p:bgPr>
+        <a:solidFill>
+          <a:srgbClr val="FFFFFF"/>
+        </a:solidFill>
+      </p:bgPr>
+    </p:bg>
+    <p:spTree>
+      <p:nvGrpSpPr>
+        <p:cNvPr id="1" name=""/>
+        <p:cNvGrpSpPr/>
+        <p:nvPr/>
+      </p:nvGrpSpPr>
+      <p:grpSpPr>
+        <a:xfrm>
+          <a:off x="0" y="0"/>
+          <a:ext cx="0" cy="0"/>
+          <a:chOff x="0" y="0"/>
+          <a:chExt cx="0" cy="0"/>
+        </a:xfrm>
+      </p:grpSpPr>
+      <p:sp>
+        <p:nvSpPr>
+          <p:cNvPr id="2" name="Shape 0"/>
+          <p:cNvSpPr/>
+          <p:nvPr/>
+        </p:nvSpPr>
+        <p:spPr>
+          <a:xfrm>
+            <a:off x="0" y="0"/>
+            <a:ext cx="12191695" cy="960120"/>
+          </a:xfrm>
+          <a:prstGeom prst="rect">
+            <a:avLst/>
+          </a:prstGeom>
+          <a:solidFill>
+            <a:srgbClr val="0F172A"/>
+          </a:solidFill>
+          <a:ln w="12700">
+            <a:solidFill>
+              <a:srgbClr val="0F172A"/>
+            </a:solidFill>
+            <a:prstDash val="solid"/>
+          </a:ln>
+        </p:spPr>
+      </p:sp>
+      <p:sp>
+        <p:nvSpPr>
+          <p:cNvPr id="3" name="Shape 1"/>
+          <p:cNvSpPr/>
+          <p:nvPr/>
+        </p:nvSpPr>
+        <p:spPr>
+          <a:xfrm>
+            <a:off x="502920" y="228600"/>
+            <a:ext cx="502920" cy="502920"/>
+          </a:xfrm>
+          <a:prstGeom prst="roundRect">
+            <a:avLst>
+              <a:gd name="adj" fmla="val 18182"/>
+            </a:avLst>
+          </a:prstGeom>
+          <a:solidFill>
+            <a:srgbClr val="10A37F"/>
+          </a:solidFill>
+          <a:ln w="12700">
+            <a:solidFill>
+              <a:srgbClr val="10A37F"/>
+            </a:solidFill>
+            <a:prstDash val="solid"/>
+          </a:ln>
+        </p:spPr>
+      </p:sp>
+      <p:sp>
+        <p:nvSpPr>
+          <p:cNvPr id="4" name="Text 2"/>
+          <p:cNvSpPr/>
+          <p:nvPr/>
+        </p:nvSpPr>
+        <p:spPr>
+          <a:xfrm>
+            <a:off x="502920" y="228600"/>
+            <a:ext cx="502920" cy="502920"/>
+          </a:xfrm>
+          <a:prstGeom prst="rect">
+            <a:avLst/>
+          </a:prstGeom>
+          <a:noFill/>
+          <a:ln/>
+        </p:spPr>
+        <p:txBody>
+          <a:bodyPr wrap="square" rtlCol="0" anchor="ctr"/>
+          <a:lstStyle/>
+          <a:p>
+            <a:pPr algn="ctr" indent="0" marL="0">
+              <a:buNone/>
+            </a:pPr>
+            <a:r>
+              <a:rPr lang="en-US" sz="1600" b="1" dirty="0">
+                <a:solidFill>
+                  <a:srgbClr val="FFFFFF"/>
+                </a:solidFill>
+                <a:latin typeface="Malgun Gothic" pitchFamily="34" charset="0"/>
+                <a:ea typeface="Malgun Gothic" pitchFamily="34" charset="-122"/>
+                <a:cs typeface="Malgun Gothic" pitchFamily="34" charset="-120"/>
+              </a:rPr>
+              <a:t>24</a:t>
+            </a:r>
+            <a:endParaRPr lang="en-US" sz="1600" dirty="0"/>
+          </a:p>
+        </p:txBody>
+      </p:sp>
+      <p:sp>
+        <p:nvSpPr>
+          <p:cNvPr id="5" name="Text 3"/>
+          <p:cNvSpPr/>
+          <p:nvPr/>
+        </p:nvSpPr>
+        <p:spPr>
+          <a:xfrm>
+            <a:off x="1143000" y="0"/>
+            <a:ext cx="10957255" cy="960120"/>
+          </a:xfrm>
+          <a:prstGeom prst="rect">
+            <a:avLst/>
+          </a:prstGeom>
+          <a:noFill/>
+          <a:ln/>
+        </p:spPr>
+        <p:txBody>
+          <a:bodyPr wrap="square" rtlCol="0" anchor="ctr"/>
+          <a:lstStyle/>
+          <a:p>
+            <a:pPr indent="0" marL="0">
+              <a:buNone/>
+            </a:pPr>
+            <a:r>
+              <a:rPr lang="en-US" sz="2200" b="1" dirty="0">
+                <a:solidFill>
+                  <a:srgbClr val="FFFFFF"/>
+                </a:solidFill>
+                <a:latin typeface="Malgun Gothic" pitchFamily="34" charset="0"/>
+                <a:ea typeface="Malgun Gothic" pitchFamily="34" charset="-122"/>
+                <a:cs typeface="Malgun Gothic" pitchFamily="34" charset="-120"/>
+              </a:rPr>
+              <a:t>summary-bar</a:t>
+            </a:r>
+            <a:endParaRPr lang="en-US" sz="2200" dirty="0"/>
+          </a:p>
+        </p:txBody>
+      </p:sp>
+      <p:sp>
+        <p:nvSpPr>
+          <p:cNvPr id="6" name="Shape 4"/>
+          <p:cNvSpPr/>
+          <p:nvPr/>
+        </p:nvSpPr>
+        <p:spPr>
+          <a:xfrm>
+            <a:off x="457200" y="1143000"/>
+            <a:ext cx="11277295" cy="3756914"/>
+          </a:xfrm>
+          <a:prstGeom prst="roundRect">
+            <a:avLst>
+              <a:gd name="adj" fmla="val 1947"/>
+            </a:avLst>
+          </a:prstGeom>
+          <a:solidFill>
+            <a:srgbClr val="FFFFFF"/>
+          </a:solidFill>
+          <a:ln w="9525">
+            <a:solidFill>
+              <a:srgbClr val="C8E6DF"/>
+            </a:solidFill>
+            <a:prstDash val="solid"/>
+          </a:ln>
+        </p:spPr>
+      </p:sp>
+      <p:graphicFrame>
+        <p:nvGraphicFramePr>
+          <p:cNvPr id="28" name="Table 0"/>
+          <p:cNvGraphicFramePr>
+            <a:graphicFrameLocks noGrp="1"/>
+          </p:cNvGraphicFramePr>
+          <p:nvPr>
+            <p:extLst>
+              <p:ext uri="{D42A27DB-BD31-4B8C-83A1-F6EECF244321}">
+                <p14:modId xmlns:p14="http://schemas.microsoft.com/office/powerpoint/2010/main" val="1579011935"/>
+              </p:ext>
+            </p:extLst>
+          </p:nvPr>
+        </p:nvGraphicFramePr>
+        <p:xfrm>
+          <a:off x="685800" y="1325880"/>
+          <a:ext cx="10820095" cy="914400"/>
+        </p:xfrm>
+        <a:graphic>
+          <a:graphicData uri="http://schemas.openxmlformats.org/drawingml/2006/table">
+            <a:tbl>
+              <a:tblPr/>
+              <a:tblGrid>
+                <a:gridCol w="5410048"/>
+                <a:gridCol w="5410048"/>
+              </a:tblGrid>
+              <a:tr h="320040">
+                <a:tc>
+                  <a:txBody>
+                    <a:bodyPr/>
+                    <a:lstStyle/>
+                    <a:p>
+                      <a:pPr indent="0" marL="0">
+                        <a:buNone/>
+                      </a:pPr>
+                      <a:r>
+                        <a:rPr lang="en-US" sz="1100" b="1" dirty="0">
+                          <a:solidFill>
+                            <a:srgbClr val="FFFFFF"/>
+                          </a:solidFill>
+                          <a:latin typeface="Malgun Gothic" pitchFamily="34" charset="0"/>
+                          <a:ea typeface="Malgun Gothic" pitchFamily="34" charset="-122"/>
+                          <a:cs typeface="Malgun Gothic" pitchFamily="34" charset="-120"/>
+                        </a:rPr>
+                        <a:t>항목</a:t>
+                      </a:r>
+                      <a:endParaRPr lang="en-US" sz="1100" dirty="0">
+                        <a:latin typeface="Malgun Gothic" charset="0"/>
+                        <a:ea typeface="Malgun Gothic" charset="0"/>
+                        <a:cs typeface="Malgun Gothic" charset="0"/>
+                      </a:endParaRPr>
+                    </a:p>
+                  </a:txBody>
+                  <a:tcPr marL="91440" marR="91440" marT="45720" marB="45720">
+                    <a:lnL w="12700" cap="flat" cmpd="sng" algn="ctr">
+                      <a:solidFill>
+                        <a:srgbClr val="C8E6DF"/>
+                      </a:solidFill>
+                      <a:prstDash val="solid"/>
+                      <a:round/>
+                      <a:headEnd type="none" w="med" len="med"/>
+                      <a:tailEnd type="none" w="med" len="med"/>
+                    </a:lnL>
+                    <a:lnR w="12700" cap="flat" cmpd="sng" algn="ctr">
+                      <a:solidFill>
+                        <a:srgbClr val="C8E6DF"/>
+                      </a:solidFill>
+                      <a:prstDash val="solid"/>
+                      <a:round/>
+                      <a:headEnd type="none" w="med" len="med"/>
+                      <a:tailEnd type="none" w="med" len="med"/>
+                    </a:lnR>
+                    <a:lnT w="12700" cap="flat" cmpd="sng" algn="ctr">
+                      <a:solidFill>
+                        <a:srgbClr val="C8E6DF"/>
+                      </a:solidFill>
+                      <a:prstDash val="solid"/>
+                      <a:round/>
+                      <a:headEnd type="none" w="med" len="med"/>
+                      <a:tailEnd type="none" w="med" len="med"/>
+                    </a:lnT>
+                    <a:lnB w="12700" cap="flat" cmpd="sng" algn="ctr">
+                      <a:solidFill>
+                        <a:srgbClr val="C8E6DF"/>
+                      </a:solidFill>
+                      <a:prstDash val="solid"/>
+                      <a:round/>
+                      <a:headEnd type="none" w="med" len="med"/>
+                      <a:tailEnd type="none" w="med" len="med"/>
+                    </a:lnB>
+                    <a:solidFill>
+                      <a:srgbClr val="10A37F"/>
+                    </a:solidFill>
+                  </a:tcPr>
+                </a:tc>
+                <a:tc>
+                  <a:txBody>
+                    <a:bodyPr/>
+                    <a:lstStyle/>
+                    <a:p>
+                      <a:pPr indent="0" marL="0">
+                        <a:buNone/>
+                      </a:pPr>
+                      <a:r>
+                        <a:rPr lang="en-US" sz="1100" b="1" dirty="0">
+                          <a:solidFill>
+                            <a:srgbClr val="FFFFFF"/>
+                          </a:solidFill>
+                          <a:latin typeface="Malgun Gothic" pitchFamily="34" charset="0"/>
+                          <a:ea typeface="Malgun Gothic" pitchFamily="34" charset="-122"/>
+                          <a:cs typeface="Malgun Gothic" pitchFamily="34" charset="-120"/>
+                        </a:rPr>
+                        <a:t>내용</a:t>
+                      </a:r>
+                      <a:endParaRPr lang="en-US" sz="1100" dirty="0">
+                        <a:latin typeface="Malgun Gothic" charset="0"/>
+                        <a:ea typeface="Malgun Gothic" charset="0"/>
+                        <a:cs typeface="Malgun Gothic" charset="0"/>
+                      </a:endParaRPr>
+                    </a:p>
+                  </a:txBody>
+                  <a:tcPr marL="91440" marR="91440" marT="45720" marB="45720">
+                    <a:lnL w="12700" cap="flat" cmpd="sng" algn="ctr">
+                      <a:solidFill>
+                        <a:srgbClr val="C8E6DF"/>
+                      </a:solidFill>
+                      <a:prstDash val="solid"/>
+                      <a:round/>
+                      <a:headEnd type="none" w="med" len="med"/>
+                      <a:tailEnd type="none" w="med" len="med"/>
+                    </a:lnL>
+                    <a:lnR w="12700" cap="flat" cmpd="sng" algn="ctr">
+                      <a:solidFill>
+                        <a:srgbClr val="C8E6DF"/>
+                      </a:solidFill>
+                      <a:prstDash val="solid"/>
+                      <a:round/>
+                      <a:headEnd type="none" w="med" len="med"/>
+                      <a:tailEnd type="none" w="med" len="med"/>
+                    </a:lnR>
+                    <a:lnT w="12700" cap="flat" cmpd="sng" algn="ctr">
+                      <a:solidFill>
+                        <a:srgbClr val="C8E6DF"/>
+                      </a:solidFill>
+                      <a:prstDash val="solid"/>
+                      <a:round/>
+                      <a:headEnd type="none" w="med" len="med"/>
+                      <a:tailEnd type="none" w="med" len="med"/>
+                    </a:lnT>
+                    <a:lnB w="12700" cap="flat" cmpd="sng" algn="ctr">
+                      <a:solidFill>
+                        <a:srgbClr val="C8E6DF"/>
+                      </a:solidFill>
+                      <a:prstDash val="solid"/>
+                      <a:round/>
+                      <a:headEnd type="none" w="med" len="med"/>
+                      <a:tailEnd type="none" w="med" len="med"/>
+                    </a:lnB>
+                    <a:solidFill>
+                      <a:srgbClr val="10A37F"/>
+                    </a:solidFill>
+                  </a:tcPr>
+                </a:tc>
+              </a:tr>
+              <a:tr h="256032">
+                <a:tc>
+                  <a:txBody>
+                    <a:bodyPr/>
+                    <a:lstStyle/>
+                    <a:p>
+                      <a:pPr indent="0" marL="0">
+                        <a:buNone/>
+                      </a:pPr>
+                      <a:r>
+                        <a:rPr lang="en-US" sz="1000" dirty="0">
+                          <a:solidFill>
+                            <a:srgbClr val="475569"/>
+                          </a:solidFill>
+                          <a:latin typeface="Malgun Gothic" pitchFamily="34" charset="0"/>
+                          <a:ea typeface="Malgun Gothic" pitchFamily="34" charset="-122"/>
+                          <a:cs typeface="Malgun Gothic" pitchFamily="34" charset="-120"/>
+                        </a:rPr>
+                        <a:t>숏코드 명</a:t>
+                      </a:r>
+                      <a:endParaRPr lang="en-US" sz="1000" dirty="0">
+                        <a:latin typeface="Malgun Gothic" charset="0"/>
+                        <a:ea typeface="Malgun Gothic" charset="0"/>
+                        <a:cs typeface="Malgun Gothic" charset="0"/>
+                      </a:endParaRPr>
+                    </a:p>
+                  </a:txBody>
+                  <a:tcPr marL="91440" marR="91440" marT="45720" marB="45720">
+                    <a:lnL w="12700" cap="flat" cmpd="sng" algn="ctr">
+                      <a:solidFill>
+                        <a:srgbClr val="C8E6DF"/>
+                      </a:solidFill>
+                      <a:prstDash val="solid"/>
+                      <a:round/>
+                      <a:headEnd type="none" w="med" len="med"/>
+                      <a:tailEnd type="none" w="med" len="med"/>
+                    </a:lnL>
+                    <a:lnR w="12700" cap="flat" cmpd="sng" algn="ctr">
+                      <a:solidFill>
+                        <a:srgbClr val="C8E6DF"/>
+                      </a:solidFill>
+                      <a:prstDash val="solid"/>
+                      <a:round/>
+                      <a:headEnd type="none" w="med" len="med"/>
+                      <a:tailEnd type="none" w="med" len="med"/>
+                    </a:lnR>
+                    <a:lnT w="12700" cap="flat" cmpd="sng" algn="ctr">
+                      <a:solidFill>
+                        <a:srgbClr val="C8E6DF"/>
+                      </a:solidFill>
+                      <a:prstDash val="solid"/>
+                      <a:round/>
+                      <a:headEnd type="none" w="med" len="med"/>
+                      <a:tailEnd type="none" w="med" len="med"/>
+                    </a:lnT>
+                    <a:lnB w="12700" cap="flat" cmpd="sng" algn="ctr">
+                      <a:solidFill>
+                        <a:srgbClr val="C8E6DF"/>
+                      </a:solidFill>
+                      <a:prstDash val="solid"/>
+                      <a:round/>
+                      <a:headEnd type="none" w="med" len="med"/>
+                      <a:tailEnd type="none" w="med" len="med"/>
+                    </a:lnB>
+                  </a:tcPr>
+                </a:tc>
+                <a:tc>
+                  <a:txBody>
+                    <a:bodyPr/>
+                    <a:lstStyle/>
+                    <a:p>
+                      <a:pPr indent="0" marL="0">
+                        <a:buNone/>
+                      </a:pPr>
+                      <a:r>
+                        <a:rPr lang="en-US" sz="1000" dirty="0">
+                          <a:solidFill>
+                            <a:srgbClr val="475569"/>
+                          </a:solidFill>
+                          <a:latin typeface="Malgun Gothic" pitchFamily="34" charset="0"/>
+                          <a:ea typeface="Malgun Gothic" pitchFamily="34" charset="-122"/>
+                          <a:cs typeface="Malgun Gothic" pitchFamily="34" charset="-120"/>
+                        </a:rPr>
+                        <a:t>summary-bar</a:t>
+                      </a:r>
+                      <a:endParaRPr lang="en-US" sz="1000" dirty="0">
+                        <a:latin typeface="Malgun Gothic" charset="0"/>
+                        <a:ea typeface="Malgun Gothic" charset="0"/>
+                        <a:cs typeface="Malgun Gothic" charset="0"/>
+                      </a:endParaRPr>
+                    </a:p>
+                  </a:txBody>
+                  <a:tcPr marL="91440" marR="91440" marT="45720" marB="45720">
+                    <a:lnL w="12700" cap="flat" cmpd="sng" algn="ctr">
+                      <a:solidFill>
+                        <a:srgbClr val="C8E6DF"/>
+                      </a:solidFill>
+                      <a:prstDash val="solid"/>
+                      <a:round/>
+                      <a:headEnd type="none" w="med" len="med"/>
+                      <a:tailEnd type="none" w="med" len="med"/>
+                    </a:lnL>
+                    <a:lnR w="12700" cap="flat" cmpd="sng" algn="ctr">
+                      <a:solidFill>
+                        <a:srgbClr val="C8E6DF"/>
+                      </a:solidFill>
+                      <a:prstDash val="solid"/>
+                      <a:round/>
+                      <a:headEnd type="none" w="med" len="med"/>
+                      <a:tailEnd type="none" w="med" len="med"/>
+                    </a:lnR>
+                    <a:lnT w="12700" cap="flat" cmpd="sng" algn="ctr">
+                      <a:solidFill>
+                        <a:srgbClr val="C8E6DF"/>
+                      </a:solidFill>
+                      <a:prstDash val="solid"/>
+                      <a:round/>
+                      <a:headEnd type="none" w="med" len="med"/>
+                      <a:tailEnd type="none" w="med" len="med"/>
+                    </a:lnT>
+                    <a:lnB w="12700" cap="flat" cmpd="sng" algn="ctr">
+                      <a:solidFill>
+                        <a:srgbClr val="C8E6DF"/>
+                      </a:solidFill>
+                      <a:prstDash val="solid"/>
+                      <a:round/>
+                      <a:headEnd type="none" w="med" len="med"/>
+                      <a:tailEnd type="none" w="med" len="med"/>
+                    </a:lnB>
+                  </a:tcPr>
+                </a:tc>
+              </a:tr>
+              <a:tr h="256032">
+                <a:tc>
+                  <a:txBody>
+                    <a:bodyPr/>
+                    <a:lstStyle/>
+                    <a:p>
+                      <a:pPr indent="0" marL="0">
+                        <a:buNone/>
+                      </a:pPr>
+                      <a:r>
+                        <a:rPr lang="en-US" sz="1000" dirty="0">
+                          <a:solidFill>
+                            <a:srgbClr val="475569"/>
+                          </a:solidFill>
+                          <a:latin typeface="Malgun Gothic" pitchFamily="34" charset="0"/>
+                          <a:ea typeface="Malgun Gothic" pitchFamily="34" charset="-122"/>
+                          <a:cs typeface="Malgun Gothic" pitchFamily="34" charset="-120"/>
+                        </a:rPr>
+                        <a:t>구현내용</a:t>
+                      </a:r>
+                      <a:endParaRPr lang="en-US" sz="1000" dirty="0">
+                        <a:latin typeface="Malgun Gothic" charset="0"/>
+                        <a:ea typeface="Malgun Gothic" charset="0"/>
+                        <a:cs typeface="Malgun Gothic" charset="0"/>
+                      </a:endParaRPr>
+                    </a:p>
+                  </a:txBody>
+                  <a:tcPr marL="91440" marR="91440" marT="45720" marB="45720">
+                    <a:lnL w="12700" cap="flat" cmpd="sng" algn="ctr">
+                      <a:solidFill>
+                        <a:srgbClr val="C8E6DF"/>
+                      </a:solidFill>
+                      <a:prstDash val="solid"/>
+                      <a:round/>
+                      <a:headEnd type="none" w="med" len="med"/>
+                      <a:tailEnd type="none" w="med" len="med"/>
+                    </a:lnL>
+                    <a:lnR w="12700" cap="flat" cmpd="sng" algn="ctr">
+                      <a:solidFill>
+                        <a:srgbClr val="C8E6DF"/>
+                      </a:solidFill>
+                      <a:prstDash val="solid"/>
+                      <a:round/>
+                      <a:headEnd type="none" w="med" len="med"/>
+                      <a:tailEnd type="none" w="med" len="med"/>
+                    </a:lnR>
+                    <a:lnT w="12700" cap="flat" cmpd="sng" algn="ctr">
+                      <a:solidFill>
+                        <a:srgbClr val="C8E6DF"/>
+                      </a:solidFill>
+                      <a:prstDash val="solid"/>
+                      <a:round/>
+                      <a:headEnd type="none" w="med" len="med"/>
+                      <a:tailEnd type="none" w="med" len="med"/>
+                    </a:lnT>
+                    <a:lnB w="12700" cap="flat" cmpd="sng" algn="ctr">
+                      <a:solidFill>
+                        <a:srgbClr val="C8E6DF"/>
+                      </a:solidFill>
+                      <a:prstDash val="solid"/>
+                      <a:round/>
+                      <a:headEnd type="none" w="med" len="med"/>
+                      <a:tailEnd type="none" w="med" len="med"/>
+                    </a:lnB>
+                  </a:tcPr>
+                </a:tc>
+                <a:tc>
+                  <a:txBody>
+                    <a:bodyPr/>
+                    <a:lstStyle/>
+                    <a:p>
+                      <a:pPr indent="0" marL="0">
+                        <a:buNone/>
+                      </a:pPr>
+                      <a:r>
+                        <a:rPr lang="en-US" sz="1000" dirty="0">
+                          <a:solidFill>
+                            <a:srgbClr val="475569"/>
+                          </a:solidFill>
+                          <a:latin typeface="Malgun Gothic" pitchFamily="34" charset="0"/>
+                          <a:ea typeface="Malgun Gothic" pitchFamily="34" charset="-122"/>
+                          <a:cs typeface="Malgun Gothic" pitchFamily="34" charset="-120"/>
+                        </a:rPr>
+                        <a:t>숏코드 문서들의 통계, 주요 수치 등을 가로 격자 형태로 요약 노출해 주는 수치 뱃지 숏코드입니다.</a:t>
+                      </a:r>
+                      <a:endParaRPr lang="en-US" sz="1000" dirty="0">
+                        <a:latin typeface="Malgun Gothic" charset="0"/>
+                        <a:ea typeface="Malgun Gothic" charset="0"/>
+                        <a:cs typeface="Malgun Gothic" charset="0"/>
+                      </a:endParaRPr>
+                    </a:p>
+                  </a:txBody>
+                  <a:tcPr marL="91440" marR="91440" marT="45720" marB="45720">
+                    <a:lnL w="12700" cap="flat" cmpd="sng" algn="ctr">
+                      <a:solidFill>
+                        <a:srgbClr val="C8E6DF"/>
+                      </a:solidFill>
+                      <a:prstDash val="solid"/>
+                      <a:round/>
+                      <a:headEnd type="none" w="med" len="med"/>
+                      <a:tailEnd type="none" w="med" len="med"/>
+                    </a:lnL>
+                    <a:lnR w="12700" cap="flat" cmpd="sng" algn="ctr">
+                      <a:solidFill>
+                        <a:srgbClr val="C8E6DF"/>
+                      </a:solidFill>
+                      <a:prstDash val="solid"/>
+                      <a:round/>
+                      <a:headEnd type="none" w="med" len="med"/>
+                      <a:tailEnd type="none" w="med" len="med"/>
+                    </a:lnR>
+                    <a:lnT w="12700" cap="flat" cmpd="sng" algn="ctr">
+                      <a:solidFill>
+                        <a:srgbClr val="C8E6DF"/>
+                      </a:solidFill>
+                      <a:prstDash val="solid"/>
+                      <a:round/>
+                      <a:headEnd type="none" w="med" len="med"/>
+                      <a:tailEnd type="none" w="med" len="med"/>
+                    </a:lnT>
+                    <a:lnB w="12700" cap="flat" cmpd="sng" algn="ctr">
+                      <a:solidFill>
+                        <a:srgbClr val="C8E6DF"/>
+                      </a:solidFill>
+                      <a:prstDash val="solid"/>
+                      <a:round/>
+                      <a:headEnd type="none" w="med" len="med"/>
+                      <a:tailEnd type="none" w="med" len="med"/>
+                    </a:lnB>
+                  </a:tcPr>
+                </a:tc>
+              </a:tr>
+            </a:tbl>
+          </a:graphicData>
+        </a:graphic>
+      </p:graphicFrame>
+      <p:sp>
+        <p:nvSpPr>
+          <p:cNvPr id="8" name="Text 5"/>
+          <p:cNvSpPr/>
+          <p:nvPr/>
+        </p:nvSpPr>
+        <p:spPr>
+          <a:xfrm>
+            <a:off x="685800" y="2295144"/>
+            <a:ext cx="10820095" cy="237490"/>
+          </a:xfrm>
+          <a:prstGeom prst="rect">
+            <a:avLst/>
+          </a:prstGeom>
+          <a:noFill/>
+          <a:ln/>
+        </p:spPr>
+        <p:txBody>
+          <a:bodyPr wrap="square" rtlCol="0" anchor="t"/>
+          <a:lstStyle/>
+          <a:p>
+            <a:pPr indent="0" marL="0">
+              <a:buNone/>
+            </a:pPr>
+            <a:r>
+              <a:rPr lang="en-US" sz="1100" dirty="0">
+                <a:solidFill>
+                  <a:srgbClr val="475569"/>
+                </a:solidFill>
+                <a:latin typeface="Malgun Gothic" pitchFamily="34" charset="0"/>
+                <a:ea typeface="Malgun Gothic" pitchFamily="34" charset="-122"/>
+                <a:cs typeface="Malgun Gothic" pitchFamily="34" charset="-120"/>
+              </a:rPr>
+              <a:t>숏코드 입력내용</a:t>
+            </a:r>
+            <a:endParaRPr lang="en-US" sz="1100" dirty="0"/>
+          </a:p>
+        </p:txBody>
+      </p:sp>
+      <p:sp>
+        <p:nvSpPr>
+          <p:cNvPr id="9" name="Shape 6"/>
+          <p:cNvSpPr/>
+          <p:nvPr/>
+        </p:nvSpPr>
+        <p:spPr>
+          <a:xfrm>
+            <a:off x="685800" y="2669794"/>
+            <a:ext cx="10820095" cy="1910080"/>
+          </a:xfrm>
+          <a:prstGeom prst="rect">
+            <a:avLst/>
+          </a:prstGeom>
+          <a:solidFill>
+            <a:srgbClr val="0F172A"/>
+          </a:solidFill>
+          <a:ln w="9525">
+            <a:solidFill>
+              <a:srgbClr val="C8E6DF"/>
+            </a:solidFill>
+            <a:prstDash val="solid"/>
+          </a:ln>
+        </p:spPr>
+      </p:sp>
+      <p:sp>
+        <p:nvSpPr>
+          <p:cNvPr id="10" name="Text 7"/>
+          <p:cNvSpPr/>
+          <p:nvPr/>
+        </p:nvSpPr>
+        <p:spPr>
+          <a:xfrm>
+            <a:off x="795528" y="2742946"/>
+            <a:ext cx="10600639" cy="1818640"/>
+          </a:xfrm>
+          <a:prstGeom prst="rect">
+            <a:avLst/>
+          </a:prstGeom>
+          <a:noFill/>
+          <a:ln/>
+        </p:spPr>
+        <p:txBody>
+          <a:bodyPr wrap="square" rtlCol="0" anchor="t"/>
+          <a:lstStyle/>
+          <a:p>
+            <a:pPr indent="0" marL="0">
+              <a:buNone/>
+            </a:pPr>
+            <a:r>
+              <a:rPr lang="en-US" sz="1000" dirty="0">
+                <a:solidFill>
+                  <a:srgbClr val="A8B2D8"/>
+                </a:solidFill>
+                <a:latin typeface="Consolas" pitchFamily="34" charset="0"/>
+                <a:ea typeface="Consolas" pitchFamily="34" charset="-122"/>
+                <a:cs typeface="Consolas" pitchFamily="34" charset="-120"/>
+              </a:rPr>
+              <a:t>\::: summary-bar</a:t>
+            </a:r>
+            <a:endParaRPr lang="en-US" sz="1000" dirty="0"/>
+          </a:p>
+          <a:p>
+            <a:pPr indent="0" marL="0">
+              <a:buNone/>
+            </a:pPr>
+            <a:r>
+              <a:rPr lang="en-US" sz="1000" dirty="0">
+                <a:solidFill>
+                  <a:srgbClr val="A8B2D8"/>
+                </a:solidFill>
+                <a:latin typeface="Consolas" pitchFamily="34" charset="0"/>
+                <a:ea typeface="Consolas" pitchFamily="34" charset="-122"/>
+                <a:cs typeface="Consolas" pitchFamily="34" charset="-120"/>
+              </a:rPr>
+              <a:t>- icon: "29장"</a:t>
+            </a:r>
+            <a:endParaRPr lang="en-US" sz="1000" dirty="0"/>
+          </a:p>
+          <a:p>
+            <a:pPr indent="0" marL="0">
+              <a:buNone/>
+            </a:pPr>
+            <a:r>
+              <a:rPr lang="en-US" sz="1000" dirty="0">
+                <a:solidFill>
+                  <a:srgbClr val="A8B2D8"/>
+                </a:solidFill>
+                <a:latin typeface="Consolas" pitchFamily="34" charset="0"/>
+                <a:ea typeface="Consolas" pitchFamily="34" charset="-122"/>
+                <a:cs typeface="Consolas" pitchFamily="34" charset="-120"/>
+              </a:rPr>
+              <a:t>  title: "Total Chapters"</a:t>
+            </a:r>
+            <a:endParaRPr lang="en-US" sz="1000" dirty="0"/>
+          </a:p>
+          <a:p>
+            <a:pPr indent="0" marL="0">
+              <a:buNone/>
+            </a:pPr>
+            <a:r>
+              <a:rPr lang="en-US" sz="1000" dirty="0">
+                <a:solidFill>
+                  <a:srgbClr val="A8B2D8"/>
+                </a:solidFill>
+                <a:latin typeface="Consolas" pitchFamily="34" charset="0"/>
+                <a:ea typeface="Consolas" pitchFamily="34" charset="-122"/>
+                <a:cs typeface="Consolas" pitchFamily="34" charset="-120"/>
+              </a:rPr>
+              <a:t>- icon: "8부"</a:t>
+            </a:r>
+            <a:endParaRPr lang="en-US" sz="1000" dirty="0"/>
+          </a:p>
+          <a:p>
+            <a:pPr indent="0" marL="0">
+              <a:buNone/>
+            </a:pPr>
+            <a:r>
+              <a:rPr lang="en-US" sz="1000" dirty="0">
+                <a:solidFill>
+                  <a:srgbClr val="A8B2D8"/>
+                </a:solidFill>
+                <a:latin typeface="Consolas" pitchFamily="34" charset="0"/>
+                <a:ea typeface="Consolas" pitchFamily="34" charset="-122"/>
+                <a:cs typeface="Consolas" pitchFamily="34" charset="-120"/>
+              </a:rPr>
+              <a:t>  title: "Parts"</a:t>
+            </a:r>
+            <a:endParaRPr lang="en-US" sz="1000" dirty="0"/>
+          </a:p>
+          <a:p>
+            <a:pPr indent="0" marL="0">
+              <a:buNone/>
+            </a:pPr>
+            <a:r>
+              <a:rPr lang="en-US" sz="1000" dirty="0">
+                <a:solidFill>
+                  <a:srgbClr val="A8B2D8"/>
+                </a:solidFill>
+                <a:latin typeface="Consolas" pitchFamily="34" charset="0"/>
+                <a:ea typeface="Consolas" pitchFamily="34" charset="-122"/>
+                <a:cs typeface="Consolas" pitchFamily="34" charset="-120"/>
+              </a:rPr>
+              <a:t>- icon: "24종"</a:t>
+            </a:r>
+            <a:endParaRPr lang="en-US" sz="1000" dirty="0"/>
+          </a:p>
+          <a:p>
+            <a:pPr indent="0" marL="0">
+              <a:buNone/>
+            </a:pPr>
+            <a:r>
+              <a:rPr lang="en-US" sz="1000" dirty="0">
+                <a:solidFill>
+                  <a:srgbClr val="A8B2D8"/>
+                </a:solidFill>
+                <a:latin typeface="Consolas" pitchFamily="34" charset="0"/>
+                <a:ea typeface="Consolas" pitchFamily="34" charset="-122"/>
+                <a:cs typeface="Consolas" pitchFamily="34" charset="-120"/>
+              </a:rPr>
+              <a:t>  title: "Support Shortcodes"</a:t>
+            </a:r>
+            <a:endParaRPr lang="en-US" sz="1000" dirty="0"/>
+          </a:p>
+          <a:p>
+            <a:pPr indent="0" marL="0">
+              <a:buNone/>
+            </a:pPr>
+            <a:r>
+              <a:rPr lang="en-US" sz="1000" dirty="0">
+                <a:solidFill>
+                  <a:srgbClr val="A8B2D8"/>
+                </a:solidFill>
+                <a:latin typeface="Consolas" pitchFamily="34" charset="0"/>
+                <a:ea typeface="Consolas" pitchFamily="34" charset="-122"/>
+                <a:cs typeface="Consolas" pitchFamily="34" charset="-120"/>
+              </a:rPr>
+              <a:t>\:::</a:t>
+            </a:r>
+            <a:endParaRPr lang="en-US" sz="1000" dirty="0"/>
           </a:p>
         </p:txBody>
       </p:sp>

--- a/public/showcase/showcase.pptx
+++ b/public/showcase/showcase.pptx
@@ -41,10 +41,9 @@
     <p:sldId id="289" r:id="rId35"/>
     <p:sldId id="290" r:id="rId36"/>
     <p:sldId id="291" r:id="rId37"/>
-    <p:sldId id="292" r:id="rId38"/>
   </p:sldIdLst>
   <p:notesMasterIdLst>
-    <p:notesMasterId r:id="rId39"/>
+    <p:notesMasterId r:id="rId38"/>
   </p:notesMasterIdLst>
   <p:sldSz cx="12192000" cy="6858000"/>
   <p:notesSz cx="6858000" cy="12192000"/>
@@ -3114,94 +3113,6 @@
             <a:fld id="{F7021451-1387-4CA6-816F-3879F97B5CBC}" type="slidenum">
               <a:rPr lang="en-US"/>
               <a:t>36</a:t>
-            </a:fld>
-            <a:endParaRPr lang="en-US"/>
-          </a:p>
-        </p:txBody>
-      </p:sp>
-    </p:spTree>
-    <p:extLst>
-      <p:ext uri="{BB962C8B-B14F-4D97-AF65-F5344CB8AC3E}">
-        <p14:creationId xmlns:p14="http://schemas.microsoft.com/office/powerpoint/2010/main" val="1024086991"/>
-      </p:ext>
-    </p:extLst>
-  </p:cSld>
-  <p:clrMapOvr>
-    <a:masterClrMapping/>
-  </p:clrMapOvr>
-</p:notes>
-</file>
-
-<file path=ppt/notesSlides/notesSlide37.xml><?xml version="1.0" encoding="utf-8"?>
-<p:notes xmlns:a="http://schemas.openxmlformats.org/drawingml/2006/main" xmlns:r="http://schemas.openxmlformats.org/officeDocument/2006/relationships" xmlns:p="http://schemas.openxmlformats.org/presentationml/2006/main">
-  <p:cSld>
-    <p:spTree>
-      <p:nvGrpSpPr>
-        <p:cNvPr id="1" name=""/>
-        <p:cNvGrpSpPr/>
-        <p:nvPr/>
-      </p:nvGrpSpPr>
-      <p:grpSpPr>
-        <a:xfrm>
-          <a:off x="0" y="0"/>
-          <a:ext cx="0" cy="0"/>
-          <a:chOff x="0" y="0"/>
-          <a:chExt cx="0" cy="0"/>
-        </a:xfrm>
-      </p:grpSpPr>
-      <p:sp>
-        <p:nvSpPr>
-          <p:cNvPr id="2" name="Slide Image Placeholder 1"/>
-          <p:cNvSpPr>
-            <a:spLocks noGrp="1" noRot="1" noChangeAspect="1"/>
-          </p:cNvSpPr>
-          <p:nvPr>
-            <p:ph type="sldImg"/>
-          </p:nvPr>
-        </p:nvSpPr>
-        <p:spPr/>
-      </p:sp>
-      <p:sp>
-        <p:nvSpPr>
-          <p:cNvPr id="3" name="Notes Placeholder 2"/>
-          <p:cNvSpPr>
-            <a:spLocks noGrp="1"/>
-          </p:cNvSpPr>
-          <p:nvPr>
-            <p:ph type="body" idx="1"/>
-          </p:nvPr>
-        </p:nvSpPr>
-        <p:spPr/>
-        <p:txBody>
-          <a:bodyPr/>
-          <a:lstStyle/>
-          <a:p>
-            <a:r>
-              <a:rPr lang="en-US" dirty="0"/>
-              <a:t/>
-            </a:r>
-            <a:endParaRPr lang="en-US" dirty="0"/>
-          </a:p>
-        </p:txBody>
-      </p:sp>
-      <p:sp>
-        <p:nvSpPr>
-          <p:cNvPr id="4" name="Slide Number Placeholder 3"/>
-          <p:cNvSpPr>
-            <a:spLocks noGrp="1"/>
-          </p:cNvSpPr>
-          <p:nvPr>
-            <p:ph type="sldNum" sz="quarter" idx="10"/>
-          </p:nvPr>
-        </p:nvSpPr>
-        <p:spPr/>
-        <p:txBody>
-          <a:bodyPr/>
-          <a:lstStyle/>
-          <a:p>
-            <a:fld id="{F7021451-1387-4CA6-816F-3879F97B5CBC}" type="slidenum">
-              <a:rPr lang="en-US"/>
-              <a:t>37</a:t>
             </a:fld>
             <a:endParaRPr lang="en-US"/>
           </a:p>
@@ -4176,7 +4087,7 @@
                 <a:ea typeface="Malgun Gothic" pitchFamily="34" charset="-122"/>
                 <a:cs typeface="Malgun Gothic" pitchFamily="34" charset="-120"/>
               </a:rPr>
-              <a:t>현재 등록된 숏코드의 입력 문법과 HTML/PPTX 구현 결과를 함께 확인하는 레퍼런스</a:t>
+              <a:t>현재 등록된 숏코드의 입력 문법과 HTML 구현 결과를 함께 확인하는 레퍼런스</a:t>
             </a:r>
             <a:endParaRPr lang="en-US" sz="1600" dirty="0"/>
           </a:p>
@@ -4215,7 +4126,7 @@
                 <a:ea typeface="Malgun Gothic" pitchFamily="34" charset="-122"/>
                 <a:cs typeface="Malgun Gothic" pitchFamily="34" charset="-120"/>
               </a:rPr>
-              <a:t>24종</a:t>
+              <a:t>29종</a:t>
             </a:r>
             <a:endParaRPr lang="en-US" sz="1800" dirty="0"/>
           </a:p>
@@ -4293,7 +4204,7 @@
                 <a:ea typeface="Malgun Gothic" pitchFamily="34" charset="-122"/>
                 <a:cs typeface="Malgun Gothic" pitchFamily="34" charset="-120"/>
               </a:rPr>
-              <a:t>7대</a:t>
+              <a:t>8개</a:t>
             </a:r>
             <a:endParaRPr lang="en-US" sz="1800" dirty="0"/>
           </a:p>
@@ -4449,7 +4360,7 @@
                 <a:ea typeface="Malgun Gothic" pitchFamily="34" charset="-122"/>
                 <a:cs typeface="Malgun Gothic" pitchFamily="34" charset="-120"/>
               </a:rPr>
-              <a:t>cols=N</a:t>
+              <a:t>cols/bullet</a:t>
             </a:r>
             <a:endParaRPr lang="en-US" sz="1800" dirty="0"/>
           </a:p>
@@ -4488,7 +4399,7 @@
                 <a:ea typeface="Malgun Gothic" pitchFamily="34" charset="-122"/>
                 <a:cs typeface="Malgun Gothic" pitchFamily="34" charset="-120"/>
               </a:rPr>
-              <a:t>그리드 단수 제어</a:t>
+              <a:t>블록 인자 제어</a:t>
             </a:r>
             <a:endParaRPr lang="en-US" sz="1000" dirty="0"/>
           </a:p>
@@ -5062,7 +4973,7 @@
                           <a:ea typeface="Malgun Gothic" pitchFamily="34" charset="-122"/>
                           <a:cs typeface="Malgun Gothic" pitchFamily="34" charset="-120"/>
                         </a:rPr>
-                        <a:t>번호가 붙는 세로 단계 리스트입니다.</a:t>
+                        <a:t>번호가 붙는 세로 단계 리스트입니다. desc에 \n을 쓰면 불릿 목록이 됩니다.</a:t>
                       </a:r>
                       <a:endParaRPr lang="en-US" sz="1000" dirty="0">
                         <a:latin typeface="Malgun Gothic" charset="0"/>
@@ -7695,7 +7606,7 @@
                           <a:ea typeface="Malgun Gothic" pitchFamily="34" charset="-122"/>
                           <a:cs typeface="Malgun Gothic" pitchFamily="34" charset="-120"/>
                         </a:rPr>
-                        <a:t>요금제, 모델 등급, 옵션 비교에 쓰는 플랜 카드입니다.</a:t>
+                        <a:t>요금제, 모델 등급, 옵션 비교에 쓰는 플랜 카드입니다. note가 하단 가격 배지로 표시됩니다.</a:t>
                       </a:r>
                       <a:endParaRPr lang="en-US" sz="1000" dirty="0">
                         <a:latin typeface="Malgun Gothic" charset="0"/>
@@ -10791,7 +10702,7 @@
                 <a:ea typeface="Consolas" pitchFamily="34" charset="-122"/>
                 <a:cs typeface="Consolas" pitchFamily="34" charset="-120"/>
               </a:rPr>
-              <a:t>  note: "node templates/build-guide.mjs guide.md"</a:t>
+              <a:t>  note: "node scripts/build-guide.mjs guide.md"</a:t>
             </a:r>
             <a:endParaRPr lang="en-US" sz="1000" dirty="0"/>
           </a:p>
@@ -11127,7 +11038,7 @@
                 <a:ea typeface="Courier New" pitchFamily="34" charset="-122"/>
                 <a:cs typeface="Courier New" pitchFamily="34" charset="-120"/>
               </a:rPr>
-              <a:t>node templates/build-guide.mjs guide.md</a:t>
+              <a:t>node scripts/build-guide.mjs guide.md</a:t>
             </a:r>
             <a:endParaRPr lang="en-US" sz="750" dirty="0"/>
           </a:p>
@@ -15958,7 +15869,7 @@
                 <a:ea typeface="Consolas" pitchFamily="34" charset="-122"/>
                 <a:cs typeface="Consolas" pitchFamily="34" charset="-120"/>
               </a:rPr>
-              <a:t>  desc: "node templates/build-guide.mjs md_src/showcase/showcase.md public/showcase/showcase.html"</a:t>
+              <a:t>  desc: "node scripts/build-guide.mjs md_src/showcase/showcase.md"</a:t>
             </a:r>
             <a:endParaRPr lang="en-US" sz="1000" dirty="0"/>
           </a:p>
@@ -16144,7 +16055,7 @@
                 <a:ea typeface="Consolas" pitchFamily="34" charset="-122"/>
                 <a:cs typeface="Consolas" pitchFamily="34" charset="-120"/>
               </a:rPr>
-              <a:t>node templates/build-guide.mjs md_src/showcase/showcase.md public/showcase/showcase.html</a:t>
+              <a:t>node scripts/build-guide.mjs md_src/showcase/showcase.md</a:t>
             </a:r>
             <a:endParaRPr lang="en-US" sz="1000" dirty="0"/>
           </a:p>
@@ -17678,11 +17589,11 @@
         <p:spPr>
           <a:xfrm>
             <a:off x="457200" y="1143000"/>
-            <a:ext cx="11277295" cy="2615184"/>
+            <a:ext cx="11277295" cy="3383280"/>
           </a:xfrm>
           <a:prstGeom prst="roundRect">
             <a:avLst>
-              <a:gd name="adj" fmla="val 2797"/>
+              <a:gd name="adj" fmla="val 2162"/>
             </a:avLst>
           </a:prstGeom>
           <a:solidFill>
@@ -18784,6 +18695,402 @@
                   </a:tcPr>
                 </a:tc>
               </a:tr>
+              <a:tr h="256032">
+                <a:tc>
+                  <a:txBody>
+                    <a:bodyPr/>
+                    <a:lstStyle/>
+                    <a:p>
+                      <a:pPr indent="0" marL="0">
+                        <a:buNone/>
+                      </a:pPr>
+                      <a:r>
+                        <a:rPr lang="en-US" sz="1000" dirty="0">
+                          <a:solidFill>
+                            <a:srgbClr val="475569"/>
+                          </a:solidFill>
+                          <a:latin typeface="Malgun Gothic" pitchFamily="34" charset="0"/>
+                          <a:ea typeface="Malgun Gothic" pitchFamily="34" charset="-122"/>
+                          <a:cs typeface="Malgun Gothic" pitchFamily="34" charset="-120"/>
+                        </a:rPr>
+                        <a:t>목차/구성</a:t>
+                      </a:r>
+                      <a:endParaRPr lang="en-US" sz="1000" dirty="0">
+                        <a:latin typeface="Malgun Gothic" charset="0"/>
+                        <a:ea typeface="Malgun Gothic" charset="0"/>
+                        <a:cs typeface="Malgun Gothic" charset="0"/>
+                      </a:endParaRPr>
+                    </a:p>
+                  </a:txBody>
+                  <a:tcPr marL="91440" marR="91440" marT="45720" marB="45720">
+                    <a:lnL w="12700" cap="flat" cmpd="sng" algn="ctr">
+                      <a:solidFill>
+                        <a:srgbClr val="C8E6DF"/>
+                      </a:solidFill>
+                      <a:prstDash val="solid"/>
+                      <a:round/>
+                      <a:headEnd type="none" w="med" len="med"/>
+                      <a:tailEnd type="none" w="med" len="med"/>
+                    </a:lnL>
+                    <a:lnR w="12700" cap="flat" cmpd="sng" algn="ctr">
+                      <a:solidFill>
+                        <a:srgbClr val="C8E6DF"/>
+                      </a:solidFill>
+                      <a:prstDash val="solid"/>
+                      <a:round/>
+                      <a:headEnd type="none" w="med" len="med"/>
+                      <a:tailEnd type="none" w="med" len="med"/>
+                    </a:lnR>
+                    <a:lnT w="12700" cap="flat" cmpd="sng" algn="ctr">
+                      <a:solidFill>
+                        <a:srgbClr val="C8E6DF"/>
+                      </a:solidFill>
+                      <a:prstDash val="solid"/>
+                      <a:round/>
+                      <a:headEnd type="none" w="med" len="med"/>
+                      <a:tailEnd type="none" w="med" len="med"/>
+                    </a:lnT>
+                    <a:lnB w="12700" cap="flat" cmpd="sng" algn="ctr">
+                      <a:solidFill>
+                        <a:srgbClr val="C8E6DF"/>
+                      </a:solidFill>
+                      <a:prstDash val="solid"/>
+                      <a:round/>
+                      <a:headEnd type="none" w="med" len="med"/>
+                      <a:tailEnd type="none" w="med" len="med"/>
+                    </a:lnB>
+                  </a:tcPr>
+                </a:tc>
+                <a:tc>
+                  <a:txBody>
+                    <a:bodyPr/>
+                    <a:lstStyle/>
+                    <a:p>
+                      <a:pPr indent="0" marL="0">
+                        <a:buNone/>
+                      </a:pPr>
+                      <a:r>
+                        <a:rPr lang="en-US" sz="1000" dirty="0">
+                          <a:solidFill>
+                            <a:srgbClr val="475569"/>
+                          </a:solidFill>
+                          <a:latin typeface="Malgun Gothic" pitchFamily="34" charset="0"/>
+                          <a:ea typeface="Malgun Gothic" pitchFamily="34" charset="-122"/>
+                          <a:cs typeface="Malgun Gothic" pitchFamily="34" charset="-120"/>
+                        </a:rPr>
+                        <a:t>part-deck, chapter-list, summary-bar</a:t>
+                      </a:r>
+                      <a:endParaRPr lang="en-US" sz="1000" dirty="0">
+                        <a:latin typeface="Malgun Gothic" charset="0"/>
+                        <a:ea typeface="Malgun Gothic" charset="0"/>
+                        <a:cs typeface="Malgun Gothic" charset="0"/>
+                      </a:endParaRPr>
+                    </a:p>
+                  </a:txBody>
+                  <a:tcPr marL="91440" marR="91440" marT="45720" marB="45720">
+                    <a:lnL w="12700" cap="flat" cmpd="sng" algn="ctr">
+                      <a:solidFill>
+                        <a:srgbClr val="C8E6DF"/>
+                      </a:solidFill>
+                      <a:prstDash val="solid"/>
+                      <a:round/>
+                      <a:headEnd type="none" w="med" len="med"/>
+                      <a:tailEnd type="none" w="med" len="med"/>
+                    </a:lnL>
+                    <a:lnR w="12700" cap="flat" cmpd="sng" algn="ctr">
+                      <a:solidFill>
+                        <a:srgbClr val="C8E6DF"/>
+                      </a:solidFill>
+                      <a:prstDash val="solid"/>
+                      <a:round/>
+                      <a:headEnd type="none" w="med" len="med"/>
+                      <a:tailEnd type="none" w="med" len="med"/>
+                    </a:lnR>
+                    <a:lnT w="12700" cap="flat" cmpd="sng" algn="ctr">
+                      <a:solidFill>
+                        <a:srgbClr val="C8E6DF"/>
+                      </a:solidFill>
+                      <a:prstDash val="solid"/>
+                      <a:round/>
+                      <a:headEnd type="none" w="med" len="med"/>
+                      <a:tailEnd type="none" w="med" len="med"/>
+                    </a:lnT>
+                    <a:lnB w="12700" cap="flat" cmpd="sng" algn="ctr">
+                      <a:solidFill>
+                        <a:srgbClr val="C8E6DF"/>
+                      </a:solidFill>
+                      <a:prstDash val="solid"/>
+                      <a:round/>
+                      <a:headEnd type="none" w="med" len="med"/>
+                      <a:tailEnd type="none" w="med" len="med"/>
+                    </a:lnB>
+                  </a:tcPr>
+                </a:tc>
+              </a:tr>
+              <a:tr h="256032">
+                <a:tc>
+                  <a:txBody>
+                    <a:bodyPr/>
+                    <a:lstStyle/>
+                    <a:p>
+                      <a:pPr indent="0" marL="0">
+                        <a:buNone/>
+                      </a:pPr>
+                      <a:r>
+                        <a:rPr lang="en-US" sz="1000" dirty="0">
+                          <a:solidFill>
+                            <a:srgbClr val="475569"/>
+                          </a:solidFill>
+                          <a:latin typeface="Malgun Gothic" pitchFamily="34" charset="0"/>
+                          <a:ea typeface="Malgun Gothic" pitchFamily="34" charset="-122"/>
+                          <a:cs typeface="Malgun Gothic" pitchFamily="34" charset="-120"/>
+                        </a:rPr>
+                        <a:t>분석/로드맵</a:t>
+                      </a:r>
+                      <a:endParaRPr lang="en-US" sz="1000" dirty="0">
+                        <a:latin typeface="Malgun Gothic" charset="0"/>
+                        <a:ea typeface="Malgun Gothic" charset="0"/>
+                        <a:cs typeface="Malgun Gothic" charset="0"/>
+                      </a:endParaRPr>
+                    </a:p>
+                  </a:txBody>
+                  <a:tcPr marL="91440" marR="91440" marT="45720" marB="45720">
+                    <a:lnL w="12700" cap="flat" cmpd="sng" algn="ctr">
+                      <a:solidFill>
+                        <a:srgbClr val="C8E6DF"/>
+                      </a:solidFill>
+                      <a:prstDash val="solid"/>
+                      <a:round/>
+                      <a:headEnd type="none" w="med" len="med"/>
+                      <a:tailEnd type="none" w="med" len="med"/>
+                    </a:lnL>
+                    <a:lnR w="12700" cap="flat" cmpd="sng" algn="ctr">
+                      <a:solidFill>
+                        <a:srgbClr val="C8E6DF"/>
+                      </a:solidFill>
+                      <a:prstDash val="solid"/>
+                      <a:round/>
+                      <a:headEnd type="none" w="med" len="med"/>
+                      <a:tailEnd type="none" w="med" len="med"/>
+                    </a:lnR>
+                    <a:lnT w="12700" cap="flat" cmpd="sng" algn="ctr">
+                      <a:solidFill>
+                        <a:srgbClr val="C8E6DF"/>
+                      </a:solidFill>
+                      <a:prstDash val="solid"/>
+                      <a:round/>
+                      <a:headEnd type="none" w="med" len="med"/>
+                      <a:tailEnd type="none" w="med" len="med"/>
+                    </a:lnT>
+                    <a:lnB w="12700" cap="flat" cmpd="sng" algn="ctr">
+                      <a:solidFill>
+                        <a:srgbClr val="C8E6DF"/>
+                      </a:solidFill>
+                      <a:prstDash val="solid"/>
+                      <a:round/>
+                      <a:headEnd type="none" w="med" len="med"/>
+                      <a:tailEnd type="none" w="med" len="med"/>
+                    </a:lnB>
+                  </a:tcPr>
+                </a:tc>
+                <a:tc>
+                  <a:txBody>
+                    <a:bodyPr/>
+                    <a:lstStyle/>
+                    <a:p>
+                      <a:pPr indent="0" marL="0">
+                        <a:buNone/>
+                      </a:pPr>
+                      <a:r>
+                        <a:rPr lang="en-US" sz="1000" dirty="0">
+                          <a:solidFill>
+                            <a:srgbClr val="475569"/>
+                          </a:solidFill>
+                          <a:latin typeface="Malgun Gothic" pitchFamily="34" charset="0"/>
+                          <a:ea typeface="Malgun Gothic" pitchFamily="34" charset="-122"/>
+                          <a:cs typeface="Malgun Gothic" pitchFamily="34" charset="-120"/>
+                        </a:rPr>
+                        <a:t>flow, level-grid, checkpoint-grid</a:t>
+                      </a:r>
+                      <a:endParaRPr lang="en-US" sz="1000" dirty="0">
+                        <a:latin typeface="Malgun Gothic" charset="0"/>
+                        <a:ea typeface="Malgun Gothic" charset="0"/>
+                        <a:cs typeface="Malgun Gothic" charset="0"/>
+                      </a:endParaRPr>
+                    </a:p>
+                  </a:txBody>
+                  <a:tcPr marL="91440" marR="91440" marT="45720" marB="45720">
+                    <a:lnL w="12700" cap="flat" cmpd="sng" algn="ctr">
+                      <a:solidFill>
+                        <a:srgbClr val="C8E6DF"/>
+                      </a:solidFill>
+                      <a:prstDash val="solid"/>
+                      <a:round/>
+                      <a:headEnd type="none" w="med" len="med"/>
+                      <a:tailEnd type="none" w="med" len="med"/>
+                    </a:lnL>
+                    <a:lnR w="12700" cap="flat" cmpd="sng" algn="ctr">
+                      <a:solidFill>
+                        <a:srgbClr val="C8E6DF"/>
+                      </a:solidFill>
+                      <a:prstDash val="solid"/>
+                      <a:round/>
+                      <a:headEnd type="none" w="med" len="med"/>
+                      <a:tailEnd type="none" w="med" len="med"/>
+                    </a:lnR>
+                    <a:lnT w="12700" cap="flat" cmpd="sng" algn="ctr">
+                      <a:solidFill>
+                        <a:srgbClr val="C8E6DF"/>
+                      </a:solidFill>
+                      <a:prstDash val="solid"/>
+                      <a:round/>
+                      <a:headEnd type="none" w="med" len="med"/>
+                      <a:tailEnd type="none" w="med" len="med"/>
+                    </a:lnT>
+                    <a:lnB w="12700" cap="flat" cmpd="sng" algn="ctr">
+                      <a:solidFill>
+                        <a:srgbClr val="C8E6DF"/>
+                      </a:solidFill>
+                      <a:prstDash val="solid"/>
+                      <a:round/>
+                      <a:headEnd type="none" w="med" len="med"/>
+                      <a:tailEnd type="none" w="med" len="med"/>
+                    </a:lnB>
+                  </a:tcPr>
+                </a:tc>
+              </a:tr>
+              <a:tr h="256032">
+                <a:tc>
+                  <a:txBody>
+                    <a:bodyPr/>
+                    <a:lstStyle/>
+                    <a:p>
+                      <a:pPr indent="0" marL="0">
+                        <a:buNone/>
+                      </a:pPr>
+                      <a:r>
+                        <a:rPr lang="en-US" sz="1000" dirty="0">
+                          <a:solidFill>
+                            <a:srgbClr val="475569"/>
+                          </a:solidFill>
+                          <a:latin typeface="Malgun Gothic" pitchFamily="34" charset="0"/>
+                          <a:ea typeface="Malgun Gothic" pitchFamily="34" charset="-122"/>
+                          <a:cs typeface="Malgun Gothic" pitchFamily="34" charset="-120"/>
+                        </a:rPr>
+                        <a:t>하이라이트</a:t>
+                      </a:r>
+                      <a:endParaRPr lang="en-US" sz="1000" dirty="0">
+                        <a:latin typeface="Malgun Gothic" charset="0"/>
+                        <a:ea typeface="Malgun Gothic" charset="0"/>
+                        <a:cs typeface="Malgun Gothic" charset="0"/>
+                      </a:endParaRPr>
+                    </a:p>
+                  </a:txBody>
+                  <a:tcPr marL="91440" marR="91440" marT="45720" marB="45720">
+                    <a:lnL w="12700" cap="flat" cmpd="sng" algn="ctr">
+                      <a:solidFill>
+                        <a:srgbClr val="C8E6DF"/>
+                      </a:solidFill>
+                      <a:prstDash val="solid"/>
+                      <a:round/>
+                      <a:headEnd type="none" w="med" len="med"/>
+                      <a:tailEnd type="none" w="med" len="med"/>
+                    </a:lnL>
+                    <a:lnR w="12700" cap="flat" cmpd="sng" algn="ctr">
+                      <a:solidFill>
+                        <a:srgbClr val="C8E6DF"/>
+                      </a:solidFill>
+                      <a:prstDash val="solid"/>
+                      <a:round/>
+                      <a:headEnd type="none" w="med" len="med"/>
+                      <a:tailEnd type="none" w="med" len="med"/>
+                    </a:lnR>
+                    <a:lnT w="12700" cap="flat" cmpd="sng" algn="ctr">
+                      <a:solidFill>
+                        <a:srgbClr val="C8E6DF"/>
+                      </a:solidFill>
+                      <a:prstDash val="solid"/>
+                      <a:round/>
+                      <a:headEnd type="none" w="med" len="med"/>
+                      <a:tailEnd type="none" w="med" len="med"/>
+                    </a:lnT>
+                    <a:lnB w="12700" cap="flat" cmpd="sng" algn="ctr">
+                      <a:solidFill>
+                        <a:srgbClr val="C8E6DF"/>
+                      </a:solidFill>
+                      <a:prstDash val="solid"/>
+                      <a:round/>
+                      <a:headEnd type="none" w="med" len="med"/>
+                      <a:tailEnd type="none" w="med" len="med"/>
+                    </a:lnB>
+                  </a:tcPr>
+                </a:tc>
+                <a:tc>
+                  <a:txBody>
+                    <a:bodyPr/>
+                    <a:lstStyle/>
+                    <a:p>
+                      <a:pPr indent="0" marL="0">
+                        <a:buNone/>
+                      </a:pPr>
+                      <a:r>
+                        <a:rPr lang="en-US" sz="1000" dirty="0">
+                          <a:solidFill>
+                            <a:srgbClr val="475569"/>
+                          </a:solidFill>
+                          <a:latin typeface="Malgun Gothic" pitchFamily="34" charset="0"/>
+                          <a:ea typeface="Malgun Gothic" pitchFamily="34" charset="-122"/>
+                          <a:cs typeface="Malgun Gothic" pitchFamily="34" charset="-120"/>
+                        </a:rPr>
+                        <a:t>compare-before-after, takeaway</a:t>
+                      </a:r>
+                      <a:endParaRPr lang="en-US" sz="1000" dirty="0">
+                        <a:latin typeface="Malgun Gothic" charset="0"/>
+                        <a:ea typeface="Malgun Gothic" charset="0"/>
+                        <a:cs typeface="Malgun Gothic" charset="0"/>
+                      </a:endParaRPr>
+                    </a:p>
+                  </a:txBody>
+                  <a:tcPr marL="91440" marR="91440" marT="45720" marB="45720">
+                    <a:lnL w="12700" cap="flat" cmpd="sng" algn="ctr">
+                      <a:solidFill>
+                        <a:srgbClr val="C8E6DF"/>
+                      </a:solidFill>
+                      <a:prstDash val="solid"/>
+                      <a:round/>
+                      <a:headEnd type="none" w="med" len="med"/>
+                      <a:tailEnd type="none" w="med" len="med"/>
+                    </a:lnL>
+                    <a:lnR w="12700" cap="flat" cmpd="sng" algn="ctr">
+                      <a:solidFill>
+                        <a:srgbClr val="C8E6DF"/>
+                      </a:solidFill>
+                      <a:prstDash val="solid"/>
+                      <a:round/>
+                      <a:headEnd type="none" w="med" len="med"/>
+                      <a:tailEnd type="none" w="med" len="med"/>
+                    </a:lnR>
+                    <a:lnT w="12700" cap="flat" cmpd="sng" algn="ctr">
+                      <a:solidFill>
+                        <a:srgbClr val="C8E6DF"/>
+                      </a:solidFill>
+                      <a:prstDash val="solid"/>
+                      <a:round/>
+                      <a:headEnd type="none" w="med" len="med"/>
+                      <a:tailEnd type="none" w="med" len="med"/>
+                    </a:lnT>
+                    <a:lnB w="12700" cap="flat" cmpd="sng" algn="ctr">
+                      <a:solidFill>
+                        <a:srgbClr val="C8E6DF"/>
+                      </a:solidFill>
+                      <a:prstDash val="solid"/>
+                      <a:round/>
+                      <a:headEnd type="none" w="med" len="med"/>
+                      <a:tailEnd type="none" w="med" len="med"/>
+                    </a:lnB>
+                  </a:tcPr>
+                </a:tc>
+              </a:tr>
             </a:tbl>
           </a:graphicData>
         </a:graphic>
@@ -21599,7 +21906,7 @@
                 <a:ea typeface="Consolas" pitchFamily="34" charset="-122"/>
                 <a:cs typeface="Consolas" pitchFamily="34" charset="-120"/>
               </a:rPr>
-              <a:t>  tag: "v1.1.0"</a:t>
+              <a:t>  tag: "v2.0.0"</a:t>
             </a:r>
             <a:endParaRPr lang="en-US" sz="1000" dirty="0"/>
           </a:p>
@@ -21616,7 +21923,7 @@
                 <a:ea typeface="Consolas" pitchFamily="34" charset="-122"/>
                 <a:cs typeface="Consolas" pitchFamily="34" charset="-120"/>
               </a:rPr>
-              <a:t>  meta: "쇼케이스 MD 정리|HTML/PPTX 변환 통과"</a:t>
+              <a:t>  meta: "숏코드 29종 완비|bullet/color 개선"</a:t>
             </a:r>
             <a:endParaRPr lang="en-US" sz="1000" dirty="0"/>
           </a:p>
@@ -21650,7 +21957,7 @@
                 <a:ea typeface="Consolas" pitchFamily="34" charset="-122"/>
                 <a:cs typeface="Consolas" pitchFamily="34" charset="-120"/>
               </a:rPr>
-              <a:t>- title: "feature/restore-md"</a:t>
+              <a:t>- title: "feature/shortcode-refactor"</a:t>
             </a:r>
             <a:endParaRPr lang="en-US" sz="1000" dirty="0"/>
           </a:p>
@@ -21667,7 +21974,7 @@
                 <a:ea typeface="Consolas" pitchFamily="34" charset="-122"/>
                 <a:cs typeface="Consolas" pitchFamily="34" charset="-120"/>
               </a:rPr>
-              <a:t>  tag: "Commit 701"</a:t>
+              <a:t>  tag: "Commit 812"</a:t>
             </a:r>
             <a:endParaRPr lang="en-US" sz="1000" dirty="0"/>
           </a:p>
@@ -21684,7 +21991,7 @@
                 <a:ea typeface="Consolas" pitchFamily="34" charset="-122"/>
                 <a:cs typeface="Consolas" pitchFamily="34" charset="-120"/>
               </a:rPr>
-              <a:t>  meta: "원본 콘텐츠 복원|신형 숏코드 반영"</a:t>
+              <a:t>  meta: "bullet 블록 인자 추가|desc 멀티라인 통일"</a:t>
             </a:r>
             <a:endParaRPr lang="en-US" sz="1000" dirty="0"/>
           </a:p>
@@ -21825,7 +22132,7 @@
                 <a:ea typeface="Malgun Gothic" pitchFamily="34" charset="-122"/>
                 <a:cs typeface="Malgun Gothic" pitchFamily="34" charset="-120"/>
               </a:rPr>
-              <a:t>쇼케이스 MD 정리|HTML/PPTX 변환 통과</a:t>
+              <a:t>숏코드 29종 완비|bullet/color 개선</a:t>
             </a:r>
             <a:endParaRPr lang="en-US" sz="900" dirty="0"/>
           </a:p>
@@ -21929,7 +22236,7 @@
                 <a:ea typeface="Malgun Gothic" pitchFamily="34" charset="-122"/>
                 <a:cs typeface="Malgun Gothic" pitchFamily="34" charset="-120"/>
               </a:rPr>
-              <a:t>feature/restore-md</a:t>
+              <a:t>feature/shortcode-refactor</a:t>
             </a:r>
             <a:endParaRPr lang="en-US" sz="1100" dirty="0"/>
           </a:p>
@@ -21968,7 +22275,7 @@
                 <a:ea typeface="Malgun Gothic" pitchFamily="34" charset="-122"/>
                 <a:cs typeface="Malgun Gothic" pitchFamily="34" charset="-120"/>
               </a:rPr>
-              <a:t>원본 콘텐츠 복원|신형 숏코드 반영</a:t>
+              <a:t>bullet 블록 인자 추가|desc 멀티라인 통일</a:t>
             </a:r>
             <a:endParaRPr lang="en-US" sz="900" dirty="0"/>
           </a:p>
@@ -26071,7 +26378,7 @@
                           <a:ea typeface="Malgun Gothic" pitchFamily="34" charset="-122"/>
                           <a:cs typeface="Malgun Gothic" pitchFamily="34" charset="-120"/>
                         </a:rPr>
-                        <a:t>세부 목차 및 챕터 리스트 숏코드입니다. 챕터 번호와 뱃지 속성에 따라 이쁜 HSL 배지 색상이 자동 매핑됩니다.</a:t>
+                        <a:t>세부 목차 및 챕터 리스트 숏코드입니다. 챕터 번호와 뱃지 속성에 따라 HSL 배지 색상이 자동 매핑됩니다.</a:t>
                       </a:r>
                       <a:endParaRPr lang="en-US" sz="1000" dirty="0">
                         <a:latin typeface="Malgun Gothic" charset="0"/>
@@ -26565,7 +26872,7 @@
                 <a:ea typeface="Malgun Gothic" pitchFamily="34" charset="-122"/>
                 <a:cs typeface="Malgun Gothic" pitchFamily="34" charset="-120"/>
               </a:rPr>
-              <a:t>19</a:t>
+              <a:t>24</a:t>
             </a:r>
             <a:endParaRPr lang="en-US" sz="1600" dirty="0"/>
           </a:p>
@@ -26604,7 +26911,7 @@
                 <a:ea typeface="Malgun Gothic" pitchFamily="34" charset="-122"/>
                 <a:cs typeface="Malgun Gothic" pitchFamily="34" charset="-120"/>
               </a:rPr>
-              <a:t>git-flow-strip</a:t>
+              <a:t>summary-bar</a:t>
             </a:r>
             <a:endParaRPr lang="en-US" sz="2200" dirty="0"/>
           </a:p>
@@ -26619,11 +26926,11 @@
         <p:spPr>
           <a:xfrm>
             <a:off x="457200" y="1143000"/>
-            <a:ext cx="11277295" cy="4188714"/>
+            <a:ext cx="11277295" cy="3756914"/>
           </a:xfrm>
           <a:prstGeom prst="roundRect">
             <a:avLst>
-              <a:gd name="adj" fmla="val 1746"/>
+              <a:gd name="adj" fmla="val 1947"/>
             </a:avLst>
           </a:prstGeom>
           <a:solidFill>
@@ -26884,7 +27191,7 @@
                           <a:ea typeface="Malgun Gothic" pitchFamily="34" charset="-122"/>
                           <a:cs typeface="Malgun Gothic" pitchFamily="34" charset="-120"/>
                         </a:rPr>
-                        <a:t>git-flow-strip</a:t>
+                        <a:t>summary-bar</a:t>
                       </a:r>
                       <a:endParaRPr lang="en-US" sz="1000" dirty="0">
                         <a:latin typeface="Malgun Gothic" charset="0"/>
@@ -27016,7 +27323,7 @@
                           <a:ea typeface="Malgun Gothic" pitchFamily="34" charset="-122"/>
                           <a:cs typeface="Malgun Gothic" pitchFamily="34" charset="-120"/>
                         </a:rPr>
-                        <a:t>브랜치 라인과 커밋 라벨을 가진 Git 흐름도입니다.</a:t>
+                        <a:t>주요 수치를 가로 격자 형태로 요약 노출하는 수치 뱃지 숏코드입니다.</a:t>
                       </a:r>
                       <a:endParaRPr lang="en-US" sz="1000" dirty="0">
                         <a:latin typeface="Malgun Gothic" charset="0"/>
@@ -27117,7 +27424,7 @@
         <p:spPr>
           <a:xfrm>
             <a:off x="685800" y="2669794"/>
-            <a:ext cx="10820095" cy="2341880"/>
+            <a:ext cx="10820095" cy="1910080"/>
           </a:xfrm>
           <a:prstGeom prst="rect">
             <a:avLst/>
@@ -27142,7 +27449,7 @@
         <p:spPr>
           <a:xfrm>
             <a:off x="795528" y="2742946"/>
-            <a:ext cx="10600639" cy="2250440"/>
+            <a:ext cx="10600639" cy="1818640"/>
           </a:xfrm>
           <a:prstGeom prst="rect">
             <a:avLst/>
@@ -27166,7 +27473,7 @@
                 <a:ea typeface="Consolas" pitchFamily="34" charset="-122"/>
                 <a:cs typeface="Consolas" pitchFamily="34" charset="-120"/>
               </a:rPr>
-              <a:t>\::: git-flow-strip</a:t>
+              <a:t>\::: summary-bar</a:t>
             </a:r>
             <a:endParaRPr lang="en-US" sz="1000" dirty="0"/>
           </a:p>
@@ -27183,7 +27490,7 @@
                 <a:ea typeface="Consolas" pitchFamily="34" charset="-122"/>
                 <a:cs typeface="Consolas" pitchFamily="34" charset="-120"/>
               </a:rPr>
-              <a:t>- title: "main"</a:t>
+              <a:t>- icon: "29종"</a:t>
             </a:r>
             <a:endParaRPr lang="en-US" sz="1000" dirty="0"/>
           </a:p>
@@ -27200,7 +27507,7 @@
                 <a:ea typeface="Consolas" pitchFamily="34" charset="-122"/>
                 <a:cs typeface="Consolas" pitchFamily="34" charset="-120"/>
               </a:rPr>
-              <a:t>  tag: "v1.1.0"</a:t>
+              <a:t>  title: "Support Shortcodes"</a:t>
             </a:r>
             <a:endParaRPr lang="en-US" sz="1000" dirty="0"/>
           </a:p>
@@ -27217,7 +27524,7 @@
                 <a:ea typeface="Consolas" pitchFamily="34" charset="-122"/>
                 <a:cs typeface="Consolas" pitchFamily="34" charset="-120"/>
               </a:rPr>
-              <a:t>  meta: "쇼케이스 MD 정리|HTML/PPTX 변환 통과"</a:t>
+              <a:t>- icon: "8개"</a:t>
             </a:r>
             <a:endParaRPr lang="en-US" sz="1000" dirty="0"/>
           </a:p>
@@ -27234,7 +27541,7 @@
                 <a:ea typeface="Consolas" pitchFamily="34" charset="-122"/>
                 <a:cs typeface="Consolas" pitchFamily="34" charset="-120"/>
               </a:rPr>
-              <a:t>  color: "#10B981"</a:t>
+              <a:t>  title: "Standard Keys"</a:t>
             </a:r>
             <a:endParaRPr lang="en-US" sz="1000" dirty="0"/>
           </a:p>
@@ -27251,7 +27558,7 @@
                 <a:ea typeface="Consolas" pitchFamily="34" charset="-122"/>
                 <a:cs typeface="Consolas" pitchFamily="34" charset="-120"/>
               </a:rPr>
-              <a:t>- title: "feature/restore-md"</a:t>
+              <a:t>- icon: "2종"</a:t>
             </a:r>
             <a:endParaRPr lang="en-US" sz="1000" dirty="0"/>
           </a:p>
@@ -27268,7 +27575,7 @@
                 <a:ea typeface="Consolas" pitchFamily="34" charset="-122"/>
                 <a:cs typeface="Consolas" pitchFamily="34" charset="-120"/>
               </a:rPr>
-              <a:t>  tag: "Commit 701"</a:t>
+              <a:t>  title: "Output Formats"</a:t>
             </a:r>
             <a:endParaRPr lang="en-US" sz="1000" dirty="0"/>
           </a:p>
@@ -27285,293 +27592,9 @@
                 <a:ea typeface="Consolas" pitchFamily="34" charset="-122"/>
                 <a:cs typeface="Consolas" pitchFamily="34" charset="-120"/>
               </a:rPr>
-              <a:t>  meta: "원본 콘텐츠 복원|신형 숏코드 반영"</a:t>
+              <a:t>\:::</a:t>
             </a:r>
             <a:endParaRPr lang="en-US" sz="1000" dirty="0"/>
-          </a:p>
-          <a:p>
-            <a:pPr indent="0" marL="0">
-              <a:buNone/>
-            </a:pPr>
-            <a:r>
-              <a:rPr lang="en-US" sz="1000" dirty="0">
-                <a:solidFill>
-                  <a:srgbClr val="A8B2D8"/>
-                </a:solidFill>
-                <a:latin typeface="Consolas" pitchFamily="34" charset="0"/>
-                <a:ea typeface="Consolas" pitchFamily="34" charset="-122"/>
-                <a:cs typeface="Consolas" pitchFamily="34" charset="-120"/>
-              </a:rPr>
-              <a:t>  color: "#3B82F6"</a:t>
-            </a:r>
-            <a:endParaRPr lang="en-US" sz="1000" dirty="0"/>
-          </a:p>
-          <a:p>
-            <a:pPr indent="0" marL="0">
-              <a:buNone/>
-            </a:pPr>
-            <a:r>
-              <a:rPr lang="en-US" sz="1000" dirty="0">
-                <a:solidFill>
-                  <a:srgbClr val="A8B2D8"/>
-                </a:solidFill>
-                <a:latin typeface="Consolas" pitchFamily="34" charset="0"/>
-                <a:ea typeface="Consolas" pitchFamily="34" charset="-122"/>
-                <a:cs typeface="Consolas" pitchFamily="34" charset="-120"/>
-              </a:rPr>
-              <a:t>\:::</a:t>
-            </a:r>
-            <a:endParaRPr lang="en-US" sz="1000" dirty="0"/>
-          </a:p>
-        </p:txBody>
-      </p:sp>
-      <p:sp>
-        <p:nvSpPr>
-          <p:cNvPr id="11" name="Shape 8"/>
-          <p:cNvSpPr/>
-          <p:nvPr/>
-        </p:nvSpPr>
-        <p:spPr>
-          <a:xfrm>
-            <a:off x="457200" y="5468874"/>
-            <a:ext cx="5524348" cy="868680"/>
-          </a:xfrm>
-          <a:prstGeom prst="roundRect">
-            <a:avLst>
-              <a:gd name="adj" fmla="val 8421"/>
-            </a:avLst>
-          </a:prstGeom>
-          <a:solidFill>
-            <a:srgbClr val="10B981">
-              <a:alpha val="10000"/>
-            </a:srgbClr>
-          </a:solidFill>
-          <a:ln w="9525">
-            <a:solidFill>
-              <a:srgbClr val="10B981"/>
-            </a:solidFill>
-            <a:prstDash val="solid"/>
-          </a:ln>
-        </p:spPr>
-      </p:sp>
-      <p:sp>
-        <p:nvSpPr>
-          <p:cNvPr id="12" name="Text 9"/>
-          <p:cNvSpPr/>
-          <p:nvPr/>
-        </p:nvSpPr>
-        <p:spPr>
-          <a:xfrm>
-            <a:off x="512064" y="5852922"/>
-            <a:ext cx="5414620" cy="237744"/>
-          </a:xfrm>
-          <a:prstGeom prst="rect">
-            <a:avLst/>
-          </a:prstGeom>
-          <a:noFill/>
-          <a:ln/>
-        </p:spPr>
-        <p:txBody>
-          <a:bodyPr wrap="square" rtlCol="0" anchor="ctr"/>
-          <a:lstStyle/>
-          <a:p>
-            <a:pPr algn="ctr" indent="0" marL="0">
-              <a:buNone/>
-            </a:pPr>
-            <a:r>
-              <a:rPr lang="en-US" sz="1100" b="1" dirty="0">
-                <a:solidFill>
-                  <a:srgbClr val="1A1A2E"/>
-                </a:solidFill>
-                <a:latin typeface="Malgun Gothic" pitchFamily="34" charset="0"/>
-                <a:ea typeface="Malgun Gothic" pitchFamily="34" charset="-122"/>
-                <a:cs typeface="Malgun Gothic" pitchFamily="34" charset="-120"/>
-              </a:rPr>
-              <a:t>main</a:t>
-            </a:r>
-            <a:endParaRPr lang="en-US" sz="1100" dirty="0"/>
-          </a:p>
-        </p:txBody>
-      </p:sp>
-      <p:sp>
-        <p:nvSpPr>
-          <p:cNvPr id="13" name="Text 10"/>
-          <p:cNvSpPr/>
-          <p:nvPr/>
-        </p:nvSpPr>
-        <p:spPr>
-          <a:xfrm>
-            <a:off x="512064" y="6090666"/>
-            <a:ext cx="5414620" cy="164592"/>
-          </a:xfrm>
-          <a:prstGeom prst="rect">
-            <a:avLst/>
-          </a:prstGeom>
-          <a:noFill/>
-          <a:ln/>
-        </p:spPr>
-        <p:txBody>
-          <a:bodyPr wrap="square" rtlCol="0" anchor="ctr"/>
-          <a:lstStyle/>
-          <a:p>
-            <a:pPr algn="ctr" indent="0" marL="0">
-              <a:buNone/>
-            </a:pPr>
-            <a:r>
-              <a:rPr lang="en-US" sz="900" dirty="0">
-                <a:solidFill>
-                  <a:srgbClr val="475569"/>
-                </a:solidFill>
-                <a:latin typeface="Malgun Gothic" pitchFamily="34" charset="0"/>
-                <a:ea typeface="Malgun Gothic" pitchFamily="34" charset="-122"/>
-                <a:cs typeface="Malgun Gothic" pitchFamily="34" charset="-120"/>
-              </a:rPr>
-              <a:t>쇼케이스 MD 정리|HTML/PPTX 변환 통과</a:t>
-            </a:r>
-            <a:endParaRPr lang="en-US" sz="900" dirty="0"/>
-          </a:p>
-        </p:txBody>
-      </p:sp>
-      <p:sp>
-        <p:nvSpPr>
-          <p:cNvPr id="14" name="Text 11"/>
-          <p:cNvSpPr/>
-          <p:nvPr/>
-        </p:nvSpPr>
-        <p:spPr>
-          <a:xfrm>
-            <a:off x="5981548" y="5802630"/>
-            <a:ext cx="228600" cy="201168"/>
-          </a:xfrm>
-          <a:prstGeom prst="rect">
-            <a:avLst/>
-          </a:prstGeom>
-          <a:noFill/>
-          <a:ln/>
-        </p:spPr>
-        <p:txBody>
-          <a:bodyPr wrap="square" rtlCol="0" anchor="ctr"/>
-          <a:lstStyle/>
-          <a:p>
-            <a:pPr algn="ctr" indent="0" marL="0">
-              <a:buNone/>
-            </a:pPr>
-            <a:r>
-              <a:rPr lang="en-US" sz="1400" dirty="0">
-                <a:solidFill>
-                  <a:srgbClr val="8892B0"/>
-                </a:solidFill>
-              </a:rPr>
-              <a:t>→</a:t>
-            </a:r>
-            <a:endParaRPr lang="en-US" sz="1400" dirty="0"/>
-          </a:p>
-        </p:txBody>
-      </p:sp>
-      <p:sp>
-        <p:nvSpPr>
-          <p:cNvPr id="15" name="Shape 12"/>
-          <p:cNvSpPr/>
-          <p:nvPr/>
-        </p:nvSpPr>
-        <p:spPr>
-          <a:xfrm>
-            <a:off x="6210148" y="5468874"/>
-            <a:ext cx="5524348" cy="868680"/>
-          </a:xfrm>
-          <a:prstGeom prst="roundRect">
-            <a:avLst>
-              <a:gd name="adj" fmla="val 8421"/>
-            </a:avLst>
-          </a:prstGeom>
-          <a:solidFill>
-            <a:srgbClr val="3B82F6">
-              <a:alpha val="10000"/>
-            </a:srgbClr>
-          </a:solidFill>
-          <a:ln w="9525">
-            <a:solidFill>
-              <a:srgbClr val="3B82F6"/>
-            </a:solidFill>
-            <a:prstDash val="solid"/>
-          </a:ln>
-        </p:spPr>
-      </p:sp>
-      <p:sp>
-        <p:nvSpPr>
-          <p:cNvPr id="16" name="Text 13"/>
-          <p:cNvSpPr/>
-          <p:nvPr/>
-        </p:nvSpPr>
-        <p:spPr>
-          <a:xfrm>
-            <a:off x="6265012" y="5852922"/>
-            <a:ext cx="5414620" cy="237744"/>
-          </a:xfrm>
-          <a:prstGeom prst="rect">
-            <a:avLst/>
-          </a:prstGeom>
-          <a:noFill/>
-          <a:ln/>
-        </p:spPr>
-        <p:txBody>
-          <a:bodyPr wrap="square" rtlCol="0" anchor="ctr"/>
-          <a:lstStyle/>
-          <a:p>
-            <a:pPr algn="ctr" indent="0" marL="0">
-              <a:buNone/>
-            </a:pPr>
-            <a:r>
-              <a:rPr lang="en-US" sz="1100" b="1" dirty="0">
-                <a:solidFill>
-                  <a:srgbClr val="1A1A2E"/>
-                </a:solidFill>
-                <a:latin typeface="Malgun Gothic" pitchFamily="34" charset="0"/>
-                <a:ea typeface="Malgun Gothic" pitchFamily="34" charset="-122"/>
-                <a:cs typeface="Malgun Gothic" pitchFamily="34" charset="-120"/>
-              </a:rPr>
-              <a:t>feature/restore-md</a:t>
-            </a:r>
-            <a:endParaRPr lang="en-US" sz="1100" dirty="0"/>
-          </a:p>
-        </p:txBody>
-      </p:sp>
-      <p:sp>
-        <p:nvSpPr>
-          <p:cNvPr id="17" name="Text 14"/>
-          <p:cNvSpPr/>
-          <p:nvPr/>
-        </p:nvSpPr>
-        <p:spPr>
-          <a:xfrm>
-            <a:off x="6265012" y="6090666"/>
-            <a:ext cx="5414620" cy="164592"/>
-          </a:xfrm>
-          <a:prstGeom prst="rect">
-            <a:avLst/>
-          </a:prstGeom>
-          <a:noFill/>
-          <a:ln/>
-        </p:spPr>
-        <p:txBody>
-          <a:bodyPr wrap="square" rtlCol="0" anchor="ctr"/>
-          <a:lstStyle/>
-          <a:p>
-            <a:pPr algn="ctr" indent="0" marL="0">
-              <a:buNone/>
-            </a:pPr>
-            <a:r>
-              <a:rPr lang="en-US" sz="900" dirty="0">
-                <a:solidFill>
-                  <a:srgbClr val="475569"/>
-                </a:solidFill>
-                <a:latin typeface="Malgun Gothic" pitchFamily="34" charset="0"/>
-                <a:ea typeface="Malgun Gothic" pitchFamily="34" charset="-122"/>
-                <a:cs typeface="Malgun Gothic" pitchFamily="34" charset="-120"/>
-              </a:rPr>
-              <a:t>원본 콘텐츠 복원|신형 숏코드 반영</a:t>
-            </a:r>
-            <a:endParaRPr lang="en-US" sz="900" dirty="0"/>
           </a:p>
         </p:txBody>
       </p:sp>
@@ -27692,7 +27715,7 @@
                 <a:ea typeface="Malgun Gothic" pitchFamily="34" charset="-122"/>
                 <a:cs typeface="Malgun Gothic" pitchFamily="34" charset="-120"/>
               </a:rPr>
-              <a:t>20</a:t>
+              <a:t>25</a:t>
             </a:r>
             <a:endParaRPr lang="en-US" sz="1600" dirty="0"/>
           </a:p>
@@ -27731,7 +27754,7 @@
                 <a:ea typeface="Malgun Gothic" pitchFamily="34" charset="-122"/>
                 <a:cs typeface="Malgun Gothic" pitchFamily="34" charset="-120"/>
               </a:rPr>
-              <a:t>editor-box</a:t>
+              <a:t>flow</a:t>
             </a:r>
             <a:endParaRPr lang="en-US" sz="2200" dirty="0"/>
           </a:p>
@@ -27746,11 +27769,11 @@
         <p:spPr>
           <a:xfrm>
             <a:off x="457200" y="1143000"/>
-            <a:ext cx="11277295" cy="4188714"/>
+            <a:ext cx="11277295" cy="5700014"/>
           </a:xfrm>
           <a:prstGeom prst="roundRect">
             <a:avLst>
-              <a:gd name="adj" fmla="val 1746"/>
+              <a:gd name="adj" fmla="val 1283"/>
             </a:avLst>
           </a:prstGeom>
           <a:solidFill>
@@ -28011,7 +28034,7 @@
                           <a:ea typeface="Malgun Gothic" pitchFamily="34" charset="-122"/>
                           <a:cs typeface="Malgun Gothic" pitchFamily="34" charset="-120"/>
                         </a:rPr>
-                        <a:t>editor-box</a:t>
+                        <a:t>flow</a:t>
                       </a:r>
                       <a:endParaRPr lang="en-US" sz="1000" dirty="0">
                         <a:latin typeface="Malgun Gothic" charset="0"/>
@@ -28143,7 +28166,7 @@
                           <a:ea typeface="Malgun Gothic" pitchFamily="34" charset="-122"/>
                           <a:cs typeface="Malgun Gothic" pitchFamily="34" charset="-120"/>
                         </a:rPr>
-                        <a:t>VS Code 느낌의 코드 편집기 시뮬레이션입니다.</a:t>
+                        <a:t>단계별 수행 과정 및 가로 흐름 다이어그램을 카드와 화살표 그리드로 렌더링해 줍니다.</a:t>
                       </a:r>
                       <a:endParaRPr lang="en-US" sz="1000" dirty="0">
                         <a:latin typeface="Malgun Gothic" charset="0"/>
@@ -28244,7 +28267,7 @@
         <p:spPr>
           <a:xfrm>
             <a:off x="685800" y="2669794"/>
-            <a:ext cx="10820095" cy="2341880"/>
+            <a:ext cx="10820095" cy="3853180"/>
           </a:xfrm>
           <a:prstGeom prst="rect">
             <a:avLst/>
@@ -28269,7 +28292,7 @@
         <p:spPr>
           <a:xfrm>
             <a:off x="795528" y="2742946"/>
-            <a:ext cx="10600639" cy="2250440"/>
+            <a:ext cx="10600639" cy="3761740"/>
           </a:xfrm>
           <a:prstGeom prst="rect">
             <a:avLst/>
@@ -28293,7 +28316,7 @@
                 <a:ea typeface="Consolas" pitchFamily="34" charset="-122"/>
                 <a:cs typeface="Consolas" pitchFamily="34" charset="-120"/>
               </a:rPr>
-              <a:t>\::: editor-box</a:t>
+              <a:t>\::: flow</a:t>
             </a:r>
             <a:endParaRPr lang="en-US" sz="1000" dirty="0"/>
           </a:p>
@@ -28310,7 +28333,7 @@
                 <a:ea typeface="Consolas" pitchFamily="34" charset="-122"/>
                 <a:cs typeface="Consolas" pitchFamily="34" charset="-120"/>
               </a:rPr>
-              <a:t>- title: "build-guide.mjs"</a:t>
+              <a:t>- icon: "🧑"</a:t>
             </a:r>
             <a:endParaRPr lang="en-US" sz="1000" dirty="0"/>
           </a:p>
@@ -28327,7 +28350,7 @@
                 <a:ea typeface="Consolas" pitchFamily="34" charset="-122"/>
                 <a:cs typeface="Consolas" pitchFamily="34" charset="-120"/>
               </a:rPr>
-              <a:t>  tag: "javascript"</a:t>
+              <a:t>  title: "사람"</a:t>
             </a:r>
             <a:endParaRPr lang="en-US" sz="1000" dirty="0"/>
           </a:p>
@@ -28344,7 +28367,7 @@
                 <a:ea typeface="Consolas" pitchFamily="34" charset="-122"/>
                 <a:cs typeface="Consolas" pitchFamily="34" charset="-120"/>
               </a:rPr>
-              <a:t>  desc: |</a:t>
+              <a:t>  desc: "원하는 것 설명"</a:t>
             </a:r>
             <a:endParaRPr lang="en-US" sz="1000" dirty="0"/>
           </a:p>
@@ -28361,7 +28384,7 @@
                 <a:ea typeface="Consolas" pitchFamily="34" charset="-122"/>
                 <a:cs typeface="Consolas" pitchFamily="34" charset="-120"/>
               </a:rPr>
-              <a:t>    function renderShortcode(type, body, args) {</a:t>
+              <a:t>  tag: "active"</a:t>
             </a:r>
             <a:endParaRPr lang="en-US" sz="1000" dirty="0"/>
           </a:p>
@@ -28378,7 +28401,7 @@
                 <a:ea typeface="Consolas" pitchFamily="34" charset="-122"/>
                 <a:cs typeface="Consolas" pitchFamily="34" charset="-120"/>
               </a:rPr>
-              <a:t>      const items = parseShortcodeItems(body);</a:t>
+              <a:t>- icon: "→"</a:t>
             </a:r>
             <a:endParaRPr lang="en-US" sz="1000" dirty="0"/>
           </a:p>
@@ -28395,7 +28418,7 @@
                 <a:ea typeface="Consolas" pitchFamily="34" charset="-122"/>
                 <a:cs typeface="Consolas" pitchFamily="34" charset="-120"/>
               </a:rPr>
-              <a:t>      if (!items.length) return "";</a:t>
+              <a:t>  title: "→"</a:t>
             </a:r>
             <a:endParaRPr lang="en-US" sz="1000" dirty="0"/>
           </a:p>
@@ -28412,7 +28435,7 @@
                 <a:ea typeface="Consolas" pitchFamily="34" charset="-122"/>
                 <a:cs typeface="Consolas" pitchFamily="34" charset="-120"/>
               </a:rPr>
-              <a:t>      return renderComponent(type, items, args);</a:t>
+              <a:t>- icon: "🤖"</a:t>
             </a:r>
             <a:endParaRPr lang="en-US" sz="1000" dirty="0"/>
           </a:p>
@@ -28429,7 +28452,7 @@
                 <a:ea typeface="Consolas" pitchFamily="34" charset="-122"/>
                 <a:cs typeface="Consolas" pitchFamily="34" charset="-120"/>
               </a:rPr>
-              <a:t>    }</a:t>
+              <a:t>  title: "AI"</a:t>
             </a:r>
             <a:endParaRPr lang="en-US" sz="1000" dirty="0"/>
           </a:p>
@@ -28446,162 +28469,44 @@
                 <a:ea typeface="Consolas" pitchFamily="34" charset="-122"/>
                 <a:cs typeface="Consolas" pitchFamily="34" charset="-120"/>
               </a:rPr>
-              <a:t>\:::</a:t>
+              <a:t>  desc: "코드 생성"</a:t>
             </a:r>
             <a:endParaRPr lang="en-US" sz="1000" dirty="0"/>
           </a:p>
-        </p:txBody>
-      </p:sp>
-      <p:sp>
-        <p:nvSpPr>
-          <p:cNvPr id="11" name="Shape 8"/>
-          <p:cNvSpPr/>
-          <p:nvPr/>
-        </p:nvSpPr>
-        <p:spPr>
-          <a:xfrm>
-            <a:off x="457200" y="5468874"/>
-            <a:ext cx="11277295" cy="1609852"/>
-          </a:xfrm>
-          <a:prstGeom prst="roundRect">
-            <a:avLst>
-              <a:gd name="adj" fmla="val 4544"/>
-            </a:avLst>
-          </a:prstGeom>
-          <a:solidFill>
-            <a:srgbClr val="0F172A"/>
-          </a:solidFill>
-          <a:ln w="9525">
-            <a:solidFill>
-              <a:srgbClr val="C8E6DF"/>
-            </a:solidFill>
-            <a:prstDash val="solid"/>
-          </a:ln>
-        </p:spPr>
-      </p:sp>
-      <p:sp>
-        <p:nvSpPr>
-          <p:cNvPr id="12" name="Shape 9"/>
-          <p:cNvSpPr/>
-          <p:nvPr/>
-        </p:nvSpPr>
-        <p:spPr>
-          <a:xfrm>
-            <a:off x="457200" y="5468874"/>
-            <a:ext cx="11277295" cy="320040"/>
-          </a:xfrm>
-          <a:prstGeom prst="rect">
-            <a:avLst/>
-          </a:prstGeom>
-          <a:solidFill>
-            <a:srgbClr val="1E293B"/>
-          </a:solidFill>
-          <a:ln w="12700">
-            <a:solidFill>
-              <a:srgbClr val="1E293B"/>
-            </a:solidFill>
-            <a:prstDash val="solid"/>
-          </a:ln>
-        </p:spPr>
-      </p:sp>
-      <p:sp>
-        <p:nvSpPr>
-          <p:cNvPr id="13" name="Text 10"/>
-          <p:cNvSpPr/>
-          <p:nvPr/>
-        </p:nvSpPr>
-        <p:spPr>
-          <a:xfrm>
-            <a:off x="566928" y="5468874"/>
-            <a:ext cx="7894107" cy="320040"/>
-          </a:xfrm>
-          <a:prstGeom prst="rect">
-            <a:avLst/>
-          </a:prstGeom>
-          <a:noFill/>
-          <a:ln/>
-        </p:spPr>
-        <p:txBody>
-          <a:bodyPr wrap="square" rtlCol="0" anchor="ctr"/>
-          <a:lstStyle/>
-          <a:p>
-            <a:pPr indent="0" marL="0">
-              <a:buNone/>
-            </a:pPr>
-            <a:r>
-              <a:rPr lang="en-US" sz="900" b="1" dirty="0">
-                <a:solidFill>
-                  <a:srgbClr val="8892B0"/>
+          <a:p>
+            <a:pPr indent="0" marL="0">
+              <a:buNone/>
+            </a:pPr>
+            <a:r>
+              <a:rPr lang="en-US" sz="1000" dirty="0">
+                <a:solidFill>
+                  <a:srgbClr val="A8B2D8"/>
                 </a:solidFill>
                 <a:latin typeface="Consolas" pitchFamily="34" charset="0"/>
                 <a:ea typeface="Consolas" pitchFamily="34" charset="-122"/>
                 <a:cs typeface="Consolas" pitchFamily="34" charset="-120"/>
               </a:rPr>
-              <a:t>build-guide.mjs</a:t>
-            </a:r>
-            <a:endParaRPr lang="en-US" sz="900" dirty="0"/>
-          </a:p>
-        </p:txBody>
-      </p:sp>
-      <p:sp>
-        <p:nvSpPr>
-          <p:cNvPr id="14" name="Text 11"/>
-          <p:cNvSpPr/>
-          <p:nvPr/>
-        </p:nvSpPr>
-        <p:spPr>
-          <a:xfrm>
-            <a:off x="10637215" y="5468874"/>
-            <a:ext cx="914400" cy="320040"/>
-          </a:xfrm>
-          <a:prstGeom prst="rect">
-            <a:avLst/>
-          </a:prstGeom>
-          <a:noFill/>
-          <a:ln/>
-        </p:spPr>
-        <p:txBody>
-          <a:bodyPr wrap="square" rtlCol="0" anchor="ctr"/>
-          <a:lstStyle/>
-          <a:p>
-            <a:pPr algn="r" indent="0" marL="0">
-              <a:buNone/>
-            </a:pPr>
-            <a:r>
-              <a:rPr lang="en-US" sz="900" dirty="0">
-                <a:solidFill>
-                  <a:srgbClr val="10A37F"/>
+              <a:t>- icon: "→"</a:t>
+            </a:r>
+            <a:endParaRPr lang="en-US" sz="1000" dirty="0"/>
+          </a:p>
+          <a:p>
+            <a:pPr indent="0" marL="0">
+              <a:buNone/>
+            </a:pPr>
+            <a:r>
+              <a:rPr lang="en-US" sz="1000" dirty="0">
+                <a:solidFill>
+                  <a:srgbClr val="A8B2D8"/>
                 </a:solidFill>
                 <a:latin typeface="Consolas" pitchFamily="34" charset="0"/>
                 <a:ea typeface="Consolas" pitchFamily="34" charset="-122"/>
                 <a:cs typeface="Consolas" pitchFamily="34" charset="-120"/>
               </a:rPr>
-              <a:t>bash</a:t>
-            </a:r>
-            <a:endParaRPr lang="en-US" sz="900" dirty="0"/>
-          </a:p>
-        </p:txBody>
-      </p:sp>
-      <p:sp>
-        <p:nvSpPr>
-          <p:cNvPr id="15" name="Text 12"/>
-          <p:cNvSpPr/>
-          <p:nvPr/>
-        </p:nvSpPr>
-        <p:spPr>
-          <a:xfrm>
-            <a:off x="566928" y="5816346"/>
-            <a:ext cx="11057839" cy="1216660"/>
-          </a:xfrm>
-          <a:prstGeom prst="rect">
-            <a:avLst/>
-          </a:prstGeom>
-          <a:noFill/>
-          <a:ln/>
-        </p:spPr>
-        <p:txBody>
-          <a:bodyPr wrap="square" rtlCol="0" anchor="t"/>
-          <a:lstStyle/>
+              <a:t>  title: "→"</a:t>
+            </a:r>
+            <a:endParaRPr lang="en-US" sz="1000" dirty="0"/>
+          </a:p>
           <a:p>
             <a:pPr indent="0" marL="0">
               <a:buNone/>
@@ -28615,7 +28520,7 @@
                 <a:ea typeface="Consolas" pitchFamily="34" charset="-122"/>
                 <a:cs typeface="Consolas" pitchFamily="34" charset="-120"/>
               </a:rPr>
-              <a:t>function renderShortcode(type, body, args) {</a:t>
+              <a:t>- icon: "✅"</a:t>
             </a:r>
             <a:endParaRPr lang="en-US" sz="1000" dirty="0"/>
           </a:p>
@@ -28632,7 +28537,7 @@
                 <a:ea typeface="Consolas" pitchFamily="34" charset="-122"/>
                 <a:cs typeface="Consolas" pitchFamily="34" charset="-120"/>
               </a:rPr>
-              <a:t>  const items = parseShortcodeItems(body);</a:t>
+              <a:t>  title: "완성"</a:t>
             </a:r>
             <a:endParaRPr lang="en-US" sz="1000" dirty="0"/>
           </a:p>
@@ -28649,7 +28554,7 @@
                 <a:ea typeface="Consolas" pitchFamily="34" charset="-122"/>
                 <a:cs typeface="Consolas" pitchFamily="34" charset="-120"/>
               </a:rPr>
-              <a:t>  if (!items.length) return "";</a:t>
+              <a:t>  desc: "결과물"</a:t>
             </a:r>
             <a:endParaRPr lang="en-US" sz="1000" dirty="0"/>
           </a:p>
@@ -28666,7 +28571,7 @@
                 <a:ea typeface="Consolas" pitchFamily="34" charset="-122"/>
                 <a:cs typeface="Consolas" pitchFamily="34" charset="-120"/>
               </a:rPr>
-              <a:t>  return renderComponent(type, items, args);</a:t>
+              <a:t>  tag: "active"</a:t>
             </a:r>
             <a:endParaRPr lang="en-US" sz="1000" dirty="0"/>
           </a:p>
@@ -28683,7 +28588,7 @@
                 <a:ea typeface="Consolas" pitchFamily="34" charset="-122"/>
                 <a:cs typeface="Consolas" pitchFamily="34" charset="-120"/>
               </a:rPr>
-              <a:t>}</a:t>
+              <a:t>\:::</a:t>
             </a:r>
             <a:endParaRPr lang="en-US" sz="1000" dirty="0"/>
           </a:p>
@@ -28806,7 +28711,7 @@
                 <a:ea typeface="Malgun Gothic" pitchFamily="34" charset="-122"/>
                 <a:cs typeface="Malgun Gothic" pitchFamily="34" charset="-120"/>
               </a:rPr>
-              <a:t>21</a:t>
+              <a:t>26</a:t>
             </a:r>
             <a:endParaRPr lang="en-US" sz="1600" dirty="0"/>
           </a:p>
@@ -28845,7 +28750,7 @@
                 <a:ea typeface="Malgun Gothic" pitchFamily="34" charset="-122"/>
                 <a:cs typeface="Malgun Gothic" pitchFamily="34" charset="-120"/>
               </a:rPr>
-              <a:t>network-box</a:t>
+              <a:t>level-grid</a:t>
             </a:r>
             <a:endParaRPr lang="en-US" sz="2200" dirty="0"/>
           </a:p>
@@ -28860,11 +28765,11 @@
         <p:spPr>
           <a:xfrm>
             <a:off x="457200" y="1143000"/>
-            <a:ext cx="11277295" cy="4836414"/>
+            <a:ext cx="11277295" cy="4404614"/>
           </a:xfrm>
           <a:prstGeom prst="roundRect">
             <a:avLst>
-              <a:gd name="adj" fmla="val 1513"/>
+              <a:gd name="adj" fmla="val 1661"/>
             </a:avLst>
           </a:prstGeom>
           <a:solidFill>
@@ -29125,7 +29030,7 @@
                           <a:ea typeface="Malgun Gothic" pitchFamily="34" charset="-122"/>
                           <a:cs typeface="Malgun Gothic" pitchFamily="34" charset="-120"/>
                         </a:rPr>
-                        <a:t>network-box</a:t>
+                        <a:t>level-grid</a:t>
                       </a:r>
                       <a:endParaRPr lang="en-US" sz="1000" dirty="0">
                         <a:latin typeface="Malgun Gothic" charset="0"/>
@@ -29257,7 +29162,7 @@
                           <a:ea typeface="Malgun Gothic" pitchFamily="34" charset="-122"/>
                           <a:cs typeface="Malgun Gothic" pitchFamily="34" charset="-120"/>
                         </a:rPr>
-                        <a:t>중앙 노드와 주변 노드가 떠 있는 지식 그래프 시각화입니다.</a:t>
+                        <a:t>난이도, 단계, 도메인 스펙트럼 로드맵 등을 가로형 카드 그리드로 렌더링해 줍니다.</a:t>
                       </a:r>
                       <a:endParaRPr lang="en-US" sz="1000" dirty="0">
                         <a:latin typeface="Malgun Gothic" charset="0"/>
@@ -29358,7 +29263,7 @@
         <p:spPr>
           <a:xfrm>
             <a:off x="685800" y="2669794"/>
-            <a:ext cx="10820095" cy="2989580"/>
+            <a:ext cx="10820095" cy="2557780"/>
           </a:xfrm>
           <a:prstGeom prst="rect">
             <a:avLst/>
@@ -29383,7 +29288,7 @@
         <p:spPr>
           <a:xfrm>
             <a:off x="795528" y="2742946"/>
-            <a:ext cx="10600639" cy="2898140"/>
+            <a:ext cx="10600639" cy="2466340"/>
           </a:xfrm>
           <a:prstGeom prst="rect">
             <a:avLst/>
@@ -29407,7 +29312,7 @@
                 <a:ea typeface="Consolas" pitchFamily="34" charset="-122"/>
                 <a:cs typeface="Consolas" pitchFamily="34" charset="-120"/>
               </a:rPr>
-              <a:t>\::: network-box</a:t>
+              <a:t>\::: level-grid</a:t>
             </a:r>
             <a:endParaRPr lang="en-US" sz="1000" dirty="0"/>
           </a:p>
@@ -29424,7 +29329,7 @@
                 <a:ea typeface="Consolas" pitchFamily="34" charset="-122"/>
                 <a:cs typeface="Consolas" pitchFamily="34" charset="-120"/>
               </a:rPr>
-              <a:t>- title: "Creative Spark"</a:t>
+              <a:t>- title: "LEVEL 1"</a:t>
             </a:r>
             <a:endParaRPr lang="en-US" sz="1000" dirty="0"/>
           </a:p>
@@ -29441,7 +29346,7 @@
                 <a:ea typeface="Consolas" pitchFamily="34" charset="-122"/>
                 <a:cs typeface="Consolas" pitchFamily="34" charset="-120"/>
               </a:rPr>
-              <a:t>  color: "#EC4899"</a:t>
+              <a:t>  desc: "코드 자동완성"</a:t>
             </a:r>
             <a:endParaRPr lang="en-US" sz="1000" dirty="0"/>
           </a:p>
@@ -29458,7 +29363,7 @@
                 <a:ea typeface="Consolas" pitchFamily="34" charset="-122"/>
                 <a:cs typeface="Consolas" pitchFamily="34" charset="-120"/>
               </a:rPr>
-              <a:t>- title: "HTML"</a:t>
+              <a:t>  meta: "GitHub Copilot 인라인"</a:t>
             </a:r>
             <a:endParaRPr lang="en-US" sz="1000" dirty="0"/>
           </a:p>
@@ -29475,7 +29380,7 @@
                 <a:ea typeface="Consolas" pitchFamily="34" charset="-122"/>
                 <a:cs typeface="Consolas" pitchFamily="34" charset="-120"/>
               </a:rPr>
-              <a:t>  meta: "build-guide"</a:t>
+              <a:t>  note: "다음 줄 예측, Tab으로 수락"</a:t>
             </a:r>
             <a:endParaRPr lang="en-US" sz="1000" dirty="0"/>
           </a:p>
@@ -29492,7 +29397,7 @@
                 <a:ea typeface="Consolas" pitchFamily="34" charset="-122"/>
                 <a:cs typeface="Consolas" pitchFamily="34" charset="-120"/>
               </a:rPr>
-              <a:t>  color: "#10B981"</a:t>
+              <a:t>- title: "LEVEL 2"</a:t>
             </a:r>
             <a:endParaRPr lang="en-US" sz="1000" dirty="0"/>
           </a:p>
@@ -29509,7 +29414,7 @@
                 <a:ea typeface="Consolas" pitchFamily="34" charset="-122"/>
                 <a:cs typeface="Consolas" pitchFamily="34" charset="-120"/>
               </a:rPr>
-              <a:t>- title: "PPTX"</a:t>
+              <a:t>  desc: "대화형 생성"</a:t>
             </a:r>
             <a:endParaRPr lang="en-US" sz="1000" dirty="0"/>
           </a:p>
@@ -29526,7 +29431,7 @@
                 <a:ea typeface="Consolas" pitchFamily="34" charset="-122"/>
                 <a:cs typeface="Consolas" pitchFamily="34" charset="-120"/>
               </a:rPr>
-              <a:t>  meta: "md-to-pptx"</a:t>
+              <a:t>  meta: "Claude.ai, ChatGPT"</a:t>
             </a:r>
             <a:endParaRPr lang="en-US" sz="1000" dirty="0"/>
           </a:p>
@@ -29543,7 +29448,7 @@
                 <a:ea typeface="Consolas" pitchFamily="34" charset="-122"/>
                 <a:cs typeface="Consolas" pitchFamily="34" charset="-120"/>
               </a:rPr>
-              <a:t>  color: "#3B82F6"</a:t>
+              <a:t>  note: "요청 → 붙여넣기 → 실행"</a:t>
             </a:r>
             <a:endParaRPr lang="en-US" sz="1000" dirty="0"/>
           </a:p>
@@ -29560,7 +29465,7 @@
                 <a:ea typeface="Consolas" pitchFamily="34" charset="-122"/>
                 <a:cs typeface="Consolas" pitchFamily="34" charset="-120"/>
               </a:rPr>
-              <a:t>- title: "Markdown"</a:t>
+              <a:t>  tag: "highlight"</a:t>
             </a:r>
             <a:endParaRPr lang="en-US" sz="1000" dirty="0"/>
           </a:p>
@@ -29577,619 +29482,9 @@
                 <a:ea typeface="Consolas" pitchFamily="34" charset="-122"/>
                 <a:cs typeface="Consolas" pitchFamily="34" charset="-120"/>
               </a:rPr>
-              <a:t>  meta: "shortcode"</a:t>
+              <a:t>\:::</a:t>
             </a:r>
             <a:endParaRPr lang="en-US" sz="1000" dirty="0"/>
-          </a:p>
-          <a:p>
-            <a:pPr indent="0" marL="0">
-              <a:buNone/>
-            </a:pPr>
-            <a:r>
-              <a:rPr lang="en-US" sz="1000" dirty="0">
-                <a:solidFill>
-                  <a:srgbClr val="A8B2D8"/>
-                </a:solidFill>
-                <a:latin typeface="Consolas" pitchFamily="34" charset="0"/>
-                <a:ea typeface="Consolas" pitchFamily="34" charset="-122"/>
-                <a:cs typeface="Consolas" pitchFamily="34" charset="-120"/>
-              </a:rPr>
-              <a:t>  color: "#F59E0B"</a:t>
-            </a:r>
-            <a:endParaRPr lang="en-US" sz="1000" dirty="0"/>
-          </a:p>
-          <a:p>
-            <a:pPr indent="0" marL="0">
-              <a:buNone/>
-            </a:pPr>
-            <a:r>
-              <a:rPr lang="en-US" sz="1000" dirty="0">
-                <a:solidFill>
-                  <a:srgbClr val="A8B2D8"/>
-                </a:solidFill>
-                <a:latin typeface="Consolas" pitchFamily="34" charset="0"/>
-                <a:ea typeface="Consolas" pitchFamily="34" charset="-122"/>
-                <a:cs typeface="Consolas" pitchFamily="34" charset="-120"/>
-              </a:rPr>
-              <a:t>\:::</a:t>
-            </a:r>
-            <a:endParaRPr lang="en-US" sz="1000" dirty="0"/>
-          </a:p>
-        </p:txBody>
-      </p:sp>
-      <p:sp>
-        <p:nvSpPr>
-          <p:cNvPr id="11" name="Shape 8"/>
-          <p:cNvSpPr/>
-          <p:nvPr/>
-        </p:nvSpPr>
-        <p:spPr>
-          <a:xfrm>
-            <a:off x="457200" y="6116574"/>
-            <a:ext cx="2716454" cy="1280160"/>
-          </a:xfrm>
-          <a:prstGeom prst="roundRect">
-            <a:avLst>
-              <a:gd name="adj" fmla="val 5714"/>
-            </a:avLst>
-          </a:prstGeom>
-          <a:solidFill>
-            <a:srgbClr val="EC4899">
-              <a:alpha val="5000"/>
-            </a:srgbClr>
-          </a:solidFill>
-          <a:ln w="9525">
-            <a:solidFill>
-              <a:srgbClr val="EC4899"/>
-            </a:solidFill>
-            <a:prstDash val="solid"/>
-          </a:ln>
-        </p:spPr>
-      </p:sp>
-      <p:sp>
-        <p:nvSpPr>
-          <p:cNvPr id="12" name="Shape 9"/>
-          <p:cNvSpPr/>
-          <p:nvPr/>
-        </p:nvSpPr>
-        <p:spPr>
-          <a:xfrm>
-            <a:off x="457200" y="6116574"/>
-            <a:ext cx="2716454" cy="36576"/>
-          </a:xfrm>
-          <a:prstGeom prst="rect">
-            <a:avLst/>
-          </a:prstGeom>
-          <a:solidFill>
-            <a:srgbClr val="EC4899"/>
-          </a:solidFill>
-          <a:ln w="12700">
-            <a:solidFill>
-              <a:srgbClr val="EC4899"/>
-            </a:solidFill>
-            <a:prstDash val="solid"/>
-          </a:ln>
-        </p:spPr>
-      </p:sp>
-      <p:sp>
-        <p:nvSpPr>
-          <p:cNvPr id="13" name="Text 10"/>
-          <p:cNvSpPr/>
-          <p:nvPr/>
-        </p:nvSpPr>
-        <p:spPr>
-          <a:xfrm>
-            <a:off x="566928" y="6208014"/>
-            <a:ext cx="2496998" cy="274320"/>
-          </a:xfrm>
-          <a:prstGeom prst="rect">
-            <a:avLst/>
-          </a:prstGeom>
-          <a:noFill/>
-          <a:ln/>
-        </p:spPr>
-        <p:txBody>
-          <a:bodyPr wrap="square" rtlCol="0" anchor="ctr"/>
-          <a:lstStyle/>
-          <a:p>
-            <a:pPr indent="0" marL="0">
-              <a:buNone/>
-            </a:pPr>
-            <a:r>
-              <a:rPr lang="en-US" sz="1400" b="1" dirty="0">
-                <a:solidFill>
-                  <a:srgbClr val="EC4899"/>
-                </a:solidFill>
-                <a:latin typeface="Malgun Gothic" pitchFamily="34" charset="0"/>
-                <a:ea typeface="Malgun Gothic" pitchFamily="34" charset="-122"/>
-                <a:cs typeface="Malgun Gothic" pitchFamily="34" charset="-120"/>
-              </a:rPr>
-              <a:t>Creative Spark</a:t>
-            </a:r>
-            <a:endParaRPr lang="en-US" sz="1400" dirty="0"/>
-          </a:p>
-        </p:txBody>
-      </p:sp>
-      <p:sp>
-        <p:nvSpPr>
-          <p:cNvPr id="14" name="Shape 11"/>
-          <p:cNvSpPr/>
-          <p:nvPr/>
-        </p:nvSpPr>
-        <p:spPr>
-          <a:xfrm>
-            <a:off x="3310814" y="6116574"/>
-            <a:ext cx="2716454" cy="1280160"/>
-          </a:xfrm>
-          <a:prstGeom prst="roundRect">
-            <a:avLst>
-              <a:gd name="adj" fmla="val 5714"/>
-            </a:avLst>
-          </a:prstGeom>
-          <a:solidFill>
-            <a:srgbClr val="10B981">
-              <a:alpha val="5000"/>
-            </a:srgbClr>
-          </a:solidFill>
-          <a:ln w="9525">
-            <a:solidFill>
-              <a:srgbClr val="10B981"/>
-            </a:solidFill>
-            <a:prstDash val="solid"/>
-          </a:ln>
-        </p:spPr>
-      </p:sp>
-      <p:sp>
-        <p:nvSpPr>
-          <p:cNvPr id="15" name="Shape 12"/>
-          <p:cNvSpPr/>
-          <p:nvPr/>
-        </p:nvSpPr>
-        <p:spPr>
-          <a:xfrm>
-            <a:off x="3310814" y="6116574"/>
-            <a:ext cx="2716454" cy="36576"/>
-          </a:xfrm>
-          <a:prstGeom prst="rect">
-            <a:avLst/>
-          </a:prstGeom>
-          <a:solidFill>
-            <a:srgbClr val="10B981"/>
-          </a:solidFill>
-          <a:ln w="12700">
-            <a:solidFill>
-              <a:srgbClr val="10B981"/>
-            </a:solidFill>
-            <a:prstDash val="solid"/>
-          </a:ln>
-        </p:spPr>
-      </p:sp>
-      <p:sp>
-        <p:nvSpPr>
-          <p:cNvPr id="16" name="Text 13"/>
-          <p:cNvSpPr/>
-          <p:nvPr/>
-        </p:nvSpPr>
-        <p:spPr>
-          <a:xfrm>
-            <a:off x="3420542" y="6208014"/>
-            <a:ext cx="2496998" cy="274320"/>
-          </a:xfrm>
-          <a:prstGeom prst="rect">
-            <a:avLst/>
-          </a:prstGeom>
-          <a:noFill/>
-          <a:ln/>
-        </p:spPr>
-        <p:txBody>
-          <a:bodyPr wrap="square" rtlCol="0" anchor="ctr"/>
-          <a:lstStyle/>
-          <a:p>
-            <a:pPr indent="0" marL="0">
-              <a:buNone/>
-            </a:pPr>
-            <a:r>
-              <a:rPr lang="en-US" sz="1400" b="1" dirty="0">
-                <a:solidFill>
-                  <a:srgbClr val="10B981"/>
-                </a:solidFill>
-                <a:latin typeface="Malgun Gothic" pitchFamily="34" charset="0"/>
-                <a:ea typeface="Malgun Gothic" pitchFamily="34" charset="-122"/>
-                <a:cs typeface="Malgun Gothic" pitchFamily="34" charset="-120"/>
-              </a:rPr>
-              <a:t>HTML</a:t>
-            </a:r>
-            <a:endParaRPr lang="en-US" sz="1400" dirty="0"/>
-          </a:p>
-        </p:txBody>
-      </p:sp>
-      <p:sp>
-        <p:nvSpPr>
-          <p:cNvPr id="17" name="Shape 14"/>
-          <p:cNvSpPr/>
-          <p:nvPr/>
-        </p:nvSpPr>
-        <p:spPr>
-          <a:xfrm>
-            <a:off x="3420542" y="7076694"/>
-            <a:ext cx="2496998" cy="256032"/>
-          </a:xfrm>
-          <a:prstGeom prst="roundRect">
-            <a:avLst>
-              <a:gd name="adj" fmla="val 21429"/>
-            </a:avLst>
-          </a:prstGeom>
-          <a:solidFill>
-            <a:srgbClr val="10B981">
-              <a:alpha val="15000"/>
-            </a:srgbClr>
-          </a:solidFill>
-          <a:ln w="12700">
-            <a:solidFill>
-              <a:srgbClr val="10B981"/>
-            </a:solidFill>
-            <a:prstDash val="solid"/>
-          </a:ln>
-        </p:spPr>
-      </p:sp>
-      <p:sp>
-        <p:nvSpPr>
-          <p:cNvPr id="18" name="Text 15"/>
-          <p:cNvSpPr/>
-          <p:nvPr/>
-        </p:nvSpPr>
-        <p:spPr>
-          <a:xfrm>
-            <a:off x="3420542" y="7076694"/>
-            <a:ext cx="2496998" cy="256032"/>
-          </a:xfrm>
-          <a:prstGeom prst="rect">
-            <a:avLst/>
-          </a:prstGeom>
-          <a:noFill/>
-          <a:ln/>
-        </p:spPr>
-        <p:txBody>
-          <a:bodyPr wrap="square" rtlCol="0" anchor="ctr"/>
-          <a:lstStyle/>
-          <a:p>
-            <a:pPr algn="ctr" indent="0" marL="0">
-              <a:buNone/>
-            </a:pPr>
-            <a:r>
-              <a:rPr lang="en-US" sz="800" b="1" dirty="0">
-                <a:solidFill>
-                  <a:srgbClr val="10B981"/>
-                </a:solidFill>
-                <a:latin typeface="Malgun Gothic" pitchFamily="34" charset="0"/>
-                <a:ea typeface="Malgun Gothic" pitchFamily="34" charset="-122"/>
-                <a:cs typeface="Malgun Gothic" pitchFamily="34" charset="-120"/>
-              </a:rPr>
-              <a:t>build-guide</a:t>
-            </a:r>
-            <a:endParaRPr lang="en-US" sz="800" dirty="0"/>
-          </a:p>
-        </p:txBody>
-      </p:sp>
-      <p:sp>
-        <p:nvSpPr>
-          <p:cNvPr id="19" name="Shape 16"/>
-          <p:cNvSpPr/>
-          <p:nvPr/>
-        </p:nvSpPr>
-        <p:spPr>
-          <a:xfrm>
-            <a:off x="6164428" y="6116574"/>
-            <a:ext cx="2716454" cy="1280160"/>
-          </a:xfrm>
-          <a:prstGeom prst="roundRect">
-            <a:avLst>
-              <a:gd name="adj" fmla="val 5714"/>
-            </a:avLst>
-          </a:prstGeom>
-          <a:solidFill>
-            <a:srgbClr val="3B82F6">
-              <a:alpha val="5000"/>
-            </a:srgbClr>
-          </a:solidFill>
-          <a:ln w="9525">
-            <a:solidFill>
-              <a:srgbClr val="3B82F6"/>
-            </a:solidFill>
-            <a:prstDash val="solid"/>
-          </a:ln>
-        </p:spPr>
-      </p:sp>
-      <p:sp>
-        <p:nvSpPr>
-          <p:cNvPr id="20" name="Shape 17"/>
-          <p:cNvSpPr/>
-          <p:nvPr/>
-        </p:nvSpPr>
-        <p:spPr>
-          <a:xfrm>
-            <a:off x="6164428" y="6116574"/>
-            <a:ext cx="2716454" cy="36576"/>
-          </a:xfrm>
-          <a:prstGeom prst="rect">
-            <a:avLst/>
-          </a:prstGeom>
-          <a:solidFill>
-            <a:srgbClr val="3B82F6"/>
-          </a:solidFill>
-          <a:ln w="12700">
-            <a:solidFill>
-              <a:srgbClr val="3B82F6"/>
-            </a:solidFill>
-            <a:prstDash val="solid"/>
-          </a:ln>
-        </p:spPr>
-      </p:sp>
-      <p:sp>
-        <p:nvSpPr>
-          <p:cNvPr id="21" name="Text 18"/>
-          <p:cNvSpPr/>
-          <p:nvPr/>
-        </p:nvSpPr>
-        <p:spPr>
-          <a:xfrm>
-            <a:off x="6274156" y="6208014"/>
-            <a:ext cx="2496998" cy="274320"/>
-          </a:xfrm>
-          <a:prstGeom prst="rect">
-            <a:avLst/>
-          </a:prstGeom>
-          <a:noFill/>
-          <a:ln/>
-        </p:spPr>
-        <p:txBody>
-          <a:bodyPr wrap="square" rtlCol="0" anchor="ctr"/>
-          <a:lstStyle/>
-          <a:p>
-            <a:pPr indent="0" marL="0">
-              <a:buNone/>
-            </a:pPr>
-            <a:r>
-              <a:rPr lang="en-US" sz="1400" b="1" dirty="0">
-                <a:solidFill>
-                  <a:srgbClr val="3B82F6"/>
-                </a:solidFill>
-                <a:latin typeface="Malgun Gothic" pitchFamily="34" charset="0"/>
-                <a:ea typeface="Malgun Gothic" pitchFamily="34" charset="-122"/>
-                <a:cs typeface="Malgun Gothic" pitchFamily="34" charset="-120"/>
-              </a:rPr>
-              <a:t>PPTX</a:t>
-            </a:r>
-            <a:endParaRPr lang="en-US" sz="1400" dirty="0"/>
-          </a:p>
-        </p:txBody>
-      </p:sp>
-      <p:sp>
-        <p:nvSpPr>
-          <p:cNvPr id="22" name="Shape 19"/>
-          <p:cNvSpPr/>
-          <p:nvPr/>
-        </p:nvSpPr>
-        <p:spPr>
-          <a:xfrm>
-            <a:off x="6274156" y="7076694"/>
-            <a:ext cx="2496998" cy="256032"/>
-          </a:xfrm>
-          <a:prstGeom prst="roundRect">
-            <a:avLst>
-              <a:gd name="adj" fmla="val 21429"/>
-            </a:avLst>
-          </a:prstGeom>
-          <a:solidFill>
-            <a:srgbClr val="3B82F6">
-              <a:alpha val="15000"/>
-            </a:srgbClr>
-          </a:solidFill>
-          <a:ln w="12700">
-            <a:solidFill>
-              <a:srgbClr val="3B82F6"/>
-            </a:solidFill>
-            <a:prstDash val="solid"/>
-          </a:ln>
-        </p:spPr>
-      </p:sp>
-      <p:sp>
-        <p:nvSpPr>
-          <p:cNvPr id="23" name="Text 20"/>
-          <p:cNvSpPr/>
-          <p:nvPr/>
-        </p:nvSpPr>
-        <p:spPr>
-          <a:xfrm>
-            <a:off x="6274156" y="7076694"/>
-            <a:ext cx="2496998" cy="256032"/>
-          </a:xfrm>
-          <a:prstGeom prst="rect">
-            <a:avLst/>
-          </a:prstGeom>
-          <a:noFill/>
-          <a:ln/>
-        </p:spPr>
-        <p:txBody>
-          <a:bodyPr wrap="square" rtlCol="0" anchor="ctr"/>
-          <a:lstStyle/>
-          <a:p>
-            <a:pPr algn="ctr" indent="0" marL="0">
-              <a:buNone/>
-            </a:pPr>
-            <a:r>
-              <a:rPr lang="en-US" sz="800" b="1" dirty="0">
-                <a:solidFill>
-                  <a:srgbClr val="3B82F6"/>
-                </a:solidFill>
-                <a:latin typeface="Malgun Gothic" pitchFamily="34" charset="0"/>
-                <a:ea typeface="Malgun Gothic" pitchFamily="34" charset="-122"/>
-                <a:cs typeface="Malgun Gothic" pitchFamily="34" charset="-120"/>
-              </a:rPr>
-              <a:t>md-to-pptx</a:t>
-            </a:r>
-            <a:endParaRPr lang="en-US" sz="800" dirty="0"/>
-          </a:p>
-        </p:txBody>
-      </p:sp>
-      <p:sp>
-        <p:nvSpPr>
-          <p:cNvPr id="24" name="Shape 21"/>
-          <p:cNvSpPr/>
-          <p:nvPr/>
-        </p:nvSpPr>
-        <p:spPr>
-          <a:xfrm>
-            <a:off x="9018041" y="6116574"/>
-            <a:ext cx="2716454" cy="1280160"/>
-          </a:xfrm>
-          <a:prstGeom prst="roundRect">
-            <a:avLst>
-              <a:gd name="adj" fmla="val 5714"/>
-            </a:avLst>
-          </a:prstGeom>
-          <a:solidFill>
-            <a:srgbClr val="F59E0B">
-              <a:alpha val="5000"/>
-            </a:srgbClr>
-          </a:solidFill>
-          <a:ln w="9525">
-            <a:solidFill>
-              <a:srgbClr val="F59E0B"/>
-            </a:solidFill>
-            <a:prstDash val="solid"/>
-          </a:ln>
-        </p:spPr>
-      </p:sp>
-      <p:sp>
-        <p:nvSpPr>
-          <p:cNvPr id="25" name="Shape 22"/>
-          <p:cNvSpPr/>
-          <p:nvPr/>
-        </p:nvSpPr>
-        <p:spPr>
-          <a:xfrm>
-            <a:off x="9018041" y="6116574"/>
-            <a:ext cx="2716454" cy="36576"/>
-          </a:xfrm>
-          <a:prstGeom prst="rect">
-            <a:avLst/>
-          </a:prstGeom>
-          <a:solidFill>
-            <a:srgbClr val="F59E0B"/>
-          </a:solidFill>
-          <a:ln w="12700">
-            <a:solidFill>
-              <a:srgbClr val="F59E0B"/>
-            </a:solidFill>
-            <a:prstDash val="solid"/>
-          </a:ln>
-        </p:spPr>
-      </p:sp>
-      <p:sp>
-        <p:nvSpPr>
-          <p:cNvPr id="26" name="Text 23"/>
-          <p:cNvSpPr/>
-          <p:nvPr/>
-        </p:nvSpPr>
-        <p:spPr>
-          <a:xfrm>
-            <a:off x="9127769" y="6208014"/>
-            <a:ext cx="2496998" cy="274320"/>
-          </a:xfrm>
-          <a:prstGeom prst="rect">
-            <a:avLst/>
-          </a:prstGeom>
-          <a:noFill/>
-          <a:ln/>
-        </p:spPr>
-        <p:txBody>
-          <a:bodyPr wrap="square" rtlCol="0" anchor="ctr"/>
-          <a:lstStyle/>
-          <a:p>
-            <a:pPr indent="0" marL="0">
-              <a:buNone/>
-            </a:pPr>
-            <a:r>
-              <a:rPr lang="en-US" sz="1400" b="1" dirty="0">
-                <a:solidFill>
-                  <a:srgbClr val="F59E0B"/>
-                </a:solidFill>
-                <a:latin typeface="Malgun Gothic" pitchFamily="34" charset="0"/>
-                <a:ea typeface="Malgun Gothic" pitchFamily="34" charset="-122"/>
-                <a:cs typeface="Malgun Gothic" pitchFamily="34" charset="-120"/>
-              </a:rPr>
-              <a:t>Markdown</a:t>
-            </a:r>
-            <a:endParaRPr lang="en-US" sz="1400" dirty="0"/>
-          </a:p>
-        </p:txBody>
-      </p:sp>
-      <p:sp>
-        <p:nvSpPr>
-          <p:cNvPr id="27" name="Shape 24"/>
-          <p:cNvSpPr/>
-          <p:nvPr/>
-        </p:nvSpPr>
-        <p:spPr>
-          <a:xfrm>
-            <a:off x="9127769" y="7076694"/>
-            <a:ext cx="2496998" cy="256032"/>
-          </a:xfrm>
-          <a:prstGeom prst="roundRect">
-            <a:avLst>
-              <a:gd name="adj" fmla="val 21429"/>
-            </a:avLst>
-          </a:prstGeom>
-          <a:solidFill>
-            <a:srgbClr val="F59E0B">
-              <a:alpha val="15000"/>
-            </a:srgbClr>
-          </a:solidFill>
-          <a:ln w="12700">
-            <a:solidFill>
-              <a:srgbClr val="F59E0B"/>
-            </a:solidFill>
-            <a:prstDash val="solid"/>
-          </a:ln>
-        </p:spPr>
-      </p:sp>
-      <p:sp>
-        <p:nvSpPr>
-          <p:cNvPr id="28" name="Text 25"/>
-          <p:cNvSpPr/>
-          <p:nvPr/>
-        </p:nvSpPr>
-        <p:spPr>
-          <a:xfrm>
-            <a:off x="9127769" y="7076694"/>
-            <a:ext cx="2496998" cy="256032"/>
-          </a:xfrm>
-          <a:prstGeom prst="rect">
-            <a:avLst/>
-          </a:prstGeom>
-          <a:noFill/>
-          <a:ln/>
-        </p:spPr>
-        <p:txBody>
-          <a:bodyPr wrap="square" rtlCol="0" anchor="ctr"/>
-          <a:lstStyle/>
-          <a:p>
-            <a:pPr algn="ctr" indent="0" marL="0">
-              <a:buNone/>
-            </a:pPr>
-            <a:r>
-              <a:rPr lang="en-US" sz="800" b="1" dirty="0">
-                <a:solidFill>
-                  <a:srgbClr val="F59E0B"/>
-                </a:solidFill>
-                <a:latin typeface="Malgun Gothic" pitchFamily="34" charset="0"/>
-                <a:ea typeface="Malgun Gothic" pitchFamily="34" charset="-122"/>
-                <a:cs typeface="Malgun Gothic" pitchFamily="34" charset="-120"/>
-              </a:rPr>
-              <a:t>shortcode</a:t>
-            </a:r>
-            <a:endParaRPr lang="en-US" sz="800" dirty="0"/>
           </a:p>
         </p:txBody>
       </p:sp>
@@ -30364,11 +29659,11 @@
         <p:spPr>
           <a:xfrm>
             <a:off x="457200" y="1143000"/>
-            <a:ext cx="11277295" cy="2989834"/>
+            <a:ext cx="11277295" cy="3245866"/>
           </a:xfrm>
           <a:prstGeom prst="roundRect">
             <a:avLst>
-              <a:gd name="adj" fmla="val 2447"/>
+              <a:gd name="adj" fmla="val 2254"/>
             </a:avLst>
           </a:prstGeom>
           <a:solidFill>
@@ -31157,7 +30452,7 @@
                           <a:ea typeface="Malgun Gothic" pitchFamily="34" charset="-122"/>
                           <a:cs typeface="Malgun Gothic" pitchFamily="34" charset="-120"/>
                         </a:rPr>
-                        <a:t>여러 줄은 `desc:</a:t>
+                        <a:t>\n으로 구분하면 불릿 목록</a:t>
                       </a:r>
                       <a:endParaRPr lang="en-US" sz="1000" dirty="0">
                         <a:latin typeface="Malgun Gothic" charset="0"/>
@@ -31551,7 +30846,204 @@
                           <a:ea typeface="Malgun Gothic" pitchFamily="34" charset="-122"/>
                           <a:cs typeface="Malgun Gothic" pitchFamily="34" charset="-120"/>
                         </a:rPr>
-                        <a:t>`</a:t>
+                        <a:t>|로 여러 항목 구분</a:t>
+                      </a:r>
+                      <a:endParaRPr lang="en-US" sz="1000" dirty="0">
+                        <a:latin typeface="Malgun Gothic" charset="0"/>
+                        <a:ea typeface="Malgun Gothic" charset="0"/>
+                        <a:cs typeface="Malgun Gothic" charset="0"/>
+                      </a:endParaRPr>
+                    </a:p>
+                  </a:txBody>
+                  <a:tcPr marL="91440" marR="91440" marT="45720" marB="45720">
+                    <a:lnL w="12700" cap="flat" cmpd="sng" algn="ctr">
+                      <a:solidFill>
+                        <a:srgbClr val="C8E6DF"/>
+                      </a:solidFill>
+                      <a:prstDash val="solid"/>
+                      <a:round/>
+                      <a:headEnd type="none" w="med" len="med"/>
+                      <a:tailEnd type="none" w="med" len="med"/>
+                    </a:lnL>
+                    <a:lnR w="12700" cap="flat" cmpd="sng" algn="ctr">
+                      <a:solidFill>
+                        <a:srgbClr val="C8E6DF"/>
+                      </a:solidFill>
+                      <a:prstDash val="solid"/>
+                      <a:round/>
+                      <a:headEnd type="none" w="med" len="med"/>
+                      <a:tailEnd type="none" w="med" len="med"/>
+                    </a:lnR>
+                    <a:lnT w="12700" cap="flat" cmpd="sng" algn="ctr">
+                      <a:solidFill>
+                        <a:srgbClr val="C8E6DF"/>
+                      </a:solidFill>
+                      <a:prstDash val="solid"/>
+                      <a:round/>
+                      <a:headEnd type="none" w="med" len="med"/>
+                      <a:tailEnd type="none" w="med" len="med"/>
+                    </a:lnT>
+                    <a:lnB w="12700" cap="flat" cmpd="sng" algn="ctr">
+                      <a:solidFill>
+                        <a:srgbClr val="C8E6DF"/>
+                      </a:solidFill>
+                      <a:prstDash val="solid"/>
+                      <a:round/>
+                      <a:headEnd type="none" w="med" len="med"/>
+                      <a:tailEnd type="none" w="med" len="med"/>
+                    </a:lnB>
+                  </a:tcPr>
+                </a:tc>
+              </a:tr>
+              <a:tr h="256032">
+                <a:tc>
+                  <a:txBody>
+                    <a:bodyPr/>
+                    <a:lstStyle/>
+                    <a:p>
+                      <a:pPr indent="0" marL="0">
+                        <a:buNone/>
+                      </a:pPr>
+                      <a:r>
+                        <a:rPr lang="en-US" sz="1000" dirty="0">
+                          <a:solidFill>
+                            <a:srgbClr val="475569"/>
+                          </a:solidFill>
+                          <a:latin typeface="Malgun Gothic" pitchFamily="34" charset="0"/>
+                          <a:ea typeface="Malgun Gothic" pitchFamily="34" charset="-122"/>
+                          <a:cs typeface="Malgun Gothic" pitchFamily="34" charset="-120"/>
+                        </a:rPr>
+                        <a:t>note</a:t>
+                      </a:r>
+                      <a:endParaRPr lang="en-US" sz="1000" dirty="0">
+                        <a:latin typeface="Malgun Gothic" charset="0"/>
+                        <a:ea typeface="Malgun Gothic" charset="0"/>
+                        <a:cs typeface="Malgun Gothic" charset="0"/>
+                      </a:endParaRPr>
+                    </a:p>
+                  </a:txBody>
+                  <a:tcPr marL="91440" marR="91440" marT="45720" marB="45720">
+                    <a:lnL w="12700" cap="flat" cmpd="sng" algn="ctr">
+                      <a:solidFill>
+                        <a:srgbClr val="C8E6DF"/>
+                      </a:solidFill>
+                      <a:prstDash val="solid"/>
+                      <a:round/>
+                      <a:headEnd type="none" w="med" len="med"/>
+                      <a:tailEnd type="none" w="med" len="med"/>
+                    </a:lnL>
+                    <a:lnR w="12700" cap="flat" cmpd="sng" algn="ctr">
+                      <a:solidFill>
+                        <a:srgbClr val="C8E6DF"/>
+                      </a:solidFill>
+                      <a:prstDash val="solid"/>
+                      <a:round/>
+                      <a:headEnd type="none" w="med" len="med"/>
+                      <a:tailEnd type="none" w="med" len="med"/>
+                    </a:lnR>
+                    <a:lnT w="12700" cap="flat" cmpd="sng" algn="ctr">
+                      <a:solidFill>
+                        <a:srgbClr val="C8E6DF"/>
+                      </a:solidFill>
+                      <a:prstDash val="solid"/>
+                      <a:round/>
+                      <a:headEnd type="none" w="med" len="med"/>
+                      <a:tailEnd type="none" w="med" len="med"/>
+                    </a:lnT>
+                    <a:lnB w="12700" cap="flat" cmpd="sng" algn="ctr">
+                      <a:solidFill>
+                        <a:srgbClr val="C8E6DF"/>
+                      </a:solidFill>
+                      <a:prstDash val="solid"/>
+                      <a:round/>
+                      <a:headEnd type="none" w="med" len="med"/>
+                      <a:tailEnd type="none" w="med" len="med"/>
+                    </a:lnB>
+                  </a:tcPr>
+                </a:tc>
+                <a:tc>
+                  <a:txBody>
+                    <a:bodyPr/>
+                    <a:lstStyle/>
+                    <a:p>
+                      <a:pPr indent="0" marL="0">
+                        <a:buNone/>
+                      </a:pPr>
+                      <a:r>
+                        <a:rPr lang="en-US" sz="1000" dirty="0">
+                          <a:solidFill>
+                            <a:srgbClr val="475569"/>
+                          </a:solidFill>
+                          <a:latin typeface="Malgun Gothic" pitchFamily="34" charset="0"/>
+                          <a:ea typeface="Malgun Gothic" pitchFamily="34" charset="-122"/>
+                          <a:cs typeface="Malgun Gothic" pitchFamily="34" charset="-120"/>
+                        </a:rPr>
+                        <a:t>하단 배지·메모</a:t>
+                      </a:r>
+                      <a:endParaRPr lang="en-US" sz="1000" dirty="0">
+                        <a:latin typeface="Malgun Gothic" charset="0"/>
+                        <a:ea typeface="Malgun Gothic" charset="0"/>
+                        <a:cs typeface="Malgun Gothic" charset="0"/>
+                      </a:endParaRPr>
+                    </a:p>
+                  </a:txBody>
+                  <a:tcPr marL="91440" marR="91440" marT="45720" marB="45720">
+                    <a:lnL w="12700" cap="flat" cmpd="sng" algn="ctr">
+                      <a:solidFill>
+                        <a:srgbClr val="C8E6DF"/>
+                      </a:solidFill>
+                      <a:prstDash val="solid"/>
+                      <a:round/>
+                      <a:headEnd type="none" w="med" len="med"/>
+                      <a:tailEnd type="none" w="med" len="med"/>
+                    </a:lnL>
+                    <a:lnR w="12700" cap="flat" cmpd="sng" algn="ctr">
+                      <a:solidFill>
+                        <a:srgbClr val="C8E6DF"/>
+                      </a:solidFill>
+                      <a:prstDash val="solid"/>
+                      <a:round/>
+                      <a:headEnd type="none" w="med" len="med"/>
+                      <a:tailEnd type="none" w="med" len="med"/>
+                    </a:lnR>
+                    <a:lnT w="12700" cap="flat" cmpd="sng" algn="ctr">
+                      <a:solidFill>
+                        <a:srgbClr val="C8E6DF"/>
+                      </a:solidFill>
+                      <a:prstDash val="solid"/>
+                      <a:round/>
+                      <a:headEnd type="none" w="med" len="med"/>
+                      <a:tailEnd type="none" w="med" len="med"/>
+                    </a:lnT>
+                    <a:lnB w="12700" cap="flat" cmpd="sng" algn="ctr">
+                      <a:solidFill>
+                        <a:srgbClr val="C8E6DF"/>
+                      </a:solidFill>
+                      <a:prstDash val="solid"/>
+                      <a:round/>
+                      <a:headEnd type="none" w="med" len="med"/>
+                      <a:tailEnd type="none" w="med" len="med"/>
+                    </a:lnB>
+                  </a:tcPr>
+                </a:tc>
+                <a:tc>
+                  <a:txBody>
+                    <a:bodyPr/>
+                    <a:lstStyle/>
+                    <a:p>
+                      <a:pPr indent="0" marL="0">
+                        <a:buNone/>
+                      </a:pPr>
+                      <a:r>
+                        <a:rPr lang="en-US" sz="1000" dirty="0">
+                          <a:solidFill>
+                            <a:srgbClr val="475569"/>
+                          </a:solidFill>
+                          <a:latin typeface="Malgun Gothic" pitchFamily="34" charset="0"/>
+                          <a:ea typeface="Malgun Gothic" pitchFamily="34" charset="-122"/>
+                          <a:cs typeface="Malgun Gothic" pitchFamily="34" charset="-120"/>
+                        </a:rPr>
+                        <a:t>\n → · 구분; plan-grid에서 가격 배지로 사용</a:t>
                       </a:r>
                       <a:endParaRPr lang="en-US" sz="1000" dirty="0">
                         <a:latin typeface="Malgun Gothic" charset="0"/>
@@ -31683,7 +31175,7 @@
                           <a:ea typeface="Malgun Gothic" pitchFamily="34" charset="-122"/>
                           <a:cs typeface="Malgun Gothic" pitchFamily="34" charset="-120"/>
                         </a:rPr>
-                        <a:t>개별 강조색</a:t>
+                        <a:t>개별 강조색 + SVG 불릿 색</a:t>
                       </a:r>
                       <a:endParaRPr lang="en-US" sz="1000" dirty="0">
                         <a:latin typeface="Malgun Gothic" charset="0"/>
@@ -31815,7 +31307,7 @@
                           <a:ea typeface="Malgun Gothic" pitchFamily="34" charset="-122"/>
                           <a:cs typeface="Malgun Gothic" pitchFamily="34" charset="-120"/>
                         </a:rPr>
-                        <a:t>note</a:t>
+                        <a:t>bullet</a:t>
                       </a:r>
                       <a:endParaRPr lang="en-US" sz="1000" dirty="0">
                         <a:latin typeface="Malgun Gothic" charset="0"/>
@@ -31880,7 +31372,7 @@
                           <a:ea typeface="Malgun Gothic" pitchFamily="34" charset="-122"/>
                           <a:cs typeface="Malgun Gothic" pitchFamily="34" charset="-120"/>
                         </a:rPr>
-                        <a:t>하단 노트, 결론, CTA 배지</a:t>
+                        <a:t>아이템별 불릿 기호 오버라이드</a:t>
                       </a:r>
                       <a:endParaRPr lang="en-US" sz="1000" dirty="0">
                         <a:latin typeface="Malgun Gothic" charset="0"/>
@@ -31945,7 +31437,7 @@
                           <a:ea typeface="Malgun Gothic" pitchFamily="34" charset="-122"/>
                           <a:cs typeface="Malgun Gothic" pitchFamily="34" charset="-120"/>
                         </a:rPr>
-                        <a:t>compare-grid, columns-grid, compare-split, plan-grid에서 특히 유효</a:t>
+                        <a:t>bullet: "✅" — color보다 우선</a:t>
                       </a:r>
                       <a:endParaRPr lang="en-US" sz="1000" dirty="0">
                         <a:latin typeface="Malgun Gothic" charset="0"/>
@@ -32006,7 +31498,7 @@
         </p:nvSpPr>
         <p:spPr>
           <a:xfrm>
-            <a:off x="685800" y="3575304"/>
+            <a:off x="685800" y="3831336"/>
             <a:ext cx="10820095" cy="237490"/>
           </a:xfrm>
           <a:prstGeom prst="rect">
@@ -32031,7 +31523,7 @@
                 <a:ea typeface="Malgun Gothic" pitchFamily="34" charset="-122"/>
                 <a:cs typeface="Malgun Gothic" pitchFamily="34" charset="-120"/>
               </a:rPr>
-              <a:t>숏코드별 예약 키도 일부 존재합니다. featured는 plan-grid의 추천 플랜 강조에 사용하고, alert-box는 선언부의 tip, warn, success, danger 타입을 읽습니다.</a:t>
+              <a:t>숏코드별 예약 키: featured는 plan-grid 추천 플랜 강조, alert-box는 선언부 tip·warn·success·danger 타입을 읽습니다.</a:t>
             </a:r>
             <a:endParaRPr lang="en-US" sz="1100" dirty="0"/>
           </a:p>
@@ -32154,7 +31646,7 @@
                 <a:ea typeface="Malgun Gothic" pitchFamily="34" charset="-122"/>
                 <a:cs typeface="Malgun Gothic" pitchFamily="34" charset="-120"/>
               </a:rPr>
-              <a:t>22</a:t>
+              <a:t>27</a:t>
             </a:r>
             <a:endParaRPr lang="en-US" sz="1600" dirty="0"/>
           </a:p>
@@ -32193,7 +31685,7 @@
                 <a:ea typeface="Malgun Gothic" pitchFamily="34" charset="-122"/>
                 <a:cs typeface="Malgun Gothic" pitchFamily="34" charset="-120"/>
               </a:rPr>
-              <a:t>part-deck</a:t>
+              <a:t>checkpoint-grid</a:t>
             </a:r>
             <a:endParaRPr lang="en-US" sz="2200" dirty="0"/>
           </a:p>
@@ -32208,11 +31700,11 @@
         <p:spPr>
           <a:xfrm>
             <a:off x="457200" y="1143000"/>
-            <a:ext cx="11277295" cy="4620514"/>
+            <a:ext cx="11277295" cy="3756914"/>
           </a:xfrm>
           <a:prstGeom prst="roundRect">
             <a:avLst>
-              <a:gd name="adj" fmla="val 1583"/>
+              <a:gd name="adj" fmla="val 1947"/>
             </a:avLst>
           </a:prstGeom>
           <a:solidFill>
@@ -32473,7 +31965,7 @@
                           <a:ea typeface="Malgun Gothic" pitchFamily="34" charset="-122"/>
                           <a:cs typeface="Malgun Gothic" pitchFamily="34" charset="-120"/>
                         </a:rPr>
-                        <a:t>part-deck</a:t>
+                        <a:t>checkpoint-grid</a:t>
                       </a:r>
                       <a:endParaRPr lang="en-US" sz="1000" dirty="0">
                         <a:latin typeface="Malgun Gothic" charset="0"/>
@@ -32605,7 +32097,7 @@
                           <a:ea typeface="Malgun Gothic" pitchFamily="34" charset="-122"/>
                           <a:cs typeface="Malgun Gothic" pitchFamily="34" charset="-120"/>
                         </a:rPr>
-                        <a:t>시리즈 가이드북 등 목차용 대단원(부, Part)을 알리는 헤더 숏코드입니다. HSL 브랜드 컬러가 다이내믹하게 적용됩니다.</a:t>
+                        <a:t>중간 검수 타이밍, 주요 체크포인트를 이모지와 가로 뱃지 형식으로 나열해 줍니다.</a:t>
                       </a:r>
                       <a:endParaRPr lang="en-US" sz="1000" dirty="0">
                         <a:latin typeface="Malgun Gothic" charset="0"/>
@@ -32706,7 +32198,7 @@
         <p:spPr>
           <a:xfrm>
             <a:off x="685800" y="2669794"/>
-            <a:ext cx="10820095" cy="2773680"/>
+            <a:ext cx="10820095" cy="1910080"/>
           </a:xfrm>
           <a:prstGeom prst="rect">
             <a:avLst/>
@@ -32731,7 +32223,7 @@
         <p:spPr>
           <a:xfrm>
             <a:off x="795528" y="2742946"/>
-            <a:ext cx="10600639" cy="2682240"/>
+            <a:ext cx="10600639" cy="1818640"/>
           </a:xfrm>
           <a:prstGeom prst="rect">
             <a:avLst/>
@@ -32755,7 +32247,7 @@
                 <a:ea typeface="Consolas" pitchFamily="34" charset="-122"/>
                 <a:cs typeface="Consolas" pitchFamily="34" charset="-120"/>
               </a:rPr>
-              <a:t>\::: part-deck</a:t>
+              <a:t>\::: checkpoint-grid</a:t>
             </a:r>
             <a:endParaRPr lang="en-US" sz="1000" dirty="0"/>
           </a:p>
@@ -32772,7 +32264,7 @@
                 <a:ea typeface="Consolas" pitchFamily="34" charset="-122"/>
                 <a:cs typeface="Consolas" pitchFamily="34" charset="-120"/>
               </a:rPr>
-              <a:t>- icon: "1부"</a:t>
+              <a:t>- icon: "📐"</a:t>
             </a:r>
             <a:endParaRPr lang="en-US" sz="1000" dirty="0"/>
           </a:p>
@@ -32789,7 +32281,7 @@
                 <a:ea typeface="Consolas" pitchFamily="34" charset="-122"/>
                 <a:cs typeface="Consolas" pitchFamily="34" charset="-120"/>
               </a:rPr>
-              <a:t>  title: "개념 이해"</a:t>
+              <a:t>  title: "계획 수립 후"</a:t>
             </a:r>
             <a:endParaRPr lang="en-US" sz="1000" dirty="0"/>
           </a:p>
@@ -32806,7 +32298,7 @@
                 <a:ea typeface="Consolas" pitchFamily="34" charset="-122"/>
                 <a:cs typeface="Consolas" pitchFamily="34" charset="-120"/>
               </a:rPr>
-              <a:t>  desc: "바이브코딩과 에이전트 코딩의 작동 원리"</a:t>
+              <a:t>  desc: "방향이 맞는지 확인"</a:t>
             </a:r>
             <a:endParaRPr lang="en-US" sz="1000" dirty="0"/>
           </a:p>
@@ -32823,7 +32315,7 @@
                 <a:ea typeface="Consolas" pitchFamily="34" charset="-122"/>
                 <a:cs typeface="Consolas" pitchFamily="34" charset="-120"/>
               </a:rPr>
-              <a:t>  tag: "Ch.01–03"</a:t>
+              <a:t>- icon: "1️⃣"</a:t>
             </a:r>
             <a:endParaRPr lang="en-US" sz="1000" dirty="0"/>
           </a:p>
@@ -32840,7 +32332,7 @@
                 <a:ea typeface="Consolas" pitchFamily="34" charset="-122"/>
                 <a:cs typeface="Consolas" pitchFamily="34" charset="-120"/>
               </a:rPr>
-              <a:t>  color: "#1a3a5c"</a:t>
+              <a:t>  title: "1단계 완료 후"</a:t>
             </a:r>
             <a:endParaRPr lang="en-US" sz="1000" dirty="0"/>
           </a:p>
@@ -32857,75 +32349,7 @@
                 <a:ea typeface="Consolas" pitchFamily="34" charset="-122"/>
                 <a:cs typeface="Consolas" pitchFamily="34" charset="-120"/>
               </a:rPr>
-              <a:t>- icon: "2부"</a:t>
-            </a:r>
-            <a:endParaRPr lang="en-US" sz="1000" dirty="0"/>
-          </a:p>
-          <a:p>
-            <a:pPr indent="0" marL="0">
-              <a:buNone/>
-            </a:pPr>
-            <a:r>
-              <a:rPr lang="en-US" sz="1000" dirty="0">
-                <a:solidFill>
-                  <a:srgbClr val="A8B2D8"/>
-                </a:solidFill>
-                <a:latin typeface="Consolas" pitchFamily="34" charset="0"/>
-                <a:ea typeface="Consolas" pitchFamily="34" charset="-122"/>
-                <a:cs typeface="Consolas" pitchFamily="34" charset="-120"/>
-              </a:rPr>
-              <a:t>  title: "AI와 대화하는 법"</a:t>
-            </a:r>
-            <a:endParaRPr lang="en-US" sz="1000" dirty="0"/>
-          </a:p>
-          <a:p>
-            <a:pPr indent="0" marL="0">
-              <a:buNone/>
-            </a:pPr>
-            <a:r>
-              <a:rPr lang="en-US" sz="1000" dirty="0">
-                <a:solidFill>
-                  <a:srgbClr val="A8B2D8"/>
-                </a:solidFill>
-                <a:latin typeface="Consolas" pitchFamily="34" charset="0"/>
-                <a:ea typeface="Consolas" pitchFamily="34" charset="-122"/>
-                <a:cs typeface="Consolas" pitchFamily="34" charset="-120"/>
-              </a:rPr>
-              <a:t>  desc: "프롬프트 설계부터 복잡한 작업 위임까지"</a:t>
-            </a:r>
-            <a:endParaRPr lang="en-US" sz="1000" dirty="0"/>
-          </a:p>
-          <a:p>
-            <a:pPr indent="0" marL="0">
-              <a:buNone/>
-            </a:pPr>
-            <a:r>
-              <a:rPr lang="en-US" sz="1000" dirty="0">
-                <a:solidFill>
-                  <a:srgbClr val="A8B2D8"/>
-                </a:solidFill>
-                <a:latin typeface="Consolas" pitchFamily="34" charset="0"/>
-                <a:ea typeface="Consolas" pitchFamily="34" charset="-122"/>
-                <a:cs typeface="Consolas" pitchFamily="34" charset="-120"/>
-              </a:rPr>
-              <a:t>  tag: "Ch.04–05"</a:t>
-            </a:r>
-            <a:endParaRPr lang="en-US" sz="1000" dirty="0"/>
-          </a:p>
-          <a:p>
-            <a:pPr indent="0" marL="0">
-              <a:buNone/>
-            </a:pPr>
-            <a:r>
-              <a:rPr lang="en-US" sz="1000" dirty="0">
-                <a:solidFill>
-                  <a:srgbClr val="A8B2D8"/>
-                </a:solidFill>
-                <a:latin typeface="Consolas" pitchFamily="34" charset="0"/>
-                <a:ea typeface="Consolas" pitchFamily="34" charset="-122"/>
-                <a:cs typeface="Consolas" pitchFamily="34" charset="-120"/>
-              </a:rPr>
-              <a:t>  color: "#1a4a3a"</a:t>
+              <a:t>  desc: "입력 데이터 검증"</a:t>
             </a:r>
             <a:endParaRPr lang="en-US" sz="1000" dirty="0"/>
           </a:p>
@@ -33065,7 +32489,7 @@
                 <a:ea typeface="Malgun Gothic" pitchFamily="34" charset="-122"/>
                 <a:cs typeface="Malgun Gothic" pitchFamily="34" charset="-120"/>
               </a:rPr>
-              <a:t>23</a:t>
+              <a:t>28</a:t>
             </a:r>
             <a:endParaRPr lang="en-US" sz="1600" dirty="0"/>
           </a:p>
@@ -33104,7 +32528,7 @@
                 <a:ea typeface="Malgun Gothic" pitchFamily="34" charset="-122"/>
                 <a:cs typeface="Malgun Gothic" pitchFamily="34" charset="-120"/>
               </a:rPr>
-              <a:t>chapter-list</a:t>
+              <a:t>compare-before-after</a:t>
             </a:r>
             <a:endParaRPr lang="en-US" sz="2200" dirty="0"/>
           </a:p>
@@ -33119,11 +32543,11 @@
         <p:spPr>
           <a:xfrm>
             <a:off x="457200" y="1143000"/>
-            <a:ext cx="11277295" cy="5052314"/>
+            <a:ext cx="11277295" cy="3325114"/>
           </a:xfrm>
           <a:prstGeom prst="roundRect">
             <a:avLst>
-              <a:gd name="adj" fmla="val 1448"/>
+              <a:gd name="adj" fmla="val 2200"/>
             </a:avLst>
           </a:prstGeom>
           <a:solidFill>
@@ -33384,7 +32808,7 @@
                           <a:ea typeface="Malgun Gothic" pitchFamily="34" charset="-122"/>
                           <a:cs typeface="Malgun Gothic" pitchFamily="34" charset="-120"/>
                         </a:rPr>
-                        <a:t>chapter-list</a:t>
+                        <a:t>compare-before-after</a:t>
                       </a:r>
                       <a:endParaRPr lang="en-US" sz="1000" dirty="0">
                         <a:latin typeface="Malgun Gothic" charset="0"/>
@@ -33516,7 +32940,7 @@
                           <a:ea typeface="Malgun Gothic" pitchFamily="34" charset="-122"/>
                           <a:cs typeface="Malgun Gothic" pitchFamily="34" charset="-120"/>
                         </a:rPr>
-                        <a:t>세부 목차 및 챕터 리스트 숏코드입니다. 챕터 번호와 뱃지 속성에 따라 이쁜 HSL 배지 색상이 자동 매핑됩니다.</a:t>
+                        <a:t>Bad vs Good, 변경 전후 1:1 대비를 전용 테두리 카드 레이아웃으로 렌더링해 줍니다.</a:t>
                       </a:r>
                       <a:endParaRPr lang="en-US" sz="1000" dirty="0">
                         <a:latin typeface="Malgun Gothic" charset="0"/>
@@ -33617,7 +33041,7 @@
         <p:spPr>
           <a:xfrm>
             <a:off x="685800" y="2669794"/>
-            <a:ext cx="10820095" cy="3205480"/>
+            <a:ext cx="10820095" cy="1478280"/>
           </a:xfrm>
           <a:prstGeom prst="rect">
             <a:avLst/>
@@ -33642,7 +33066,7 @@
         <p:spPr>
           <a:xfrm>
             <a:off x="795528" y="2742946"/>
-            <a:ext cx="10600639" cy="3114040"/>
+            <a:ext cx="10600639" cy="1386840"/>
           </a:xfrm>
           <a:prstGeom prst="rect">
             <a:avLst/>
@@ -33666,7 +33090,7 @@
                 <a:ea typeface="Consolas" pitchFamily="34" charset="-122"/>
                 <a:cs typeface="Consolas" pitchFamily="34" charset="-120"/>
               </a:rPr>
-              <a:t>\::: chapter-list</a:t>
+              <a:t>\::: compare-before-after</a:t>
             </a:r>
             <a:endParaRPr lang="en-US" sz="1000" dirty="0"/>
           </a:p>
@@ -33683,7 +33107,7 @@
                 <a:ea typeface="Consolas" pitchFamily="34" charset="-122"/>
                 <a:cs typeface="Consolas" pitchFamily="34" charset="-120"/>
               </a:rPr>
-              <a:t>- icon: "01"</a:t>
+              <a:t>- title: "나쁜 프롬프트"</a:t>
             </a:r>
             <a:endParaRPr lang="en-US" sz="1000" dirty="0"/>
           </a:p>
@@ -33700,7 +33124,7 @@
                 <a:ea typeface="Consolas" pitchFamily="34" charset="-122"/>
                 <a:cs typeface="Consolas" pitchFamily="34" charset="-120"/>
               </a:rPr>
-              <a:t>  title: "바이브코딩이란?"</a:t>
+              <a:t>  desc: "엑셀 자동화 코드 만들어줘."</a:t>
             </a:r>
             <a:endParaRPr lang="en-US" sz="1000" dirty="0"/>
           </a:p>
@@ -33717,7 +33141,7 @@
                 <a:ea typeface="Consolas" pitchFamily="34" charset="-122"/>
                 <a:cs typeface="Consolas" pitchFamily="34" charset="-120"/>
               </a:rPr>
-              <a:t>  desc: "Karpathy 발언 배경 · 전통 코딩 vs 바이브코딩 · LLM 발전"</a:t>
+              <a:t>- title: "좋은 프롬프트"</a:t>
             </a:r>
             <a:endParaRPr lang="en-US" sz="1000" dirty="0"/>
           </a:p>
@@ -33734,143 +33158,7 @@
                 <a:ea typeface="Consolas" pitchFamily="34" charset="-122"/>
                 <a:cs typeface="Consolas" pitchFamily="34" charset="-120"/>
               </a:rPr>
-              <a:t>  tag: "개념"</a:t>
-            </a:r>
-            <a:endParaRPr lang="en-US" sz="1000" dirty="0"/>
-          </a:p>
-          <a:p>
-            <a:pPr indent="0" marL="0">
-              <a:buNone/>
-            </a:pPr>
-            <a:r>
-              <a:rPr lang="en-US" sz="1000" dirty="0">
-                <a:solidFill>
-                  <a:srgbClr val="A8B2D8"/>
-                </a:solidFill>
-                <a:latin typeface="Consolas" pitchFamily="34" charset="0"/>
-                <a:ea typeface="Consolas" pitchFamily="34" charset="-122"/>
-                <a:cs typeface="Consolas" pitchFamily="34" charset="-120"/>
-              </a:rPr>
-              <a:t>- icon: "02"</a:t>
-            </a:r>
-            <a:endParaRPr lang="en-US" sz="1000" dirty="0"/>
-          </a:p>
-          <a:p>
-            <a:pPr indent="0" marL="0">
-              <a:buNone/>
-            </a:pPr>
-            <a:r>
-              <a:rPr lang="en-US" sz="1000" dirty="0">
-                <a:solidFill>
-                  <a:srgbClr val="A8B2D8"/>
-                </a:solidFill>
-                <a:latin typeface="Consolas" pitchFamily="34" charset="0"/>
-                <a:ea typeface="Consolas" pitchFamily="34" charset="-122"/>
-                <a:cs typeface="Consolas" pitchFamily="34" charset="-120"/>
-              </a:rPr>
-              <a:t>  title: "에이전트 코딩이란?"</a:t>
-            </a:r>
-            <a:endParaRPr lang="en-US" sz="1000" dirty="0"/>
-          </a:p>
-          <a:p>
-            <a:pPr indent="0" marL="0">
-              <a:buNone/>
-            </a:pPr>
-            <a:r>
-              <a:rPr lang="en-US" sz="1000" dirty="0">
-                <a:solidFill>
-                  <a:srgbClr val="A8B2D8"/>
-                </a:solidFill>
-                <a:latin typeface="Consolas" pitchFamily="34" charset="0"/>
-                <a:ea typeface="Consolas" pitchFamily="34" charset="-122"/>
-                <a:cs typeface="Consolas" pitchFamily="34" charset="-120"/>
-              </a:rPr>
-              <a:t>  desc: "계획→실행→수정 루프 · 레벨 1~5 스펙트럼 · 바이브코딩과 차이"</a:t>
-            </a:r>
-            <a:endParaRPr lang="en-US" sz="1000" dirty="0"/>
-          </a:p>
-          <a:p>
-            <a:pPr indent="0" marL="0">
-              <a:buNone/>
-            </a:pPr>
-            <a:r>
-              <a:rPr lang="en-US" sz="1000" dirty="0">
-                <a:solidFill>
-                  <a:srgbClr val="A8B2D8"/>
-                </a:solidFill>
-                <a:latin typeface="Consolas" pitchFamily="34" charset="0"/>
-                <a:ea typeface="Consolas" pitchFamily="34" charset="-122"/>
-                <a:cs typeface="Consolas" pitchFamily="34" charset="-120"/>
-              </a:rPr>
-              <a:t>  tag: "개념"</a:t>
-            </a:r>
-            <a:endParaRPr lang="en-US" sz="1000" dirty="0"/>
-          </a:p>
-          <a:p>
-            <a:pPr indent="0" marL="0">
-              <a:buNone/>
-            </a:pPr>
-            <a:r>
-              <a:rPr lang="en-US" sz="1000" dirty="0">
-                <a:solidFill>
-                  <a:srgbClr val="A8B2D8"/>
-                </a:solidFill>
-                <a:latin typeface="Consolas" pitchFamily="34" charset="0"/>
-                <a:ea typeface="Consolas" pitchFamily="34" charset="-122"/>
-                <a:cs typeface="Consolas" pitchFamily="34" charset="-120"/>
-              </a:rPr>
-              <a:t>- icon: "04"</a:t>
-            </a:r>
-            <a:endParaRPr lang="en-US" sz="1000" dirty="0"/>
-          </a:p>
-          <a:p>
-            <a:pPr indent="0" marL="0">
-              <a:buNone/>
-            </a:pPr>
-            <a:r>
-              <a:rPr lang="en-US" sz="1000" dirty="0">
-                <a:solidFill>
-                  <a:srgbClr val="A8B2D8"/>
-                </a:solidFill>
-                <a:latin typeface="Consolas" pitchFamily="34" charset="0"/>
-                <a:ea typeface="Consolas" pitchFamily="34" charset="-122"/>
-                <a:cs typeface="Consolas" pitchFamily="34" charset="-120"/>
-              </a:rPr>
-              <a:t>  title: "첫 대화: 프롬프트 설계"</a:t>
-            </a:r>
-            <a:endParaRPr lang="en-US" sz="1000" dirty="0"/>
-          </a:p>
-          <a:p>
-            <a:pPr indent="0" marL="0">
-              <a:buNone/>
-            </a:pPr>
-            <a:r>
-              <a:rPr lang="en-US" sz="1000" dirty="0">
-                <a:solidFill>
-                  <a:srgbClr val="A8B2D8"/>
-                </a:solidFill>
-                <a:latin typeface="Consolas" pitchFamily="34" charset="0"/>
-                <a:ea typeface="Consolas" pitchFamily="34" charset="-122"/>
-                <a:cs typeface="Consolas" pitchFamily="34" charset="-120"/>
-              </a:rPr>
-              <a:t>  desc: "요구사항 명세 · 컨텍스트 주입 전략 · SKILL.md 재사용 지시"</a:t>
-            </a:r>
-            <a:endParaRPr lang="en-US" sz="1000" dirty="0"/>
-          </a:p>
-          <a:p>
-            <a:pPr indent="0" marL="0">
-              <a:buNone/>
-            </a:pPr>
-            <a:r>
-              <a:rPr lang="en-US" sz="1000" dirty="0">
-                <a:solidFill>
-                  <a:srgbClr val="A8B2D8"/>
-                </a:solidFill>
-                <a:latin typeface="Consolas" pitchFamily="34" charset="0"/>
-                <a:ea typeface="Consolas" pitchFamily="34" charset="-122"/>
-                <a:cs typeface="Consolas" pitchFamily="34" charset="-120"/>
-              </a:rPr>
-              <a:t>  tag: "실습"</a:t>
+              <a:t>  desc: "Python으로 A열 날짜, B열 금액 합산 summary.xlsx 만드는 Pandas 코드 작성해줘."</a:t>
             </a:r>
             <a:endParaRPr lang="en-US" sz="1000" dirty="0"/>
           </a:p>
@@ -34010,7 +33298,7 @@
                 <a:ea typeface="Malgun Gothic" pitchFamily="34" charset="-122"/>
                 <a:cs typeface="Malgun Gothic" pitchFamily="34" charset="-120"/>
               </a:rPr>
-              <a:t>24</a:t>
+              <a:t>29</a:t>
             </a:r>
             <a:endParaRPr lang="en-US" sz="1600" dirty="0"/>
           </a:p>
@@ -34049,7 +33337,7 @@
                 <a:ea typeface="Malgun Gothic" pitchFamily="34" charset="-122"/>
                 <a:cs typeface="Malgun Gothic" pitchFamily="34" charset="-120"/>
               </a:rPr>
-              <a:t>summary-bar</a:t>
+              <a:t>takeaway</a:t>
             </a:r>
             <a:endParaRPr lang="en-US" sz="2200" dirty="0"/>
           </a:p>
@@ -34064,11 +33352,11 @@
         <p:spPr>
           <a:xfrm>
             <a:off x="457200" y="1143000"/>
-            <a:ext cx="11277295" cy="3756914"/>
+            <a:ext cx="11277295" cy="3109214"/>
           </a:xfrm>
           <a:prstGeom prst="roundRect">
             <a:avLst>
-              <a:gd name="adj" fmla="val 1947"/>
+              <a:gd name="adj" fmla="val 2353"/>
             </a:avLst>
           </a:prstGeom>
           <a:solidFill>
@@ -34329,7 +33617,7 @@
                           <a:ea typeface="Malgun Gothic" pitchFamily="34" charset="-122"/>
                           <a:cs typeface="Malgun Gothic" pitchFamily="34" charset="-120"/>
                         </a:rPr>
-                        <a:t>summary-bar</a:t>
+                        <a:t>takeaway</a:t>
                       </a:r>
                       <a:endParaRPr lang="en-US" sz="1000" dirty="0">
                         <a:latin typeface="Malgun Gothic" charset="0"/>
@@ -34461,7 +33749,7 @@
                           <a:ea typeface="Malgun Gothic" pitchFamily="34" charset="-122"/>
                           <a:cs typeface="Malgun Gothic" pitchFamily="34" charset="-120"/>
                         </a:rPr>
-                        <a:t>숏코드 문서들의 통계, 주요 수치 등을 가로 격자 형태로 요약 노출해 주는 수치 뱃지 숏코드입니다.</a:t>
+                        <a:t>핵심 요약 및 테이크어웨이 메시지를 그라데이션 프리미엄 배너 형태로 감싸 줍니다.</a:t>
                       </a:r>
                       <a:endParaRPr lang="en-US" sz="1000" dirty="0">
                         <a:latin typeface="Malgun Gothic" charset="0"/>
@@ -34562,7 +33850,7 @@
         <p:spPr>
           <a:xfrm>
             <a:off x="685800" y="2669794"/>
-            <a:ext cx="10820095" cy="1910080"/>
+            <a:ext cx="10820095" cy="1262380"/>
           </a:xfrm>
           <a:prstGeom prst="rect">
             <a:avLst/>
@@ -34587,7 +33875,7 @@
         <p:spPr>
           <a:xfrm>
             <a:off x="795528" y="2742946"/>
-            <a:ext cx="10600639" cy="1818640"/>
+            <a:ext cx="10600639" cy="1170940"/>
           </a:xfrm>
           <a:prstGeom prst="rect">
             <a:avLst/>
@@ -34611,7 +33899,7 @@
                 <a:ea typeface="Consolas" pitchFamily="34" charset="-122"/>
                 <a:cs typeface="Consolas" pitchFamily="34" charset="-120"/>
               </a:rPr>
-              <a:t>\::: summary-bar</a:t>
+              <a:t>\::: takeaway</a:t>
             </a:r>
             <a:endParaRPr lang="en-US" sz="1000" dirty="0"/>
           </a:p>
@@ -34628,7 +33916,7 @@
                 <a:ea typeface="Consolas" pitchFamily="34" charset="-122"/>
                 <a:cs typeface="Consolas" pitchFamily="34" charset="-120"/>
               </a:rPr>
-              <a:t>- icon: "29장"</a:t>
+              <a:t>- icon: "💡"</a:t>
             </a:r>
             <a:endParaRPr lang="en-US" sz="1000" dirty="0"/>
           </a:p>
@@ -34645,7 +33933,7 @@
                 <a:ea typeface="Consolas" pitchFamily="34" charset="-122"/>
                 <a:cs typeface="Consolas" pitchFamily="34" charset="-120"/>
               </a:rPr>
-              <a:t>  title: "Total Chapters"</a:t>
+              <a:t>  title: "Key Takeaway"</a:t>
             </a:r>
             <a:endParaRPr lang="en-US" sz="1000" dirty="0"/>
           </a:p>
@@ -34662,58 +33950,7 @@
                 <a:ea typeface="Consolas" pitchFamily="34" charset="-122"/>
                 <a:cs typeface="Consolas" pitchFamily="34" charset="-120"/>
               </a:rPr>
-              <a:t>- icon: "8부"</a:t>
-            </a:r>
-            <a:endParaRPr lang="en-US" sz="1000" dirty="0"/>
-          </a:p>
-          <a:p>
-            <a:pPr indent="0" marL="0">
-              <a:buNone/>
-            </a:pPr>
-            <a:r>
-              <a:rPr lang="en-US" sz="1000" dirty="0">
-                <a:solidFill>
-                  <a:srgbClr val="A8B2D8"/>
-                </a:solidFill>
-                <a:latin typeface="Consolas" pitchFamily="34" charset="0"/>
-                <a:ea typeface="Consolas" pitchFamily="34" charset="-122"/>
-                <a:cs typeface="Consolas" pitchFamily="34" charset="-120"/>
-              </a:rPr>
-              <a:t>  title: "Parts"</a:t>
-            </a:r>
-            <a:endParaRPr lang="en-US" sz="1000" dirty="0"/>
-          </a:p>
-          <a:p>
-            <a:pPr indent="0" marL="0">
-              <a:buNone/>
-            </a:pPr>
-            <a:r>
-              <a:rPr lang="en-US" sz="1000" dirty="0">
-                <a:solidFill>
-                  <a:srgbClr val="A8B2D8"/>
-                </a:solidFill>
-                <a:latin typeface="Consolas" pitchFamily="34" charset="0"/>
-                <a:ea typeface="Consolas" pitchFamily="34" charset="-122"/>
-                <a:cs typeface="Consolas" pitchFamily="34" charset="-120"/>
-              </a:rPr>
-              <a:t>- icon: "24종"</a:t>
-            </a:r>
-            <a:endParaRPr lang="en-US" sz="1000" dirty="0"/>
-          </a:p>
-          <a:p>
-            <a:pPr indent="0" marL="0">
-              <a:buNone/>
-            </a:pPr>
-            <a:r>
-              <a:rPr lang="en-US" sz="1000" dirty="0">
-                <a:solidFill>
-                  <a:srgbClr val="A8B2D8"/>
-                </a:solidFill>
-                <a:latin typeface="Consolas" pitchFamily="34" charset="0"/>
-                <a:ea typeface="Consolas" pitchFamily="34" charset="-122"/>
-                <a:cs typeface="Consolas" pitchFamily="34" charset="-120"/>
-              </a:rPr>
-              <a:t>  title: "Support Shortcodes"</a:t>
+              <a:t>  desc: "바이브코딩은 문법 암기가 아닌, 원하는 바를 논리적 자연어로 설명하는 역량이 본질입니다."</a:t>
             </a:r>
             <a:endParaRPr lang="en-US" sz="1000" dirty="0"/>
           </a:p>
@@ -34853,7 +34090,7 @@
                 <a:ea typeface="Malgun Gothic" pitchFamily="34" charset="-122"/>
                 <a:cs typeface="Malgun Gothic" pitchFamily="34" charset="-120"/>
               </a:rPr>
-              <a:t>25</a:t>
+              <a:t>32</a:t>
             </a:r>
             <a:endParaRPr lang="en-US" sz="1600" dirty="0"/>
           </a:p>
@@ -34892,7 +34129,7 @@
                 <a:ea typeface="Malgun Gothic" pitchFamily="34" charset="-122"/>
                 <a:cs typeface="Malgun Gothic" pitchFamily="34" charset="-120"/>
               </a:rPr>
-              <a:t>flow</a:t>
+              <a:t>부록 A. desc 다중 줄 불릿 목록</a:t>
             </a:r>
             <a:endParaRPr lang="en-US" sz="2200" dirty="0"/>
           </a:p>
@@ -34907,11 +34144,11 @@
         <p:spPr>
           <a:xfrm>
             <a:off x="457200" y="1143000"/>
-            <a:ext cx="11277295" cy="5700014"/>
+            <a:ext cx="11277295" cy="4889500"/>
           </a:xfrm>
           <a:prstGeom prst="roundRect">
             <a:avLst>
-              <a:gd name="adj" fmla="val 1283"/>
+              <a:gd name="adj" fmla="val 1496"/>
             </a:avLst>
           </a:prstGeom>
           <a:solidFill>
@@ -34925,447 +34162,15 @@
           </a:ln>
         </p:spPr>
       </p:sp>
-      <p:graphicFrame>
-        <p:nvGraphicFramePr>
-          <p:cNvPr id="34" name="Table 0"/>
-          <p:cNvGraphicFramePr>
-            <a:graphicFrameLocks noGrp="1"/>
-          </p:cNvGraphicFramePr>
-          <p:nvPr>
-            <p:extLst>
-              <p:ext uri="{D42A27DB-BD31-4B8C-83A1-F6EECF244321}">
-                <p14:modId xmlns:p14="http://schemas.microsoft.com/office/powerpoint/2010/main" val="1579011935"/>
-              </p:ext>
-            </p:extLst>
-          </p:nvPr>
-        </p:nvGraphicFramePr>
-        <p:xfrm>
-          <a:off x="685800" y="1325880"/>
-          <a:ext cx="10820095" cy="914400"/>
-        </p:xfrm>
-        <a:graphic>
-          <a:graphicData uri="http://schemas.openxmlformats.org/drawingml/2006/table">
-            <a:tbl>
-              <a:tblPr/>
-              <a:tblGrid>
-                <a:gridCol w="5410048"/>
-                <a:gridCol w="5410048"/>
-              </a:tblGrid>
-              <a:tr h="320040">
-                <a:tc>
-                  <a:txBody>
-                    <a:bodyPr/>
-                    <a:lstStyle/>
-                    <a:p>
-                      <a:pPr indent="0" marL="0">
-                        <a:buNone/>
-                      </a:pPr>
-                      <a:r>
-                        <a:rPr lang="en-US" sz="1100" b="1" dirty="0">
-                          <a:solidFill>
-                            <a:srgbClr val="FFFFFF"/>
-                          </a:solidFill>
-                          <a:latin typeface="Malgun Gothic" pitchFamily="34" charset="0"/>
-                          <a:ea typeface="Malgun Gothic" pitchFamily="34" charset="-122"/>
-                          <a:cs typeface="Malgun Gothic" pitchFamily="34" charset="-120"/>
-                        </a:rPr>
-                        <a:t>항목</a:t>
-                      </a:r>
-                      <a:endParaRPr lang="en-US" sz="1100" dirty="0">
-                        <a:latin typeface="Malgun Gothic" charset="0"/>
-                        <a:ea typeface="Malgun Gothic" charset="0"/>
-                        <a:cs typeface="Malgun Gothic" charset="0"/>
-                      </a:endParaRPr>
-                    </a:p>
-                  </a:txBody>
-                  <a:tcPr marL="91440" marR="91440" marT="45720" marB="45720">
-                    <a:lnL w="12700" cap="flat" cmpd="sng" algn="ctr">
-                      <a:solidFill>
-                        <a:srgbClr val="C8E6DF"/>
-                      </a:solidFill>
-                      <a:prstDash val="solid"/>
-                      <a:round/>
-                      <a:headEnd type="none" w="med" len="med"/>
-                      <a:tailEnd type="none" w="med" len="med"/>
-                    </a:lnL>
-                    <a:lnR w="12700" cap="flat" cmpd="sng" algn="ctr">
-                      <a:solidFill>
-                        <a:srgbClr val="C8E6DF"/>
-                      </a:solidFill>
-                      <a:prstDash val="solid"/>
-                      <a:round/>
-                      <a:headEnd type="none" w="med" len="med"/>
-                      <a:tailEnd type="none" w="med" len="med"/>
-                    </a:lnR>
-                    <a:lnT w="12700" cap="flat" cmpd="sng" algn="ctr">
-                      <a:solidFill>
-                        <a:srgbClr val="C8E6DF"/>
-                      </a:solidFill>
-                      <a:prstDash val="solid"/>
-                      <a:round/>
-                      <a:headEnd type="none" w="med" len="med"/>
-                      <a:tailEnd type="none" w="med" len="med"/>
-                    </a:lnT>
-                    <a:lnB w="12700" cap="flat" cmpd="sng" algn="ctr">
-                      <a:solidFill>
-                        <a:srgbClr val="C8E6DF"/>
-                      </a:solidFill>
-                      <a:prstDash val="solid"/>
-                      <a:round/>
-                      <a:headEnd type="none" w="med" len="med"/>
-                      <a:tailEnd type="none" w="med" len="med"/>
-                    </a:lnB>
-                    <a:solidFill>
-                      <a:srgbClr val="10A37F"/>
-                    </a:solidFill>
-                  </a:tcPr>
-                </a:tc>
-                <a:tc>
-                  <a:txBody>
-                    <a:bodyPr/>
-                    <a:lstStyle/>
-                    <a:p>
-                      <a:pPr indent="0" marL="0">
-                        <a:buNone/>
-                      </a:pPr>
-                      <a:r>
-                        <a:rPr lang="en-US" sz="1100" b="1" dirty="0">
-                          <a:solidFill>
-                            <a:srgbClr val="FFFFFF"/>
-                          </a:solidFill>
-                          <a:latin typeface="Malgun Gothic" pitchFamily="34" charset="0"/>
-                          <a:ea typeface="Malgun Gothic" pitchFamily="34" charset="-122"/>
-                          <a:cs typeface="Malgun Gothic" pitchFamily="34" charset="-120"/>
-                        </a:rPr>
-                        <a:t>내용</a:t>
-                      </a:r>
-                      <a:endParaRPr lang="en-US" sz="1100" dirty="0">
-                        <a:latin typeface="Malgun Gothic" charset="0"/>
-                        <a:ea typeface="Malgun Gothic" charset="0"/>
-                        <a:cs typeface="Malgun Gothic" charset="0"/>
-                      </a:endParaRPr>
-                    </a:p>
-                  </a:txBody>
-                  <a:tcPr marL="91440" marR="91440" marT="45720" marB="45720">
-                    <a:lnL w="12700" cap="flat" cmpd="sng" algn="ctr">
-                      <a:solidFill>
-                        <a:srgbClr val="C8E6DF"/>
-                      </a:solidFill>
-                      <a:prstDash val="solid"/>
-                      <a:round/>
-                      <a:headEnd type="none" w="med" len="med"/>
-                      <a:tailEnd type="none" w="med" len="med"/>
-                    </a:lnL>
-                    <a:lnR w="12700" cap="flat" cmpd="sng" algn="ctr">
-                      <a:solidFill>
-                        <a:srgbClr val="C8E6DF"/>
-                      </a:solidFill>
-                      <a:prstDash val="solid"/>
-                      <a:round/>
-                      <a:headEnd type="none" w="med" len="med"/>
-                      <a:tailEnd type="none" w="med" len="med"/>
-                    </a:lnR>
-                    <a:lnT w="12700" cap="flat" cmpd="sng" algn="ctr">
-                      <a:solidFill>
-                        <a:srgbClr val="C8E6DF"/>
-                      </a:solidFill>
-                      <a:prstDash val="solid"/>
-                      <a:round/>
-                      <a:headEnd type="none" w="med" len="med"/>
-                      <a:tailEnd type="none" w="med" len="med"/>
-                    </a:lnT>
-                    <a:lnB w="12700" cap="flat" cmpd="sng" algn="ctr">
-                      <a:solidFill>
-                        <a:srgbClr val="C8E6DF"/>
-                      </a:solidFill>
-                      <a:prstDash val="solid"/>
-                      <a:round/>
-                      <a:headEnd type="none" w="med" len="med"/>
-                      <a:tailEnd type="none" w="med" len="med"/>
-                    </a:lnB>
-                    <a:solidFill>
-                      <a:srgbClr val="10A37F"/>
-                    </a:solidFill>
-                  </a:tcPr>
-                </a:tc>
-              </a:tr>
-              <a:tr h="256032">
-                <a:tc>
-                  <a:txBody>
-                    <a:bodyPr/>
-                    <a:lstStyle/>
-                    <a:p>
-                      <a:pPr indent="0" marL="0">
-                        <a:buNone/>
-                      </a:pPr>
-                      <a:r>
-                        <a:rPr lang="en-US" sz="1000" dirty="0">
-                          <a:solidFill>
-                            <a:srgbClr val="475569"/>
-                          </a:solidFill>
-                          <a:latin typeface="Malgun Gothic" pitchFamily="34" charset="0"/>
-                          <a:ea typeface="Malgun Gothic" pitchFamily="34" charset="-122"/>
-                          <a:cs typeface="Malgun Gothic" pitchFamily="34" charset="-120"/>
-                        </a:rPr>
-                        <a:t>숏코드 명</a:t>
-                      </a:r>
-                      <a:endParaRPr lang="en-US" sz="1000" dirty="0">
-                        <a:latin typeface="Malgun Gothic" charset="0"/>
-                        <a:ea typeface="Malgun Gothic" charset="0"/>
-                        <a:cs typeface="Malgun Gothic" charset="0"/>
-                      </a:endParaRPr>
-                    </a:p>
-                  </a:txBody>
-                  <a:tcPr marL="91440" marR="91440" marT="45720" marB="45720">
-                    <a:lnL w="12700" cap="flat" cmpd="sng" algn="ctr">
-                      <a:solidFill>
-                        <a:srgbClr val="C8E6DF"/>
-                      </a:solidFill>
-                      <a:prstDash val="solid"/>
-                      <a:round/>
-                      <a:headEnd type="none" w="med" len="med"/>
-                      <a:tailEnd type="none" w="med" len="med"/>
-                    </a:lnL>
-                    <a:lnR w="12700" cap="flat" cmpd="sng" algn="ctr">
-                      <a:solidFill>
-                        <a:srgbClr val="C8E6DF"/>
-                      </a:solidFill>
-                      <a:prstDash val="solid"/>
-                      <a:round/>
-                      <a:headEnd type="none" w="med" len="med"/>
-                      <a:tailEnd type="none" w="med" len="med"/>
-                    </a:lnR>
-                    <a:lnT w="12700" cap="flat" cmpd="sng" algn="ctr">
-                      <a:solidFill>
-                        <a:srgbClr val="C8E6DF"/>
-                      </a:solidFill>
-                      <a:prstDash val="solid"/>
-                      <a:round/>
-                      <a:headEnd type="none" w="med" len="med"/>
-                      <a:tailEnd type="none" w="med" len="med"/>
-                    </a:lnT>
-                    <a:lnB w="12700" cap="flat" cmpd="sng" algn="ctr">
-                      <a:solidFill>
-                        <a:srgbClr val="C8E6DF"/>
-                      </a:solidFill>
-                      <a:prstDash val="solid"/>
-                      <a:round/>
-                      <a:headEnd type="none" w="med" len="med"/>
-                      <a:tailEnd type="none" w="med" len="med"/>
-                    </a:lnB>
-                  </a:tcPr>
-                </a:tc>
-                <a:tc>
-                  <a:txBody>
-                    <a:bodyPr/>
-                    <a:lstStyle/>
-                    <a:p>
-                      <a:pPr indent="0" marL="0">
-                        <a:buNone/>
-                      </a:pPr>
-                      <a:r>
-                        <a:rPr lang="en-US" sz="1000" dirty="0">
-                          <a:solidFill>
-                            <a:srgbClr val="475569"/>
-                          </a:solidFill>
-                          <a:latin typeface="Malgun Gothic" pitchFamily="34" charset="0"/>
-                          <a:ea typeface="Malgun Gothic" pitchFamily="34" charset="-122"/>
-                          <a:cs typeface="Malgun Gothic" pitchFamily="34" charset="-120"/>
-                        </a:rPr>
-                        <a:t>flow</a:t>
-                      </a:r>
-                      <a:endParaRPr lang="en-US" sz="1000" dirty="0">
-                        <a:latin typeface="Malgun Gothic" charset="0"/>
-                        <a:ea typeface="Malgun Gothic" charset="0"/>
-                        <a:cs typeface="Malgun Gothic" charset="0"/>
-                      </a:endParaRPr>
-                    </a:p>
-                  </a:txBody>
-                  <a:tcPr marL="91440" marR="91440" marT="45720" marB="45720">
-                    <a:lnL w="12700" cap="flat" cmpd="sng" algn="ctr">
-                      <a:solidFill>
-                        <a:srgbClr val="C8E6DF"/>
-                      </a:solidFill>
-                      <a:prstDash val="solid"/>
-                      <a:round/>
-                      <a:headEnd type="none" w="med" len="med"/>
-                      <a:tailEnd type="none" w="med" len="med"/>
-                    </a:lnL>
-                    <a:lnR w="12700" cap="flat" cmpd="sng" algn="ctr">
-                      <a:solidFill>
-                        <a:srgbClr val="C8E6DF"/>
-                      </a:solidFill>
-                      <a:prstDash val="solid"/>
-                      <a:round/>
-                      <a:headEnd type="none" w="med" len="med"/>
-                      <a:tailEnd type="none" w="med" len="med"/>
-                    </a:lnR>
-                    <a:lnT w="12700" cap="flat" cmpd="sng" algn="ctr">
-                      <a:solidFill>
-                        <a:srgbClr val="C8E6DF"/>
-                      </a:solidFill>
-                      <a:prstDash val="solid"/>
-                      <a:round/>
-                      <a:headEnd type="none" w="med" len="med"/>
-                      <a:tailEnd type="none" w="med" len="med"/>
-                    </a:lnT>
-                    <a:lnB w="12700" cap="flat" cmpd="sng" algn="ctr">
-                      <a:solidFill>
-                        <a:srgbClr val="C8E6DF"/>
-                      </a:solidFill>
-                      <a:prstDash val="solid"/>
-                      <a:round/>
-                      <a:headEnd type="none" w="med" len="med"/>
-                      <a:tailEnd type="none" w="med" len="med"/>
-                    </a:lnB>
-                  </a:tcPr>
-                </a:tc>
-              </a:tr>
-              <a:tr h="256032">
-                <a:tc>
-                  <a:txBody>
-                    <a:bodyPr/>
-                    <a:lstStyle/>
-                    <a:p>
-                      <a:pPr indent="0" marL="0">
-                        <a:buNone/>
-                      </a:pPr>
-                      <a:r>
-                        <a:rPr lang="en-US" sz="1000" dirty="0">
-                          <a:solidFill>
-                            <a:srgbClr val="475569"/>
-                          </a:solidFill>
-                          <a:latin typeface="Malgun Gothic" pitchFamily="34" charset="0"/>
-                          <a:ea typeface="Malgun Gothic" pitchFamily="34" charset="-122"/>
-                          <a:cs typeface="Malgun Gothic" pitchFamily="34" charset="-120"/>
-                        </a:rPr>
-                        <a:t>구현내용</a:t>
-                      </a:r>
-                      <a:endParaRPr lang="en-US" sz="1000" dirty="0">
-                        <a:latin typeface="Malgun Gothic" charset="0"/>
-                        <a:ea typeface="Malgun Gothic" charset="0"/>
-                        <a:cs typeface="Malgun Gothic" charset="0"/>
-                      </a:endParaRPr>
-                    </a:p>
-                  </a:txBody>
-                  <a:tcPr marL="91440" marR="91440" marT="45720" marB="45720">
-                    <a:lnL w="12700" cap="flat" cmpd="sng" algn="ctr">
-                      <a:solidFill>
-                        <a:srgbClr val="C8E6DF"/>
-                      </a:solidFill>
-                      <a:prstDash val="solid"/>
-                      <a:round/>
-                      <a:headEnd type="none" w="med" len="med"/>
-                      <a:tailEnd type="none" w="med" len="med"/>
-                    </a:lnL>
-                    <a:lnR w="12700" cap="flat" cmpd="sng" algn="ctr">
-                      <a:solidFill>
-                        <a:srgbClr val="C8E6DF"/>
-                      </a:solidFill>
-                      <a:prstDash val="solid"/>
-                      <a:round/>
-                      <a:headEnd type="none" w="med" len="med"/>
-                      <a:tailEnd type="none" w="med" len="med"/>
-                    </a:lnR>
-                    <a:lnT w="12700" cap="flat" cmpd="sng" algn="ctr">
-                      <a:solidFill>
-                        <a:srgbClr val="C8E6DF"/>
-                      </a:solidFill>
-                      <a:prstDash val="solid"/>
-                      <a:round/>
-                      <a:headEnd type="none" w="med" len="med"/>
-                      <a:tailEnd type="none" w="med" len="med"/>
-                    </a:lnT>
-                    <a:lnB w="12700" cap="flat" cmpd="sng" algn="ctr">
-                      <a:solidFill>
-                        <a:srgbClr val="C8E6DF"/>
-                      </a:solidFill>
-                      <a:prstDash val="solid"/>
-                      <a:round/>
-                      <a:headEnd type="none" w="med" len="med"/>
-                      <a:tailEnd type="none" w="med" len="med"/>
-                    </a:lnB>
-                  </a:tcPr>
-                </a:tc>
-                <a:tc>
-                  <a:txBody>
-                    <a:bodyPr/>
-                    <a:lstStyle/>
-                    <a:p>
-                      <a:pPr indent="0" marL="0">
-                        <a:buNone/>
-                      </a:pPr>
-                      <a:r>
-                        <a:rPr lang="en-US" sz="1000" dirty="0">
-                          <a:solidFill>
-                            <a:srgbClr val="475569"/>
-                          </a:solidFill>
-                          <a:latin typeface="Malgun Gothic" pitchFamily="34" charset="0"/>
-                          <a:ea typeface="Malgun Gothic" pitchFamily="34" charset="-122"/>
-                          <a:cs typeface="Malgun Gothic" pitchFamily="34" charset="-120"/>
-                        </a:rPr>
-                        <a:t>단계별 수행 과정 및 가로 흐름 다이어그램을 카드와 화살표 그리드로 렌더링해 줍니다.</a:t>
-                      </a:r>
-                      <a:endParaRPr lang="en-US" sz="1000" dirty="0">
-                        <a:latin typeface="Malgun Gothic" charset="0"/>
-                        <a:ea typeface="Malgun Gothic" charset="0"/>
-                        <a:cs typeface="Malgun Gothic" charset="0"/>
-                      </a:endParaRPr>
-                    </a:p>
-                  </a:txBody>
-                  <a:tcPr marL="91440" marR="91440" marT="45720" marB="45720">
-                    <a:lnL w="12700" cap="flat" cmpd="sng" algn="ctr">
-                      <a:solidFill>
-                        <a:srgbClr val="C8E6DF"/>
-                      </a:solidFill>
-                      <a:prstDash val="solid"/>
-                      <a:round/>
-                      <a:headEnd type="none" w="med" len="med"/>
-                      <a:tailEnd type="none" w="med" len="med"/>
-                    </a:lnL>
-                    <a:lnR w="12700" cap="flat" cmpd="sng" algn="ctr">
-                      <a:solidFill>
-                        <a:srgbClr val="C8E6DF"/>
-                      </a:solidFill>
-                      <a:prstDash val="solid"/>
-                      <a:round/>
-                      <a:headEnd type="none" w="med" len="med"/>
-                      <a:tailEnd type="none" w="med" len="med"/>
-                    </a:lnR>
-                    <a:lnT w="12700" cap="flat" cmpd="sng" algn="ctr">
-                      <a:solidFill>
-                        <a:srgbClr val="C8E6DF"/>
-                      </a:solidFill>
-                      <a:prstDash val="solid"/>
-                      <a:round/>
-                      <a:headEnd type="none" w="med" len="med"/>
-                      <a:tailEnd type="none" w="med" len="med"/>
-                    </a:lnT>
-                    <a:lnB w="12700" cap="flat" cmpd="sng" algn="ctr">
-                      <a:solidFill>
-                        <a:srgbClr val="C8E6DF"/>
-                      </a:solidFill>
-                      <a:prstDash val="solid"/>
-                      <a:round/>
-                      <a:headEnd type="none" w="med" len="med"/>
-                      <a:tailEnd type="none" w="med" len="med"/>
-                    </a:lnB>
-                  </a:tcPr>
-                </a:tc>
-              </a:tr>
-            </a:tbl>
-          </a:graphicData>
-        </a:graphic>
-      </p:graphicFrame>
-      <p:sp>
-        <p:nvSpPr>
-          <p:cNvPr id="8" name="Text 5"/>
-          <p:cNvSpPr/>
-          <p:nvPr/>
-        </p:nvSpPr>
-        <p:spPr>
-          <a:xfrm>
-            <a:off x="685800" y="2295144"/>
+      <p:sp>
+        <p:nvSpPr>
+          <p:cNvPr id="7" name="Text 5"/>
+          <p:cNvSpPr/>
+          <p:nvPr/>
+        </p:nvSpPr>
+        <p:spPr>
+          <a:xfrm>
+            <a:off x="685800" y="1325880"/>
             <a:ext cx="10820095" cy="237490"/>
           </a:xfrm>
           <a:prstGeom prst="rect">
@@ -35390,6 +34195,45 @@
                 <a:ea typeface="Malgun Gothic" pitchFamily="34" charset="-122"/>
                 <a:cs typeface="Malgun Gothic" pitchFamily="34" charset="-120"/>
               </a:rPr>
+              <a:t>desc에 \n(YAML 멀티라인 |)으로 줄을 나누면 자동으로 불릿 목록이 됩니다. 줄 앞에 이모지를 쓰면 그 이모지가 불릿으로 사용됩니다.</a:t>
+            </a:r>
+            <a:endParaRPr lang="en-US" sz="1100" dirty="0"/>
+          </a:p>
+        </p:txBody>
+      </p:sp>
+      <p:sp>
+        <p:nvSpPr>
+          <p:cNvPr id="8" name="Text 6"/>
+          <p:cNvSpPr/>
+          <p:nvPr/>
+        </p:nvSpPr>
+        <p:spPr>
+          <a:xfrm>
+            <a:off x="685800" y="1700530"/>
+            <a:ext cx="10820095" cy="237490"/>
+          </a:xfrm>
+          <a:prstGeom prst="rect">
+            <a:avLst/>
+          </a:prstGeom>
+          <a:noFill/>
+          <a:ln/>
+        </p:spPr>
+        <p:txBody>
+          <a:bodyPr wrap="square" rtlCol="0" anchor="t"/>
+          <a:lstStyle/>
+          <a:p>
+            <a:pPr indent="0" marL="0">
+              <a:buNone/>
+            </a:pPr>
+            <a:r>
+              <a:rPr lang="en-US" sz="1100" dirty="0">
+                <a:solidFill>
+                  <a:srgbClr val="475569"/>
+                </a:solidFill>
+                <a:latin typeface="Malgun Gothic" pitchFamily="34" charset="0"/>
+                <a:ea typeface="Malgun Gothic" pitchFamily="34" charset="-122"/>
+                <a:cs typeface="Malgun Gothic" pitchFamily="34" charset="-120"/>
+              </a:rPr>
               <a:t>숏코드 입력내용</a:t>
             </a:r>
             <a:endParaRPr lang="en-US" sz="1100" dirty="0"/>
@@ -35398,14 +34242,14 @@
       </p:sp>
       <p:sp>
         <p:nvSpPr>
-          <p:cNvPr id="9" name="Shape 6"/>
-          <p:cNvSpPr/>
-          <p:nvPr/>
-        </p:nvSpPr>
-        <p:spPr>
-          <a:xfrm>
-            <a:off x="685800" y="2669794"/>
-            <a:ext cx="10820095" cy="3853180"/>
+          <p:cNvPr id="9" name="Shape 7"/>
+          <p:cNvSpPr/>
+          <p:nvPr/>
+        </p:nvSpPr>
+        <p:spPr>
+          <a:xfrm>
+            <a:off x="685800" y="2075180"/>
+            <a:ext cx="10820095" cy="3637280"/>
           </a:xfrm>
           <a:prstGeom prst="rect">
             <a:avLst/>
@@ -35423,14 +34267,14 @@
       </p:sp>
       <p:sp>
         <p:nvSpPr>
-          <p:cNvPr id="10" name="Text 7"/>
-          <p:cNvSpPr/>
-          <p:nvPr/>
-        </p:nvSpPr>
-        <p:spPr>
-          <a:xfrm>
-            <a:off x="795528" y="2742946"/>
-            <a:ext cx="10600639" cy="3761740"/>
+          <p:cNvPr id="10" name="Text 8"/>
+          <p:cNvSpPr/>
+          <p:nvPr/>
+        </p:nvSpPr>
+        <p:spPr>
+          <a:xfrm>
+            <a:off x="795528" y="2148332"/>
+            <a:ext cx="10600639" cy="3545840"/>
           </a:xfrm>
           <a:prstGeom prst="rect">
             <a:avLst/>
@@ -35454,7 +34298,7 @@
                 <a:ea typeface="Consolas" pitchFamily="34" charset="-122"/>
                 <a:cs typeface="Consolas" pitchFamily="34" charset="-120"/>
               </a:rPr>
-              <a:t>\::: flow</a:t>
+              <a:t>\::: step-list</a:t>
             </a:r>
             <a:endParaRPr lang="en-US" sz="1000" dirty="0"/>
           </a:p>
@@ -35471,7 +34315,7 @@
                 <a:ea typeface="Consolas" pitchFamily="34" charset="-122"/>
                 <a:cs typeface="Consolas" pitchFamily="34" charset="-120"/>
               </a:rPr>
-              <a:t>- icon: "🧑"</a:t>
+              <a:t>- title: "기본 불릿 (SVG 체크)"</a:t>
             </a:r>
             <a:endParaRPr lang="en-US" sz="1000" dirty="0"/>
           </a:p>
@@ -35488,7 +34332,7 @@
                 <a:ea typeface="Consolas" pitchFamily="34" charset="-122"/>
                 <a:cs typeface="Consolas" pitchFamily="34" charset="-120"/>
               </a:rPr>
-              <a:t>  title: "사람"</a:t>
+              <a:t>  desc: |</a:t>
             </a:r>
             <a:endParaRPr lang="en-US" sz="1000" dirty="0"/>
           </a:p>
@@ -35505,7 +34349,7 @@
                 <a:ea typeface="Consolas" pitchFamily="34" charset="-122"/>
                 <a:cs typeface="Consolas" pitchFamily="34" charset="-120"/>
               </a:rPr>
-              <a:t>  desc: "원하는 것 설명"</a:t>
+              <a:t>    첫 번째 항목</a:t>
             </a:r>
             <a:endParaRPr lang="en-US" sz="1000" dirty="0"/>
           </a:p>
@@ -35522,7 +34366,7 @@
                 <a:ea typeface="Consolas" pitchFamily="34" charset="-122"/>
                 <a:cs typeface="Consolas" pitchFamily="34" charset="-120"/>
               </a:rPr>
-              <a:t>  tag: "active"</a:t>
+              <a:t>    두 번째 항목</a:t>
             </a:r>
             <a:endParaRPr lang="en-US" sz="1000" dirty="0"/>
           </a:p>
@@ -35539,7 +34383,7 @@
                 <a:ea typeface="Consolas" pitchFamily="34" charset="-122"/>
                 <a:cs typeface="Consolas" pitchFamily="34" charset="-120"/>
               </a:rPr>
-              <a:t>- icon: "→"</a:t>
+              <a:t>    세 번째 항목</a:t>
             </a:r>
             <a:endParaRPr lang="en-US" sz="1000" dirty="0"/>
           </a:p>
@@ -35556,7 +34400,7 @@
                 <a:ea typeface="Consolas" pitchFamily="34" charset="-122"/>
                 <a:cs typeface="Consolas" pitchFamily="34" charset="-120"/>
               </a:rPr>
-              <a:t>  title: "→"</a:t>
+              <a:t>- title: "이모지 불릿"</a:t>
             </a:r>
             <a:endParaRPr lang="en-US" sz="1000" dirty="0"/>
           </a:p>
@@ -35573,7 +34417,7 @@
                 <a:ea typeface="Consolas" pitchFamily="34" charset="-122"/>
                 <a:cs typeface="Consolas" pitchFamily="34" charset="-120"/>
               </a:rPr>
-              <a:t>- icon: "🤖"</a:t>
+              <a:t>  desc: |</a:t>
             </a:r>
             <a:endParaRPr lang="en-US" sz="1000" dirty="0"/>
           </a:p>
@@ -35590,7 +34434,7 @@
                 <a:ea typeface="Consolas" pitchFamily="34" charset="-122"/>
                 <a:cs typeface="Consolas" pitchFamily="34" charset="-120"/>
               </a:rPr>
-              <a:t>  title: "AI"</a:t>
+              <a:t>    ✅ 완료된 항목</a:t>
             </a:r>
             <a:endParaRPr lang="en-US" sz="1000" dirty="0"/>
           </a:p>
@@ -35607,7 +34451,7 @@
                 <a:ea typeface="Consolas" pitchFamily="34" charset="-122"/>
                 <a:cs typeface="Consolas" pitchFamily="34" charset="-120"/>
               </a:rPr>
-              <a:t>  desc: "코드 생성"</a:t>
+              <a:t>    🔥 중요 항목</a:t>
             </a:r>
             <a:endParaRPr lang="en-US" sz="1000" dirty="0"/>
           </a:p>
@@ -35624,7 +34468,7 @@
                 <a:ea typeface="Consolas" pitchFamily="34" charset="-122"/>
                 <a:cs typeface="Consolas" pitchFamily="34" charset="-120"/>
               </a:rPr>
-              <a:t>- icon: "→"</a:t>
+              <a:t>    📌 참고 항목</a:t>
             </a:r>
             <a:endParaRPr lang="en-US" sz="1000" dirty="0"/>
           </a:p>
@@ -35641,7 +34485,7 @@
                 <a:ea typeface="Consolas" pitchFamily="34" charset="-122"/>
                 <a:cs typeface="Consolas" pitchFamily="34" charset="-120"/>
               </a:rPr>
-              <a:t>  title: "→"</a:t>
+              <a:t>- title: "표준 마커 → SVG로 변환"</a:t>
             </a:r>
             <a:endParaRPr lang="en-US" sz="1000" dirty="0"/>
           </a:p>
@@ -35658,7 +34502,7 @@
                 <a:ea typeface="Consolas" pitchFamily="34" charset="-122"/>
                 <a:cs typeface="Consolas" pitchFamily="34" charset="-120"/>
               </a:rPr>
-              <a:t>- icon: "✅"</a:t>
+              <a:t>  desc: |</a:t>
             </a:r>
             <a:endParaRPr lang="en-US" sz="1000" dirty="0"/>
           </a:p>
@@ -35675,7 +34519,7 @@
                 <a:ea typeface="Consolas" pitchFamily="34" charset="-122"/>
                 <a:cs typeface="Consolas" pitchFamily="34" charset="-120"/>
               </a:rPr>
-              <a:t>  title: "완성"</a:t>
+              <a:t>    - 마이너스 기호</a:t>
             </a:r>
             <a:endParaRPr lang="en-US" sz="1000" dirty="0"/>
           </a:p>
@@ -35692,7 +34536,7 @@
                 <a:ea typeface="Consolas" pitchFamily="34" charset="-122"/>
                 <a:cs typeface="Consolas" pitchFamily="34" charset="-120"/>
               </a:rPr>
-              <a:t>  desc: "결과물"</a:t>
+              <a:t>    • 불릿 기호</a:t>
             </a:r>
             <a:endParaRPr lang="en-US" sz="1000" dirty="0"/>
           </a:p>
@@ -35709,10 +34553,164 @@
                 <a:ea typeface="Consolas" pitchFamily="34" charset="-122"/>
                 <a:cs typeface="Consolas" pitchFamily="34" charset="-120"/>
               </a:rPr>
-              <a:t>  tag: "active"</a:t>
+              <a:t>\:::</a:t>
             </a:r>
             <a:endParaRPr lang="en-US" sz="1000" dirty="0"/>
           </a:p>
+        </p:txBody>
+      </p:sp>
+      <p:sp>
+        <p:nvSpPr>
+          <p:cNvPr id="11" name="Shape 9"/>
+          <p:cNvSpPr/>
+          <p:nvPr/>
+        </p:nvSpPr>
+        <p:spPr>
+          <a:xfrm>
+            <a:off x="457200" y="6169660"/>
+            <a:ext cx="658368" cy="658368"/>
+          </a:xfrm>
+          <a:prstGeom prst="roundRect">
+            <a:avLst>
+              <a:gd name="adj" fmla="val 11111"/>
+            </a:avLst>
+          </a:prstGeom>
+          <a:solidFill>
+            <a:srgbClr val="FFFFFF"/>
+          </a:solidFill>
+          <a:ln w="9525">
+            <a:solidFill>
+              <a:srgbClr val="C8E6DF"/>
+            </a:solidFill>
+            <a:prstDash val="solid"/>
+          </a:ln>
+        </p:spPr>
+      </p:sp>
+      <p:sp>
+        <p:nvSpPr>
+          <p:cNvPr id="12" name="Shape 10"/>
+          <p:cNvSpPr/>
+          <p:nvPr/>
+        </p:nvSpPr>
+        <p:spPr>
+          <a:xfrm>
+            <a:off x="548640" y="6306820"/>
+            <a:ext cx="384048" cy="384048"/>
+          </a:xfrm>
+          <a:prstGeom prst="roundRect">
+            <a:avLst>
+              <a:gd name="adj" fmla="val 23810"/>
+            </a:avLst>
+          </a:prstGeom>
+          <a:solidFill>
+            <a:srgbClr val="10A37F"/>
+          </a:solidFill>
+          <a:ln w="12700">
+            <a:solidFill>
+              <a:srgbClr val="10A37F"/>
+            </a:solidFill>
+            <a:prstDash val="solid"/>
+          </a:ln>
+        </p:spPr>
+      </p:sp>
+      <p:sp>
+        <p:nvSpPr>
+          <p:cNvPr id="13" name="Text 11"/>
+          <p:cNvSpPr/>
+          <p:nvPr/>
+        </p:nvSpPr>
+        <p:spPr>
+          <a:xfrm>
+            <a:off x="548640" y="6306820"/>
+            <a:ext cx="384048" cy="384048"/>
+          </a:xfrm>
+          <a:prstGeom prst="rect">
+            <a:avLst/>
+          </a:prstGeom>
+          <a:noFill/>
+          <a:ln/>
+        </p:spPr>
+        <p:txBody>
+          <a:bodyPr wrap="square" rtlCol="0" anchor="ctr"/>
+          <a:lstStyle/>
+          <a:p>
+            <a:pPr algn="ctr" indent="0" marL="0">
+              <a:buNone/>
+            </a:pPr>
+            <a:r>
+              <a:rPr lang="en-US" sz="1300" b="1" dirty="0">
+                <a:solidFill>
+                  <a:srgbClr val="FFFFFF"/>
+                </a:solidFill>
+                <a:latin typeface="Malgun Gothic" pitchFamily="34" charset="0"/>
+                <a:ea typeface="Malgun Gothic" pitchFamily="34" charset="-122"/>
+                <a:cs typeface="Malgun Gothic" pitchFamily="34" charset="-120"/>
+              </a:rPr>
+              <a:t>1</a:t>
+            </a:r>
+            <a:endParaRPr lang="en-US" sz="1300" dirty="0"/>
+          </a:p>
+        </p:txBody>
+      </p:sp>
+      <p:sp>
+        <p:nvSpPr>
+          <p:cNvPr id="14" name="Text 12"/>
+          <p:cNvSpPr/>
+          <p:nvPr/>
+        </p:nvSpPr>
+        <p:spPr>
+          <a:xfrm>
+            <a:off x="1042416" y="6233668"/>
+            <a:ext cx="10600639" cy="237744"/>
+          </a:xfrm>
+          <a:prstGeom prst="rect">
+            <a:avLst/>
+          </a:prstGeom>
+          <a:noFill/>
+          <a:ln/>
+        </p:spPr>
+        <p:txBody>
+          <a:bodyPr wrap="square" rtlCol="0" anchor="t"/>
+          <a:lstStyle/>
+          <a:p>
+            <a:pPr indent="0" marL="0">
+              <a:buNone/>
+            </a:pPr>
+            <a:r>
+              <a:rPr lang="en-US" sz="1100" b="1" dirty="0">
+                <a:solidFill>
+                  <a:srgbClr val="1A1A2E"/>
+                </a:solidFill>
+                <a:latin typeface="Malgun Gothic" pitchFamily="34" charset="0"/>
+                <a:ea typeface="Malgun Gothic" pitchFamily="34" charset="-122"/>
+                <a:cs typeface="Malgun Gothic" pitchFamily="34" charset="-120"/>
+              </a:rPr>
+              <a:t>기본 불릿 (SVG 체크)</a:t>
+            </a:r>
+            <a:endParaRPr lang="en-US" sz="1100" dirty="0"/>
+          </a:p>
+        </p:txBody>
+      </p:sp>
+      <p:sp>
+        <p:nvSpPr>
+          <p:cNvPr id="15" name="Text 13"/>
+          <p:cNvSpPr/>
+          <p:nvPr/>
+        </p:nvSpPr>
+        <p:spPr>
+          <a:xfrm>
+            <a:off x="1042416" y="6480556"/>
+            <a:ext cx="10600639" cy="292608"/>
+          </a:xfrm>
+          <a:prstGeom prst="rect">
+            <a:avLst/>
+          </a:prstGeom>
+          <a:noFill/>
+          <a:ln/>
+        </p:spPr>
+        <p:txBody>
+          <a:bodyPr wrap="square" rtlCol="0" anchor="t"/>
+          <a:lstStyle/>
           <a:p>
             <a:pPr indent="0" marL="0">
               <a:buNone/>
@@ -35720,13 +34718,440 @@
             <a:r>
               <a:rPr lang="en-US" sz="1000" dirty="0">
                 <a:solidFill>
-                  <a:srgbClr val="A8B2D8"/>
-                </a:solidFill>
-                <a:latin typeface="Consolas" pitchFamily="34" charset="0"/>
-                <a:ea typeface="Consolas" pitchFamily="34" charset="-122"/>
-                <a:cs typeface="Consolas" pitchFamily="34" charset="-120"/>
-              </a:rPr>
-              <a:t>\:::</a:t>
+                  <a:srgbClr val="475569"/>
+                </a:solidFill>
+                <a:latin typeface="Malgun Gothic" pitchFamily="34" charset="0"/>
+                <a:ea typeface="Malgun Gothic" pitchFamily="34" charset="-122"/>
+                <a:cs typeface="Malgun Gothic" pitchFamily="34" charset="-120"/>
+              </a:rPr>
+              <a:t>첫 번째 항목</a:t>
+            </a:r>
+            <a:endParaRPr lang="en-US" sz="1000" dirty="0"/>
+          </a:p>
+          <a:p>
+            <a:pPr indent="0" marL="0">
+              <a:buNone/>
+            </a:pPr>
+            <a:r>
+              <a:rPr lang="en-US" sz="1000" dirty="0">
+                <a:solidFill>
+                  <a:srgbClr val="475569"/>
+                </a:solidFill>
+                <a:latin typeface="Malgun Gothic" pitchFamily="34" charset="0"/>
+                <a:ea typeface="Malgun Gothic" pitchFamily="34" charset="-122"/>
+                <a:cs typeface="Malgun Gothic" pitchFamily="34" charset="-120"/>
+              </a:rPr>
+              <a:t>두 번째 항목</a:t>
+            </a:r>
+            <a:endParaRPr lang="en-US" sz="1000" dirty="0"/>
+          </a:p>
+          <a:p>
+            <a:pPr indent="0" marL="0">
+              <a:buNone/>
+            </a:pPr>
+            <a:r>
+              <a:rPr lang="en-US" sz="1000" dirty="0">
+                <a:solidFill>
+                  <a:srgbClr val="475569"/>
+                </a:solidFill>
+                <a:latin typeface="Malgun Gothic" pitchFamily="34" charset="0"/>
+                <a:ea typeface="Malgun Gothic" pitchFamily="34" charset="-122"/>
+                <a:cs typeface="Malgun Gothic" pitchFamily="34" charset="-120"/>
+              </a:rPr>
+              <a:t>세 번째 항목</a:t>
+            </a:r>
+            <a:endParaRPr lang="en-US" sz="1000" dirty="0"/>
+          </a:p>
+        </p:txBody>
+      </p:sp>
+      <p:sp>
+        <p:nvSpPr>
+          <p:cNvPr id="16" name="Shape 14"/>
+          <p:cNvSpPr/>
+          <p:nvPr/>
+        </p:nvSpPr>
+        <p:spPr>
+          <a:xfrm>
+            <a:off x="457200" y="6965188"/>
+            <a:ext cx="658368" cy="658368"/>
+          </a:xfrm>
+          <a:prstGeom prst="roundRect">
+            <a:avLst>
+              <a:gd name="adj" fmla="val 11111"/>
+            </a:avLst>
+          </a:prstGeom>
+          <a:solidFill>
+            <a:srgbClr val="FFFFFF"/>
+          </a:solidFill>
+          <a:ln w="9525">
+            <a:solidFill>
+              <a:srgbClr val="C8E6DF"/>
+            </a:solidFill>
+            <a:prstDash val="solid"/>
+          </a:ln>
+        </p:spPr>
+      </p:sp>
+      <p:sp>
+        <p:nvSpPr>
+          <p:cNvPr id="17" name="Shape 15"/>
+          <p:cNvSpPr/>
+          <p:nvPr/>
+        </p:nvSpPr>
+        <p:spPr>
+          <a:xfrm>
+            <a:off x="548640" y="7102348"/>
+            <a:ext cx="384048" cy="384048"/>
+          </a:xfrm>
+          <a:prstGeom prst="roundRect">
+            <a:avLst>
+              <a:gd name="adj" fmla="val 23810"/>
+            </a:avLst>
+          </a:prstGeom>
+          <a:solidFill>
+            <a:srgbClr val="10A37F"/>
+          </a:solidFill>
+          <a:ln w="12700">
+            <a:solidFill>
+              <a:srgbClr val="10A37F"/>
+            </a:solidFill>
+            <a:prstDash val="solid"/>
+          </a:ln>
+        </p:spPr>
+      </p:sp>
+      <p:sp>
+        <p:nvSpPr>
+          <p:cNvPr id="18" name="Text 16"/>
+          <p:cNvSpPr/>
+          <p:nvPr/>
+        </p:nvSpPr>
+        <p:spPr>
+          <a:xfrm>
+            <a:off x="548640" y="7102348"/>
+            <a:ext cx="384048" cy="384048"/>
+          </a:xfrm>
+          <a:prstGeom prst="rect">
+            <a:avLst/>
+          </a:prstGeom>
+          <a:noFill/>
+          <a:ln/>
+        </p:spPr>
+        <p:txBody>
+          <a:bodyPr wrap="square" rtlCol="0" anchor="ctr"/>
+          <a:lstStyle/>
+          <a:p>
+            <a:pPr algn="ctr" indent="0" marL="0">
+              <a:buNone/>
+            </a:pPr>
+            <a:r>
+              <a:rPr lang="en-US" sz="1300" b="1" dirty="0">
+                <a:solidFill>
+                  <a:srgbClr val="FFFFFF"/>
+                </a:solidFill>
+                <a:latin typeface="Malgun Gothic" pitchFamily="34" charset="0"/>
+                <a:ea typeface="Malgun Gothic" pitchFamily="34" charset="-122"/>
+                <a:cs typeface="Malgun Gothic" pitchFamily="34" charset="-120"/>
+              </a:rPr>
+              <a:t>2</a:t>
+            </a:r>
+            <a:endParaRPr lang="en-US" sz="1300" dirty="0"/>
+          </a:p>
+        </p:txBody>
+      </p:sp>
+      <p:sp>
+        <p:nvSpPr>
+          <p:cNvPr id="19" name="Text 17"/>
+          <p:cNvSpPr/>
+          <p:nvPr/>
+        </p:nvSpPr>
+        <p:spPr>
+          <a:xfrm>
+            <a:off x="1042416" y="7029196"/>
+            <a:ext cx="10600639" cy="237744"/>
+          </a:xfrm>
+          <a:prstGeom prst="rect">
+            <a:avLst/>
+          </a:prstGeom>
+          <a:noFill/>
+          <a:ln/>
+        </p:spPr>
+        <p:txBody>
+          <a:bodyPr wrap="square" rtlCol="0" anchor="t"/>
+          <a:lstStyle/>
+          <a:p>
+            <a:pPr indent="0" marL="0">
+              <a:buNone/>
+            </a:pPr>
+            <a:r>
+              <a:rPr lang="en-US" sz="1100" b="1" dirty="0">
+                <a:solidFill>
+                  <a:srgbClr val="1A1A2E"/>
+                </a:solidFill>
+                <a:latin typeface="Malgun Gothic" pitchFamily="34" charset="0"/>
+                <a:ea typeface="Malgun Gothic" pitchFamily="34" charset="-122"/>
+                <a:cs typeface="Malgun Gothic" pitchFamily="34" charset="-120"/>
+              </a:rPr>
+              <a:t>이모지 불릿</a:t>
+            </a:r>
+            <a:endParaRPr lang="en-US" sz="1100" dirty="0"/>
+          </a:p>
+        </p:txBody>
+      </p:sp>
+      <p:sp>
+        <p:nvSpPr>
+          <p:cNvPr id="20" name="Text 18"/>
+          <p:cNvSpPr/>
+          <p:nvPr/>
+        </p:nvSpPr>
+        <p:spPr>
+          <a:xfrm>
+            <a:off x="1042416" y="7276084"/>
+            <a:ext cx="10600639" cy="292608"/>
+          </a:xfrm>
+          <a:prstGeom prst="rect">
+            <a:avLst/>
+          </a:prstGeom>
+          <a:noFill/>
+          <a:ln/>
+        </p:spPr>
+        <p:txBody>
+          <a:bodyPr wrap="square" rtlCol="0" anchor="t"/>
+          <a:lstStyle/>
+          <a:p>
+            <a:pPr indent="0" marL="0">
+              <a:buNone/>
+            </a:pPr>
+            <a:r>
+              <a:rPr lang="en-US" sz="1000" dirty="0">
+                <a:solidFill>
+                  <a:srgbClr val="475569"/>
+                </a:solidFill>
+                <a:latin typeface="Malgun Gothic" pitchFamily="34" charset="0"/>
+                <a:ea typeface="Malgun Gothic" pitchFamily="34" charset="-122"/>
+                <a:cs typeface="Malgun Gothic" pitchFamily="34" charset="-120"/>
+              </a:rPr>
+              <a:t>✅ 완료된 항목</a:t>
+            </a:r>
+            <a:endParaRPr lang="en-US" sz="1000" dirty="0"/>
+          </a:p>
+          <a:p>
+            <a:pPr indent="0" marL="0">
+              <a:buNone/>
+            </a:pPr>
+            <a:r>
+              <a:rPr lang="en-US" sz="1000" dirty="0">
+                <a:solidFill>
+                  <a:srgbClr val="475569"/>
+                </a:solidFill>
+                <a:latin typeface="Malgun Gothic" pitchFamily="34" charset="0"/>
+                <a:ea typeface="Malgun Gothic" pitchFamily="34" charset="-122"/>
+                <a:cs typeface="Malgun Gothic" pitchFamily="34" charset="-120"/>
+              </a:rPr>
+              <a:t>🔥 중요 항목</a:t>
+            </a:r>
+            <a:endParaRPr lang="en-US" sz="1000" dirty="0"/>
+          </a:p>
+          <a:p>
+            <a:pPr indent="0" marL="0">
+              <a:buNone/>
+            </a:pPr>
+            <a:r>
+              <a:rPr lang="en-US" sz="1000" dirty="0">
+                <a:solidFill>
+                  <a:srgbClr val="475569"/>
+                </a:solidFill>
+                <a:latin typeface="Malgun Gothic" pitchFamily="34" charset="0"/>
+                <a:ea typeface="Malgun Gothic" pitchFamily="34" charset="-122"/>
+                <a:cs typeface="Malgun Gothic" pitchFamily="34" charset="-120"/>
+              </a:rPr>
+              <a:t>📌 참고 항목</a:t>
+            </a:r>
+            <a:endParaRPr lang="en-US" sz="1000" dirty="0"/>
+          </a:p>
+        </p:txBody>
+      </p:sp>
+      <p:sp>
+        <p:nvSpPr>
+          <p:cNvPr id="21" name="Shape 19"/>
+          <p:cNvSpPr/>
+          <p:nvPr/>
+        </p:nvSpPr>
+        <p:spPr>
+          <a:xfrm>
+            <a:off x="457200" y="7760716"/>
+            <a:ext cx="658368" cy="658368"/>
+          </a:xfrm>
+          <a:prstGeom prst="roundRect">
+            <a:avLst>
+              <a:gd name="adj" fmla="val 11111"/>
+            </a:avLst>
+          </a:prstGeom>
+          <a:solidFill>
+            <a:srgbClr val="FFFFFF"/>
+          </a:solidFill>
+          <a:ln w="9525">
+            <a:solidFill>
+              <a:srgbClr val="C8E6DF"/>
+            </a:solidFill>
+            <a:prstDash val="solid"/>
+          </a:ln>
+        </p:spPr>
+      </p:sp>
+      <p:sp>
+        <p:nvSpPr>
+          <p:cNvPr id="22" name="Shape 20"/>
+          <p:cNvSpPr/>
+          <p:nvPr/>
+        </p:nvSpPr>
+        <p:spPr>
+          <a:xfrm>
+            <a:off x="548640" y="7897876"/>
+            <a:ext cx="384048" cy="384048"/>
+          </a:xfrm>
+          <a:prstGeom prst="roundRect">
+            <a:avLst>
+              <a:gd name="adj" fmla="val 23810"/>
+            </a:avLst>
+          </a:prstGeom>
+          <a:solidFill>
+            <a:srgbClr val="10A37F"/>
+          </a:solidFill>
+          <a:ln w="12700">
+            <a:solidFill>
+              <a:srgbClr val="10A37F"/>
+            </a:solidFill>
+            <a:prstDash val="solid"/>
+          </a:ln>
+        </p:spPr>
+      </p:sp>
+      <p:sp>
+        <p:nvSpPr>
+          <p:cNvPr id="23" name="Text 21"/>
+          <p:cNvSpPr/>
+          <p:nvPr/>
+        </p:nvSpPr>
+        <p:spPr>
+          <a:xfrm>
+            <a:off x="548640" y="7897876"/>
+            <a:ext cx="384048" cy="384048"/>
+          </a:xfrm>
+          <a:prstGeom prst="rect">
+            <a:avLst/>
+          </a:prstGeom>
+          <a:noFill/>
+          <a:ln/>
+        </p:spPr>
+        <p:txBody>
+          <a:bodyPr wrap="square" rtlCol="0" anchor="ctr"/>
+          <a:lstStyle/>
+          <a:p>
+            <a:pPr algn="ctr" indent="0" marL="0">
+              <a:buNone/>
+            </a:pPr>
+            <a:r>
+              <a:rPr lang="en-US" sz="1300" b="1" dirty="0">
+                <a:solidFill>
+                  <a:srgbClr val="FFFFFF"/>
+                </a:solidFill>
+                <a:latin typeface="Malgun Gothic" pitchFamily="34" charset="0"/>
+                <a:ea typeface="Malgun Gothic" pitchFamily="34" charset="-122"/>
+                <a:cs typeface="Malgun Gothic" pitchFamily="34" charset="-120"/>
+              </a:rPr>
+              <a:t>3</a:t>
+            </a:r>
+            <a:endParaRPr lang="en-US" sz="1300" dirty="0"/>
+          </a:p>
+        </p:txBody>
+      </p:sp>
+      <p:sp>
+        <p:nvSpPr>
+          <p:cNvPr id="24" name="Text 22"/>
+          <p:cNvSpPr/>
+          <p:nvPr/>
+        </p:nvSpPr>
+        <p:spPr>
+          <a:xfrm>
+            <a:off x="1042416" y="7824724"/>
+            <a:ext cx="10600639" cy="237744"/>
+          </a:xfrm>
+          <a:prstGeom prst="rect">
+            <a:avLst/>
+          </a:prstGeom>
+          <a:noFill/>
+          <a:ln/>
+        </p:spPr>
+        <p:txBody>
+          <a:bodyPr wrap="square" rtlCol="0" anchor="t"/>
+          <a:lstStyle/>
+          <a:p>
+            <a:pPr indent="0" marL="0">
+              <a:buNone/>
+            </a:pPr>
+            <a:r>
+              <a:rPr lang="en-US" sz="1100" b="1" dirty="0">
+                <a:solidFill>
+                  <a:srgbClr val="1A1A2E"/>
+                </a:solidFill>
+                <a:latin typeface="Malgun Gothic" pitchFamily="34" charset="0"/>
+                <a:ea typeface="Malgun Gothic" pitchFamily="34" charset="-122"/>
+                <a:cs typeface="Malgun Gothic" pitchFamily="34" charset="-120"/>
+              </a:rPr>
+              <a:t>표준 마커 → SVG로 변환</a:t>
+            </a:r>
+            <a:endParaRPr lang="en-US" sz="1100" dirty="0"/>
+          </a:p>
+        </p:txBody>
+      </p:sp>
+      <p:sp>
+        <p:nvSpPr>
+          <p:cNvPr id="25" name="Text 23"/>
+          <p:cNvSpPr/>
+          <p:nvPr/>
+        </p:nvSpPr>
+        <p:spPr>
+          <a:xfrm>
+            <a:off x="1042416" y="8071612"/>
+            <a:ext cx="10600639" cy="292608"/>
+          </a:xfrm>
+          <a:prstGeom prst="rect">
+            <a:avLst/>
+          </a:prstGeom>
+          <a:noFill/>
+          <a:ln/>
+        </p:spPr>
+        <p:txBody>
+          <a:bodyPr wrap="square" rtlCol="0" anchor="t"/>
+          <a:lstStyle/>
+          <a:p>
+            <a:pPr indent="0" marL="0">
+              <a:buNone/>
+            </a:pPr>
+            <a:r>
+              <a:rPr lang="en-US" sz="1000" dirty="0">
+                <a:solidFill>
+                  <a:srgbClr val="475569"/>
+                </a:solidFill>
+                <a:latin typeface="Malgun Gothic" pitchFamily="34" charset="0"/>
+                <a:ea typeface="Malgun Gothic" pitchFamily="34" charset="-122"/>
+                <a:cs typeface="Malgun Gothic" pitchFamily="34" charset="-120"/>
+              </a:rPr>
+              <a:t>- 마이너스 기호</a:t>
+            </a:r>
+            <a:endParaRPr lang="en-US" sz="1000" dirty="0"/>
+          </a:p>
+          <a:p>
+            <a:pPr indent="0" marL="0">
+              <a:buNone/>
+            </a:pPr>
+            <a:r>
+              <a:rPr lang="en-US" sz="1000" dirty="0">
+                <a:solidFill>
+                  <a:srgbClr val="475569"/>
+                </a:solidFill>
+                <a:latin typeface="Malgun Gothic" pitchFamily="34" charset="0"/>
+                <a:ea typeface="Malgun Gothic" pitchFamily="34" charset="-122"/>
+                <a:cs typeface="Malgun Gothic" pitchFamily="34" charset="-120"/>
+              </a:rPr>
+              <a:t>• 불릿 기호</a:t>
             </a:r>
             <a:endParaRPr lang="en-US" sz="1000" dirty="0"/>
           </a:p>
@@ -35849,7 +35274,7 @@
                 <a:ea typeface="Malgun Gothic" pitchFamily="34" charset="-122"/>
                 <a:cs typeface="Malgun Gothic" pitchFamily="34" charset="-120"/>
               </a:rPr>
-              <a:t>26</a:t>
+              <a:t>33</a:t>
             </a:r>
             <a:endParaRPr lang="en-US" sz="1600" dirty="0"/>
           </a:p>
@@ -35888,7 +35313,7 @@
                 <a:ea typeface="Malgun Gothic" pitchFamily="34" charset="-122"/>
                 <a:cs typeface="Malgun Gothic" pitchFamily="34" charset="-120"/>
               </a:rPr>
-              <a:t>level-grid</a:t>
+              <a:t>부록 B. bullet 필드 — 아이템별 불릿 오버라이드</a:t>
             </a:r>
             <a:endParaRPr lang="en-US" sz="2200" dirty="0"/>
           </a:p>
@@ -35903,11 +35328,11 @@
         <p:spPr>
           <a:xfrm>
             <a:off x="457200" y="1143000"/>
-            <a:ext cx="11277295" cy="4404614"/>
+            <a:ext cx="11277295" cy="3594100"/>
           </a:xfrm>
           <a:prstGeom prst="roundRect">
             <a:avLst>
-              <a:gd name="adj" fmla="val 1661"/>
+              <a:gd name="adj" fmla="val 2035"/>
             </a:avLst>
           </a:prstGeom>
           <a:solidFill>
@@ -35921,447 +35346,15 @@
           </a:ln>
         </p:spPr>
       </p:sp>
-      <p:graphicFrame>
-        <p:nvGraphicFramePr>
-          <p:cNvPr id="35" name="Table 0"/>
-          <p:cNvGraphicFramePr>
-            <a:graphicFrameLocks noGrp="1"/>
-          </p:cNvGraphicFramePr>
-          <p:nvPr>
-            <p:extLst>
-              <p:ext uri="{D42A27DB-BD31-4B8C-83A1-F6EECF244321}">
-                <p14:modId xmlns:p14="http://schemas.microsoft.com/office/powerpoint/2010/main" val="1579011935"/>
-              </p:ext>
-            </p:extLst>
-          </p:nvPr>
-        </p:nvGraphicFramePr>
-        <p:xfrm>
-          <a:off x="685800" y="1325880"/>
-          <a:ext cx="10820095" cy="914400"/>
-        </p:xfrm>
-        <a:graphic>
-          <a:graphicData uri="http://schemas.openxmlformats.org/drawingml/2006/table">
-            <a:tbl>
-              <a:tblPr/>
-              <a:tblGrid>
-                <a:gridCol w="5410048"/>
-                <a:gridCol w="5410048"/>
-              </a:tblGrid>
-              <a:tr h="320040">
-                <a:tc>
-                  <a:txBody>
-                    <a:bodyPr/>
-                    <a:lstStyle/>
-                    <a:p>
-                      <a:pPr indent="0" marL="0">
-                        <a:buNone/>
-                      </a:pPr>
-                      <a:r>
-                        <a:rPr lang="en-US" sz="1100" b="1" dirty="0">
-                          <a:solidFill>
-                            <a:srgbClr val="FFFFFF"/>
-                          </a:solidFill>
-                          <a:latin typeface="Malgun Gothic" pitchFamily="34" charset="0"/>
-                          <a:ea typeface="Malgun Gothic" pitchFamily="34" charset="-122"/>
-                          <a:cs typeface="Malgun Gothic" pitchFamily="34" charset="-120"/>
-                        </a:rPr>
-                        <a:t>항목</a:t>
-                      </a:r>
-                      <a:endParaRPr lang="en-US" sz="1100" dirty="0">
-                        <a:latin typeface="Malgun Gothic" charset="0"/>
-                        <a:ea typeface="Malgun Gothic" charset="0"/>
-                        <a:cs typeface="Malgun Gothic" charset="0"/>
-                      </a:endParaRPr>
-                    </a:p>
-                  </a:txBody>
-                  <a:tcPr marL="91440" marR="91440" marT="45720" marB="45720">
-                    <a:lnL w="12700" cap="flat" cmpd="sng" algn="ctr">
-                      <a:solidFill>
-                        <a:srgbClr val="C8E6DF"/>
-                      </a:solidFill>
-                      <a:prstDash val="solid"/>
-                      <a:round/>
-                      <a:headEnd type="none" w="med" len="med"/>
-                      <a:tailEnd type="none" w="med" len="med"/>
-                    </a:lnL>
-                    <a:lnR w="12700" cap="flat" cmpd="sng" algn="ctr">
-                      <a:solidFill>
-                        <a:srgbClr val="C8E6DF"/>
-                      </a:solidFill>
-                      <a:prstDash val="solid"/>
-                      <a:round/>
-                      <a:headEnd type="none" w="med" len="med"/>
-                      <a:tailEnd type="none" w="med" len="med"/>
-                    </a:lnR>
-                    <a:lnT w="12700" cap="flat" cmpd="sng" algn="ctr">
-                      <a:solidFill>
-                        <a:srgbClr val="C8E6DF"/>
-                      </a:solidFill>
-                      <a:prstDash val="solid"/>
-                      <a:round/>
-                      <a:headEnd type="none" w="med" len="med"/>
-                      <a:tailEnd type="none" w="med" len="med"/>
-                    </a:lnT>
-                    <a:lnB w="12700" cap="flat" cmpd="sng" algn="ctr">
-                      <a:solidFill>
-                        <a:srgbClr val="C8E6DF"/>
-                      </a:solidFill>
-                      <a:prstDash val="solid"/>
-                      <a:round/>
-                      <a:headEnd type="none" w="med" len="med"/>
-                      <a:tailEnd type="none" w="med" len="med"/>
-                    </a:lnB>
-                    <a:solidFill>
-                      <a:srgbClr val="10A37F"/>
-                    </a:solidFill>
-                  </a:tcPr>
-                </a:tc>
-                <a:tc>
-                  <a:txBody>
-                    <a:bodyPr/>
-                    <a:lstStyle/>
-                    <a:p>
-                      <a:pPr indent="0" marL="0">
-                        <a:buNone/>
-                      </a:pPr>
-                      <a:r>
-                        <a:rPr lang="en-US" sz="1100" b="1" dirty="0">
-                          <a:solidFill>
-                            <a:srgbClr val="FFFFFF"/>
-                          </a:solidFill>
-                          <a:latin typeface="Malgun Gothic" pitchFamily="34" charset="0"/>
-                          <a:ea typeface="Malgun Gothic" pitchFamily="34" charset="-122"/>
-                          <a:cs typeface="Malgun Gothic" pitchFamily="34" charset="-120"/>
-                        </a:rPr>
-                        <a:t>내용</a:t>
-                      </a:r>
-                      <a:endParaRPr lang="en-US" sz="1100" dirty="0">
-                        <a:latin typeface="Malgun Gothic" charset="0"/>
-                        <a:ea typeface="Malgun Gothic" charset="0"/>
-                        <a:cs typeface="Malgun Gothic" charset="0"/>
-                      </a:endParaRPr>
-                    </a:p>
-                  </a:txBody>
-                  <a:tcPr marL="91440" marR="91440" marT="45720" marB="45720">
-                    <a:lnL w="12700" cap="flat" cmpd="sng" algn="ctr">
-                      <a:solidFill>
-                        <a:srgbClr val="C8E6DF"/>
-                      </a:solidFill>
-                      <a:prstDash val="solid"/>
-                      <a:round/>
-                      <a:headEnd type="none" w="med" len="med"/>
-                      <a:tailEnd type="none" w="med" len="med"/>
-                    </a:lnL>
-                    <a:lnR w="12700" cap="flat" cmpd="sng" algn="ctr">
-                      <a:solidFill>
-                        <a:srgbClr val="C8E6DF"/>
-                      </a:solidFill>
-                      <a:prstDash val="solid"/>
-                      <a:round/>
-                      <a:headEnd type="none" w="med" len="med"/>
-                      <a:tailEnd type="none" w="med" len="med"/>
-                    </a:lnR>
-                    <a:lnT w="12700" cap="flat" cmpd="sng" algn="ctr">
-                      <a:solidFill>
-                        <a:srgbClr val="C8E6DF"/>
-                      </a:solidFill>
-                      <a:prstDash val="solid"/>
-                      <a:round/>
-                      <a:headEnd type="none" w="med" len="med"/>
-                      <a:tailEnd type="none" w="med" len="med"/>
-                    </a:lnT>
-                    <a:lnB w="12700" cap="flat" cmpd="sng" algn="ctr">
-                      <a:solidFill>
-                        <a:srgbClr val="C8E6DF"/>
-                      </a:solidFill>
-                      <a:prstDash val="solid"/>
-                      <a:round/>
-                      <a:headEnd type="none" w="med" len="med"/>
-                      <a:tailEnd type="none" w="med" len="med"/>
-                    </a:lnB>
-                    <a:solidFill>
-                      <a:srgbClr val="10A37F"/>
-                    </a:solidFill>
-                  </a:tcPr>
-                </a:tc>
-              </a:tr>
-              <a:tr h="256032">
-                <a:tc>
-                  <a:txBody>
-                    <a:bodyPr/>
-                    <a:lstStyle/>
-                    <a:p>
-                      <a:pPr indent="0" marL="0">
-                        <a:buNone/>
-                      </a:pPr>
-                      <a:r>
-                        <a:rPr lang="en-US" sz="1000" dirty="0">
-                          <a:solidFill>
-                            <a:srgbClr val="475569"/>
-                          </a:solidFill>
-                          <a:latin typeface="Malgun Gothic" pitchFamily="34" charset="0"/>
-                          <a:ea typeface="Malgun Gothic" pitchFamily="34" charset="-122"/>
-                          <a:cs typeface="Malgun Gothic" pitchFamily="34" charset="-120"/>
-                        </a:rPr>
-                        <a:t>숏코드 명</a:t>
-                      </a:r>
-                      <a:endParaRPr lang="en-US" sz="1000" dirty="0">
-                        <a:latin typeface="Malgun Gothic" charset="0"/>
-                        <a:ea typeface="Malgun Gothic" charset="0"/>
-                        <a:cs typeface="Malgun Gothic" charset="0"/>
-                      </a:endParaRPr>
-                    </a:p>
-                  </a:txBody>
-                  <a:tcPr marL="91440" marR="91440" marT="45720" marB="45720">
-                    <a:lnL w="12700" cap="flat" cmpd="sng" algn="ctr">
-                      <a:solidFill>
-                        <a:srgbClr val="C8E6DF"/>
-                      </a:solidFill>
-                      <a:prstDash val="solid"/>
-                      <a:round/>
-                      <a:headEnd type="none" w="med" len="med"/>
-                      <a:tailEnd type="none" w="med" len="med"/>
-                    </a:lnL>
-                    <a:lnR w="12700" cap="flat" cmpd="sng" algn="ctr">
-                      <a:solidFill>
-                        <a:srgbClr val="C8E6DF"/>
-                      </a:solidFill>
-                      <a:prstDash val="solid"/>
-                      <a:round/>
-                      <a:headEnd type="none" w="med" len="med"/>
-                      <a:tailEnd type="none" w="med" len="med"/>
-                    </a:lnR>
-                    <a:lnT w="12700" cap="flat" cmpd="sng" algn="ctr">
-                      <a:solidFill>
-                        <a:srgbClr val="C8E6DF"/>
-                      </a:solidFill>
-                      <a:prstDash val="solid"/>
-                      <a:round/>
-                      <a:headEnd type="none" w="med" len="med"/>
-                      <a:tailEnd type="none" w="med" len="med"/>
-                    </a:lnT>
-                    <a:lnB w="12700" cap="flat" cmpd="sng" algn="ctr">
-                      <a:solidFill>
-                        <a:srgbClr val="C8E6DF"/>
-                      </a:solidFill>
-                      <a:prstDash val="solid"/>
-                      <a:round/>
-                      <a:headEnd type="none" w="med" len="med"/>
-                      <a:tailEnd type="none" w="med" len="med"/>
-                    </a:lnB>
-                  </a:tcPr>
-                </a:tc>
-                <a:tc>
-                  <a:txBody>
-                    <a:bodyPr/>
-                    <a:lstStyle/>
-                    <a:p>
-                      <a:pPr indent="0" marL="0">
-                        <a:buNone/>
-                      </a:pPr>
-                      <a:r>
-                        <a:rPr lang="en-US" sz="1000" dirty="0">
-                          <a:solidFill>
-                            <a:srgbClr val="475569"/>
-                          </a:solidFill>
-                          <a:latin typeface="Malgun Gothic" pitchFamily="34" charset="0"/>
-                          <a:ea typeface="Malgun Gothic" pitchFamily="34" charset="-122"/>
-                          <a:cs typeface="Malgun Gothic" pitchFamily="34" charset="-120"/>
-                        </a:rPr>
-                        <a:t>level-grid</a:t>
-                      </a:r>
-                      <a:endParaRPr lang="en-US" sz="1000" dirty="0">
-                        <a:latin typeface="Malgun Gothic" charset="0"/>
-                        <a:ea typeface="Malgun Gothic" charset="0"/>
-                        <a:cs typeface="Malgun Gothic" charset="0"/>
-                      </a:endParaRPr>
-                    </a:p>
-                  </a:txBody>
-                  <a:tcPr marL="91440" marR="91440" marT="45720" marB="45720">
-                    <a:lnL w="12700" cap="flat" cmpd="sng" algn="ctr">
-                      <a:solidFill>
-                        <a:srgbClr val="C8E6DF"/>
-                      </a:solidFill>
-                      <a:prstDash val="solid"/>
-                      <a:round/>
-                      <a:headEnd type="none" w="med" len="med"/>
-                      <a:tailEnd type="none" w="med" len="med"/>
-                    </a:lnL>
-                    <a:lnR w="12700" cap="flat" cmpd="sng" algn="ctr">
-                      <a:solidFill>
-                        <a:srgbClr val="C8E6DF"/>
-                      </a:solidFill>
-                      <a:prstDash val="solid"/>
-                      <a:round/>
-                      <a:headEnd type="none" w="med" len="med"/>
-                      <a:tailEnd type="none" w="med" len="med"/>
-                    </a:lnR>
-                    <a:lnT w="12700" cap="flat" cmpd="sng" algn="ctr">
-                      <a:solidFill>
-                        <a:srgbClr val="C8E6DF"/>
-                      </a:solidFill>
-                      <a:prstDash val="solid"/>
-                      <a:round/>
-                      <a:headEnd type="none" w="med" len="med"/>
-                      <a:tailEnd type="none" w="med" len="med"/>
-                    </a:lnT>
-                    <a:lnB w="12700" cap="flat" cmpd="sng" algn="ctr">
-                      <a:solidFill>
-                        <a:srgbClr val="C8E6DF"/>
-                      </a:solidFill>
-                      <a:prstDash val="solid"/>
-                      <a:round/>
-                      <a:headEnd type="none" w="med" len="med"/>
-                      <a:tailEnd type="none" w="med" len="med"/>
-                    </a:lnB>
-                  </a:tcPr>
-                </a:tc>
-              </a:tr>
-              <a:tr h="256032">
-                <a:tc>
-                  <a:txBody>
-                    <a:bodyPr/>
-                    <a:lstStyle/>
-                    <a:p>
-                      <a:pPr indent="0" marL="0">
-                        <a:buNone/>
-                      </a:pPr>
-                      <a:r>
-                        <a:rPr lang="en-US" sz="1000" dirty="0">
-                          <a:solidFill>
-                            <a:srgbClr val="475569"/>
-                          </a:solidFill>
-                          <a:latin typeface="Malgun Gothic" pitchFamily="34" charset="0"/>
-                          <a:ea typeface="Malgun Gothic" pitchFamily="34" charset="-122"/>
-                          <a:cs typeface="Malgun Gothic" pitchFamily="34" charset="-120"/>
-                        </a:rPr>
-                        <a:t>구현내용</a:t>
-                      </a:r>
-                      <a:endParaRPr lang="en-US" sz="1000" dirty="0">
-                        <a:latin typeface="Malgun Gothic" charset="0"/>
-                        <a:ea typeface="Malgun Gothic" charset="0"/>
-                        <a:cs typeface="Malgun Gothic" charset="0"/>
-                      </a:endParaRPr>
-                    </a:p>
-                  </a:txBody>
-                  <a:tcPr marL="91440" marR="91440" marT="45720" marB="45720">
-                    <a:lnL w="12700" cap="flat" cmpd="sng" algn="ctr">
-                      <a:solidFill>
-                        <a:srgbClr val="C8E6DF"/>
-                      </a:solidFill>
-                      <a:prstDash val="solid"/>
-                      <a:round/>
-                      <a:headEnd type="none" w="med" len="med"/>
-                      <a:tailEnd type="none" w="med" len="med"/>
-                    </a:lnL>
-                    <a:lnR w="12700" cap="flat" cmpd="sng" algn="ctr">
-                      <a:solidFill>
-                        <a:srgbClr val="C8E6DF"/>
-                      </a:solidFill>
-                      <a:prstDash val="solid"/>
-                      <a:round/>
-                      <a:headEnd type="none" w="med" len="med"/>
-                      <a:tailEnd type="none" w="med" len="med"/>
-                    </a:lnR>
-                    <a:lnT w="12700" cap="flat" cmpd="sng" algn="ctr">
-                      <a:solidFill>
-                        <a:srgbClr val="C8E6DF"/>
-                      </a:solidFill>
-                      <a:prstDash val="solid"/>
-                      <a:round/>
-                      <a:headEnd type="none" w="med" len="med"/>
-                      <a:tailEnd type="none" w="med" len="med"/>
-                    </a:lnT>
-                    <a:lnB w="12700" cap="flat" cmpd="sng" algn="ctr">
-                      <a:solidFill>
-                        <a:srgbClr val="C8E6DF"/>
-                      </a:solidFill>
-                      <a:prstDash val="solid"/>
-                      <a:round/>
-                      <a:headEnd type="none" w="med" len="med"/>
-                      <a:tailEnd type="none" w="med" len="med"/>
-                    </a:lnB>
-                  </a:tcPr>
-                </a:tc>
-                <a:tc>
-                  <a:txBody>
-                    <a:bodyPr/>
-                    <a:lstStyle/>
-                    <a:p>
-                      <a:pPr indent="0" marL="0">
-                        <a:buNone/>
-                      </a:pPr>
-                      <a:r>
-                        <a:rPr lang="en-US" sz="1000" dirty="0">
-                          <a:solidFill>
-                            <a:srgbClr val="475569"/>
-                          </a:solidFill>
-                          <a:latin typeface="Malgun Gothic" pitchFamily="34" charset="0"/>
-                          <a:ea typeface="Malgun Gothic" pitchFamily="34" charset="-122"/>
-                          <a:cs typeface="Malgun Gothic" pitchFamily="34" charset="-120"/>
-                        </a:rPr>
-                        <a:t>난이도, 단계, 도메인 스펙트럼 로드맵 등을 가로형 카드 그리드로 렌더링해 줍니다.</a:t>
-                      </a:r>
-                      <a:endParaRPr lang="en-US" sz="1000" dirty="0">
-                        <a:latin typeface="Malgun Gothic" charset="0"/>
-                        <a:ea typeface="Malgun Gothic" charset="0"/>
-                        <a:cs typeface="Malgun Gothic" charset="0"/>
-                      </a:endParaRPr>
-                    </a:p>
-                  </a:txBody>
-                  <a:tcPr marL="91440" marR="91440" marT="45720" marB="45720">
-                    <a:lnL w="12700" cap="flat" cmpd="sng" algn="ctr">
-                      <a:solidFill>
-                        <a:srgbClr val="C8E6DF"/>
-                      </a:solidFill>
-                      <a:prstDash val="solid"/>
-                      <a:round/>
-                      <a:headEnd type="none" w="med" len="med"/>
-                      <a:tailEnd type="none" w="med" len="med"/>
-                    </a:lnL>
-                    <a:lnR w="12700" cap="flat" cmpd="sng" algn="ctr">
-                      <a:solidFill>
-                        <a:srgbClr val="C8E6DF"/>
-                      </a:solidFill>
-                      <a:prstDash val="solid"/>
-                      <a:round/>
-                      <a:headEnd type="none" w="med" len="med"/>
-                      <a:tailEnd type="none" w="med" len="med"/>
-                    </a:lnR>
-                    <a:lnT w="12700" cap="flat" cmpd="sng" algn="ctr">
-                      <a:solidFill>
-                        <a:srgbClr val="C8E6DF"/>
-                      </a:solidFill>
-                      <a:prstDash val="solid"/>
-                      <a:round/>
-                      <a:headEnd type="none" w="med" len="med"/>
-                      <a:tailEnd type="none" w="med" len="med"/>
-                    </a:lnT>
-                    <a:lnB w="12700" cap="flat" cmpd="sng" algn="ctr">
-                      <a:solidFill>
-                        <a:srgbClr val="C8E6DF"/>
-                      </a:solidFill>
-                      <a:prstDash val="solid"/>
-                      <a:round/>
-                      <a:headEnd type="none" w="med" len="med"/>
-                      <a:tailEnd type="none" w="med" len="med"/>
-                    </a:lnB>
-                  </a:tcPr>
-                </a:tc>
-              </a:tr>
-            </a:tbl>
-          </a:graphicData>
-        </a:graphic>
-      </p:graphicFrame>
-      <p:sp>
-        <p:nvSpPr>
-          <p:cNvPr id="8" name="Text 5"/>
-          <p:cNvSpPr/>
-          <p:nvPr/>
-        </p:nvSpPr>
-        <p:spPr>
-          <a:xfrm>
-            <a:off x="685800" y="2295144"/>
+      <p:sp>
+        <p:nvSpPr>
+          <p:cNvPr id="7" name="Text 5"/>
+          <p:cNvSpPr/>
+          <p:nvPr/>
+        </p:nvSpPr>
+        <p:spPr>
+          <a:xfrm>
+            <a:off x="685800" y="1325880"/>
             <a:ext cx="10820095" cy="237490"/>
           </a:xfrm>
           <a:prstGeom prst="rect">
@@ -36386,6 +35379,45 @@
                 <a:ea typeface="Malgun Gothic" pitchFamily="34" charset="-122"/>
                 <a:cs typeface="Malgun Gothic" pitchFamily="34" charset="-120"/>
               </a:rPr>
+              <a:t>아이템의 bullet: 필드로 해당 카드의 불릿 기호만 바꿀 수 있습니다.</a:t>
+            </a:r>
+            <a:endParaRPr lang="en-US" sz="1100" dirty="0"/>
+          </a:p>
+        </p:txBody>
+      </p:sp>
+      <p:sp>
+        <p:nvSpPr>
+          <p:cNvPr id="8" name="Text 6"/>
+          <p:cNvSpPr/>
+          <p:nvPr/>
+        </p:nvSpPr>
+        <p:spPr>
+          <a:xfrm>
+            <a:off x="685800" y="1700530"/>
+            <a:ext cx="10820095" cy="237490"/>
+          </a:xfrm>
+          <a:prstGeom prst="rect">
+            <a:avLst/>
+          </a:prstGeom>
+          <a:noFill/>
+          <a:ln/>
+        </p:spPr>
+        <p:txBody>
+          <a:bodyPr wrap="square" rtlCol="0" anchor="t"/>
+          <a:lstStyle/>
+          <a:p>
+            <a:pPr indent="0" marL="0">
+              <a:buNone/>
+            </a:pPr>
+            <a:r>
+              <a:rPr lang="en-US" sz="1100" dirty="0">
+                <a:solidFill>
+                  <a:srgbClr val="475569"/>
+                </a:solidFill>
+                <a:latin typeface="Malgun Gothic" pitchFamily="34" charset="0"/>
+                <a:ea typeface="Malgun Gothic" pitchFamily="34" charset="-122"/>
+                <a:cs typeface="Malgun Gothic" pitchFamily="34" charset="-120"/>
+              </a:rPr>
               <a:t>숏코드 입력내용</a:t>
             </a:r>
             <a:endParaRPr lang="en-US" sz="1100" dirty="0"/>
@@ -36394,14 +35426,14 @@
       </p:sp>
       <p:sp>
         <p:nvSpPr>
-          <p:cNvPr id="9" name="Shape 6"/>
-          <p:cNvSpPr/>
-          <p:nvPr/>
-        </p:nvSpPr>
-        <p:spPr>
-          <a:xfrm>
-            <a:off x="685800" y="2669794"/>
-            <a:ext cx="10820095" cy="2557780"/>
+          <p:cNvPr id="9" name="Shape 7"/>
+          <p:cNvSpPr/>
+          <p:nvPr/>
+        </p:nvSpPr>
+        <p:spPr>
+          <a:xfrm>
+            <a:off x="685800" y="2075180"/>
+            <a:ext cx="10820095" cy="2341880"/>
           </a:xfrm>
           <a:prstGeom prst="rect">
             <a:avLst/>
@@ -36419,14 +35451,14 @@
       </p:sp>
       <p:sp>
         <p:nvSpPr>
-          <p:cNvPr id="10" name="Text 7"/>
-          <p:cNvSpPr/>
-          <p:nvPr/>
-        </p:nvSpPr>
-        <p:spPr>
-          <a:xfrm>
-            <a:off x="795528" y="2742946"/>
-            <a:ext cx="10600639" cy="2466340"/>
+          <p:cNvPr id="10" name="Text 8"/>
+          <p:cNvSpPr/>
+          <p:nvPr/>
+        </p:nvSpPr>
+        <p:spPr>
+          <a:xfrm>
+            <a:off x="795528" y="2148332"/>
+            <a:ext cx="10600639" cy="2250440"/>
           </a:xfrm>
           <a:prstGeom prst="rect">
             <a:avLst/>
@@ -36450,7 +35482,7 @@
                 <a:ea typeface="Consolas" pitchFamily="34" charset="-122"/>
                 <a:cs typeface="Consolas" pitchFamily="34" charset="-120"/>
               </a:rPr>
-              <a:t>\::: level-grid</a:t>
+              <a:t>\::: skill-list</a:t>
             </a:r>
             <a:endParaRPr lang="en-US" sz="1000" dirty="0"/>
           </a:p>
@@ -36467,7 +35499,7 @@
                 <a:ea typeface="Consolas" pitchFamily="34" charset="-122"/>
                 <a:cs typeface="Consolas" pitchFamily="34" charset="-120"/>
               </a:rPr>
-              <a:t>- title: "LEVEL 1"</a:t>
+              <a:t>- icon: "⚡"</a:t>
             </a:r>
             <a:endParaRPr lang="en-US" sz="1000" dirty="0"/>
           </a:p>
@@ -36484,7 +35516,7 @@
                 <a:ea typeface="Consolas" pitchFamily="34" charset="-122"/>
                 <a:cs typeface="Consolas" pitchFamily="34" charset="-120"/>
               </a:rPr>
-              <a:t>  desc: "코드 자동완성"</a:t>
+              <a:t>  title: "고속 처리"</a:t>
             </a:r>
             <a:endParaRPr lang="en-US" sz="1000" dirty="0"/>
           </a:p>
@@ -36501,7 +35533,7 @@
                 <a:ea typeface="Consolas" pitchFamily="34" charset="-122"/>
                 <a:cs typeface="Consolas" pitchFamily="34" charset="-120"/>
               </a:rPr>
-              <a:t>  meta: "GitHub Copilot 인라인"</a:t>
+              <a:t>  desc: "대용량 파일도 빠르게 처리\n병렬 처리 지원\n메모리 최적화"</a:t>
             </a:r>
             <a:endParaRPr lang="en-US" sz="1000" dirty="0"/>
           </a:p>
@@ -36518,7 +35550,7 @@
                 <a:ea typeface="Consolas" pitchFamily="34" charset="-122"/>
                 <a:cs typeface="Consolas" pitchFamily="34" charset="-120"/>
               </a:rPr>
-              <a:t>  note: "다음 줄 예측, Tab으로 수락"</a:t>
+              <a:t>  bullet: "🔥"</a:t>
             </a:r>
             <a:endParaRPr lang="en-US" sz="1000" dirty="0"/>
           </a:p>
@@ -36535,7 +35567,7 @@
                 <a:ea typeface="Consolas" pitchFamily="34" charset="-122"/>
                 <a:cs typeface="Consolas" pitchFamily="34" charset="-120"/>
               </a:rPr>
-              <a:t>- title: "LEVEL 2"</a:t>
+              <a:t>- icon: "🔒"</a:t>
             </a:r>
             <a:endParaRPr lang="en-US" sz="1000" dirty="0"/>
           </a:p>
@@ -36552,7 +35584,7 @@
                 <a:ea typeface="Consolas" pitchFamily="34" charset="-122"/>
                 <a:cs typeface="Consolas" pitchFamily="34" charset="-120"/>
               </a:rPr>
-              <a:t>  desc: "대화형 생성"</a:t>
+              <a:t>  title: "보안 강화"</a:t>
             </a:r>
             <a:endParaRPr lang="en-US" sz="1000" dirty="0"/>
           </a:p>
@@ -36569,7 +35601,7 @@
                 <a:ea typeface="Consolas" pitchFamily="34" charset="-122"/>
                 <a:cs typeface="Consolas" pitchFamily="34" charset="-120"/>
               </a:rPr>
-              <a:t>  meta: "Claude.ai, ChatGPT"</a:t>
+              <a:t>  desc: "엔드투엔드 암호화\n접근 권한 관리\n감사 로그 제공"</a:t>
             </a:r>
             <a:endParaRPr lang="en-US" sz="1000" dirty="0"/>
           </a:p>
@@ -36586,24 +35618,7 @@
                 <a:ea typeface="Consolas" pitchFamily="34" charset="-122"/>
                 <a:cs typeface="Consolas" pitchFamily="34" charset="-120"/>
               </a:rPr>
-              <a:t>  note: "요청 → 붙여넣기 → 실행"</a:t>
-            </a:r>
-            <a:endParaRPr lang="en-US" sz="1000" dirty="0"/>
-          </a:p>
-          <a:p>
-            <a:pPr indent="0" marL="0">
-              <a:buNone/>
-            </a:pPr>
-            <a:r>
-              <a:rPr lang="en-US" sz="1000" dirty="0">
-                <a:solidFill>
-                  <a:srgbClr val="A8B2D8"/>
-                </a:solidFill>
-                <a:latin typeface="Consolas" pitchFamily="34" charset="0"/>
-                <a:ea typeface="Consolas" pitchFamily="34" charset="-122"/>
-                <a:cs typeface="Consolas" pitchFamily="34" charset="-120"/>
-              </a:rPr>
-              <a:t>  tag: "highlight"</a:t>
+              <a:t>  bullet: "🔐"</a:t>
             </a:r>
             <a:endParaRPr lang="en-US" sz="1000" dirty="0"/>
           </a:p>
@@ -36743,7 +35758,7 @@
                 <a:ea typeface="Malgun Gothic" pitchFamily="34" charset="-122"/>
                 <a:cs typeface="Malgun Gothic" pitchFamily="34" charset="-120"/>
               </a:rPr>
-              <a:t>27</a:t>
+              <a:t>34</a:t>
             </a:r>
             <a:endParaRPr lang="en-US" sz="1600" dirty="0"/>
           </a:p>
@@ -36782,7 +35797,7 @@
                 <a:ea typeface="Malgun Gothic" pitchFamily="34" charset="-122"/>
                 <a:cs typeface="Malgun Gothic" pitchFamily="34" charset="-120"/>
               </a:rPr>
-              <a:t>checkpoint-grid</a:t>
+              <a:t>부록 C. bullet= 블록 인자 — 블록 전체 불릿 지정</a:t>
             </a:r>
             <a:endParaRPr lang="en-US" sz="2200" dirty="0"/>
           </a:p>
@@ -36797,11 +35812,11 @@
         <p:spPr>
           <a:xfrm>
             <a:off x="457200" y="1143000"/>
-            <a:ext cx="11277295" cy="3756914"/>
+            <a:ext cx="11277295" cy="3810000"/>
           </a:xfrm>
           <a:prstGeom prst="roundRect">
             <a:avLst>
-              <a:gd name="adj" fmla="val 1947"/>
+              <a:gd name="adj" fmla="val 1920"/>
             </a:avLst>
           </a:prstGeom>
           <a:solidFill>
@@ -36815,447 +35830,15 @@
           </a:ln>
         </p:spPr>
       </p:sp>
-      <p:graphicFrame>
-        <p:nvGraphicFramePr>
-          <p:cNvPr id="36" name="Table 0"/>
-          <p:cNvGraphicFramePr>
-            <a:graphicFrameLocks noGrp="1"/>
-          </p:cNvGraphicFramePr>
-          <p:nvPr>
-            <p:extLst>
-              <p:ext uri="{D42A27DB-BD31-4B8C-83A1-F6EECF244321}">
-                <p14:modId xmlns:p14="http://schemas.microsoft.com/office/powerpoint/2010/main" val="1579011935"/>
-              </p:ext>
-            </p:extLst>
-          </p:nvPr>
-        </p:nvGraphicFramePr>
-        <p:xfrm>
-          <a:off x="685800" y="1325880"/>
-          <a:ext cx="10820095" cy="914400"/>
-        </p:xfrm>
-        <a:graphic>
-          <a:graphicData uri="http://schemas.openxmlformats.org/drawingml/2006/table">
-            <a:tbl>
-              <a:tblPr/>
-              <a:tblGrid>
-                <a:gridCol w="5410048"/>
-                <a:gridCol w="5410048"/>
-              </a:tblGrid>
-              <a:tr h="320040">
-                <a:tc>
-                  <a:txBody>
-                    <a:bodyPr/>
-                    <a:lstStyle/>
-                    <a:p>
-                      <a:pPr indent="0" marL="0">
-                        <a:buNone/>
-                      </a:pPr>
-                      <a:r>
-                        <a:rPr lang="en-US" sz="1100" b="1" dirty="0">
-                          <a:solidFill>
-                            <a:srgbClr val="FFFFFF"/>
-                          </a:solidFill>
-                          <a:latin typeface="Malgun Gothic" pitchFamily="34" charset="0"/>
-                          <a:ea typeface="Malgun Gothic" pitchFamily="34" charset="-122"/>
-                          <a:cs typeface="Malgun Gothic" pitchFamily="34" charset="-120"/>
-                        </a:rPr>
-                        <a:t>항목</a:t>
-                      </a:r>
-                      <a:endParaRPr lang="en-US" sz="1100" dirty="0">
-                        <a:latin typeface="Malgun Gothic" charset="0"/>
-                        <a:ea typeface="Malgun Gothic" charset="0"/>
-                        <a:cs typeface="Malgun Gothic" charset="0"/>
-                      </a:endParaRPr>
-                    </a:p>
-                  </a:txBody>
-                  <a:tcPr marL="91440" marR="91440" marT="45720" marB="45720">
-                    <a:lnL w="12700" cap="flat" cmpd="sng" algn="ctr">
-                      <a:solidFill>
-                        <a:srgbClr val="C8E6DF"/>
-                      </a:solidFill>
-                      <a:prstDash val="solid"/>
-                      <a:round/>
-                      <a:headEnd type="none" w="med" len="med"/>
-                      <a:tailEnd type="none" w="med" len="med"/>
-                    </a:lnL>
-                    <a:lnR w="12700" cap="flat" cmpd="sng" algn="ctr">
-                      <a:solidFill>
-                        <a:srgbClr val="C8E6DF"/>
-                      </a:solidFill>
-                      <a:prstDash val="solid"/>
-                      <a:round/>
-                      <a:headEnd type="none" w="med" len="med"/>
-                      <a:tailEnd type="none" w="med" len="med"/>
-                    </a:lnR>
-                    <a:lnT w="12700" cap="flat" cmpd="sng" algn="ctr">
-                      <a:solidFill>
-                        <a:srgbClr val="C8E6DF"/>
-                      </a:solidFill>
-                      <a:prstDash val="solid"/>
-                      <a:round/>
-                      <a:headEnd type="none" w="med" len="med"/>
-                      <a:tailEnd type="none" w="med" len="med"/>
-                    </a:lnT>
-                    <a:lnB w="12700" cap="flat" cmpd="sng" algn="ctr">
-                      <a:solidFill>
-                        <a:srgbClr val="C8E6DF"/>
-                      </a:solidFill>
-                      <a:prstDash val="solid"/>
-                      <a:round/>
-                      <a:headEnd type="none" w="med" len="med"/>
-                      <a:tailEnd type="none" w="med" len="med"/>
-                    </a:lnB>
-                    <a:solidFill>
-                      <a:srgbClr val="10A37F"/>
-                    </a:solidFill>
-                  </a:tcPr>
-                </a:tc>
-                <a:tc>
-                  <a:txBody>
-                    <a:bodyPr/>
-                    <a:lstStyle/>
-                    <a:p>
-                      <a:pPr indent="0" marL="0">
-                        <a:buNone/>
-                      </a:pPr>
-                      <a:r>
-                        <a:rPr lang="en-US" sz="1100" b="1" dirty="0">
-                          <a:solidFill>
-                            <a:srgbClr val="FFFFFF"/>
-                          </a:solidFill>
-                          <a:latin typeface="Malgun Gothic" pitchFamily="34" charset="0"/>
-                          <a:ea typeface="Malgun Gothic" pitchFamily="34" charset="-122"/>
-                          <a:cs typeface="Malgun Gothic" pitchFamily="34" charset="-120"/>
-                        </a:rPr>
-                        <a:t>내용</a:t>
-                      </a:r>
-                      <a:endParaRPr lang="en-US" sz="1100" dirty="0">
-                        <a:latin typeface="Malgun Gothic" charset="0"/>
-                        <a:ea typeface="Malgun Gothic" charset="0"/>
-                        <a:cs typeface="Malgun Gothic" charset="0"/>
-                      </a:endParaRPr>
-                    </a:p>
-                  </a:txBody>
-                  <a:tcPr marL="91440" marR="91440" marT="45720" marB="45720">
-                    <a:lnL w="12700" cap="flat" cmpd="sng" algn="ctr">
-                      <a:solidFill>
-                        <a:srgbClr val="C8E6DF"/>
-                      </a:solidFill>
-                      <a:prstDash val="solid"/>
-                      <a:round/>
-                      <a:headEnd type="none" w="med" len="med"/>
-                      <a:tailEnd type="none" w="med" len="med"/>
-                    </a:lnL>
-                    <a:lnR w="12700" cap="flat" cmpd="sng" algn="ctr">
-                      <a:solidFill>
-                        <a:srgbClr val="C8E6DF"/>
-                      </a:solidFill>
-                      <a:prstDash val="solid"/>
-                      <a:round/>
-                      <a:headEnd type="none" w="med" len="med"/>
-                      <a:tailEnd type="none" w="med" len="med"/>
-                    </a:lnR>
-                    <a:lnT w="12700" cap="flat" cmpd="sng" algn="ctr">
-                      <a:solidFill>
-                        <a:srgbClr val="C8E6DF"/>
-                      </a:solidFill>
-                      <a:prstDash val="solid"/>
-                      <a:round/>
-                      <a:headEnd type="none" w="med" len="med"/>
-                      <a:tailEnd type="none" w="med" len="med"/>
-                    </a:lnT>
-                    <a:lnB w="12700" cap="flat" cmpd="sng" algn="ctr">
-                      <a:solidFill>
-                        <a:srgbClr val="C8E6DF"/>
-                      </a:solidFill>
-                      <a:prstDash val="solid"/>
-                      <a:round/>
-                      <a:headEnd type="none" w="med" len="med"/>
-                      <a:tailEnd type="none" w="med" len="med"/>
-                    </a:lnB>
-                    <a:solidFill>
-                      <a:srgbClr val="10A37F"/>
-                    </a:solidFill>
-                  </a:tcPr>
-                </a:tc>
-              </a:tr>
-              <a:tr h="256032">
-                <a:tc>
-                  <a:txBody>
-                    <a:bodyPr/>
-                    <a:lstStyle/>
-                    <a:p>
-                      <a:pPr indent="0" marL="0">
-                        <a:buNone/>
-                      </a:pPr>
-                      <a:r>
-                        <a:rPr lang="en-US" sz="1000" dirty="0">
-                          <a:solidFill>
-                            <a:srgbClr val="475569"/>
-                          </a:solidFill>
-                          <a:latin typeface="Malgun Gothic" pitchFamily="34" charset="0"/>
-                          <a:ea typeface="Malgun Gothic" pitchFamily="34" charset="-122"/>
-                          <a:cs typeface="Malgun Gothic" pitchFamily="34" charset="-120"/>
-                        </a:rPr>
-                        <a:t>숏코드 명</a:t>
-                      </a:r>
-                      <a:endParaRPr lang="en-US" sz="1000" dirty="0">
-                        <a:latin typeface="Malgun Gothic" charset="0"/>
-                        <a:ea typeface="Malgun Gothic" charset="0"/>
-                        <a:cs typeface="Malgun Gothic" charset="0"/>
-                      </a:endParaRPr>
-                    </a:p>
-                  </a:txBody>
-                  <a:tcPr marL="91440" marR="91440" marT="45720" marB="45720">
-                    <a:lnL w="12700" cap="flat" cmpd="sng" algn="ctr">
-                      <a:solidFill>
-                        <a:srgbClr val="C8E6DF"/>
-                      </a:solidFill>
-                      <a:prstDash val="solid"/>
-                      <a:round/>
-                      <a:headEnd type="none" w="med" len="med"/>
-                      <a:tailEnd type="none" w="med" len="med"/>
-                    </a:lnL>
-                    <a:lnR w="12700" cap="flat" cmpd="sng" algn="ctr">
-                      <a:solidFill>
-                        <a:srgbClr val="C8E6DF"/>
-                      </a:solidFill>
-                      <a:prstDash val="solid"/>
-                      <a:round/>
-                      <a:headEnd type="none" w="med" len="med"/>
-                      <a:tailEnd type="none" w="med" len="med"/>
-                    </a:lnR>
-                    <a:lnT w="12700" cap="flat" cmpd="sng" algn="ctr">
-                      <a:solidFill>
-                        <a:srgbClr val="C8E6DF"/>
-                      </a:solidFill>
-                      <a:prstDash val="solid"/>
-                      <a:round/>
-                      <a:headEnd type="none" w="med" len="med"/>
-                      <a:tailEnd type="none" w="med" len="med"/>
-                    </a:lnT>
-                    <a:lnB w="12700" cap="flat" cmpd="sng" algn="ctr">
-                      <a:solidFill>
-                        <a:srgbClr val="C8E6DF"/>
-                      </a:solidFill>
-                      <a:prstDash val="solid"/>
-                      <a:round/>
-                      <a:headEnd type="none" w="med" len="med"/>
-                      <a:tailEnd type="none" w="med" len="med"/>
-                    </a:lnB>
-                  </a:tcPr>
-                </a:tc>
-                <a:tc>
-                  <a:txBody>
-                    <a:bodyPr/>
-                    <a:lstStyle/>
-                    <a:p>
-                      <a:pPr indent="0" marL="0">
-                        <a:buNone/>
-                      </a:pPr>
-                      <a:r>
-                        <a:rPr lang="en-US" sz="1000" dirty="0">
-                          <a:solidFill>
-                            <a:srgbClr val="475569"/>
-                          </a:solidFill>
-                          <a:latin typeface="Malgun Gothic" pitchFamily="34" charset="0"/>
-                          <a:ea typeface="Malgun Gothic" pitchFamily="34" charset="-122"/>
-                          <a:cs typeface="Malgun Gothic" pitchFamily="34" charset="-120"/>
-                        </a:rPr>
-                        <a:t>checkpoint-grid</a:t>
-                      </a:r>
-                      <a:endParaRPr lang="en-US" sz="1000" dirty="0">
-                        <a:latin typeface="Malgun Gothic" charset="0"/>
-                        <a:ea typeface="Malgun Gothic" charset="0"/>
-                        <a:cs typeface="Malgun Gothic" charset="0"/>
-                      </a:endParaRPr>
-                    </a:p>
-                  </a:txBody>
-                  <a:tcPr marL="91440" marR="91440" marT="45720" marB="45720">
-                    <a:lnL w="12700" cap="flat" cmpd="sng" algn="ctr">
-                      <a:solidFill>
-                        <a:srgbClr val="C8E6DF"/>
-                      </a:solidFill>
-                      <a:prstDash val="solid"/>
-                      <a:round/>
-                      <a:headEnd type="none" w="med" len="med"/>
-                      <a:tailEnd type="none" w="med" len="med"/>
-                    </a:lnL>
-                    <a:lnR w="12700" cap="flat" cmpd="sng" algn="ctr">
-                      <a:solidFill>
-                        <a:srgbClr val="C8E6DF"/>
-                      </a:solidFill>
-                      <a:prstDash val="solid"/>
-                      <a:round/>
-                      <a:headEnd type="none" w="med" len="med"/>
-                      <a:tailEnd type="none" w="med" len="med"/>
-                    </a:lnR>
-                    <a:lnT w="12700" cap="flat" cmpd="sng" algn="ctr">
-                      <a:solidFill>
-                        <a:srgbClr val="C8E6DF"/>
-                      </a:solidFill>
-                      <a:prstDash val="solid"/>
-                      <a:round/>
-                      <a:headEnd type="none" w="med" len="med"/>
-                      <a:tailEnd type="none" w="med" len="med"/>
-                    </a:lnT>
-                    <a:lnB w="12700" cap="flat" cmpd="sng" algn="ctr">
-                      <a:solidFill>
-                        <a:srgbClr val="C8E6DF"/>
-                      </a:solidFill>
-                      <a:prstDash val="solid"/>
-                      <a:round/>
-                      <a:headEnd type="none" w="med" len="med"/>
-                      <a:tailEnd type="none" w="med" len="med"/>
-                    </a:lnB>
-                  </a:tcPr>
-                </a:tc>
-              </a:tr>
-              <a:tr h="256032">
-                <a:tc>
-                  <a:txBody>
-                    <a:bodyPr/>
-                    <a:lstStyle/>
-                    <a:p>
-                      <a:pPr indent="0" marL="0">
-                        <a:buNone/>
-                      </a:pPr>
-                      <a:r>
-                        <a:rPr lang="en-US" sz="1000" dirty="0">
-                          <a:solidFill>
-                            <a:srgbClr val="475569"/>
-                          </a:solidFill>
-                          <a:latin typeface="Malgun Gothic" pitchFamily="34" charset="0"/>
-                          <a:ea typeface="Malgun Gothic" pitchFamily="34" charset="-122"/>
-                          <a:cs typeface="Malgun Gothic" pitchFamily="34" charset="-120"/>
-                        </a:rPr>
-                        <a:t>구현내용</a:t>
-                      </a:r>
-                      <a:endParaRPr lang="en-US" sz="1000" dirty="0">
-                        <a:latin typeface="Malgun Gothic" charset="0"/>
-                        <a:ea typeface="Malgun Gothic" charset="0"/>
-                        <a:cs typeface="Malgun Gothic" charset="0"/>
-                      </a:endParaRPr>
-                    </a:p>
-                  </a:txBody>
-                  <a:tcPr marL="91440" marR="91440" marT="45720" marB="45720">
-                    <a:lnL w="12700" cap="flat" cmpd="sng" algn="ctr">
-                      <a:solidFill>
-                        <a:srgbClr val="C8E6DF"/>
-                      </a:solidFill>
-                      <a:prstDash val="solid"/>
-                      <a:round/>
-                      <a:headEnd type="none" w="med" len="med"/>
-                      <a:tailEnd type="none" w="med" len="med"/>
-                    </a:lnL>
-                    <a:lnR w="12700" cap="flat" cmpd="sng" algn="ctr">
-                      <a:solidFill>
-                        <a:srgbClr val="C8E6DF"/>
-                      </a:solidFill>
-                      <a:prstDash val="solid"/>
-                      <a:round/>
-                      <a:headEnd type="none" w="med" len="med"/>
-                      <a:tailEnd type="none" w="med" len="med"/>
-                    </a:lnR>
-                    <a:lnT w="12700" cap="flat" cmpd="sng" algn="ctr">
-                      <a:solidFill>
-                        <a:srgbClr val="C8E6DF"/>
-                      </a:solidFill>
-                      <a:prstDash val="solid"/>
-                      <a:round/>
-                      <a:headEnd type="none" w="med" len="med"/>
-                      <a:tailEnd type="none" w="med" len="med"/>
-                    </a:lnT>
-                    <a:lnB w="12700" cap="flat" cmpd="sng" algn="ctr">
-                      <a:solidFill>
-                        <a:srgbClr val="C8E6DF"/>
-                      </a:solidFill>
-                      <a:prstDash val="solid"/>
-                      <a:round/>
-                      <a:headEnd type="none" w="med" len="med"/>
-                      <a:tailEnd type="none" w="med" len="med"/>
-                    </a:lnB>
-                  </a:tcPr>
-                </a:tc>
-                <a:tc>
-                  <a:txBody>
-                    <a:bodyPr/>
-                    <a:lstStyle/>
-                    <a:p>
-                      <a:pPr indent="0" marL="0">
-                        <a:buNone/>
-                      </a:pPr>
-                      <a:r>
-                        <a:rPr lang="en-US" sz="1000" dirty="0">
-                          <a:solidFill>
-                            <a:srgbClr val="475569"/>
-                          </a:solidFill>
-                          <a:latin typeface="Malgun Gothic" pitchFamily="34" charset="0"/>
-                          <a:ea typeface="Malgun Gothic" pitchFamily="34" charset="-122"/>
-                          <a:cs typeface="Malgun Gothic" pitchFamily="34" charset="-120"/>
-                        </a:rPr>
-                        <a:t>중간 검수 타이밍, 주요 체크포인트를 이모지와 가로 뱃지 형식으로 나열해 줍니다.</a:t>
-                      </a:r>
-                      <a:endParaRPr lang="en-US" sz="1000" dirty="0">
-                        <a:latin typeface="Malgun Gothic" charset="0"/>
-                        <a:ea typeface="Malgun Gothic" charset="0"/>
-                        <a:cs typeface="Malgun Gothic" charset="0"/>
-                      </a:endParaRPr>
-                    </a:p>
-                  </a:txBody>
-                  <a:tcPr marL="91440" marR="91440" marT="45720" marB="45720">
-                    <a:lnL w="12700" cap="flat" cmpd="sng" algn="ctr">
-                      <a:solidFill>
-                        <a:srgbClr val="C8E6DF"/>
-                      </a:solidFill>
-                      <a:prstDash val="solid"/>
-                      <a:round/>
-                      <a:headEnd type="none" w="med" len="med"/>
-                      <a:tailEnd type="none" w="med" len="med"/>
-                    </a:lnL>
-                    <a:lnR w="12700" cap="flat" cmpd="sng" algn="ctr">
-                      <a:solidFill>
-                        <a:srgbClr val="C8E6DF"/>
-                      </a:solidFill>
-                      <a:prstDash val="solid"/>
-                      <a:round/>
-                      <a:headEnd type="none" w="med" len="med"/>
-                      <a:tailEnd type="none" w="med" len="med"/>
-                    </a:lnR>
-                    <a:lnT w="12700" cap="flat" cmpd="sng" algn="ctr">
-                      <a:solidFill>
-                        <a:srgbClr val="C8E6DF"/>
-                      </a:solidFill>
-                      <a:prstDash val="solid"/>
-                      <a:round/>
-                      <a:headEnd type="none" w="med" len="med"/>
-                      <a:tailEnd type="none" w="med" len="med"/>
-                    </a:lnT>
-                    <a:lnB w="12700" cap="flat" cmpd="sng" algn="ctr">
-                      <a:solidFill>
-                        <a:srgbClr val="C8E6DF"/>
-                      </a:solidFill>
-                      <a:prstDash val="solid"/>
-                      <a:round/>
-                      <a:headEnd type="none" w="med" len="med"/>
-                      <a:tailEnd type="none" w="med" len="med"/>
-                    </a:lnB>
-                  </a:tcPr>
-                </a:tc>
-              </a:tr>
-            </a:tbl>
-          </a:graphicData>
-        </a:graphic>
-      </p:graphicFrame>
-      <p:sp>
-        <p:nvSpPr>
-          <p:cNvPr id="8" name="Text 5"/>
-          <p:cNvSpPr/>
-          <p:nvPr/>
-        </p:nvSpPr>
-        <p:spPr>
-          <a:xfrm>
-            <a:off x="685800" y="2295144"/>
+      <p:sp>
+        <p:nvSpPr>
+          <p:cNvPr id="7" name="Text 5"/>
+          <p:cNvSpPr/>
+          <p:nvPr/>
+        </p:nvSpPr>
+        <p:spPr>
+          <a:xfrm>
+            <a:off x="685800" y="1325880"/>
             <a:ext cx="10820095" cy="237490"/>
           </a:xfrm>
           <a:prstGeom prst="rect">
@@ -37280,6 +35863,45 @@
                 <a:ea typeface="Malgun Gothic" pitchFamily="34" charset="-122"/>
                 <a:cs typeface="Malgun Gothic" pitchFamily="34" charset="-120"/>
               </a:rPr>
+              <a:t>bullet=X 블록 인자로 블록 안 모든 아이템의 기본 불릿을 한 번에 지정합니다. 아이템 bullet: 필드가 있으면 그쪽이 우선합니다.</a:t>
+            </a:r>
+            <a:endParaRPr lang="en-US" sz="1100" dirty="0"/>
+          </a:p>
+        </p:txBody>
+      </p:sp>
+      <p:sp>
+        <p:nvSpPr>
+          <p:cNvPr id="8" name="Text 6"/>
+          <p:cNvSpPr/>
+          <p:nvPr/>
+        </p:nvSpPr>
+        <p:spPr>
+          <a:xfrm>
+            <a:off x="685800" y="1700530"/>
+            <a:ext cx="10820095" cy="237490"/>
+          </a:xfrm>
+          <a:prstGeom prst="rect">
+            <a:avLst/>
+          </a:prstGeom>
+          <a:noFill/>
+          <a:ln/>
+        </p:spPr>
+        <p:txBody>
+          <a:bodyPr wrap="square" rtlCol="0" anchor="t"/>
+          <a:lstStyle/>
+          <a:p>
+            <a:pPr indent="0" marL="0">
+              <a:buNone/>
+            </a:pPr>
+            <a:r>
+              <a:rPr lang="en-US" sz="1100" dirty="0">
+                <a:solidFill>
+                  <a:srgbClr val="475569"/>
+                </a:solidFill>
+                <a:latin typeface="Malgun Gothic" pitchFamily="34" charset="0"/>
+                <a:ea typeface="Malgun Gothic" pitchFamily="34" charset="-122"/>
+                <a:cs typeface="Malgun Gothic" pitchFamily="34" charset="-120"/>
+              </a:rPr>
               <a:t>숏코드 입력내용</a:t>
             </a:r>
             <a:endParaRPr lang="en-US" sz="1100" dirty="0"/>
@@ -37288,14 +35910,14 @@
       </p:sp>
       <p:sp>
         <p:nvSpPr>
-          <p:cNvPr id="9" name="Shape 6"/>
-          <p:cNvSpPr/>
-          <p:nvPr/>
-        </p:nvSpPr>
-        <p:spPr>
-          <a:xfrm>
-            <a:off x="685800" y="2669794"/>
-            <a:ext cx="10820095" cy="1910080"/>
+          <p:cNvPr id="9" name="Shape 7"/>
+          <p:cNvSpPr/>
+          <p:nvPr/>
+        </p:nvSpPr>
+        <p:spPr>
+          <a:xfrm>
+            <a:off x="685800" y="2075180"/>
+            <a:ext cx="10820095" cy="2557780"/>
           </a:xfrm>
           <a:prstGeom prst="rect">
             <a:avLst/>
@@ -37313,14 +35935,14 @@
       </p:sp>
       <p:sp>
         <p:nvSpPr>
-          <p:cNvPr id="10" name="Text 7"/>
-          <p:cNvSpPr/>
-          <p:nvPr/>
-        </p:nvSpPr>
-        <p:spPr>
-          <a:xfrm>
-            <a:off x="795528" y="2742946"/>
-            <a:ext cx="10600639" cy="1818640"/>
+          <p:cNvPr id="10" name="Text 8"/>
+          <p:cNvSpPr/>
+          <p:nvPr/>
+        </p:nvSpPr>
+        <p:spPr>
+          <a:xfrm>
+            <a:off x="795528" y="2148332"/>
+            <a:ext cx="10600639" cy="2466340"/>
           </a:xfrm>
           <a:prstGeom prst="rect">
             <a:avLst/>
@@ -37344,7 +35966,7 @@
                 <a:ea typeface="Consolas" pitchFamily="34" charset="-122"/>
                 <a:cs typeface="Consolas" pitchFamily="34" charset="-120"/>
               </a:rPr>
-              <a:t>\::: checkpoint-grid</a:t>
+              <a:t>\::: icon-grid cols=3 bullet=✅</a:t>
             </a:r>
             <a:endParaRPr lang="en-US" sz="1000" dirty="0"/>
           </a:p>
@@ -37361,7 +35983,7 @@
                 <a:ea typeface="Consolas" pitchFamily="34" charset="-122"/>
                 <a:cs typeface="Consolas" pitchFamily="34" charset="-120"/>
               </a:rPr>
-              <a:t>- icon: "📐"</a:t>
+              <a:t>- icon: "📄"</a:t>
             </a:r>
             <a:endParaRPr lang="en-US" sz="1000" dirty="0"/>
           </a:p>
@@ -37378,7 +36000,7 @@
                 <a:ea typeface="Consolas" pitchFamily="34" charset="-122"/>
                 <a:cs typeface="Consolas" pitchFamily="34" charset="-120"/>
               </a:rPr>
-              <a:t>  title: "계획 수립 후"</a:t>
+              <a:t>  title: "문서화"</a:t>
             </a:r>
             <a:endParaRPr lang="en-US" sz="1000" dirty="0"/>
           </a:p>
@@ -37395,7 +36017,7 @@
                 <a:ea typeface="Consolas" pitchFamily="34" charset="-122"/>
                 <a:cs typeface="Consolas" pitchFamily="34" charset="-120"/>
               </a:rPr>
-              <a:t>  desc: "방향이 맞는지 확인"</a:t>
+              <a:t>  desc: "자동 생성\n버전 관리\n다국어 지원"</a:t>
             </a:r>
             <a:endParaRPr lang="en-US" sz="1000" dirty="0"/>
           </a:p>
@@ -37412,7 +36034,7 @@
                 <a:ea typeface="Consolas" pitchFamily="34" charset="-122"/>
                 <a:cs typeface="Consolas" pitchFamily="34" charset="-120"/>
               </a:rPr>
-              <a:t>- icon: "1️⃣"</a:t>
+              <a:t>- icon: "🔧"</a:t>
             </a:r>
             <a:endParaRPr lang="en-US" sz="1000" dirty="0"/>
           </a:p>
@@ -37429,7 +36051,7 @@
                 <a:ea typeface="Consolas" pitchFamily="34" charset="-122"/>
                 <a:cs typeface="Consolas" pitchFamily="34" charset="-120"/>
               </a:rPr>
-              <a:t>  title: "1단계 완료 후"</a:t>
+              <a:t>  title: "자동화"</a:t>
             </a:r>
             <a:endParaRPr lang="en-US" sz="1000" dirty="0"/>
           </a:p>
@@ -37446,7 +36068,7 @@
                 <a:ea typeface="Consolas" pitchFamily="34" charset="-122"/>
                 <a:cs typeface="Consolas" pitchFamily="34" charset="-120"/>
               </a:rPr>
-              <a:t>  desc: "입력 데이터 검증"</a:t>
+              <a:t>  desc: "CI/CD 통합\n테스트 자동화\n배포 스크립트"</a:t>
             </a:r>
             <a:endParaRPr lang="en-US" sz="1000" dirty="0"/>
           </a:p>
@@ -37463,7 +36085,481 @@
                 <a:ea typeface="Consolas" pitchFamily="34" charset="-122"/>
                 <a:cs typeface="Consolas" pitchFamily="34" charset="-120"/>
               </a:rPr>
+              <a:t>- icon: "📊"</a:t>
+            </a:r>
+            <a:endParaRPr lang="en-US" sz="1000" dirty="0"/>
+          </a:p>
+          <a:p>
+            <a:pPr indent="0" marL="0">
+              <a:buNone/>
+            </a:pPr>
+            <a:r>
+              <a:rPr lang="en-US" sz="1000" dirty="0">
+                <a:solidFill>
+                  <a:srgbClr val="A8B2D8"/>
+                </a:solidFill>
+                <a:latin typeface="Consolas" pitchFamily="34" charset="0"/>
+                <a:ea typeface="Consolas" pitchFamily="34" charset="-122"/>
+                <a:cs typeface="Consolas" pitchFamily="34" charset="-120"/>
+              </a:rPr>
+              <a:t>  title: "분석"</a:t>
+            </a:r>
+            <a:endParaRPr lang="en-US" sz="1000" dirty="0"/>
+          </a:p>
+          <a:p>
+            <a:pPr indent="0" marL="0">
+              <a:buNone/>
+            </a:pPr>
+            <a:r>
+              <a:rPr lang="en-US" sz="1000" dirty="0">
+                <a:solidFill>
+                  <a:srgbClr val="A8B2D8"/>
+                </a:solidFill>
+                <a:latin typeface="Consolas" pitchFamily="34" charset="0"/>
+                <a:ea typeface="Consolas" pitchFamily="34" charset="-122"/>
+                <a:cs typeface="Consolas" pitchFamily="34" charset="-120"/>
+              </a:rPr>
+              <a:t>  desc: "실시간 모니터링\n대시보드\n알림 설정"</a:t>
+            </a:r>
+            <a:endParaRPr lang="en-US" sz="1000" dirty="0"/>
+          </a:p>
+          <a:p>
+            <a:pPr indent="0" marL="0">
+              <a:buNone/>
+            </a:pPr>
+            <a:r>
+              <a:rPr lang="en-US" sz="1000" dirty="0">
+                <a:solidFill>
+                  <a:srgbClr val="A8B2D8"/>
+                </a:solidFill>
+                <a:latin typeface="Consolas" pitchFamily="34" charset="0"/>
+                <a:ea typeface="Consolas" pitchFamily="34" charset="-122"/>
+                <a:cs typeface="Consolas" pitchFamily="34" charset="-120"/>
+              </a:rPr>
               <a:t>\:::</a:t>
+            </a:r>
+            <a:endParaRPr lang="en-US" sz="1000" dirty="0"/>
+          </a:p>
+        </p:txBody>
+      </p:sp>
+      <p:sp>
+        <p:nvSpPr>
+          <p:cNvPr id="11" name="Shape 9"/>
+          <p:cNvSpPr/>
+          <p:nvPr/>
+        </p:nvSpPr>
+        <p:spPr>
+          <a:xfrm>
+            <a:off x="457200" y="5090160"/>
+            <a:ext cx="3667658" cy="1280160"/>
+          </a:xfrm>
+          <a:prstGeom prst="roundRect">
+            <a:avLst>
+              <a:gd name="adj" fmla="val 5714"/>
+            </a:avLst>
+          </a:prstGeom>
+          <a:solidFill>
+            <a:srgbClr val="FFFFFF"/>
+          </a:solidFill>
+          <a:ln w="9525">
+            <a:solidFill>
+              <a:srgbClr val="C8E6DF"/>
+            </a:solidFill>
+            <a:prstDash val="solid"/>
+          </a:ln>
+        </p:spPr>
+      </p:sp>
+      <p:sp>
+        <p:nvSpPr>
+          <p:cNvPr id="12" name="Text 10"/>
+          <p:cNvSpPr/>
+          <p:nvPr/>
+        </p:nvSpPr>
+        <p:spPr>
+          <a:xfrm>
+            <a:off x="548640" y="5181600"/>
+            <a:ext cx="3484778" cy="384048"/>
+          </a:xfrm>
+          <a:prstGeom prst="rect">
+            <a:avLst/>
+          </a:prstGeom>
+          <a:noFill/>
+          <a:ln/>
+        </p:spPr>
+        <p:txBody>
+          <a:bodyPr wrap="square" rtlCol="0" anchor="ctr"/>
+          <a:lstStyle/>
+          <a:p>
+            <a:pPr algn="ctr" indent="0" marL="0">
+              <a:buNone/>
+            </a:pPr>
+            <a:r>
+              <a:rPr lang="en-US" sz="2000" dirty="0">
+                <a:solidFill>
+                  <a:srgbClr val="000000"/>
+                </a:solidFill>
+              </a:rPr>
+              <a:t>📄</a:t>
+            </a:r>
+            <a:endParaRPr lang="en-US" sz="2000" dirty="0"/>
+          </a:p>
+        </p:txBody>
+      </p:sp>
+      <p:sp>
+        <p:nvSpPr>
+          <p:cNvPr id="13" name="Text 11"/>
+          <p:cNvSpPr/>
+          <p:nvPr/>
+        </p:nvSpPr>
+        <p:spPr>
+          <a:xfrm>
+            <a:off x="548640" y="5620512"/>
+            <a:ext cx="3484778" cy="256032"/>
+          </a:xfrm>
+          <a:prstGeom prst="rect">
+            <a:avLst/>
+          </a:prstGeom>
+          <a:noFill/>
+          <a:ln/>
+        </p:spPr>
+        <p:txBody>
+          <a:bodyPr wrap="square" rtlCol="0" anchor="ctr"/>
+          <a:lstStyle/>
+          <a:p>
+            <a:pPr algn="ctr" indent="0" marL="0">
+              <a:buNone/>
+            </a:pPr>
+            <a:r>
+              <a:rPr lang="en-US" sz="1100" b="1" dirty="0">
+                <a:solidFill>
+                  <a:srgbClr val="1A1A2E"/>
+                </a:solidFill>
+                <a:latin typeface="Malgun Gothic" pitchFamily="34" charset="0"/>
+                <a:ea typeface="Malgun Gothic" pitchFamily="34" charset="-122"/>
+                <a:cs typeface="Malgun Gothic" pitchFamily="34" charset="-120"/>
+              </a:rPr>
+              <a:t>문서화</a:t>
+            </a:r>
+            <a:endParaRPr lang="en-US" sz="1100" dirty="0"/>
+          </a:p>
+        </p:txBody>
+      </p:sp>
+      <p:sp>
+        <p:nvSpPr>
+          <p:cNvPr id="14" name="Text 12"/>
+          <p:cNvSpPr/>
+          <p:nvPr/>
+        </p:nvSpPr>
+        <p:spPr>
+          <a:xfrm>
+            <a:off x="548640" y="5894832"/>
+            <a:ext cx="3484778" cy="420624"/>
+          </a:xfrm>
+          <a:prstGeom prst="rect">
+            <a:avLst/>
+          </a:prstGeom>
+          <a:noFill/>
+          <a:ln/>
+        </p:spPr>
+        <p:txBody>
+          <a:bodyPr wrap="square" rtlCol="0" anchor="t"/>
+          <a:lstStyle/>
+          <a:p>
+            <a:pPr algn="ctr" indent="0" marL="0">
+              <a:buNone/>
+            </a:pPr>
+            <a:r>
+              <a:rPr lang="en-US" sz="1000" dirty="0">
+                <a:solidFill>
+                  <a:srgbClr val="475569"/>
+                </a:solidFill>
+                <a:latin typeface="Malgun Gothic" pitchFamily="34" charset="0"/>
+                <a:ea typeface="Malgun Gothic" pitchFamily="34" charset="-122"/>
+                <a:cs typeface="Malgun Gothic" pitchFamily="34" charset="-120"/>
+              </a:rPr>
+              <a:t>자동 생성\n버전 관리\n다국어 지원</a:t>
+            </a:r>
+            <a:endParaRPr lang="en-US" sz="1000" dirty="0"/>
+          </a:p>
+        </p:txBody>
+      </p:sp>
+      <p:sp>
+        <p:nvSpPr>
+          <p:cNvPr id="15" name="Shape 13"/>
+          <p:cNvSpPr/>
+          <p:nvPr/>
+        </p:nvSpPr>
+        <p:spPr>
+          <a:xfrm>
+            <a:off x="4262018" y="5090160"/>
+            <a:ext cx="3667658" cy="1280160"/>
+          </a:xfrm>
+          <a:prstGeom prst="roundRect">
+            <a:avLst>
+              <a:gd name="adj" fmla="val 5714"/>
+            </a:avLst>
+          </a:prstGeom>
+          <a:solidFill>
+            <a:srgbClr val="FFFFFF"/>
+          </a:solidFill>
+          <a:ln w="9525">
+            <a:solidFill>
+              <a:srgbClr val="C8E6DF"/>
+            </a:solidFill>
+            <a:prstDash val="solid"/>
+          </a:ln>
+        </p:spPr>
+      </p:sp>
+      <p:sp>
+        <p:nvSpPr>
+          <p:cNvPr id="16" name="Text 14"/>
+          <p:cNvSpPr/>
+          <p:nvPr/>
+        </p:nvSpPr>
+        <p:spPr>
+          <a:xfrm>
+            <a:off x="4353458" y="5181600"/>
+            <a:ext cx="3484778" cy="384048"/>
+          </a:xfrm>
+          <a:prstGeom prst="rect">
+            <a:avLst/>
+          </a:prstGeom>
+          <a:noFill/>
+          <a:ln/>
+        </p:spPr>
+        <p:txBody>
+          <a:bodyPr wrap="square" rtlCol="0" anchor="ctr"/>
+          <a:lstStyle/>
+          <a:p>
+            <a:pPr algn="ctr" indent="0" marL="0">
+              <a:buNone/>
+            </a:pPr>
+            <a:r>
+              <a:rPr lang="en-US" sz="2000" dirty="0">
+                <a:solidFill>
+                  <a:srgbClr val="000000"/>
+                </a:solidFill>
+              </a:rPr>
+              <a:t>🔧</a:t>
+            </a:r>
+            <a:endParaRPr lang="en-US" sz="2000" dirty="0"/>
+          </a:p>
+        </p:txBody>
+      </p:sp>
+      <p:sp>
+        <p:nvSpPr>
+          <p:cNvPr id="17" name="Text 15"/>
+          <p:cNvSpPr/>
+          <p:nvPr/>
+        </p:nvSpPr>
+        <p:spPr>
+          <a:xfrm>
+            <a:off x="4353458" y="5620512"/>
+            <a:ext cx="3484778" cy="256032"/>
+          </a:xfrm>
+          <a:prstGeom prst="rect">
+            <a:avLst/>
+          </a:prstGeom>
+          <a:noFill/>
+          <a:ln/>
+        </p:spPr>
+        <p:txBody>
+          <a:bodyPr wrap="square" rtlCol="0" anchor="ctr"/>
+          <a:lstStyle/>
+          <a:p>
+            <a:pPr algn="ctr" indent="0" marL="0">
+              <a:buNone/>
+            </a:pPr>
+            <a:r>
+              <a:rPr lang="en-US" sz="1100" b="1" dirty="0">
+                <a:solidFill>
+                  <a:srgbClr val="1A1A2E"/>
+                </a:solidFill>
+                <a:latin typeface="Malgun Gothic" pitchFamily="34" charset="0"/>
+                <a:ea typeface="Malgun Gothic" pitchFamily="34" charset="-122"/>
+                <a:cs typeface="Malgun Gothic" pitchFamily="34" charset="-120"/>
+              </a:rPr>
+              <a:t>자동화</a:t>
+            </a:r>
+            <a:endParaRPr lang="en-US" sz="1100" dirty="0"/>
+          </a:p>
+        </p:txBody>
+      </p:sp>
+      <p:sp>
+        <p:nvSpPr>
+          <p:cNvPr id="18" name="Text 16"/>
+          <p:cNvSpPr/>
+          <p:nvPr/>
+        </p:nvSpPr>
+        <p:spPr>
+          <a:xfrm>
+            <a:off x="4353458" y="5894832"/>
+            <a:ext cx="3484778" cy="420624"/>
+          </a:xfrm>
+          <a:prstGeom prst="rect">
+            <a:avLst/>
+          </a:prstGeom>
+          <a:noFill/>
+          <a:ln/>
+        </p:spPr>
+        <p:txBody>
+          <a:bodyPr wrap="square" rtlCol="0" anchor="t"/>
+          <a:lstStyle/>
+          <a:p>
+            <a:pPr algn="ctr" indent="0" marL="0">
+              <a:buNone/>
+            </a:pPr>
+            <a:r>
+              <a:rPr lang="en-US" sz="1000" dirty="0">
+                <a:solidFill>
+                  <a:srgbClr val="475569"/>
+                </a:solidFill>
+                <a:latin typeface="Malgun Gothic" pitchFamily="34" charset="0"/>
+                <a:ea typeface="Malgun Gothic" pitchFamily="34" charset="-122"/>
+                <a:cs typeface="Malgun Gothic" pitchFamily="34" charset="-120"/>
+              </a:rPr>
+              <a:t>CI/CD 통합\n테스트 자동화\n배포 스크립트</a:t>
+            </a:r>
+            <a:endParaRPr lang="en-US" sz="1000" dirty="0"/>
+          </a:p>
+        </p:txBody>
+      </p:sp>
+      <p:sp>
+        <p:nvSpPr>
+          <p:cNvPr id="19" name="Shape 17"/>
+          <p:cNvSpPr/>
+          <p:nvPr/>
+        </p:nvSpPr>
+        <p:spPr>
+          <a:xfrm>
+            <a:off x="8066837" y="5090160"/>
+            <a:ext cx="3667658" cy="1280160"/>
+          </a:xfrm>
+          <a:prstGeom prst="roundRect">
+            <a:avLst>
+              <a:gd name="adj" fmla="val 5714"/>
+            </a:avLst>
+          </a:prstGeom>
+          <a:solidFill>
+            <a:srgbClr val="FFFFFF"/>
+          </a:solidFill>
+          <a:ln w="9525">
+            <a:solidFill>
+              <a:srgbClr val="C8E6DF"/>
+            </a:solidFill>
+            <a:prstDash val="solid"/>
+          </a:ln>
+        </p:spPr>
+      </p:sp>
+      <p:sp>
+        <p:nvSpPr>
+          <p:cNvPr id="20" name="Text 18"/>
+          <p:cNvSpPr/>
+          <p:nvPr/>
+        </p:nvSpPr>
+        <p:spPr>
+          <a:xfrm>
+            <a:off x="8158277" y="5181600"/>
+            <a:ext cx="3484778" cy="384048"/>
+          </a:xfrm>
+          <a:prstGeom prst="rect">
+            <a:avLst/>
+          </a:prstGeom>
+          <a:noFill/>
+          <a:ln/>
+        </p:spPr>
+        <p:txBody>
+          <a:bodyPr wrap="square" rtlCol="0" anchor="ctr"/>
+          <a:lstStyle/>
+          <a:p>
+            <a:pPr algn="ctr" indent="0" marL="0">
+              <a:buNone/>
+            </a:pPr>
+            <a:r>
+              <a:rPr lang="en-US" sz="2000" dirty="0">
+                <a:solidFill>
+                  <a:srgbClr val="000000"/>
+                </a:solidFill>
+              </a:rPr>
+              <a:t>📊</a:t>
+            </a:r>
+            <a:endParaRPr lang="en-US" sz="2000" dirty="0"/>
+          </a:p>
+        </p:txBody>
+      </p:sp>
+      <p:sp>
+        <p:nvSpPr>
+          <p:cNvPr id="21" name="Text 19"/>
+          <p:cNvSpPr/>
+          <p:nvPr/>
+        </p:nvSpPr>
+        <p:spPr>
+          <a:xfrm>
+            <a:off x="8158277" y="5620512"/>
+            <a:ext cx="3484778" cy="256032"/>
+          </a:xfrm>
+          <a:prstGeom prst="rect">
+            <a:avLst/>
+          </a:prstGeom>
+          <a:noFill/>
+          <a:ln/>
+        </p:spPr>
+        <p:txBody>
+          <a:bodyPr wrap="square" rtlCol="0" anchor="ctr"/>
+          <a:lstStyle/>
+          <a:p>
+            <a:pPr algn="ctr" indent="0" marL="0">
+              <a:buNone/>
+            </a:pPr>
+            <a:r>
+              <a:rPr lang="en-US" sz="1100" b="1" dirty="0">
+                <a:solidFill>
+                  <a:srgbClr val="1A1A2E"/>
+                </a:solidFill>
+                <a:latin typeface="Malgun Gothic" pitchFamily="34" charset="0"/>
+                <a:ea typeface="Malgun Gothic" pitchFamily="34" charset="-122"/>
+                <a:cs typeface="Malgun Gothic" pitchFamily="34" charset="-120"/>
+              </a:rPr>
+              <a:t>분석</a:t>
+            </a:r>
+            <a:endParaRPr lang="en-US" sz="1100" dirty="0"/>
+          </a:p>
+        </p:txBody>
+      </p:sp>
+      <p:sp>
+        <p:nvSpPr>
+          <p:cNvPr id="22" name="Text 20"/>
+          <p:cNvSpPr/>
+          <p:nvPr/>
+        </p:nvSpPr>
+        <p:spPr>
+          <a:xfrm>
+            <a:off x="8158277" y="5894832"/>
+            <a:ext cx="3484778" cy="420624"/>
+          </a:xfrm>
+          <a:prstGeom prst="rect">
+            <a:avLst/>
+          </a:prstGeom>
+          <a:noFill/>
+          <a:ln/>
+        </p:spPr>
+        <p:txBody>
+          <a:bodyPr wrap="square" rtlCol="0" anchor="t"/>
+          <a:lstStyle/>
+          <a:p>
+            <a:pPr algn="ctr" indent="0" marL="0">
+              <a:buNone/>
+            </a:pPr>
+            <a:r>
+              <a:rPr lang="en-US" sz="1000" dirty="0">
+                <a:solidFill>
+                  <a:srgbClr val="475569"/>
+                </a:solidFill>
+                <a:latin typeface="Malgun Gothic" pitchFamily="34" charset="0"/>
+                <a:ea typeface="Malgun Gothic" pitchFamily="34" charset="-122"/>
+                <a:cs typeface="Malgun Gothic" pitchFamily="34" charset="-120"/>
+              </a:rPr>
+              <a:t>실시간 모니터링\n대시보드\n알림 설정</a:t>
             </a:r>
             <a:endParaRPr lang="en-US" sz="1000" dirty="0"/>
           </a:p>
@@ -37586,7 +36682,7 @@
                 <a:ea typeface="Malgun Gothic" pitchFamily="34" charset="-122"/>
                 <a:cs typeface="Malgun Gothic" pitchFamily="34" charset="-120"/>
               </a:rPr>
-              <a:t>28</a:t>
+              <a:t>35</a:t>
             </a:r>
             <a:endParaRPr lang="en-US" sz="1600" dirty="0"/>
           </a:p>
@@ -37625,7 +36721,7 @@
                 <a:ea typeface="Malgun Gothic" pitchFamily="34" charset="-122"/>
                 <a:cs typeface="Malgun Gothic" pitchFamily="34" charset="-120"/>
               </a:rPr>
-              <a:t>compare-before-after</a:t>
+              <a:t>부록 D. color — 카드 강조 + SVG 불릿 색 동시 적용</a:t>
             </a:r>
             <a:endParaRPr lang="en-US" sz="2200" dirty="0"/>
           </a:p>
@@ -37640,11 +36736,11 @@
         <p:spPr>
           <a:xfrm>
             <a:off x="457200" y="1143000"/>
-            <a:ext cx="11277295" cy="3325114"/>
+            <a:ext cx="11277295" cy="3594100"/>
           </a:xfrm>
           <a:prstGeom prst="roundRect">
             <a:avLst>
-              <a:gd name="adj" fmla="val 2200"/>
+              <a:gd name="adj" fmla="val 2035"/>
             </a:avLst>
           </a:prstGeom>
           <a:solidFill>
@@ -37658,447 +36754,15 @@
           </a:ln>
         </p:spPr>
       </p:sp>
-      <p:graphicFrame>
-        <p:nvGraphicFramePr>
-          <p:cNvPr id="37" name="Table 0"/>
-          <p:cNvGraphicFramePr>
-            <a:graphicFrameLocks noGrp="1"/>
-          </p:cNvGraphicFramePr>
-          <p:nvPr>
-            <p:extLst>
-              <p:ext uri="{D42A27DB-BD31-4B8C-83A1-F6EECF244321}">
-                <p14:modId xmlns:p14="http://schemas.microsoft.com/office/powerpoint/2010/main" val="1579011935"/>
-              </p:ext>
-            </p:extLst>
-          </p:nvPr>
-        </p:nvGraphicFramePr>
-        <p:xfrm>
-          <a:off x="685800" y="1325880"/>
-          <a:ext cx="10820095" cy="914400"/>
-        </p:xfrm>
-        <a:graphic>
-          <a:graphicData uri="http://schemas.openxmlformats.org/drawingml/2006/table">
-            <a:tbl>
-              <a:tblPr/>
-              <a:tblGrid>
-                <a:gridCol w="5410048"/>
-                <a:gridCol w="5410048"/>
-              </a:tblGrid>
-              <a:tr h="320040">
-                <a:tc>
-                  <a:txBody>
-                    <a:bodyPr/>
-                    <a:lstStyle/>
-                    <a:p>
-                      <a:pPr indent="0" marL="0">
-                        <a:buNone/>
-                      </a:pPr>
-                      <a:r>
-                        <a:rPr lang="en-US" sz="1100" b="1" dirty="0">
-                          <a:solidFill>
-                            <a:srgbClr val="FFFFFF"/>
-                          </a:solidFill>
-                          <a:latin typeface="Malgun Gothic" pitchFamily="34" charset="0"/>
-                          <a:ea typeface="Malgun Gothic" pitchFamily="34" charset="-122"/>
-                          <a:cs typeface="Malgun Gothic" pitchFamily="34" charset="-120"/>
-                        </a:rPr>
-                        <a:t>항목</a:t>
-                      </a:r>
-                      <a:endParaRPr lang="en-US" sz="1100" dirty="0">
-                        <a:latin typeface="Malgun Gothic" charset="0"/>
-                        <a:ea typeface="Malgun Gothic" charset="0"/>
-                        <a:cs typeface="Malgun Gothic" charset="0"/>
-                      </a:endParaRPr>
-                    </a:p>
-                  </a:txBody>
-                  <a:tcPr marL="91440" marR="91440" marT="45720" marB="45720">
-                    <a:lnL w="12700" cap="flat" cmpd="sng" algn="ctr">
-                      <a:solidFill>
-                        <a:srgbClr val="C8E6DF"/>
-                      </a:solidFill>
-                      <a:prstDash val="solid"/>
-                      <a:round/>
-                      <a:headEnd type="none" w="med" len="med"/>
-                      <a:tailEnd type="none" w="med" len="med"/>
-                    </a:lnL>
-                    <a:lnR w="12700" cap="flat" cmpd="sng" algn="ctr">
-                      <a:solidFill>
-                        <a:srgbClr val="C8E6DF"/>
-                      </a:solidFill>
-                      <a:prstDash val="solid"/>
-                      <a:round/>
-                      <a:headEnd type="none" w="med" len="med"/>
-                      <a:tailEnd type="none" w="med" len="med"/>
-                    </a:lnR>
-                    <a:lnT w="12700" cap="flat" cmpd="sng" algn="ctr">
-                      <a:solidFill>
-                        <a:srgbClr val="C8E6DF"/>
-                      </a:solidFill>
-                      <a:prstDash val="solid"/>
-                      <a:round/>
-                      <a:headEnd type="none" w="med" len="med"/>
-                      <a:tailEnd type="none" w="med" len="med"/>
-                    </a:lnT>
-                    <a:lnB w="12700" cap="flat" cmpd="sng" algn="ctr">
-                      <a:solidFill>
-                        <a:srgbClr val="C8E6DF"/>
-                      </a:solidFill>
-                      <a:prstDash val="solid"/>
-                      <a:round/>
-                      <a:headEnd type="none" w="med" len="med"/>
-                      <a:tailEnd type="none" w="med" len="med"/>
-                    </a:lnB>
-                    <a:solidFill>
-                      <a:srgbClr val="10A37F"/>
-                    </a:solidFill>
-                  </a:tcPr>
-                </a:tc>
-                <a:tc>
-                  <a:txBody>
-                    <a:bodyPr/>
-                    <a:lstStyle/>
-                    <a:p>
-                      <a:pPr indent="0" marL="0">
-                        <a:buNone/>
-                      </a:pPr>
-                      <a:r>
-                        <a:rPr lang="en-US" sz="1100" b="1" dirty="0">
-                          <a:solidFill>
-                            <a:srgbClr val="FFFFFF"/>
-                          </a:solidFill>
-                          <a:latin typeface="Malgun Gothic" pitchFamily="34" charset="0"/>
-                          <a:ea typeface="Malgun Gothic" pitchFamily="34" charset="-122"/>
-                          <a:cs typeface="Malgun Gothic" pitchFamily="34" charset="-120"/>
-                        </a:rPr>
-                        <a:t>내용</a:t>
-                      </a:r>
-                      <a:endParaRPr lang="en-US" sz="1100" dirty="0">
-                        <a:latin typeface="Malgun Gothic" charset="0"/>
-                        <a:ea typeface="Malgun Gothic" charset="0"/>
-                        <a:cs typeface="Malgun Gothic" charset="0"/>
-                      </a:endParaRPr>
-                    </a:p>
-                  </a:txBody>
-                  <a:tcPr marL="91440" marR="91440" marT="45720" marB="45720">
-                    <a:lnL w="12700" cap="flat" cmpd="sng" algn="ctr">
-                      <a:solidFill>
-                        <a:srgbClr val="C8E6DF"/>
-                      </a:solidFill>
-                      <a:prstDash val="solid"/>
-                      <a:round/>
-                      <a:headEnd type="none" w="med" len="med"/>
-                      <a:tailEnd type="none" w="med" len="med"/>
-                    </a:lnL>
-                    <a:lnR w="12700" cap="flat" cmpd="sng" algn="ctr">
-                      <a:solidFill>
-                        <a:srgbClr val="C8E6DF"/>
-                      </a:solidFill>
-                      <a:prstDash val="solid"/>
-                      <a:round/>
-                      <a:headEnd type="none" w="med" len="med"/>
-                      <a:tailEnd type="none" w="med" len="med"/>
-                    </a:lnR>
-                    <a:lnT w="12700" cap="flat" cmpd="sng" algn="ctr">
-                      <a:solidFill>
-                        <a:srgbClr val="C8E6DF"/>
-                      </a:solidFill>
-                      <a:prstDash val="solid"/>
-                      <a:round/>
-                      <a:headEnd type="none" w="med" len="med"/>
-                      <a:tailEnd type="none" w="med" len="med"/>
-                    </a:lnT>
-                    <a:lnB w="12700" cap="flat" cmpd="sng" algn="ctr">
-                      <a:solidFill>
-                        <a:srgbClr val="C8E6DF"/>
-                      </a:solidFill>
-                      <a:prstDash val="solid"/>
-                      <a:round/>
-                      <a:headEnd type="none" w="med" len="med"/>
-                      <a:tailEnd type="none" w="med" len="med"/>
-                    </a:lnB>
-                    <a:solidFill>
-                      <a:srgbClr val="10A37F"/>
-                    </a:solidFill>
-                  </a:tcPr>
-                </a:tc>
-              </a:tr>
-              <a:tr h="256032">
-                <a:tc>
-                  <a:txBody>
-                    <a:bodyPr/>
-                    <a:lstStyle/>
-                    <a:p>
-                      <a:pPr indent="0" marL="0">
-                        <a:buNone/>
-                      </a:pPr>
-                      <a:r>
-                        <a:rPr lang="en-US" sz="1000" dirty="0">
-                          <a:solidFill>
-                            <a:srgbClr val="475569"/>
-                          </a:solidFill>
-                          <a:latin typeface="Malgun Gothic" pitchFamily="34" charset="0"/>
-                          <a:ea typeface="Malgun Gothic" pitchFamily="34" charset="-122"/>
-                          <a:cs typeface="Malgun Gothic" pitchFamily="34" charset="-120"/>
-                        </a:rPr>
-                        <a:t>숏코드 명</a:t>
-                      </a:r>
-                      <a:endParaRPr lang="en-US" sz="1000" dirty="0">
-                        <a:latin typeface="Malgun Gothic" charset="0"/>
-                        <a:ea typeface="Malgun Gothic" charset="0"/>
-                        <a:cs typeface="Malgun Gothic" charset="0"/>
-                      </a:endParaRPr>
-                    </a:p>
-                  </a:txBody>
-                  <a:tcPr marL="91440" marR="91440" marT="45720" marB="45720">
-                    <a:lnL w="12700" cap="flat" cmpd="sng" algn="ctr">
-                      <a:solidFill>
-                        <a:srgbClr val="C8E6DF"/>
-                      </a:solidFill>
-                      <a:prstDash val="solid"/>
-                      <a:round/>
-                      <a:headEnd type="none" w="med" len="med"/>
-                      <a:tailEnd type="none" w="med" len="med"/>
-                    </a:lnL>
-                    <a:lnR w="12700" cap="flat" cmpd="sng" algn="ctr">
-                      <a:solidFill>
-                        <a:srgbClr val="C8E6DF"/>
-                      </a:solidFill>
-                      <a:prstDash val="solid"/>
-                      <a:round/>
-                      <a:headEnd type="none" w="med" len="med"/>
-                      <a:tailEnd type="none" w="med" len="med"/>
-                    </a:lnR>
-                    <a:lnT w="12700" cap="flat" cmpd="sng" algn="ctr">
-                      <a:solidFill>
-                        <a:srgbClr val="C8E6DF"/>
-                      </a:solidFill>
-                      <a:prstDash val="solid"/>
-                      <a:round/>
-                      <a:headEnd type="none" w="med" len="med"/>
-                      <a:tailEnd type="none" w="med" len="med"/>
-                    </a:lnT>
-                    <a:lnB w="12700" cap="flat" cmpd="sng" algn="ctr">
-                      <a:solidFill>
-                        <a:srgbClr val="C8E6DF"/>
-                      </a:solidFill>
-                      <a:prstDash val="solid"/>
-                      <a:round/>
-                      <a:headEnd type="none" w="med" len="med"/>
-                      <a:tailEnd type="none" w="med" len="med"/>
-                    </a:lnB>
-                  </a:tcPr>
-                </a:tc>
-                <a:tc>
-                  <a:txBody>
-                    <a:bodyPr/>
-                    <a:lstStyle/>
-                    <a:p>
-                      <a:pPr indent="0" marL="0">
-                        <a:buNone/>
-                      </a:pPr>
-                      <a:r>
-                        <a:rPr lang="en-US" sz="1000" dirty="0">
-                          <a:solidFill>
-                            <a:srgbClr val="475569"/>
-                          </a:solidFill>
-                          <a:latin typeface="Malgun Gothic" pitchFamily="34" charset="0"/>
-                          <a:ea typeface="Malgun Gothic" pitchFamily="34" charset="-122"/>
-                          <a:cs typeface="Malgun Gothic" pitchFamily="34" charset="-120"/>
-                        </a:rPr>
-                        <a:t>compare-before-after</a:t>
-                      </a:r>
-                      <a:endParaRPr lang="en-US" sz="1000" dirty="0">
-                        <a:latin typeface="Malgun Gothic" charset="0"/>
-                        <a:ea typeface="Malgun Gothic" charset="0"/>
-                        <a:cs typeface="Malgun Gothic" charset="0"/>
-                      </a:endParaRPr>
-                    </a:p>
-                  </a:txBody>
-                  <a:tcPr marL="91440" marR="91440" marT="45720" marB="45720">
-                    <a:lnL w="12700" cap="flat" cmpd="sng" algn="ctr">
-                      <a:solidFill>
-                        <a:srgbClr val="C8E6DF"/>
-                      </a:solidFill>
-                      <a:prstDash val="solid"/>
-                      <a:round/>
-                      <a:headEnd type="none" w="med" len="med"/>
-                      <a:tailEnd type="none" w="med" len="med"/>
-                    </a:lnL>
-                    <a:lnR w="12700" cap="flat" cmpd="sng" algn="ctr">
-                      <a:solidFill>
-                        <a:srgbClr val="C8E6DF"/>
-                      </a:solidFill>
-                      <a:prstDash val="solid"/>
-                      <a:round/>
-                      <a:headEnd type="none" w="med" len="med"/>
-                      <a:tailEnd type="none" w="med" len="med"/>
-                    </a:lnR>
-                    <a:lnT w="12700" cap="flat" cmpd="sng" algn="ctr">
-                      <a:solidFill>
-                        <a:srgbClr val="C8E6DF"/>
-                      </a:solidFill>
-                      <a:prstDash val="solid"/>
-                      <a:round/>
-                      <a:headEnd type="none" w="med" len="med"/>
-                      <a:tailEnd type="none" w="med" len="med"/>
-                    </a:lnT>
-                    <a:lnB w="12700" cap="flat" cmpd="sng" algn="ctr">
-                      <a:solidFill>
-                        <a:srgbClr val="C8E6DF"/>
-                      </a:solidFill>
-                      <a:prstDash val="solid"/>
-                      <a:round/>
-                      <a:headEnd type="none" w="med" len="med"/>
-                      <a:tailEnd type="none" w="med" len="med"/>
-                    </a:lnB>
-                  </a:tcPr>
-                </a:tc>
-              </a:tr>
-              <a:tr h="256032">
-                <a:tc>
-                  <a:txBody>
-                    <a:bodyPr/>
-                    <a:lstStyle/>
-                    <a:p>
-                      <a:pPr indent="0" marL="0">
-                        <a:buNone/>
-                      </a:pPr>
-                      <a:r>
-                        <a:rPr lang="en-US" sz="1000" dirty="0">
-                          <a:solidFill>
-                            <a:srgbClr val="475569"/>
-                          </a:solidFill>
-                          <a:latin typeface="Malgun Gothic" pitchFamily="34" charset="0"/>
-                          <a:ea typeface="Malgun Gothic" pitchFamily="34" charset="-122"/>
-                          <a:cs typeface="Malgun Gothic" pitchFamily="34" charset="-120"/>
-                        </a:rPr>
-                        <a:t>구현내용</a:t>
-                      </a:r>
-                      <a:endParaRPr lang="en-US" sz="1000" dirty="0">
-                        <a:latin typeface="Malgun Gothic" charset="0"/>
-                        <a:ea typeface="Malgun Gothic" charset="0"/>
-                        <a:cs typeface="Malgun Gothic" charset="0"/>
-                      </a:endParaRPr>
-                    </a:p>
-                  </a:txBody>
-                  <a:tcPr marL="91440" marR="91440" marT="45720" marB="45720">
-                    <a:lnL w="12700" cap="flat" cmpd="sng" algn="ctr">
-                      <a:solidFill>
-                        <a:srgbClr val="C8E6DF"/>
-                      </a:solidFill>
-                      <a:prstDash val="solid"/>
-                      <a:round/>
-                      <a:headEnd type="none" w="med" len="med"/>
-                      <a:tailEnd type="none" w="med" len="med"/>
-                    </a:lnL>
-                    <a:lnR w="12700" cap="flat" cmpd="sng" algn="ctr">
-                      <a:solidFill>
-                        <a:srgbClr val="C8E6DF"/>
-                      </a:solidFill>
-                      <a:prstDash val="solid"/>
-                      <a:round/>
-                      <a:headEnd type="none" w="med" len="med"/>
-                      <a:tailEnd type="none" w="med" len="med"/>
-                    </a:lnR>
-                    <a:lnT w="12700" cap="flat" cmpd="sng" algn="ctr">
-                      <a:solidFill>
-                        <a:srgbClr val="C8E6DF"/>
-                      </a:solidFill>
-                      <a:prstDash val="solid"/>
-                      <a:round/>
-                      <a:headEnd type="none" w="med" len="med"/>
-                      <a:tailEnd type="none" w="med" len="med"/>
-                    </a:lnT>
-                    <a:lnB w="12700" cap="flat" cmpd="sng" algn="ctr">
-                      <a:solidFill>
-                        <a:srgbClr val="C8E6DF"/>
-                      </a:solidFill>
-                      <a:prstDash val="solid"/>
-                      <a:round/>
-                      <a:headEnd type="none" w="med" len="med"/>
-                      <a:tailEnd type="none" w="med" len="med"/>
-                    </a:lnB>
-                  </a:tcPr>
-                </a:tc>
-                <a:tc>
-                  <a:txBody>
-                    <a:bodyPr/>
-                    <a:lstStyle/>
-                    <a:p>
-                      <a:pPr indent="0" marL="0">
-                        <a:buNone/>
-                      </a:pPr>
-                      <a:r>
-                        <a:rPr lang="en-US" sz="1000" dirty="0">
-                          <a:solidFill>
-                            <a:srgbClr val="475569"/>
-                          </a:solidFill>
-                          <a:latin typeface="Malgun Gothic" pitchFamily="34" charset="0"/>
-                          <a:ea typeface="Malgun Gothic" pitchFamily="34" charset="-122"/>
-                          <a:cs typeface="Malgun Gothic" pitchFamily="34" charset="-120"/>
-                        </a:rPr>
-                        <a:t>Bad vs Good, 변경 전후 1:1 대비를 우아한 전용 테두리 카드 레이아웃으로 렌더링해 줍니다.</a:t>
-                      </a:r>
-                      <a:endParaRPr lang="en-US" sz="1000" dirty="0">
-                        <a:latin typeface="Malgun Gothic" charset="0"/>
-                        <a:ea typeface="Malgun Gothic" charset="0"/>
-                        <a:cs typeface="Malgun Gothic" charset="0"/>
-                      </a:endParaRPr>
-                    </a:p>
-                  </a:txBody>
-                  <a:tcPr marL="91440" marR="91440" marT="45720" marB="45720">
-                    <a:lnL w="12700" cap="flat" cmpd="sng" algn="ctr">
-                      <a:solidFill>
-                        <a:srgbClr val="C8E6DF"/>
-                      </a:solidFill>
-                      <a:prstDash val="solid"/>
-                      <a:round/>
-                      <a:headEnd type="none" w="med" len="med"/>
-                      <a:tailEnd type="none" w="med" len="med"/>
-                    </a:lnL>
-                    <a:lnR w="12700" cap="flat" cmpd="sng" algn="ctr">
-                      <a:solidFill>
-                        <a:srgbClr val="C8E6DF"/>
-                      </a:solidFill>
-                      <a:prstDash val="solid"/>
-                      <a:round/>
-                      <a:headEnd type="none" w="med" len="med"/>
-                      <a:tailEnd type="none" w="med" len="med"/>
-                    </a:lnR>
-                    <a:lnT w="12700" cap="flat" cmpd="sng" algn="ctr">
-                      <a:solidFill>
-                        <a:srgbClr val="C8E6DF"/>
-                      </a:solidFill>
-                      <a:prstDash val="solid"/>
-                      <a:round/>
-                      <a:headEnd type="none" w="med" len="med"/>
-                      <a:tailEnd type="none" w="med" len="med"/>
-                    </a:lnT>
-                    <a:lnB w="12700" cap="flat" cmpd="sng" algn="ctr">
-                      <a:solidFill>
-                        <a:srgbClr val="C8E6DF"/>
-                      </a:solidFill>
-                      <a:prstDash val="solid"/>
-                      <a:round/>
-                      <a:headEnd type="none" w="med" len="med"/>
-                      <a:tailEnd type="none" w="med" len="med"/>
-                    </a:lnB>
-                  </a:tcPr>
-                </a:tc>
-              </a:tr>
-            </a:tbl>
-          </a:graphicData>
-        </a:graphic>
-      </p:graphicFrame>
-      <p:sp>
-        <p:nvSpPr>
-          <p:cNvPr id="8" name="Text 5"/>
-          <p:cNvSpPr/>
-          <p:nvPr/>
-        </p:nvSpPr>
-        <p:spPr>
-          <a:xfrm>
-            <a:off x="685800" y="2295144"/>
+      <p:sp>
+        <p:nvSpPr>
+          <p:cNvPr id="7" name="Text 5"/>
+          <p:cNvSpPr/>
+          <p:nvPr/>
+        </p:nvSpPr>
+        <p:spPr>
+          <a:xfrm>
+            <a:off x="685800" y="1325880"/>
             <a:ext cx="10820095" cy="237490"/>
           </a:xfrm>
           <a:prstGeom prst="rect">
@@ -38123,6 +36787,45 @@
                 <a:ea typeface="Malgun Gothic" pitchFamily="34" charset="-122"/>
                 <a:cs typeface="Malgun Gothic" pitchFamily="34" charset="-120"/>
               </a:rPr>
+              <a:t>color: 필드는 카드 테두리·배경과 함께 SVG 불릿 색상도 동시에 제어합니다.</a:t>
+            </a:r>
+            <a:endParaRPr lang="en-US" sz="1100" dirty="0"/>
+          </a:p>
+        </p:txBody>
+      </p:sp>
+      <p:sp>
+        <p:nvSpPr>
+          <p:cNvPr id="8" name="Text 6"/>
+          <p:cNvSpPr/>
+          <p:nvPr/>
+        </p:nvSpPr>
+        <p:spPr>
+          <a:xfrm>
+            <a:off x="685800" y="1700530"/>
+            <a:ext cx="10820095" cy="237490"/>
+          </a:xfrm>
+          <a:prstGeom prst="rect">
+            <a:avLst/>
+          </a:prstGeom>
+          <a:noFill/>
+          <a:ln/>
+        </p:spPr>
+        <p:txBody>
+          <a:bodyPr wrap="square" rtlCol="0" anchor="t"/>
+          <a:lstStyle/>
+          <a:p>
+            <a:pPr indent="0" marL="0">
+              <a:buNone/>
+            </a:pPr>
+            <a:r>
+              <a:rPr lang="en-US" sz="1100" dirty="0">
+                <a:solidFill>
+                  <a:srgbClr val="475569"/>
+                </a:solidFill>
+                <a:latin typeface="Malgun Gothic" pitchFamily="34" charset="0"/>
+                <a:ea typeface="Malgun Gothic" pitchFamily="34" charset="-122"/>
+                <a:cs typeface="Malgun Gothic" pitchFamily="34" charset="-120"/>
+              </a:rPr>
               <a:t>숏코드 입력내용</a:t>
             </a:r>
             <a:endParaRPr lang="en-US" sz="1100" dirty="0"/>
@@ -38131,14 +36834,14 @@
       </p:sp>
       <p:sp>
         <p:nvSpPr>
-          <p:cNvPr id="9" name="Shape 6"/>
-          <p:cNvSpPr/>
-          <p:nvPr/>
-        </p:nvSpPr>
-        <p:spPr>
-          <a:xfrm>
-            <a:off x="685800" y="2669794"/>
-            <a:ext cx="10820095" cy="1478280"/>
+          <p:cNvPr id="9" name="Shape 7"/>
+          <p:cNvSpPr/>
+          <p:nvPr/>
+        </p:nvSpPr>
+        <p:spPr>
+          <a:xfrm>
+            <a:off x="685800" y="2075180"/>
+            <a:ext cx="10820095" cy="2341880"/>
           </a:xfrm>
           <a:prstGeom prst="rect">
             <a:avLst/>
@@ -38156,14 +36859,14 @@
       </p:sp>
       <p:sp>
         <p:nvSpPr>
-          <p:cNvPr id="10" name="Text 7"/>
-          <p:cNvSpPr/>
-          <p:nvPr/>
-        </p:nvSpPr>
-        <p:spPr>
-          <a:xfrm>
-            <a:off x="795528" y="2742946"/>
-            <a:ext cx="10600639" cy="1386840"/>
+          <p:cNvPr id="10" name="Text 8"/>
+          <p:cNvSpPr/>
+          <p:nvPr/>
+        </p:nvSpPr>
+        <p:spPr>
+          <a:xfrm>
+            <a:off x="795528" y="2148332"/>
+            <a:ext cx="10600639" cy="2250440"/>
           </a:xfrm>
           <a:prstGeom prst="rect">
             <a:avLst/>
@@ -38187,7 +36890,7 @@
                 <a:ea typeface="Consolas" pitchFamily="34" charset="-122"/>
                 <a:cs typeface="Consolas" pitchFamily="34" charset="-120"/>
               </a:rPr>
-              <a:t>\::: compare-before-after</a:t>
+              <a:t>\::: feature-grid cols=2</a:t>
             </a:r>
             <a:endParaRPr lang="en-US" sz="1000" dirty="0"/>
           </a:p>
@@ -38204,7 +36907,7 @@
                 <a:ea typeface="Consolas" pitchFamily="34" charset="-122"/>
                 <a:cs typeface="Consolas" pitchFamily="34" charset="-120"/>
               </a:rPr>
-              <a:t>- title: "나쁜 프롬프트"</a:t>
+              <a:t>- icon: "🚀"</a:t>
             </a:r>
             <a:endParaRPr lang="en-US" sz="1000" dirty="0"/>
           </a:p>
@@ -38221,7 +36924,7 @@
                 <a:ea typeface="Consolas" pitchFamily="34" charset="-122"/>
                 <a:cs typeface="Consolas" pitchFamily="34" charset="-120"/>
               </a:rPr>
-              <a:t>  desc: "엑셀 자동화 코드 만들어줘."</a:t>
+              <a:t>  title: "빠른 배포"</a:t>
             </a:r>
             <a:endParaRPr lang="en-US" sz="1000" dirty="0"/>
           </a:p>
@@ -38238,7 +36941,7 @@
                 <a:ea typeface="Consolas" pitchFamily="34" charset="-122"/>
                 <a:cs typeface="Consolas" pitchFamily="34" charset="-120"/>
               </a:rPr>
-              <a:t>- title: "좋은 프롬프트"</a:t>
+              <a:t>  desc: "원클릭 배포\n자동 롤백\n무중단 업데이트"</a:t>
             </a:r>
             <a:endParaRPr lang="en-US" sz="1000" dirty="0"/>
           </a:p>
@@ -38255,7 +36958,7 @@
                 <a:ea typeface="Consolas" pitchFamily="34" charset="-122"/>
                 <a:cs typeface="Consolas" pitchFamily="34" charset="-120"/>
               </a:rPr>
-              <a:t>  desc: "Python으로 A열 날짜, B열 금액 합산 summary.xlsx 만드는 Pandas 코드 작성해줘."</a:t>
+              <a:t>  color: "#6366F1"</a:t>
             </a:r>
             <a:endParaRPr lang="en-US" sz="1000" dirty="0"/>
           </a:p>
@@ -38272,188 +36975,94 @@
                 <a:ea typeface="Consolas" pitchFamily="34" charset="-122"/>
                 <a:cs typeface="Consolas" pitchFamily="34" charset="-120"/>
               </a:rPr>
+              <a:t>- icon: "🛡️"</a:t>
+            </a:r>
+            <a:endParaRPr lang="en-US" sz="1000" dirty="0"/>
+          </a:p>
+          <a:p>
+            <a:pPr indent="0" marL="0">
+              <a:buNone/>
+            </a:pPr>
+            <a:r>
+              <a:rPr lang="en-US" sz="1000" dirty="0">
+                <a:solidFill>
+                  <a:srgbClr val="A8B2D8"/>
+                </a:solidFill>
+                <a:latin typeface="Consolas" pitchFamily="34" charset="0"/>
+                <a:ea typeface="Consolas" pitchFamily="34" charset="-122"/>
+                <a:cs typeface="Consolas" pitchFamily="34" charset="-120"/>
+              </a:rPr>
+              <a:t>  title: "보안 우선"</a:t>
+            </a:r>
+            <a:endParaRPr lang="en-US" sz="1000" dirty="0"/>
+          </a:p>
+          <a:p>
+            <a:pPr indent="0" marL="0">
+              <a:buNone/>
+            </a:pPr>
+            <a:r>
+              <a:rPr lang="en-US" sz="1000" dirty="0">
+                <a:solidFill>
+                  <a:srgbClr val="A8B2D8"/>
+                </a:solidFill>
+                <a:latin typeface="Consolas" pitchFamily="34" charset="0"/>
+                <a:ea typeface="Consolas" pitchFamily="34" charset="-122"/>
+                <a:cs typeface="Consolas" pitchFamily="34" charset="-120"/>
+              </a:rPr>
+              <a:t>  desc: "자동 인증서\n방화벽 내장\n취약점 스캔"</a:t>
+            </a:r>
+            <a:endParaRPr lang="en-US" sz="1000" dirty="0"/>
+          </a:p>
+          <a:p>
+            <a:pPr indent="0" marL="0">
+              <a:buNone/>
+            </a:pPr>
+            <a:r>
+              <a:rPr lang="en-US" sz="1000" dirty="0">
+                <a:solidFill>
+                  <a:srgbClr val="A8B2D8"/>
+                </a:solidFill>
+                <a:latin typeface="Consolas" pitchFamily="34" charset="0"/>
+                <a:ea typeface="Consolas" pitchFamily="34" charset="-122"/>
+                <a:cs typeface="Consolas" pitchFamily="34" charset="-120"/>
+              </a:rPr>
+              <a:t>  color: "#E11D48"</a:t>
+            </a:r>
+            <a:endParaRPr lang="en-US" sz="1000" dirty="0"/>
+          </a:p>
+          <a:p>
+            <a:pPr indent="0" marL="0">
+              <a:buNone/>
+            </a:pPr>
+            <a:r>
+              <a:rPr lang="en-US" sz="1000" dirty="0">
+                <a:solidFill>
+                  <a:srgbClr val="A8B2D8"/>
+                </a:solidFill>
+                <a:latin typeface="Consolas" pitchFamily="34" charset="0"/>
+                <a:ea typeface="Consolas" pitchFamily="34" charset="-122"/>
+                <a:cs typeface="Consolas" pitchFamily="34" charset="-120"/>
+              </a:rPr>
               <a:t>\:::</a:t>
             </a:r>
             <a:endParaRPr lang="en-US" sz="1000" dirty="0"/>
           </a:p>
         </p:txBody>
       </p:sp>
-    </p:spTree>
-  </p:cSld>
-  <p:clrMapOvr>
-    <a:masterClrMapping/>
-  </p:clrMapOvr>
-</p:sld>
-</file>
-
-<file path=ppt/slides/slide37.xml><?xml version="1.0" encoding="utf-8"?>
-<p:sld xmlns:a="http://schemas.openxmlformats.org/drawingml/2006/main" xmlns:r="http://schemas.openxmlformats.org/officeDocument/2006/relationships" xmlns:p="http://schemas.openxmlformats.org/presentationml/2006/main">
-  <p:cSld name="Slide 37">
-    <p:bg>
-      <p:bgPr>
-        <a:solidFill>
-          <a:srgbClr val="FFFFFF"/>
-        </a:solidFill>
-      </p:bgPr>
-    </p:bg>
-    <p:spTree>
-      <p:nvGrpSpPr>
-        <p:cNvPr id="1" name=""/>
-        <p:cNvGrpSpPr/>
-        <p:nvPr/>
-      </p:nvGrpSpPr>
-      <p:grpSpPr>
-        <a:xfrm>
-          <a:off x="0" y="0"/>
-          <a:ext cx="0" cy="0"/>
-          <a:chOff x="0" y="0"/>
-          <a:chExt cx="0" cy="0"/>
-        </a:xfrm>
-      </p:grpSpPr>
-      <p:sp>
-        <p:nvSpPr>
-          <p:cNvPr id="2" name="Shape 0"/>
-          <p:cNvSpPr/>
-          <p:nvPr/>
-        </p:nvSpPr>
-        <p:spPr>
-          <a:xfrm>
-            <a:off x="0" y="0"/>
-            <a:ext cx="12191695" cy="960120"/>
-          </a:xfrm>
-          <a:prstGeom prst="rect">
-            <a:avLst/>
-          </a:prstGeom>
-          <a:solidFill>
-            <a:srgbClr val="0F172A"/>
-          </a:solidFill>
-          <a:ln w="12700">
-            <a:solidFill>
-              <a:srgbClr val="0F172A"/>
-            </a:solidFill>
-            <a:prstDash val="solid"/>
-          </a:ln>
-        </p:spPr>
-      </p:sp>
-      <p:sp>
-        <p:nvSpPr>
-          <p:cNvPr id="3" name="Shape 1"/>
-          <p:cNvSpPr/>
-          <p:nvPr/>
-        </p:nvSpPr>
-        <p:spPr>
-          <a:xfrm>
-            <a:off x="502920" y="228600"/>
-            <a:ext cx="502920" cy="502920"/>
+      <p:sp>
+        <p:nvSpPr>
+          <p:cNvPr id="11" name="Shape 9"/>
+          <p:cNvSpPr/>
+          <p:nvPr/>
+        </p:nvSpPr>
+        <p:spPr>
+          <a:xfrm>
+            <a:off x="457200" y="4874260"/>
+            <a:ext cx="5570068" cy="1371600"/>
           </a:xfrm>
           <a:prstGeom prst="roundRect">
             <a:avLst>
-              <a:gd name="adj" fmla="val 18182"/>
-            </a:avLst>
-          </a:prstGeom>
-          <a:solidFill>
-            <a:srgbClr val="10A37F"/>
-          </a:solidFill>
-          <a:ln w="12700">
-            <a:solidFill>
-              <a:srgbClr val="10A37F"/>
-            </a:solidFill>
-            <a:prstDash val="solid"/>
-          </a:ln>
-        </p:spPr>
-      </p:sp>
-      <p:sp>
-        <p:nvSpPr>
-          <p:cNvPr id="4" name="Text 2"/>
-          <p:cNvSpPr/>
-          <p:nvPr/>
-        </p:nvSpPr>
-        <p:spPr>
-          <a:xfrm>
-            <a:off x="502920" y="228600"/>
-            <a:ext cx="502920" cy="502920"/>
-          </a:xfrm>
-          <a:prstGeom prst="rect">
-            <a:avLst/>
-          </a:prstGeom>
-          <a:noFill/>
-          <a:ln/>
-        </p:spPr>
-        <p:txBody>
-          <a:bodyPr wrap="square" rtlCol="0" anchor="ctr"/>
-          <a:lstStyle/>
-          <a:p>
-            <a:pPr algn="ctr" indent="0" marL="0">
-              <a:buNone/>
-            </a:pPr>
-            <a:r>
-              <a:rPr lang="en-US" sz="1600" b="1" dirty="0">
-                <a:solidFill>
-                  <a:srgbClr val="FFFFFF"/>
-                </a:solidFill>
-                <a:latin typeface="Malgun Gothic" pitchFamily="34" charset="0"/>
-                <a:ea typeface="Malgun Gothic" pitchFamily="34" charset="-122"/>
-                <a:cs typeface="Malgun Gothic" pitchFamily="34" charset="-120"/>
-              </a:rPr>
-              <a:t>29</a:t>
-            </a:r>
-            <a:endParaRPr lang="en-US" sz="1600" dirty="0"/>
-          </a:p>
-        </p:txBody>
-      </p:sp>
-      <p:sp>
-        <p:nvSpPr>
-          <p:cNvPr id="5" name="Text 3"/>
-          <p:cNvSpPr/>
-          <p:nvPr/>
-        </p:nvSpPr>
-        <p:spPr>
-          <a:xfrm>
-            <a:off x="1143000" y="0"/>
-            <a:ext cx="10957255" cy="960120"/>
-          </a:xfrm>
-          <a:prstGeom prst="rect">
-            <a:avLst/>
-          </a:prstGeom>
-          <a:noFill/>
-          <a:ln/>
-        </p:spPr>
-        <p:txBody>
-          <a:bodyPr wrap="square" rtlCol="0" anchor="ctr"/>
-          <a:lstStyle/>
-          <a:p>
-            <a:pPr indent="0" marL="0">
-              <a:buNone/>
-            </a:pPr>
-            <a:r>
-              <a:rPr lang="en-US" sz="2200" b="1" dirty="0">
-                <a:solidFill>
-                  <a:srgbClr val="FFFFFF"/>
-                </a:solidFill>
-                <a:latin typeface="Malgun Gothic" pitchFamily="34" charset="0"/>
-                <a:ea typeface="Malgun Gothic" pitchFamily="34" charset="-122"/>
-                <a:cs typeface="Malgun Gothic" pitchFamily="34" charset="-120"/>
-              </a:rPr>
-              <a:t>takeaway</a:t>
-            </a:r>
-            <a:endParaRPr lang="en-US" sz="2200" dirty="0"/>
-          </a:p>
-        </p:txBody>
-      </p:sp>
-      <p:sp>
-        <p:nvSpPr>
-          <p:cNvPr id="6" name="Shape 4"/>
-          <p:cNvSpPr/>
-          <p:nvPr/>
-        </p:nvSpPr>
-        <p:spPr>
-          <a:xfrm>
-            <a:off x="457200" y="1143000"/>
-            <a:ext cx="11277295" cy="3109214"/>
-          </a:xfrm>
-          <a:prstGeom prst="roundRect">
-            <a:avLst>
-              <a:gd name="adj" fmla="val 2353"/>
+              <a:gd name="adj" fmla="val 5333"/>
             </a:avLst>
           </a:prstGeom>
           <a:solidFill>
@@ -38467,448 +37076,80 @@
           </a:ln>
         </p:spPr>
       </p:sp>
-      <p:graphicFrame>
-        <p:nvGraphicFramePr>
-          <p:cNvPr id="38" name="Table 0"/>
-          <p:cNvGraphicFramePr>
-            <a:graphicFrameLocks noGrp="1"/>
-          </p:cNvGraphicFramePr>
-          <p:nvPr>
-            <p:extLst>
-              <p:ext uri="{D42A27DB-BD31-4B8C-83A1-F6EECF244321}">
-                <p14:modId xmlns:p14="http://schemas.microsoft.com/office/powerpoint/2010/main" val="1579011935"/>
-              </p:ext>
-            </p:extLst>
-          </p:nvPr>
-        </p:nvGraphicFramePr>
-        <p:xfrm>
-          <a:off x="685800" y="1325880"/>
-          <a:ext cx="10820095" cy="914400"/>
-        </p:xfrm>
-        <a:graphic>
-          <a:graphicData uri="http://schemas.openxmlformats.org/drawingml/2006/table">
-            <a:tbl>
-              <a:tblPr/>
-              <a:tblGrid>
-                <a:gridCol w="5410048"/>
-                <a:gridCol w="5410048"/>
-              </a:tblGrid>
-              <a:tr h="320040">
-                <a:tc>
-                  <a:txBody>
-                    <a:bodyPr/>
-                    <a:lstStyle/>
-                    <a:p>
-                      <a:pPr indent="0" marL="0">
-                        <a:buNone/>
-                      </a:pPr>
-                      <a:r>
-                        <a:rPr lang="en-US" sz="1100" b="1" dirty="0">
-                          <a:solidFill>
-                            <a:srgbClr val="FFFFFF"/>
-                          </a:solidFill>
-                          <a:latin typeface="Malgun Gothic" pitchFamily="34" charset="0"/>
-                          <a:ea typeface="Malgun Gothic" pitchFamily="34" charset="-122"/>
-                          <a:cs typeface="Malgun Gothic" pitchFamily="34" charset="-120"/>
-                        </a:rPr>
-                        <a:t>항목</a:t>
-                      </a:r>
-                      <a:endParaRPr lang="en-US" sz="1100" dirty="0">
-                        <a:latin typeface="Malgun Gothic" charset="0"/>
-                        <a:ea typeface="Malgun Gothic" charset="0"/>
-                        <a:cs typeface="Malgun Gothic" charset="0"/>
-                      </a:endParaRPr>
-                    </a:p>
-                  </a:txBody>
-                  <a:tcPr marL="91440" marR="91440" marT="45720" marB="45720">
-                    <a:lnL w="12700" cap="flat" cmpd="sng" algn="ctr">
-                      <a:solidFill>
-                        <a:srgbClr val="C8E6DF"/>
-                      </a:solidFill>
-                      <a:prstDash val="solid"/>
-                      <a:round/>
-                      <a:headEnd type="none" w="med" len="med"/>
-                      <a:tailEnd type="none" w="med" len="med"/>
-                    </a:lnL>
-                    <a:lnR w="12700" cap="flat" cmpd="sng" algn="ctr">
-                      <a:solidFill>
-                        <a:srgbClr val="C8E6DF"/>
-                      </a:solidFill>
-                      <a:prstDash val="solid"/>
-                      <a:round/>
-                      <a:headEnd type="none" w="med" len="med"/>
-                      <a:tailEnd type="none" w="med" len="med"/>
-                    </a:lnR>
-                    <a:lnT w="12700" cap="flat" cmpd="sng" algn="ctr">
-                      <a:solidFill>
-                        <a:srgbClr val="C8E6DF"/>
-                      </a:solidFill>
-                      <a:prstDash val="solid"/>
-                      <a:round/>
-                      <a:headEnd type="none" w="med" len="med"/>
-                      <a:tailEnd type="none" w="med" len="med"/>
-                    </a:lnT>
-                    <a:lnB w="12700" cap="flat" cmpd="sng" algn="ctr">
-                      <a:solidFill>
-                        <a:srgbClr val="C8E6DF"/>
-                      </a:solidFill>
-                      <a:prstDash val="solid"/>
-                      <a:round/>
-                      <a:headEnd type="none" w="med" len="med"/>
-                      <a:tailEnd type="none" w="med" len="med"/>
-                    </a:lnB>
-                    <a:solidFill>
-                      <a:srgbClr val="10A37F"/>
-                    </a:solidFill>
-                  </a:tcPr>
-                </a:tc>
-                <a:tc>
-                  <a:txBody>
-                    <a:bodyPr/>
-                    <a:lstStyle/>
-                    <a:p>
-                      <a:pPr indent="0" marL="0">
-                        <a:buNone/>
-                      </a:pPr>
-                      <a:r>
-                        <a:rPr lang="en-US" sz="1100" b="1" dirty="0">
-                          <a:solidFill>
-                            <a:srgbClr val="FFFFFF"/>
-                          </a:solidFill>
-                          <a:latin typeface="Malgun Gothic" pitchFamily="34" charset="0"/>
-                          <a:ea typeface="Malgun Gothic" pitchFamily="34" charset="-122"/>
-                          <a:cs typeface="Malgun Gothic" pitchFamily="34" charset="-120"/>
-                        </a:rPr>
-                        <a:t>내용</a:t>
-                      </a:r>
-                      <a:endParaRPr lang="en-US" sz="1100" dirty="0">
-                        <a:latin typeface="Malgun Gothic" charset="0"/>
-                        <a:ea typeface="Malgun Gothic" charset="0"/>
-                        <a:cs typeface="Malgun Gothic" charset="0"/>
-                      </a:endParaRPr>
-                    </a:p>
-                  </a:txBody>
-                  <a:tcPr marL="91440" marR="91440" marT="45720" marB="45720">
-                    <a:lnL w="12700" cap="flat" cmpd="sng" algn="ctr">
-                      <a:solidFill>
-                        <a:srgbClr val="C8E6DF"/>
-                      </a:solidFill>
-                      <a:prstDash val="solid"/>
-                      <a:round/>
-                      <a:headEnd type="none" w="med" len="med"/>
-                      <a:tailEnd type="none" w="med" len="med"/>
-                    </a:lnL>
-                    <a:lnR w="12700" cap="flat" cmpd="sng" algn="ctr">
-                      <a:solidFill>
-                        <a:srgbClr val="C8E6DF"/>
-                      </a:solidFill>
-                      <a:prstDash val="solid"/>
-                      <a:round/>
-                      <a:headEnd type="none" w="med" len="med"/>
-                      <a:tailEnd type="none" w="med" len="med"/>
-                    </a:lnR>
-                    <a:lnT w="12700" cap="flat" cmpd="sng" algn="ctr">
-                      <a:solidFill>
-                        <a:srgbClr val="C8E6DF"/>
-                      </a:solidFill>
-                      <a:prstDash val="solid"/>
-                      <a:round/>
-                      <a:headEnd type="none" w="med" len="med"/>
-                      <a:tailEnd type="none" w="med" len="med"/>
-                    </a:lnT>
-                    <a:lnB w="12700" cap="flat" cmpd="sng" algn="ctr">
-                      <a:solidFill>
-                        <a:srgbClr val="C8E6DF"/>
-                      </a:solidFill>
-                      <a:prstDash val="solid"/>
-                      <a:round/>
-                      <a:headEnd type="none" w="med" len="med"/>
-                      <a:tailEnd type="none" w="med" len="med"/>
-                    </a:lnB>
-                    <a:solidFill>
-                      <a:srgbClr val="10A37F"/>
-                    </a:solidFill>
-                  </a:tcPr>
-                </a:tc>
-              </a:tr>
-              <a:tr h="256032">
-                <a:tc>
-                  <a:txBody>
-                    <a:bodyPr/>
-                    <a:lstStyle/>
-                    <a:p>
-                      <a:pPr indent="0" marL="0">
-                        <a:buNone/>
-                      </a:pPr>
-                      <a:r>
-                        <a:rPr lang="en-US" sz="1000" dirty="0">
-                          <a:solidFill>
-                            <a:srgbClr val="475569"/>
-                          </a:solidFill>
-                          <a:latin typeface="Malgun Gothic" pitchFamily="34" charset="0"/>
-                          <a:ea typeface="Malgun Gothic" pitchFamily="34" charset="-122"/>
-                          <a:cs typeface="Malgun Gothic" pitchFamily="34" charset="-120"/>
-                        </a:rPr>
-                        <a:t>숏코드 명</a:t>
-                      </a:r>
-                      <a:endParaRPr lang="en-US" sz="1000" dirty="0">
-                        <a:latin typeface="Malgun Gothic" charset="0"/>
-                        <a:ea typeface="Malgun Gothic" charset="0"/>
-                        <a:cs typeface="Malgun Gothic" charset="0"/>
-                      </a:endParaRPr>
-                    </a:p>
-                  </a:txBody>
-                  <a:tcPr marL="91440" marR="91440" marT="45720" marB="45720">
-                    <a:lnL w="12700" cap="flat" cmpd="sng" algn="ctr">
-                      <a:solidFill>
-                        <a:srgbClr val="C8E6DF"/>
-                      </a:solidFill>
-                      <a:prstDash val="solid"/>
-                      <a:round/>
-                      <a:headEnd type="none" w="med" len="med"/>
-                      <a:tailEnd type="none" w="med" len="med"/>
-                    </a:lnL>
-                    <a:lnR w="12700" cap="flat" cmpd="sng" algn="ctr">
-                      <a:solidFill>
-                        <a:srgbClr val="C8E6DF"/>
-                      </a:solidFill>
-                      <a:prstDash val="solid"/>
-                      <a:round/>
-                      <a:headEnd type="none" w="med" len="med"/>
-                      <a:tailEnd type="none" w="med" len="med"/>
-                    </a:lnR>
-                    <a:lnT w="12700" cap="flat" cmpd="sng" algn="ctr">
-                      <a:solidFill>
-                        <a:srgbClr val="C8E6DF"/>
-                      </a:solidFill>
-                      <a:prstDash val="solid"/>
-                      <a:round/>
-                      <a:headEnd type="none" w="med" len="med"/>
-                      <a:tailEnd type="none" w="med" len="med"/>
-                    </a:lnT>
-                    <a:lnB w="12700" cap="flat" cmpd="sng" algn="ctr">
-                      <a:solidFill>
-                        <a:srgbClr val="C8E6DF"/>
-                      </a:solidFill>
-                      <a:prstDash val="solid"/>
-                      <a:round/>
-                      <a:headEnd type="none" w="med" len="med"/>
-                      <a:tailEnd type="none" w="med" len="med"/>
-                    </a:lnB>
-                  </a:tcPr>
-                </a:tc>
-                <a:tc>
-                  <a:txBody>
-                    <a:bodyPr/>
-                    <a:lstStyle/>
-                    <a:p>
-                      <a:pPr indent="0" marL="0">
-                        <a:buNone/>
-                      </a:pPr>
-                      <a:r>
-                        <a:rPr lang="en-US" sz="1000" dirty="0">
-                          <a:solidFill>
-                            <a:srgbClr val="475569"/>
-                          </a:solidFill>
-                          <a:latin typeface="Malgun Gothic" pitchFamily="34" charset="0"/>
-                          <a:ea typeface="Malgun Gothic" pitchFamily="34" charset="-122"/>
-                          <a:cs typeface="Malgun Gothic" pitchFamily="34" charset="-120"/>
-                        </a:rPr>
-                        <a:t>takeaway</a:t>
-                      </a:r>
-                      <a:endParaRPr lang="en-US" sz="1000" dirty="0">
-                        <a:latin typeface="Malgun Gothic" charset="0"/>
-                        <a:ea typeface="Malgun Gothic" charset="0"/>
-                        <a:cs typeface="Malgun Gothic" charset="0"/>
-                      </a:endParaRPr>
-                    </a:p>
-                  </a:txBody>
-                  <a:tcPr marL="91440" marR="91440" marT="45720" marB="45720">
-                    <a:lnL w="12700" cap="flat" cmpd="sng" algn="ctr">
-                      <a:solidFill>
-                        <a:srgbClr val="C8E6DF"/>
-                      </a:solidFill>
-                      <a:prstDash val="solid"/>
-                      <a:round/>
-                      <a:headEnd type="none" w="med" len="med"/>
-                      <a:tailEnd type="none" w="med" len="med"/>
-                    </a:lnL>
-                    <a:lnR w="12700" cap="flat" cmpd="sng" algn="ctr">
-                      <a:solidFill>
-                        <a:srgbClr val="C8E6DF"/>
-                      </a:solidFill>
-                      <a:prstDash val="solid"/>
-                      <a:round/>
-                      <a:headEnd type="none" w="med" len="med"/>
-                      <a:tailEnd type="none" w="med" len="med"/>
-                    </a:lnR>
-                    <a:lnT w="12700" cap="flat" cmpd="sng" algn="ctr">
-                      <a:solidFill>
-                        <a:srgbClr val="C8E6DF"/>
-                      </a:solidFill>
-                      <a:prstDash val="solid"/>
-                      <a:round/>
-                      <a:headEnd type="none" w="med" len="med"/>
-                      <a:tailEnd type="none" w="med" len="med"/>
-                    </a:lnT>
-                    <a:lnB w="12700" cap="flat" cmpd="sng" algn="ctr">
-                      <a:solidFill>
-                        <a:srgbClr val="C8E6DF"/>
-                      </a:solidFill>
-                      <a:prstDash val="solid"/>
-                      <a:round/>
-                      <a:headEnd type="none" w="med" len="med"/>
-                      <a:tailEnd type="none" w="med" len="med"/>
-                    </a:lnB>
-                  </a:tcPr>
-                </a:tc>
-              </a:tr>
-              <a:tr h="256032">
-                <a:tc>
-                  <a:txBody>
-                    <a:bodyPr/>
-                    <a:lstStyle/>
-                    <a:p>
-                      <a:pPr indent="0" marL="0">
-                        <a:buNone/>
-                      </a:pPr>
-                      <a:r>
-                        <a:rPr lang="en-US" sz="1000" dirty="0">
-                          <a:solidFill>
-                            <a:srgbClr val="475569"/>
-                          </a:solidFill>
-                          <a:latin typeface="Malgun Gothic" pitchFamily="34" charset="0"/>
-                          <a:ea typeface="Malgun Gothic" pitchFamily="34" charset="-122"/>
-                          <a:cs typeface="Malgun Gothic" pitchFamily="34" charset="-120"/>
-                        </a:rPr>
-                        <a:t>구현내용</a:t>
-                      </a:r>
-                      <a:endParaRPr lang="en-US" sz="1000" dirty="0">
-                        <a:latin typeface="Malgun Gothic" charset="0"/>
-                        <a:ea typeface="Malgun Gothic" charset="0"/>
-                        <a:cs typeface="Malgun Gothic" charset="0"/>
-                      </a:endParaRPr>
-                    </a:p>
-                  </a:txBody>
-                  <a:tcPr marL="91440" marR="91440" marT="45720" marB="45720">
-                    <a:lnL w="12700" cap="flat" cmpd="sng" algn="ctr">
-                      <a:solidFill>
-                        <a:srgbClr val="C8E6DF"/>
-                      </a:solidFill>
-                      <a:prstDash val="solid"/>
-                      <a:round/>
-                      <a:headEnd type="none" w="med" len="med"/>
-                      <a:tailEnd type="none" w="med" len="med"/>
-                    </a:lnL>
-                    <a:lnR w="12700" cap="flat" cmpd="sng" algn="ctr">
-                      <a:solidFill>
-                        <a:srgbClr val="C8E6DF"/>
-                      </a:solidFill>
-                      <a:prstDash val="solid"/>
-                      <a:round/>
-                      <a:headEnd type="none" w="med" len="med"/>
-                      <a:tailEnd type="none" w="med" len="med"/>
-                    </a:lnR>
-                    <a:lnT w="12700" cap="flat" cmpd="sng" algn="ctr">
-                      <a:solidFill>
-                        <a:srgbClr val="C8E6DF"/>
-                      </a:solidFill>
-                      <a:prstDash val="solid"/>
-                      <a:round/>
-                      <a:headEnd type="none" w="med" len="med"/>
-                      <a:tailEnd type="none" w="med" len="med"/>
-                    </a:lnT>
-                    <a:lnB w="12700" cap="flat" cmpd="sng" algn="ctr">
-                      <a:solidFill>
-                        <a:srgbClr val="C8E6DF"/>
-                      </a:solidFill>
-                      <a:prstDash val="solid"/>
-                      <a:round/>
-                      <a:headEnd type="none" w="med" len="med"/>
-                      <a:tailEnd type="none" w="med" len="med"/>
-                    </a:lnB>
-                  </a:tcPr>
-                </a:tc>
-                <a:tc>
-                  <a:txBody>
-                    <a:bodyPr/>
-                    <a:lstStyle/>
-                    <a:p>
-                      <a:pPr indent="0" marL="0">
-                        <a:buNone/>
-                      </a:pPr>
-                      <a:r>
-                        <a:rPr lang="en-US" sz="1000" dirty="0">
-                          <a:solidFill>
-                            <a:srgbClr val="475569"/>
-                          </a:solidFill>
-                          <a:latin typeface="Malgun Gothic" pitchFamily="34" charset="0"/>
-                          <a:ea typeface="Malgun Gothic" pitchFamily="34" charset="-122"/>
-                          <a:cs typeface="Malgun Gothic" pitchFamily="34" charset="-120"/>
-                        </a:rPr>
-                        <a:t>핵심 요약 및 테이크어웨이 메시지를 그라데이션이 들어간 프리미엄 배너 형태로 감싸 줍니다.</a:t>
-                      </a:r>
-                      <a:endParaRPr lang="en-US" sz="1000" dirty="0">
-                        <a:latin typeface="Malgun Gothic" charset="0"/>
-                        <a:ea typeface="Malgun Gothic" charset="0"/>
-                        <a:cs typeface="Malgun Gothic" charset="0"/>
-                      </a:endParaRPr>
-                    </a:p>
-                  </a:txBody>
-                  <a:tcPr marL="91440" marR="91440" marT="45720" marB="45720">
-                    <a:lnL w="12700" cap="flat" cmpd="sng" algn="ctr">
-                      <a:solidFill>
-                        <a:srgbClr val="C8E6DF"/>
-                      </a:solidFill>
-                      <a:prstDash val="solid"/>
-                      <a:round/>
-                      <a:headEnd type="none" w="med" len="med"/>
-                      <a:tailEnd type="none" w="med" len="med"/>
-                    </a:lnL>
-                    <a:lnR w="12700" cap="flat" cmpd="sng" algn="ctr">
-                      <a:solidFill>
-                        <a:srgbClr val="C8E6DF"/>
-                      </a:solidFill>
-                      <a:prstDash val="solid"/>
-                      <a:round/>
-                      <a:headEnd type="none" w="med" len="med"/>
-                      <a:tailEnd type="none" w="med" len="med"/>
-                    </a:lnR>
-                    <a:lnT w="12700" cap="flat" cmpd="sng" algn="ctr">
-                      <a:solidFill>
-                        <a:srgbClr val="C8E6DF"/>
-                      </a:solidFill>
-                      <a:prstDash val="solid"/>
-                      <a:round/>
-                      <a:headEnd type="none" w="med" len="med"/>
-                      <a:tailEnd type="none" w="med" len="med"/>
-                    </a:lnT>
-                    <a:lnB w="12700" cap="flat" cmpd="sng" algn="ctr">
-                      <a:solidFill>
-                        <a:srgbClr val="C8E6DF"/>
-                      </a:solidFill>
-                      <a:prstDash val="solid"/>
-                      <a:round/>
-                      <a:headEnd type="none" w="med" len="med"/>
-                      <a:tailEnd type="none" w="med" len="med"/>
-                    </a:lnB>
-                  </a:tcPr>
-                </a:tc>
-              </a:tr>
-            </a:tbl>
-          </a:graphicData>
-        </a:graphic>
-      </p:graphicFrame>
-      <p:sp>
-        <p:nvSpPr>
-          <p:cNvPr id="8" name="Text 5"/>
-          <p:cNvSpPr/>
-          <p:nvPr/>
-        </p:nvSpPr>
-        <p:spPr>
-          <a:xfrm>
-            <a:off x="685800" y="2295144"/>
-            <a:ext cx="10820095" cy="237490"/>
+      <p:sp>
+        <p:nvSpPr>
+          <p:cNvPr id="12" name="Shape 10"/>
+          <p:cNvSpPr/>
+          <p:nvPr/>
+        </p:nvSpPr>
+        <p:spPr>
+          <a:xfrm>
+            <a:off x="457200" y="4874260"/>
+            <a:ext cx="5570068" cy="36576"/>
+          </a:xfrm>
+          <a:prstGeom prst="rect">
+            <a:avLst/>
+          </a:prstGeom>
+          <a:solidFill>
+            <a:srgbClr val="6366F1"/>
+          </a:solidFill>
+          <a:ln w="12700">
+            <a:solidFill>
+              <a:srgbClr val="6366F1"/>
+            </a:solidFill>
+            <a:prstDash val="solid"/>
+          </a:ln>
+        </p:spPr>
+      </p:sp>
+      <p:sp>
+        <p:nvSpPr>
+          <p:cNvPr id="13" name="Text 11"/>
+          <p:cNvSpPr/>
+          <p:nvPr/>
+        </p:nvSpPr>
+        <p:spPr>
+          <a:xfrm>
+            <a:off x="566928" y="4983988"/>
+            <a:ext cx="5350612" cy="274320"/>
+          </a:xfrm>
+          <a:prstGeom prst="rect">
+            <a:avLst/>
+          </a:prstGeom>
+          <a:noFill/>
+          <a:ln/>
+        </p:spPr>
+        <p:txBody>
+          <a:bodyPr wrap="square" rtlCol="0" anchor="ctr"/>
+          <a:lstStyle/>
+          <a:p>
+            <a:pPr indent="0" marL="0">
+              <a:buNone/>
+            </a:pPr>
+            <a:r>
+              <a:rPr lang="en-US" sz="1400" b="1" dirty="0">
+                <a:solidFill>
+                  <a:srgbClr val="1A1A2E"/>
+                </a:solidFill>
+                <a:latin typeface="Malgun Gothic" pitchFamily="34" charset="0"/>
+                <a:ea typeface="Malgun Gothic" pitchFamily="34" charset="-122"/>
+                <a:cs typeface="Malgun Gothic" pitchFamily="34" charset="-120"/>
+              </a:rPr>
+              <a:t>🚀 빠른 배포</a:t>
+            </a:r>
+            <a:endParaRPr lang="en-US" sz="1400" dirty="0"/>
+          </a:p>
+        </p:txBody>
+      </p:sp>
+      <p:sp>
+        <p:nvSpPr>
+          <p:cNvPr id="14" name="Text 12"/>
+          <p:cNvSpPr/>
+          <p:nvPr/>
+        </p:nvSpPr>
+        <p:spPr>
+          <a:xfrm>
+            <a:off x="566928" y="5294884"/>
+            <a:ext cx="5350612" cy="877824"/>
           </a:xfrm>
           <a:prstGeom prst="rect">
             <a:avLst/>
@@ -38924,7 +37165,7 @@
               <a:buNone/>
             </a:pPr>
             <a:r>
-              <a:rPr lang="en-US" sz="1100" dirty="0">
+              <a:rPr lang="en-US" sz="1000" dirty="0">
                 <a:solidFill>
                   <a:srgbClr val="475569"/>
                 </a:solidFill>
@@ -38932,28 +37173,30 @@
                 <a:ea typeface="Malgun Gothic" pitchFamily="34" charset="-122"/>
                 <a:cs typeface="Malgun Gothic" pitchFamily="34" charset="-120"/>
               </a:rPr>
-              <a:t>숏코드 입력내용</a:t>
-            </a:r>
-            <a:endParaRPr lang="en-US" sz="1100" dirty="0"/>
+              <a:t>원클릭 배포\n자동 롤백\n무중단 업데이트</a:t>
+            </a:r>
+            <a:endParaRPr lang="en-US" sz="1000" dirty="0"/>
           </a:p>
         </p:txBody>
       </p:sp>
       <p:sp>
         <p:nvSpPr>
-          <p:cNvPr id="9" name="Shape 6"/>
-          <p:cNvSpPr/>
-          <p:nvPr/>
-        </p:nvSpPr>
-        <p:spPr>
-          <a:xfrm>
-            <a:off x="685800" y="2669794"/>
-            <a:ext cx="10820095" cy="1262380"/>
-          </a:xfrm>
-          <a:prstGeom prst="rect">
-            <a:avLst/>
+          <p:cNvPr id="15" name="Shape 13"/>
+          <p:cNvSpPr/>
+          <p:nvPr/>
+        </p:nvSpPr>
+        <p:spPr>
+          <a:xfrm>
+            <a:off x="6164428" y="4874260"/>
+            <a:ext cx="5570068" cy="1371600"/>
+          </a:xfrm>
+          <a:prstGeom prst="roundRect">
+            <a:avLst>
+              <a:gd name="adj" fmla="val 5333"/>
+            </a:avLst>
           </a:prstGeom>
           <a:solidFill>
-            <a:srgbClr val="0F172A"/>
+            <a:srgbClr val="FFFFFF"/>
           </a:solidFill>
           <a:ln w="9525">
             <a:solidFill>
@@ -38965,14 +37208,78 @@
       </p:sp>
       <p:sp>
         <p:nvSpPr>
-          <p:cNvPr id="10" name="Text 7"/>
-          <p:cNvSpPr/>
-          <p:nvPr/>
-        </p:nvSpPr>
-        <p:spPr>
-          <a:xfrm>
-            <a:off x="795528" y="2742946"/>
-            <a:ext cx="10600639" cy="1170940"/>
+          <p:cNvPr id="16" name="Shape 14"/>
+          <p:cNvSpPr/>
+          <p:nvPr/>
+        </p:nvSpPr>
+        <p:spPr>
+          <a:xfrm>
+            <a:off x="6164428" y="4874260"/>
+            <a:ext cx="5570068" cy="36576"/>
+          </a:xfrm>
+          <a:prstGeom prst="rect">
+            <a:avLst/>
+          </a:prstGeom>
+          <a:solidFill>
+            <a:srgbClr val="E11D48"/>
+          </a:solidFill>
+          <a:ln w="12700">
+            <a:solidFill>
+              <a:srgbClr val="E11D48"/>
+            </a:solidFill>
+            <a:prstDash val="solid"/>
+          </a:ln>
+        </p:spPr>
+      </p:sp>
+      <p:sp>
+        <p:nvSpPr>
+          <p:cNvPr id="17" name="Text 15"/>
+          <p:cNvSpPr/>
+          <p:nvPr/>
+        </p:nvSpPr>
+        <p:spPr>
+          <a:xfrm>
+            <a:off x="6274156" y="4983988"/>
+            <a:ext cx="5350612" cy="274320"/>
+          </a:xfrm>
+          <a:prstGeom prst="rect">
+            <a:avLst/>
+          </a:prstGeom>
+          <a:noFill/>
+          <a:ln/>
+        </p:spPr>
+        <p:txBody>
+          <a:bodyPr wrap="square" rtlCol="0" anchor="ctr"/>
+          <a:lstStyle/>
+          <a:p>
+            <a:pPr indent="0" marL="0">
+              <a:buNone/>
+            </a:pPr>
+            <a:r>
+              <a:rPr lang="en-US" sz="1400" b="1" dirty="0">
+                <a:solidFill>
+                  <a:srgbClr val="1A1A2E"/>
+                </a:solidFill>
+                <a:latin typeface="Malgun Gothic" pitchFamily="34" charset="0"/>
+                <a:ea typeface="Malgun Gothic" pitchFamily="34" charset="-122"/>
+                <a:cs typeface="Malgun Gothic" pitchFamily="34" charset="-120"/>
+              </a:rPr>
+              <a:t>🛡️ 보안 우선</a:t>
+            </a:r>
+            <a:endParaRPr lang="en-US" sz="1400" dirty="0"/>
+          </a:p>
+        </p:txBody>
+      </p:sp>
+      <p:sp>
+        <p:nvSpPr>
+          <p:cNvPr id="18" name="Text 16"/>
+          <p:cNvSpPr/>
+          <p:nvPr/>
+        </p:nvSpPr>
+        <p:spPr>
+          <a:xfrm>
+            <a:off x="6274156" y="5294884"/>
+            <a:ext cx="5350612" cy="877824"/>
           </a:xfrm>
           <a:prstGeom prst="rect">
             <a:avLst/>
@@ -38990,81 +37297,13 @@
             <a:r>
               <a:rPr lang="en-US" sz="1000" dirty="0">
                 <a:solidFill>
-                  <a:srgbClr val="A8B2D8"/>
-                </a:solidFill>
-                <a:latin typeface="Consolas" pitchFamily="34" charset="0"/>
-                <a:ea typeface="Consolas" pitchFamily="34" charset="-122"/>
-                <a:cs typeface="Consolas" pitchFamily="34" charset="-120"/>
-              </a:rPr>
-              <a:t>\::: takeaway</a:t>
-            </a:r>
-            <a:endParaRPr lang="en-US" sz="1000" dirty="0"/>
-          </a:p>
-          <a:p>
-            <a:pPr indent="0" marL="0">
-              <a:buNone/>
-            </a:pPr>
-            <a:r>
-              <a:rPr lang="en-US" sz="1000" dirty="0">
-                <a:solidFill>
-                  <a:srgbClr val="A8B2D8"/>
-                </a:solidFill>
-                <a:latin typeface="Consolas" pitchFamily="34" charset="0"/>
-                <a:ea typeface="Consolas" pitchFamily="34" charset="-122"/>
-                <a:cs typeface="Consolas" pitchFamily="34" charset="-120"/>
-              </a:rPr>
-              <a:t>- icon: "💡"</a:t>
-            </a:r>
-            <a:endParaRPr lang="en-US" sz="1000" dirty="0"/>
-          </a:p>
-          <a:p>
-            <a:pPr indent="0" marL="0">
-              <a:buNone/>
-            </a:pPr>
-            <a:r>
-              <a:rPr lang="en-US" sz="1000" dirty="0">
-                <a:solidFill>
-                  <a:srgbClr val="A8B2D8"/>
-                </a:solidFill>
-                <a:latin typeface="Consolas" pitchFamily="34" charset="0"/>
-                <a:ea typeface="Consolas" pitchFamily="34" charset="-122"/>
-                <a:cs typeface="Consolas" pitchFamily="34" charset="-120"/>
-              </a:rPr>
-              <a:t>  title: "Key Takeaway"</a:t>
-            </a:r>
-            <a:endParaRPr lang="en-US" sz="1000" dirty="0"/>
-          </a:p>
-          <a:p>
-            <a:pPr indent="0" marL="0">
-              <a:buNone/>
-            </a:pPr>
-            <a:r>
-              <a:rPr lang="en-US" sz="1000" dirty="0">
-                <a:solidFill>
-                  <a:srgbClr val="A8B2D8"/>
-                </a:solidFill>
-                <a:latin typeface="Consolas" pitchFamily="34" charset="0"/>
-                <a:ea typeface="Consolas" pitchFamily="34" charset="-122"/>
-                <a:cs typeface="Consolas" pitchFamily="34" charset="-120"/>
-              </a:rPr>
-              <a:t>  desc: "바이브코딩은 문법 암기가 아닌, 원하는 바를 논리적 자연어로 설명하는 역량이 본질입니다."</a:t>
-            </a:r>
-            <a:endParaRPr lang="en-US" sz="1000" dirty="0"/>
-          </a:p>
-          <a:p>
-            <a:pPr indent="0" marL="0">
-              <a:buNone/>
-            </a:pPr>
-            <a:r>
-              <a:rPr lang="en-US" sz="1000" dirty="0">
-                <a:solidFill>
-                  <a:srgbClr val="A8B2D8"/>
-                </a:solidFill>
-                <a:latin typeface="Consolas" pitchFamily="34" charset="0"/>
-                <a:ea typeface="Consolas" pitchFamily="34" charset="-122"/>
-                <a:cs typeface="Consolas" pitchFamily="34" charset="-120"/>
-              </a:rPr>
-              <a:t>\:::</a:t>
+                  <a:srgbClr val="475569"/>
+                </a:solidFill>
+                <a:latin typeface="Malgun Gothic" pitchFamily="34" charset="0"/>
+                <a:ea typeface="Malgun Gothic" pitchFamily="34" charset="-122"/>
+                <a:cs typeface="Malgun Gothic" pitchFamily="34" charset="-120"/>
+              </a:rPr>
+              <a:t>자동 인증서\n방화벽 내장\n취약점 스캔</a:t>
             </a:r>
             <a:endParaRPr lang="en-US" sz="1000" dirty="0"/>
           </a:p>
@@ -39187,7 +37426,7 @@
                 <a:ea typeface="Malgun Gothic" pitchFamily="34" charset="-122"/>
                 <a:cs typeface="Malgun Gothic" pitchFamily="34" charset="-120"/>
               </a:rPr>
-              <a:t>1</a:t>
+              <a:t>3</a:t>
             </a:r>
             <a:endParaRPr lang="en-US" sz="1600" dirty="0"/>
           </a:p>
@@ -39226,7 +37465,7 @@
                 <a:ea typeface="Malgun Gothic" pitchFamily="34" charset="-122"/>
                 <a:cs typeface="Malgun Gothic" pitchFamily="34" charset="-120"/>
               </a:rPr>
-              <a:t>icon-grid</a:t>
+              <a:t>블록 인자</a:t>
             </a:r>
             <a:endParaRPr lang="en-US" sz="2200" dirty="0"/>
           </a:p>
@@ -39241,11 +37480,11 @@
         <p:spPr>
           <a:xfrm>
             <a:off x="457200" y="1143000"/>
-            <a:ext cx="11277295" cy="4404614"/>
+            <a:ext cx="11277295" cy="2245614"/>
           </a:xfrm>
           <a:prstGeom prst="roundRect">
             <a:avLst>
-              <a:gd name="adj" fmla="val 1661"/>
+              <a:gd name="adj" fmla="val 3258"/>
             </a:avLst>
           </a:prstGeom>
           <a:solidFill>
@@ -39258,6 +37497,45 @@
             <a:prstDash val="solid"/>
           </a:ln>
         </p:spPr>
+      </p:sp>
+      <p:sp>
+        <p:nvSpPr>
+          <p:cNvPr id="7" name="Text 5"/>
+          <p:cNvSpPr/>
+          <p:nvPr/>
+        </p:nvSpPr>
+        <p:spPr>
+          <a:xfrm>
+            <a:off x="685800" y="1325880"/>
+            <a:ext cx="10820095" cy="237490"/>
+          </a:xfrm>
+          <a:prstGeom prst="rect">
+            <a:avLst/>
+          </a:prstGeom>
+          <a:noFill/>
+          <a:ln/>
+        </p:spPr>
+        <p:txBody>
+          <a:bodyPr wrap="square" rtlCol="0" anchor="t"/>
+          <a:lstStyle/>
+          <a:p>
+            <a:pPr indent="0" marL="0">
+              <a:buNone/>
+            </a:pPr>
+            <a:r>
+              <a:rPr lang="en-US" sz="1100" dirty="0">
+                <a:solidFill>
+                  <a:srgbClr val="475569"/>
+                </a:solidFill>
+                <a:latin typeface="Malgun Gothic" pitchFamily="34" charset="0"/>
+                <a:ea typeface="Malgun Gothic" pitchFamily="34" charset="-122"/>
+                <a:cs typeface="Malgun Gothic" pitchFamily="34" charset="-120"/>
+              </a:rPr>
+              <a:t>숏코드명 뒤에 공백으로 지정하며 복수 조합이 가능합니다.</a:t>
+            </a:r>
+            <a:endParaRPr lang="en-US" sz="1100" dirty="0"/>
+          </a:p>
+        </p:txBody>
       </p:sp>
       <p:graphicFrame>
         <p:nvGraphicFramePr>
@@ -39274,7 +37552,7 @@
           </p:nvPr>
         </p:nvGraphicFramePr>
         <p:xfrm>
-          <a:off x="685800" y="1325880"/>
+          <a:off x="685800" y="1700530"/>
           <a:ext cx="10820095" cy="914400"/>
         </p:xfrm>
         <a:graphic>
@@ -39282,8 +37560,9 @@
             <a:tbl>
               <a:tblPr/>
               <a:tblGrid>
-                <a:gridCol w="5410048"/>
-                <a:gridCol w="5410048"/>
+                <a:gridCol w="3606698"/>
+                <a:gridCol w="3606698"/>
+                <a:gridCol w="3606698"/>
               </a:tblGrid>
               <a:tr h="320040">
                 <a:tc>
@@ -39303,7 +37582,7 @@
                           <a:ea typeface="Malgun Gothic" pitchFamily="34" charset="-122"/>
                           <a:cs typeface="Malgun Gothic" pitchFamily="34" charset="-120"/>
                         </a:rPr>
-                        <a:t>항목</a:t>
+                        <a:t>인자</a:t>
                       </a:r>
                       <a:endParaRPr lang="en-US" sz="1100" dirty="0">
                         <a:latin typeface="Malgun Gothic" charset="0"/>
@@ -39371,7 +37650,75 @@
                           <a:ea typeface="Malgun Gothic" pitchFamily="34" charset="-122"/>
                           <a:cs typeface="Malgun Gothic" pitchFamily="34" charset="-120"/>
                         </a:rPr>
-                        <a:t>내용</a:t>
+                        <a:t>대상</a:t>
+                      </a:r>
+                      <a:endParaRPr lang="en-US" sz="1100" dirty="0">
+                        <a:latin typeface="Malgun Gothic" charset="0"/>
+                        <a:ea typeface="Malgun Gothic" charset="0"/>
+                        <a:cs typeface="Malgun Gothic" charset="0"/>
+                      </a:endParaRPr>
+                    </a:p>
+                  </a:txBody>
+                  <a:tcPr marL="91440" marR="91440" marT="45720" marB="45720">
+                    <a:lnL w="12700" cap="flat" cmpd="sng" algn="ctr">
+                      <a:solidFill>
+                        <a:srgbClr val="C8E6DF"/>
+                      </a:solidFill>
+                      <a:prstDash val="solid"/>
+                      <a:round/>
+                      <a:headEnd type="none" w="med" len="med"/>
+                      <a:tailEnd type="none" w="med" len="med"/>
+                    </a:lnL>
+                    <a:lnR w="12700" cap="flat" cmpd="sng" algn="ctr">
+                      <a:solidFill>
+                        <a:srgbClr val="C8E6DF"/>
+                      </a:solidFill>
+                      <a:prstDash val="solid"/>
+                      <a:round/>
+                      <a:headEnd type="none" w="med" len="med"/>
+                      <a:tailEnd type="none" w="med" len="med"/>
+                    </a:lnR>
+                    <a:lnT w="12700" cap="flat" cmpd="sng" algn="ctr">
+                      <a:solidFill>
+                        <a:srgbClr val="C8E6DF"/>
+                      </a:solidFill>
+                      <a:prstDash val="solid"/>
+                      <a:round/>
+                      <a:headEnd type="none" w="med" len="med"/>
+                      <a:tailEnd type="none" w="med" len="med"/>
+                    </a:lnT>
+                    <a:lnB w="12700" cap="flat" cmpd="sng" algn="ctr">
+                      <a:solidFill>
+                        <a:srgbClr val="C8E6DF"/>
+                      </a:solidFill>
+                      <a:prstDash val="solid"/>
+                      <a:round/>
+                      <a:headEnd type="none" w="med" len="med"/>
+                      <a:tailEnd type="none" w="med" len="med"/>
+                    </a:lnB>
+                    <a:solidFill>
+                      <a:srgbClr val="10A37F"/>
+                    </a:solidFill>
+                  </a:tcPr>
+                </a:tc>
+                <a:tc>
+                  <a:txBody>
+                    <a:bodyPr/>
+                    <a:lstStyle/>
+                    <a:p>
+                      <a:pPr indent="0" marL="0">
+                        <a:buNone/>
+                      </a:pPr>
+                      <a:r>
+                        <a:rPr lang="en-US" sz="1100" b="1" dirty="0">
+                          <a:solidFill>
+                            <a:srgbClr val="FFFFFF"/>
+                          </a:solidFill>
+                          <a:latin typeface="Malgun Gothic" pitchFamily="34" charset="0"/>
+                          <a:ea typeface="Malgun Gothic" pitchFamily="34" charset="-122"/>
+                          <a:cs typeface="Malgun Gothic" pitchFamily="34" charset="-120"/>
+                        </a:rPr>
+                        <a:t>설명</a:t>
                       </a:r>
                       <a:endParaRPr lang="en-US" sz="1100" dirty="0">
                         <a:latin typeface="Malgun Gothic" charset="0"/>
@@ -39441,7 +37788,7 @@
                           <a:ea typeface="Malgun Gothic" pitchFamily="34" charset="-122"/>
                           <a:cs typeface="Malgun Gothic" pitchFamily="34" charset="-120"/>
                         </a:rPr>
-                        <a:t>숏코드 명</a:t>
+                        <a:t>cols=N</a:t>
                       </a:r>
                       <a:endParaRPr lang="en-US" sz="1000" dirty="0">
                         <a:latin typeface="Malgun Gothic" charset="0"/>
@@ -39506,7 +37853,72 @@
                           <a:ea typeface="Malgun Gothic" pitchFamily="34" charset="-122"/>
                           <a:cs typeface="Malgun Gothic" pitchFamily="34" charset="-120"/>
                         </a:rPr>
-                        <a:t>icon-grid</a:t>
+                        <a:t>grid 계열 5종</a:t>
+                      </a:r>
+                      <a:endParaRPr lang="en-US" sz="1000" dirty="0">
+                        <a:latin typeface="Malgun Gothic" charset="0"/>
+                        <a:ea typeface="Malgun Gothic" charset="0"/>
+                        <a:cs typeface="Malgun Gothic" charset="0"/>
+                      </a:endParaRPr>
+                    </a:p>
+                  </a:txBody>
+                  <a:tcPr marL="91440" marR="91440" marT="45720" marB="45720">
+                    <a:lnL w="12700" cap="flat" cmpd="sng" algn="ctr">
+                      <a:solidFill>
+                        <a:srgbClr val="C8E6DF"/>
+                      </a:solidFill>
+                      <a:prstDash val="solid"/>
+                      <a:round/>
+                      <a:headEnd type="none" w="med" len="med"/>
+                      <a:tailEnd type="none" w="med" len="med"/>
+                    </a:lnL>
+                    <a:lnR w="12700" cap="flat" cmpd="sng" algn="ctr">
+                      <a:solidFill>
+                        <a:srgbClr val="C8E6DF"/>
+                      </a:solidFill>
+                      <a:prstDash val="solid"/>
+                      <a:round/>
+                      <a:headEnd type="none" w="med" len="med"/>
+                      <a:tailEnd type="none" w="med" len="med"/>
+                    </a:lnR>
+                    <a:lnT w="12700" cap="flat" cmpd="sng" algn="ctr">
+                      <a:solidFill>
+                        <a:srgbClr val="C8E6DF"/>
+                      </a:solidFill>
+                      <a:prstDash val="solid"/>
+                      <a:round/>
+                      <a:headEnd type="none" w="med" len="med"/>
+                      <a:tailEnd type="none" w="med" len="med"/>
+                    </a:lnT>
+                    <a:lnB w="12700" cap="flat" cmpd="sng" algn="ctr">
+                      <a:solidFill>
+                        <a:srgbClr val="C8E6DF"/>
+                      </a:solidFill>
+                      <a:prstDash val="solid"/>
+                      <a:round/>
+                      <a:headEnd type="none" w="med" len="med"/>
+                      <a:tailEnd type="none" w="med" len="med"/>
+                    </a:lnB>
+                  </a:tcPr>
+                </a:tc>
+                <a:tc>
+                  <a:txBody>
+                    <a:bodyPr/>
+                    <a:lstStyle/>
+                    <a:p>
+                      <a:pPr indent="0" marL="0">
+                        <a:buNone/>
+                      </a:pPr>
+                      <a:r>
+                        <a:rPr lang="en-US" sz="1000" dirty="0">
+                          <a:solidFill>
+                            <a:srgbClr val="475569"/>
+                          </a:solidFill>
+                          <a:latin typeface="Malgun Gothic" pitchFamily="34" charset="0"/>
+                          <a:ea typeface="Malgun Gothic" pitchFamily="34" charset="-122"/>
+                          <a:cs typeface="Malgun Gothic" pitchFamily="34" charset="-120"/>
+                        </a:rPr>
+                        <a:t>CSS 컬럼 수 강제 지정</a:t>
                       </a:r>
                       <a:endParaRPr lang="en-US" sz="1000" dirty="0">
                         <a:latin typeface="Malgun Gothic" charset="0"/>
@@ -39573,7 +37985,7 @@
                           <a:ea typeface="Malgun Gothic" pitchFamily="34" charset="-122"/>
                           <a:cs typeface="Malgun Gothic" pitchFamily="34" charset="-120"/>
                         </a:rPr>
-                        <a:t>구현내용</a:t>
+                        <a:t>bullet=X</a:t>
                       </a:r>
                       <a:endParaRPr lang="en-US" sz="1000" dirty="0">
                         <a:latin typeface="Malgun Gothic" charset="0"/>
@@ -39638,7 +38050,7 @@
                           <a:ea typeface="Malgun Gothic" pitchFamily="34" charset="-122"/>
                           <a:cs typeface="Malgun Gothic" pitchFamily="34" charset="-120"/>
                         </a:rPr>
-                        <a:t>아이콘 중심의 기본 카드 그리드. 핵심 기능, 사용 사례, 장점 목록에 적합합니다.</a:t>
+                        <a:t>전체</a:t>
                       </a:r>
                       <a:endParaRPr lang="en-US" sz="1000" dirty="0">
                         <a:latin typeface="Malgun Gothic" charset="0"/>
@@ -39686,6 +38098,71 @@
                     </a:lnB>
                   </a:tcPr>
                 </a:tc>
+                <a:tc>
+                  <a:txBody>
+                    <a:bodyPr/>
+                    <a:lstStyle/>
+                    <a:p>
+                      <a:pPr indent="0" marL="0">
+                        <a:buNone/>
+                      </a:pPr>
+                      <a:r>
+                        <a:rPr lang="en-US" sz="1000" dirty="0">
+                          <a:solidFill>
+                            <a:srgbClr val="475569"/>
+                          </a:solidFill>
+                          <a:latin typeface="Malgun Gothic" pitchFamily="34" charset="0"/>
+                          <a:ea typeface="Malgun Gothic" pitchFamily="34" charset="-122"/>
+                          <a:cs typeface="Malgun Gothic" pitchFamily="34" charset="-120"/>
+                        </a:rPr>
+                        <a:t>블록 기본 불릿 기호 지정</a:t>
+                      </a:r>
+                      <a:endParaRPr lang="en-US" sz="1000" dirty="0">
+                        <a:latin typeface="Malgun Gothic" charset="0"/>
+                        <a:ea typeface="Malgun Gothic" charset="0"/>
+                        <a:cs typeface="Malgun Gothic" charset="0"/>
+                      </a:endParaRPr>
+                    </a:p>
+                  </a:txBody>
+                  <a:tcPr marL="91440" marR="91440" marT="45720" marB="45720">
+                    <a:lnL w="12700" cap="flat" cmpd="sng" algn="ctr">
+                      <a:solidFill>
+                        <a:srgbClr val="C8E6DF"/>
+                      </a:solidFill>
+                      <a:prstDash val="solid"/>
+                      <a:round/>
+                      <a:headEnd type="none" w="med" len="med"/>
+                      <a:tailEnd type="none" w="med" len="med"/>
+                    </a:lnL>
+                    <a:lnR w="12700" cap="flat" cmpd="sng" algn="ctr">
+                      <a:solidFill>
+                        <a:srgbClr val="C8E6DF"/>
+                      </a:solidFill>
+                      <a:prstDash val="solid"/>
+                      <a:round/>
+                      <a:headEnd type="none" w="med" len="med"/>
+                      <a:tailEnd type="none" w="med" len="med"/>
+                    </a:lnR>
+                    <a:lnT w="12700" cap="flat" cmpd="sng" algn="ctr">
+                      <a:solidFill>
+                        <a:srgbClr val="C8E6DF"/>
+                      </a:solidFill>
+                      <a:prstDash val="solid"/>
+                      <a:round/>
+                      <a:headEnd type="none" w="med" len="med"/>
+                      <a:tailEnd type="none" w="med" len="med"/>
+                    </a:lnT>
+                    <a:lnB w="12700" cap="flat" cmpd="sng" algn="ctr">
+                      <a:solidFill>
+                        <a:srgbClr val="C8E6DF"/>
+                      </a:solidFill>
+                      <a:prstDash val="solid"/>
+                      <a:round/>
+                      <a:headEnd type="none" w="med" len="med"/>
+                      <a:tailEnd type="none" w="med" len="med"/>
+                    </a:lnB>
+                  </a:tcPr>
+                </a:tc>
               </a:tr>
             </a:tbl>
           </a:graphicData>
@@ -39693,45 +38170,6 @@
       </p:graphicFrame>
       <p:sp>
         <p:nvSpPr>
-          <p:cNvPr id="8" name="Text 5"/>
-          <p:cNvSpPr/>
-          <p:nvPr/>
-        </p:nvSpPr>
-        <p:spPr>
-          <a:xfrm>
-            <a:off x="685800" y="2295144"/>
-            <a:ext cx="10820095" cy="237490"/>
-          </a:xfrm>
-          <a:prstGeom prst="rect">
-            <a:avLst/>
-          </a:prstGeom>
-          <a:noFill/>
-          <a:ln/>
-        </p:spPr>
-        <p:txBody>
-          <a:bodyPr wrap="square" rtlCol="0" anchor="t"/>
-          <a:lstStyle/>
-          <a:p>
-            <a:pPr indent="0" marL="0">
-              <a:buNone/>
-            </a:pPr>
-            <a:r>
-              <a:rPr lang="en-US" sz="1100" dirty="0">
-                <a:solidFill>
-                  <a:srgbClr val="475569"/>
-                </a:solidFill>
-                <a:latin typeface="Malgun Gothic" pitchFamily="34" charset="0"/>
-                <a:ea typeface="Malgun Gothic" pitchFamily="34" charset="-122"/>
-                <a:cs typeface="Malgun Gothic" pitchFamily="34" charset="-120"/>
-              </a:rPr>
-              <a:t>숏코드 입력내용</a:t>
-            </a:r>
-            <a:endParaRPr lang="en-US" sz="1100" dirty="0"/>
-          </a:p>
-        </p:txBody>
-      </p:sp>
-      <p:sp>
-        <p:nvSpPr>
           <p:cNvPr id="9" name="Shape 6"/>
           <p:cNvSpPr/>
           <p:nvPr/>
@@ -39739,7 +38177,7 @@
         <p:spPr>
           <a:xfrm>
             <a:off x="685800" y="2669794"/>
-            <a:ext cx="10820095" cy="2557780"/>
+            <a:ext cx="10820095" cy="398780"/>
           </a:xfrm>
           <a:prstGeom prst="rect">
             <a:avLst/>
@@ -39764,7 +38202,7 @@
         <p:spPr>
           <a:xfrm>
             <a:off x="795528" y="2742946"/>
-            <a:ext cx="10600639" cy="2466340"/>
+            <a:ext cx="10600639" cy="307340"/>
           </a:xfrm>
           <a:prstGeom prst="rect">
             <a:avLst/>
@@ -39779,189 +38217,8 @@
             <a:pPr indent="0" marL="0">
               <a:buNone/>
             </a:pPr>
-            <a:r>
-              <a:rPr lang="en-US" sz="1000" dirty="0">
-                <a:solidFill>
-                  <a:srgbClr val="A8B2D8"/>
-                </a:solidFill>
-                <a:latin typeface="Consolas" pitchFamily="34" charset="0"/>
-                <a:ea typeface="Consolas" pitchFamily="34" charset="-122"/>
-                <a:cs typeface="Consolas" pitchFamily="34" charset="-120"/>
-              </a:rPr>
-              <a:t>\::: icon-grid cols=3</a:t>
-            </a:r>
             <a:endParaRPr lang="en-US" sz="1000" dirty="0"/>
           </a:p>
-          <a:p>
-            <a:pPr indent="0" marL="0">
-              <a:buNone/>
-            </a:pPr>
-            <a:r>
-              <a:rPr lang="en-US" sz="1000" dirty="0">
-                <a:solidFill>
-                  <a:srgbClr val="A8B2D8"/>
-                </a:solidFill>
-                <a:latin typeface="Consolas" pitchFamily="34" charset="0"/>
-                <a:ea typeface="Consolas" pitchFamily="34" charset="-122"/>
-                <a:cs typeface="Consolas" pitchFamily="34" charset="-120"/>
-              </a:rPr>
-              <a:t>- icon: "⚡"</a:t>
-            </a:r>
-            <a:endParaRPr lang="en-US" sz="1000" dirty="0"/>
-          </a:p>
-          <a:p>
-            <a:pPr indent="0" marL="0">
-              <a:buNone/>
-            </a:pPr>
-            <a:r>
-              <a:rPr lang="en-US" sz="1000" dirty="0">
-                <a:solidFill>
-                  <a:srgbClr val="A8B2D8"/>
-                </a:solidFill>
-                <a:latin typeface="Consolas" pitchFamily="34" charset="0"/>
-                <a:ea typeface="Consolas" pitchFamily="34" charset="-122"/>
-                <a:cs typeface="Consolas" pitchFamily="34" charset="-120"/>
-              </a:rPr>
-              <a:t>  title: "빠른 작업"</a:t>
-            </a:r>
-            <a:endParaRPr lang="en-US" sz="1000" dirty="0"/>
-          </a:p>
-          <a:p>
-            <a:pPr indent="0" marL="0">
-              <a:buNone/>
-            </a:pPr>
-            <a:r>
-              <a:rPr lang="en-US" sz="1000" dirty="0">
-                <a:solidFill>
-                  <a:srgbClr val="A8B2D8"/>
-                </a:solidFill>
-                <a:latin typeface="Consolas" pitchFamily="34" charset="0"/>
-                <a:ea typeface="Consolas" pitchFamily="34" charset="-122"/>
-                <a:cs typeface="Consolas" pitchFamily="34" charset="-120"/>
-              </a:rPr>
-              <a:t>  desc: "반복 작업을 줄이고 결과물을 빠르게 만듭니다."</a:t>
-            </a:r>
-            <a:endParaRPr lang="en-US" sz="1000" dirty="0"/>
-          </a:p>
-          <a:p>
-            <a:pPr indent="0" marL="0">
-              <a:buNone/>
-            </a:pPr>
-            <a:r>
-              <a:rPr lang="en-US" sz="1000" dirty="0">
-                <a:solidFill>
-                  <a:srgbClr val="A8B2D8"/>
-                </a:solidFill>
-                <a:latin typeface="Consolas" pitchFamily="34" charset="0"/>
-                <a:ea typeface="Consolas" pitchFamily="34" charset="-122"/>
-                <a:cs typeface="Consolas" pitchFamily="34" charset="-120"/>
-              </a:rPr>
-              <a:t>- icon: "🎨"</a:t>
-            </a:r>
-            <a:endParaRPr lang="en-US" sz="1000" dirty="0"/>
-          </a:p>
-          <a:p>
-            <a:pPr indent="0" marL="0">
-              <a:buNone/>
-            </a:pPr>
-            <a:r>
-              <a:rPr lang="en-US" sz="1000" dirty="0">
-                <a:solidFill>
-                  <a:srgbClr val="A8B2D8"/>
-                </a:solidFill>
-                <a:latin typeface="Consolas" pitchFamily="34" charset="0"/>
-                <a:ea typeface="Consolas" pitchFamily="34" charset="-122"/>
-                <a:cs typeface="Consolas" pitchFamily="34" charset="-120"/>
-              </a:rPr>
-              <a:t>  title: "쉬운 디자인"</a:t>
-            </a:r>
-            <a:endParaRPr lang="en-US" sz="1000" dirty="0"/>
-          </a:p>
-          <a:p>
-            <a:pPr indent="0" marL="0">
-              <a:buNone/>
-            </a:pPr>
-            <a:r>
-              <a:rPr lang="en-US" sz="1000" dirty="0">
-                <a:solidFill>
-                  <a:srgbClr val="A8B2D8"/>
-                </a:solidFill>
-                <a:latin typeface="Consolas" pitchFamily="34" charset="0"/>
-                <a:ea typeface="Consolas" pitchFamily="34" charset="-122"/>
-                <a:cs typeface="Consolas" pitchFamily="34" charset="-120"/>
-              </a:rPr>
-              <a:t>  desc: "템플릿과 프리셋으로 초보자도 보기 좋은 결과를 만들 수 있습니다."</a:t>
-            </a:r>
-            <a:endParaRPr lang="en-US" sz="1000" dirty="0"/>
-          </a:p>
-          <a:p>
-            <a:pPr indent="0" marL="0">
-              <a:buNone/>
-            </a:pPr>
-            <a:r>
-              <a:rPr lang="en-US" sz="1000" dirty="0">
-                <a:solidFill>
-                  <a:srgbClr val="A8B2D8"/>
-                </a:solidFill>
-                <a:latin typeface="Consolas" pitchFamily="34" charset="0"/>
-                <a:ea typeface="Consolas" pitchFamily="34" charset="-122"/>
-                <a:cs typeface="Consolas" pitchFamily="34" charset="-120"/>
-              </a:rPr>
-              <a:t>- icon: "🤝"</a:t>
-            </a:r>
-            <a:endParaRPr lang="en-US" sz="1000" dirty="0"/>
-          </a:p>
-          <a:p>
-            <a:pPr indent="0" marL="0">
-              <a:buNone/>
-            </a:pPr>
-            <a:r>
-              <a:rPr lang="en-US" sz="1000" dirty="0">
-                <a:solidFill>
-                  <a:srgbClr val="A8B2D8"/>
-                </a:solidFill>
-                <a:latin typeface="Consolas" pitchFamily="34" charset="0"/>
-                <a:ea typeface="Consolas" pitchFamily="34" charset="-122"/>
-                <a:cs typeface="Consolas" pitchFamily="34" charset="-120"/>
-              </a:rPr>
-              <a:t>  title: "팀 협업"</a:t>
-            </a:r>
-            <a:endParaRPr lang="en-US" sz="1000" dirty="0"/>
-          </a:p>
-          <a:p>
-            <a:pPr indent="0" marL="0">
-              <a:buNone/>
-            </a:pPr>
-            <a:r>
-              <a:rPr lang="en-US" sz="1000" dirty="0">
-                <a:solidFill>
-                  <a:srgbClr val="A8B2D8"/>
-                </a:solidFill>
-                <a:latin typeface="Consolas" pitchFamily="34" charset="0"/>
-                <a:ea typeface="Consolas" pitchFamily="34" charset="-122"/>
-                <a:cs typeface="Consolas" pitchFamily="34" charset="-120"/>
-              </a:rPr>
-              <a:t>  desc: "링크 공유와 댓글로 팀 작업을 이어갈 수 있습니다."</a:t>
-            </a:r>
-            <a:endParaRPr lang="en-US" sz="1000" dirty="0"/>
-          </a:p>
-          <a:p>
-            <a:pPr indent="0" marL="0">
-              <a:buNone/>
-            </a:pPr>
-            <a:r>
-              <a:rPr lang="en-US" sz="1000" dirty="0">
-                <a:solidFill>
-                  <a:srgbClr val="A8B2D8"/>
-                </a:solidFill>
-                <a:latin typeface="Consolas" pitchFamily="34" charset="0"/>
-                <a:ea typeface="Consolas" pitchFamily="34" charset="-122"/>
-                <a:cs typeface="Consolas" pitchFamily="34" charset="-120"/>
-              </a:rPr>
-              <a:t>\:::</a:t>
-            </a:r>
-            <a:endParaRPr lang="en-US" sz="1000" dirty="0"/>
-          </a:p>
         </p:txBody>
       </p:sp>
       <p:sp>
@@ -39972,12 +38229,12 @@
         </p:nvSpPr>
         <p:spPr>
           <a:xfrm>
-            <a:off x="457200" y="5684774"/>
-            <a:ext cx="3667658" cy="1280160"/>
+            <a:off x="457200" y="3525774"/>
+            <a:ext cx="2716454" cy="1371600"/>
           </a:xfrm>
           <a:prstGeom prst="roundRect">
             <a:avLst>
-              <a:gd name="adj" fmla="val 5714"/>
+              <a:gd name="adj" fmla="val 5333"/>
             </a:avLst>
           </a:prstGeom>
           <a:solidFill>
@@ -39993,14 +38250,39 @@
       </p:sp>
       <p:sp>
         <p:nvSpPr>
-          <p:cNvPr id="12" name="Text 9"/>
-          <p:cNvSpPr/>
-          <p:nvPr/>
-        </p:nvSpPr>
-        <p:spPr>
-          <a:xfrm>
-            <a:off x="548640" y="5776214"/>
-            <a:ext cx="3484778" cy="384048"/>
+          <p:cNvPr id="12" name="Shape 9"/>
+          <p:cNvSpPr/>
+          <p:nvPr/>
+        </p:nvSpPr>
+        <p:spPr>
+          <a:xfrm>
+            <a:off x="457200" y="3525774"/>
+            <a:ext cx="2716454" cy="36576"/>
+          </a:xfrm>
+          <a:prstGeom prst="rect">
+            <a:avLst/>
+          </a:prstGeom>
+          <a:solidFill>
+            <a:srgbClr val="10A37F"/>
+          </a:solidFill>
+          <a:ln w="12700">
+            <a:solidFill>
+              <a:srgbClr val="10A37F"/>
+            </a:solidFill>
+            <a:prstDash val="solid"/>
+          </a:ln>
+        </p:spPr>
+      </p:sp>
+      <p:sp>
+        <p:nvSpPr>
+          <p:cNvPr id="13" name="Text 10"/>
+          <p:cNvSpPr/>
+          <p:nvPr/>
+        </p:nvSpPr>
+        <p:spPr>
+          <a:xfrm>
+            <a:off x="566928" y="3635502"/>
+            <a:ext cx="2496998" cy="274320"/>
           </a:xfrm>
           <a:prstGeom prst="rect">
             <a:avLst/>
@@ -40012,47 +38294,11 @@
           <a:bodyPr wrap="square" rtlCol="0" anchor="ctr"/>
           <a:lstStyle/>
           <a:p>
-            <a:pPr algn="ctr" indent="0" marL="0">
-              <a:buNone/>
-            </a:pPr>
-            <a:r>
-              <a:rPr lang="en-US" sz="2000" dirty="0">
-                <a:solidFill>
-                  <a:srgbClr val="000000"/>
-                </a:solidFill>
-              </a:rPr>
-              <a:t>⚡</a:t>
-            </a:r>
-            <a:endParaRPr lang="en-US" sz="2000" dirty="0"/>
-          </a:p>
-        </p:txBody>
-      </p:sp>
-      <p:sp>
-        <p:nvSpPr>
-          <p:cNvPr id="13" name="Text 10"/>
-          <p:cNvSpPr/>
-          <p:nvPr/>
-        </p:nvSpPr>
-        <p:spPr>
-          <a:xfrm>
-            <a:off x="548640" y="6215126"/>
-            <a:ext cx="3484778" cy="256032"/>
-          </a:xfrm>
-          <a:prstGeom prst="rect">
-            <a:avLst/>
-          </a:prstGeom>
-          <a:noFill/>
-          <a:ln/>
-        </p:spPr>
-        <p:txBody>
-          <a:bodyPr wrap="square" rtlCol="0" anchor="ctr"/>
-          <a:lstStyle/>
-          <a:p>
-            <a:pPr algn="ctr" indent="0" marL="0">
-              <a:buNone/>
-            </a:pPr>
-            <a:r>
-              <a:rPr lang="en-US" sz="1100" b="1" dirty="0">
+            <a:pPr indent="0" marL="0">
+              <a:buNone/>
+            </a:pPr>
+            <a:r>
+              <a:rPr lang="en-US" sz="1400" b="1" dirty="0">
                 <a:solidFill>
                   <a:srgbClr val="1A1A2E"/>
                 </a:solidFill>
@@ -40060,9 +38306,9 @@
                 <a:ea typeface="Malgun Gothic" pitchFamily="34" charset="-122"/>
                 <a:cs typeface="Malgun Gothic" pitchFamily="34" charset="-120"/>
               </a:rPr>
-              <a:t>빠른 작업</a:t>
-            </a:r>
-            <a:endParaRPr lang="en-US" sz="1100" dirty="0"/>
+              <a:t>⚡ 빠른 작업</a:t>
+            </a:r>
+            <a:endParaRPr lang="en-US" sz="1400" dirty="0"/>
           </a:p>
         </p:txBody>
       </p:sp>
@@ -40074,8 +38320,8 @@
         </p:nvSpPr>
         <p:spPr>
           <a:xfrm>
-            <a:off x="548640" y="6489446"/>
-            <a:ext cx="3484778" cy="420624"/>
+            <a:off x="566928" y="3946398"/>
+            <a:ext cx="2496998" cy="877824"/>
           </a:xfrm>
           <a:prstGeom prst="rect">
             <a:avLst/>
@@ -40087,7 +38333,7 @@
           <a:bodyPr wrap="square" rtlCol="0" anchor="t"/>
           <a:lstStyle/>
           <a:p>
-            <a:pPr algn="ctr" indent="0" marL="0">
+            <a:pPr indent="0" marL="0">
               <a:buNone/>
             </a:pPr>
             <a:r>
@@ -40113,12 +38359,12 @@
         </p:nvSpPr>
         <p:spPr>
           <a:xfrm>
-            <a:off x="4262018" y="5684774"/>
-            <a:ext cx="3667658" cy="1280160"/>
+            <a:off x="3310814" y="3525774"/>
+            <a:ext cx="2716454" cy="1371600"/>
           </a:xfrm>
           <a:prstGeom prst="roundRect">
             <a:avLst>
-              <a:gd name="adj" fmla="val 5714"/>
+              <a:gd name="adj" fmla="val 5333"/>
             </a:avLst>
           </a:prstGeom>
           <a:solidFill>
@@ -40134,14 +38380,39 @@
       </p:sp>
       <p:sp>
         <p:nvSpPr>
-          <p:cNvPr id="16" name="Text 13"/>
-          <p:cNvSpPr/>
-          <p:nvPr/>
-        </p:nvSpPr>
-        <p:spPr>
-          <a:xfrm>
-            <a:off x="4353458" y="5776214"/>
-            <a:ext cx="3484778" cy="384048"/>
+          <p:cNvPr id="16" name="Shape 13"/>
+          <p:cNvSpPr/>
+          <p:nvPr/>
+        </p:nvSpPr>
+        <p:spPr>
+          <a:xfrm>
+            <a:off x="3310814" y="3525774"/>
+            <a:ext cx="2716454" cy="36576"/>
+          </a:xfrm>
+          <a:prstGeom prst="rect">
+            <a:avLst/>
+          </a:prstGeom>
+          <a:solidFill>
+            <a:srgbClr val="10A37F"/>
+          </a:solidFill>
+          <a:ln w="12700">
+            <a:solidFill>
+              <a:srgbClr val="10A37F"/>
+            </a:solidFill>
+            <a:prstDash val="solid"/>
+          </a:ln>
+        </p:spPr>
+      </p:sp>
+      <p:sp>
+        <p:nvSpPr>
+          <p:cNvPr id="17" name="Text 14"/>
+          <p:cNvSpPr/>
+          <p:nvPr/>
+        </p:nvSpPr>
+        <p:spPr>
+          <a:xfrm>
+            <a:off x="3420542" y="3635502"/>
+            <a:ext cx="2496998" cy="274320"/>
           </a:xfrm>
           <a:prstGeom prst="rect">
             <a:avLst/>
@@ -40153,47 +38424,11 @@
           <a:bodyPr wrap="square" rtlCol="0" anchor="ctr"/>
           <a:lstStyle/>
           <a:p>
-            <a:pPr algn="ctr" indent="0" marL="0">
-              <a:buNone/>
-            </a:pPr>
-            <a:r>
-              <a:rPr lang="en-US" sz="2000" dirty="0">
-                <a:solidFill>
-                  <a:srgbClr val="000000"/>
-                </a:solidFill>
-              </a:rPr>
-              <a:t>🎨</a:t>
-            </a:r>
-            <a:endParaRPr lang="en-US" sz="2000" dirty="0"/>
-          </a:p>
-        </p:txBody>
-      </p:sp>
-      <p:sp>
-        <p:nvSpPr>
-          <p:cNvPr id="17" name="Text 14"/>
-          <p:cNvSpPr/>
-          <p:nvPr/>
-        </p:nvSpPr>
-        <p:spPr>
-          <a:xfrm>
-            <a:off x="4353458" y="6215126"/>
-            <a:ext cx="3484778" cy="256032"/>
-          </a:xfrm>
-          <a:prstGeom prst="rect">
-            <a:avLst/>
-          </a:prstGeom>
-          <a:noFill/>
-          <a:ln/>
-        </p:spPr>
-        <p:txBody>
-          <a:bodyPr wrap="square" rtlCol="0" anchor="ctr"/>
-          <a:lstStyle/>
-          <a:p>
-            <a:pPr algn="ctr" indent="0" marL="0">
-              <a:buNone/>
-            </a:pPr>
-            <a:r>
-              <a:rPr lang="en-US" sz="1100" b="1" dirty="0">
+            <a:pPr indent="0" marL="0">
+              <a:buNone/>
+            </a:pPr>
+            <a:r>
+              <a:rPr lang="en-US" sz="1400" b="1" dirty="0">
                 <a:solidFill>
                   <a:srgbClr val="1A1A2E"/>
                 </a:solidFill>
@@ -40201,9 +38436,9 @@
                 <a:ea typeface="Malgun Gothic" pitchFamily="34" charset="-122"/>
                 <a:cs typeface="Malgun Gothic" pitchFamily="34" charset="-120"/>
               </a:rPr>
-              <a:t>쉬운 디자인</a:t>
-            </a:r>
-            <a:endParaRPr lang="en-US" sz="1100" dirty="0"/>
+              <a:t>🎨 쉬운 디자인</a:t>
+            </a:r>
+            <a:endParaRPr lang="en-US" sz="1400" dirty="0"/>
           </a:p>
         </p:txBody>
       </p:sp>
@@ -40215,8 +38450,8 @@
         </p:nvSpPr>
         <p:spPr>
           <a:xfrm>
-            <a:off x="4353458" y="6489446"/>
-            <a:ext cx="3484778" cy="420624"/>
+            <a:off x="3420542" y="3946398"/>
+            <a:ext cx="2496998" cy="877824"/>
           </a:xfrm>
           <a:prstGeom prst="rect">
             <a:avLst/>
@@ -40228,7 +38463,7 @@
           <a:bodyPr wrap="square" rtlCol="0" anchor="t"/>
           <a:lstStyle/>
           <a:p>
-            <a:pPr algn="ctr" indent="0" marL="0">
+            <a:pPr indent="0" marL="0">
               <a:buNone/>
             </a:pPr>
             <a:r>
@@ -40254,12 +38489,12 @@
         </p:nvSpPr>
         <p:spPr>
           <a:xfrm>
-            <a:off x="8066837" y="5684774"/>
-            <a:ext cx="3667658" cy="1280160"/>
+            <a:off x="6164428" y="3525774"/>
+            <a:ext cx="2716454" cy="1371600"/>
           </a:xfrm>
           <a:prstGeom prst="roundRect">
             <a:avLst>
-              <a:gd name="adj" fmla="val 5714"/>
+              <a:gd name="adj" fmla="val 5333"/>
             </a:avLst>
           </a:prstGeom>
           <a:solidFill>
@@ -40275,14 +38510,39 @@
       </p:sp>
       <p:sp>
         <p:nvSpPr>
-          <p:cNvPr id="20" name="Text 17"/>
-          <p:cNvSpPr/>
-          <p:nvPr/>
-        </p:nvSpPr>
-        <p:spPr>
-          <a:xfrm>
-            <a:off x="8158277" y="5776214"/>
-            <a:ext cx="3484778" cy="384048"/>
+          <p:cNvPr id="20" name="Shape 17"/>
+          <p:cNvSpPr/>
+          <p:nvPr/>
+        </p:nvSpPr>
+        <p:spPr>
+          <a:xfrm>
+            <a:off x="6164428" y="3525774"/>
+            <a:ext cx="2716454" cy="36576"/>
+          </a:xfrm>
+          <a:prstGeom prst="rect">
+            <a:avLst/>
+          </a:prstGeom>
+          <a:solidFill>
+            <a:srgbClr val="10A37F"/>
+          </a:solidFill>
+          <a:ln w="12700">
+            <a:solidFill>
+              <a:srgbClr val="10A37F"/>
+            </a:solidFill>
+            <a:prstDash val="solid"/>
+          </a:ln>
+        </p:spPr>
+      </p:sp>
+      <p:sp>
+        <p:nvSpPr>
+          <p:cNvPr id="21" name="Text 18"/>
+          <p:cNvSpPr/>
+          <p:nvPr/>
+        </p:nvSpPr>
+        <p:spPr>
+          <a:xfrm>
+            <a:off x="6274156" y="3635502"/>
+            <a:ext cx="2496998" cy="274320"/>
           </a:xfrm>
           <a:prstGeom prst="rect">
             <a:avLst/>
@@ -40294,31 +38554,125 @@
           <a:bodyPr wrap="square" rtlCol="0" anchor="ctr"/>
           <a:lstStyle/>
           <a:p>
-            <a:pPr algn="ctr" indent="0" marL="0">
-              <a:buNone/>
-            </a:pPr>
-            <a:r>
-              <a:rPr lang="en-US" sz="2000" dirty="0">
-                <a:solidFill>
-                  <a:srgbClr val="000000"/>
-                </a:solidFill>
-              </a:rPr>
-              <a:t>🤝</a:t>
-            </a:r>
-            <a:endParaRPr lang="en-US" sz="2000" dirty="0"/>
+            <a:pPr indent="0" marL="0">
+              <a:buNone/>
+            </a:pPr>
+            <a:r>
+              <a:rPr lang="en-US" sz="1400" b="1" dirty="0">
+                <a:solidFill>
+                  <a:srgbClr val="1A1A2E"/>
+                </a:solidFill>
+                <a:latin typeface="Malgun Gothic" pitchFamily="34" charset="0"/>
+                <a:ea typeface="Malgun Gothic" pitchFamily="34" charset="-122"/>
+                <a:cs typeface="Malgun Gothic" pitchFamily="34" charset="-120"/>
+              </a:rPr>
+              <a:t>🤝 팀 협업</a:t>
+            </a:r>
+            <a:endParaRPr lang="en-US" sz="1400" dirty="0"/>
           </a:p>
         </p:txBody>
       </p:sp>
       <p:sp>
         <p:nvSpPr>
-          <p:cNvPr id="21" name="Text 18"/>
-          <p:cNvSpPr/>
-          <p:nvPr/>
-        </p:nvSpPr>
-        <p:spPr>
-          <a:xfrm>
-            <a:off x="8158277" y="6215126"/>
-            <a:ext cx="3484778" cy="256032"/>
+          <p:cNvPr id="22" name="Text 19"/>
+          <p:cNvSpPr/>
+          <p:nvPr/>
+        </p:nvSpPr>
+        <p:spPr>
+          <a:xfrm>
+            <a:off x="6274156" y="3946398"/>
+            <a:ext cx="2496998" cy="877824"/>
+          </a:xfrm>
+          <a:prstGeom prst="rect">
+            <a:avLst/>
+          </a:prstGeom>
+          <a:noFill/>
+          <a:ln/>
+        </p:spPr>
+        <p:txBody>
+          <a:bodyPr wrap="square" rtlCol="0" anchor="t"/>
+          <a:lstStyle/>
+          <a:p>
+            <a:pPr indent="0" marL="0">
+              <a:buNone/>
+            </a:pPr>
+            <a:r>
+              <a:rPr lang="en-US" sz="1000" dirty="0">
+                <a:solidFill>
+                  <a:srgbClr val="475569"/>
+                </a:solidFill>
+                <a:latin typeface="Malgun Gothic" pitchFamily="34" charset="0"/>
+                <a:ea typeface="Malgun Gothic" pitchFamily="34" charset="-122"/>
+                <a:cs typeface="Malgun Gothic" pitchFamily="34" charset="-120"/>
+              </a:rPr>
+              <a:t>링크 공유와 댓글로 팀 작업을 이어갈 수 있습니다.</a:t>
+            </a:r>
+            <a:endParaRPr lang="en-US" sz="1000" dirty="0"/>
+          </a:p>
+        </p:txBody>
+      </p:sp>
+      <p:sp>
+        <p:nvSpPr>
+          <p:cNvPr id="23" name="Shape 20"/>
+          <p:cNvSpPr/>
+          <p:nvPr/>
+        </p:nvSpPr>
+        <p:spPr>
+          <a:xfrm>
+            <a:off x="9018041" y="3525774"/>
+            <a:ext cx="2716454" cy="1371600"/>
+          </a:xfrm>
+          <a:prstGeom prst="roundRect">
+            <a:avLst>
+              <a:gd name="adj" fmla="val 5333"/>
+            </a:avLst>
+          </a:prstGeom>
+          <a:solidFill>
+            <a:srgbClr val="FFFFFF"/>
+          </a:solidFill>
+          <a:ln w="9525">
+            <a:solidFill>
+              <a:srgbClr val="C8E6DF"/>
+            </a:solidFill>
+            <a:prstDash val="solid"/>
+          </a:ln>
+        </p:spPr>
+      </p:sp>
+      <p:sp>
+        <p:nvSpPr>
+          <p:cNvPr id="24" name="Shape 21"/>
+          <p:cNvSpPr/>
+          <p:nvPr/>
+        </p:nvSpPr>
+        <p:spPr>
+          <a:xfrm>
+            <a:off x="9018041" y="3525774"/>
+            <a:ext cx="2716454" cy="36576"/>
+          </a:xfrm>
+          <a:prstGeom prst="rect">
+            <a:avLst/>
+          </a:prstGeom>
+          <a:solidFill>
+            <a:srgbClr val="10A37F"/>
+          </a:solidFill>
+          <a:ln w="12700">
+            <a:solidFill>
+              <a:srgbClr val="10A37F"/>
+            </a:solidFill>
+            <a:prstDash val="solid"/>
+          </a:ln>
+        </p:spPr>
+      </p:sp>
+      <p:sp>
+        <p:nvSpPr>
+          <p:cNvPr id="25" name="Text 22"/>
+          <p:cNvSpPr/>
+          <p:nvPr/>
+        </p:nvSpPr>
+        <p:spPr>
+          <a:xfrm>
+            <a:off x="9127769" y="3635502"/>
+            <a:ext cx="2496998" cy="274320"/>
           </a:xfrm>
           <a:prstGeom prst="rect">
             <a:avLst/>
@@ -40330,11 +38684,11 @@
           <a:bodyPr wrap="square" rtlCol="0" anchor="ctr"/>
           <a:lstStyle/>
           <a:p>
-            <a:pPr algn="ctr" indent="0" marL="0">
-              <a:buNone/>
-            </a:pPr>
-            <a:r>
-              <a:rPr lang="en-US" sz="1100" b="1" dirty="0">
+            <a:pPr indent="0" marL="0">
+              <a:buNone/>
+            </a:pPr>
+            <a:r>
+              <a:rPr lang="en-US" sz="1400" b="1" dirty="0">
                 <a:solidFill>
                   <a:srgbClr val="1A1A2E"/>
                 </a:solidFill>
@@ -40342,22 +38696,22 @@
                 <a:ea typeface="Malgun Gothic" pitchFamily="34" charset="-122"/>
                 <a:cs typeface="Malgun Gothic" pitchFamily="34" charset="-120"/>
               </a:rPr>
-              <a:t>팀 협업</a:t>
-            </a:r>
-            <a:endParaRPr lang="en-US" sz="1100" dirty="0"/>
+              <a:t>⚡ 빠른 작업</a:t>
+            </a:r>
+            <a:endParaRPr lang="en-US" sz="1400" dirty="0"/>
           </a:p>
         </p:txBody>
       </p:sp>
       <p:sp>
         <p:nvSpPr>
-          <p:cNvPr id="22" name="Text 19"/>
-          <p:cNvSpPr/>
-          <p:nvPr/>
-        </p:nvSpPr>
-        <p:spPr>
-          <a:xfrm>
-            <a:off x="8158277" y="6489446"/>
-            <a:ext cx="3484778" cy="420624"/>
+          <p:cNvPr id="26" name="Text 23"/>
+          <p:cNvSpPr/>
+          <p:nvPr/>
+        </p:nvSpPr>
+        <p:spPr>
+          <a:xfrm>
+            <a:off x="9127769" y="3946398"/>
+            <a:ext cx="2496998" cy="877824"/>
           </a:xfrm>
           <a:prstGeom prst="rect">
             <a:avLst/>
@@ -40369,7 +38723,267 @@
           <a:bodyPr wrap="square" rtlCol="0" anchor="t"/>
           <a:lstStyle/>
           <a:p>
-            <a:pPr algn="ctr" indent="0" marL="0">
+            <a:pPr indent="0" marL="0">
+              <a:buNone/>
+            </a:pPr>
+            <a:r>
+              <a:rPr lang="en-US" sz="1000" dirty="0">
+                <a:solidFill>
+                  <a:srgbClr val="475569"/>
+                </a:solidFill>
+                <a:latin typeface="Malgun Gothic" pitchFamily="34" charset="0"/>
+                <a:ea typeface="Malgun Gothic" pitchFamily="34" charset="-122"/>
+                <a:cs typeface="Malgun Gothic" pitchFamily="34" charset="-120"/>
+              </a:rPr>
+              <a:t>반복 작업을 줄이고 결과물을 빠르게 만듭니다.</a:t>
+            </a:r>
+            <a:endParaRPr lang="en-US" sz="1000" dirty="0"/>
+          </a:p>
+        </p:txBody>
+      </p:sp>
+      <p:sp>
+        <p:nvSpPr>
+          <p:cNvPr id="27" name="Shape 24"/>
+          <p:cNvSpPr/>
+          <p:nvPr/>
+        </p:nvSpPr>
+        <p:spPr>
+          <a:xfrm>
+            <a:off x="457200" y="5034534"/>
+            <a:ext cx="2716454" cy="1371600"/>
+          </a:xfrm>
+          <a:prstGeom prst="roundRect">
+            <a:avLst>
+              <a:gd name="adj" fmla="val 5333"/>
+            </a:avLst>
+          </a:prstGeom>
+          <a:solidFill>
+            <a:srgbClr val="FFFFFF"/>
+          </a:solidFill>
+          <a:ln w="9525">
+            <a:solidFill>
+              <a:srgbClr val="C8E6DF"/>
+            </a:solidFill>
+            <a:prstDash val="solid"/>
+          </a:ln>
+        </p:spPr>
+      </p:sp>
+      <p:sp>
+        <p:nvSpPr>
+          <p:cNvPr id="28" name="Shape 25"/>
+          <p:cNvSpPr/>
+          <p:nvPr/>
+        </p:nvSpPr>
+        <p:spPr>
+          <a:xfrm>
+            <a:off x="457200" y="5034534"/>
+            <a:ext cx="2716454" cy="36576"/>
+          </a:xfrm>
+          <a:prstGeom prst="rect">
+            <a:avLst/>
+          </a:prstGeom>
+          <a:solidFill>
+            <a:srgbClr val="10A37F"/>
+          </a:solidFill>
+          <a:ln w="12700">
+            <a:solidFill>
+              <a:srgbClr val="10A37F"/>
+            </a:solidFill>
+            <a:prstDash val="solid"/>
+          </a:ln>
+        </p:spPr>
+      </p:sp>
+      <p:sp>
+        <p:nvSpPr>
+          <p:cNvPr id="29" name="Text 26"/>
+          <p:cNvSpPr/>
+          <p:nvPr/>
+        </p:nvSpPr>
+        <p:spPr>
+          <a:xfrm>
+            <a:off x="566928" y="5144262"/>
+            <a:ext cx="2496998" cy="274320"/>
+          </a:xfrm>
+          <a:prstGeom prst="rect">
+            <a:avLst/>
+          </a:prstGeom>
+          <a:noFill/>
+          <a:ln/>
+        </p:spPr>
+        <p:txBody>
+          <a:bodyPr wrap="square" rtlCol="0" anchor="ctr"/>
+          <a:lstStyle/>
+          <a:p>
+            <a:pPr indent="0" marL="0">
+              <a:buNone/>
+            </a:pPr>
+            <a:r>
+              <a:rPr lang="en-US" sz="1400" b="1" dirty="0">
+                <a:solidFill>
+                  <a:srgbClr val="1A1A2E"/>
+                </a:solidFill>
+                <a:latin typeface="Malgun Gothic" pitchFamily="34" charset="0"/>
+                <a:ea typeface="Malgun Gothic" pitchFamily="34" charset="-122"/>
+                <a:cs typeface="Malgun Gothic" pitchFamily="34" charset="-120"/>
+              </a:rPr>
+              <a:t>🎨 쉬운 디자인</a:t>
+            </a:r>
+            <a:endParaRPr lang="en-US" sz="1400" dirty="0"/>
+          </a:p>
+        </p:txBody>
+      </p:sp>
+      <p:sp>
+        <p:nvSpPr>
+          <p:cNvPr id="30" name="Text 27"/>
+          <p:cNvSpPr/>
+          <p:nvPr/>
+        </p:nvSpPr>
+        <p:spPr>
+          <a:xfrm>
+            <a:off x="566928" y="5455158"/>
+            <a:ext cx="2496998" cy="877824"/>
+          </a:xfrm>
+          <a:prstGeom prst="rect">
+            <a:avLst/>
+          </a:prstGeom>
+          <a:noFill/>
+          <a:ln/>
+        </p:spPr>
+        <p:txBody>
+          <a:bodyPr wrap="square" rtlCol="0" anchor="t"/>
+          <a:lstStyle/>
+          <a:p>
+            <a:pPr indent="0" marL="0">
+              <a:buNone/>
+            </a:pPr>
+            <a:r>
+              <a:rPr lang="en-US" sz="1000" dirty="0">
+                <a:solidFill>
+                  <a:srgbClr val="475569"/>
+                </a:solidFill>
+                <a:latin typeface="Malgun Gothic" pitchFamily="34" charset="0"/>
+                <a:ea typeface="Malgun Gothic" pitchFamily="34" charset="-122"/>
+                <a:cs typeface="Malgun Gothic" pitchFamily="34" charset="-120"/>
+              </a:rPr>
+              <a:t>템플릿과 프리셋으로 초보자도 보기 좋은 결과를 만들 수 있습니다.</a:t>
+            </a:r>
+            <a:endParaRPr lang="en-US" sz="1000" dirty="0"/>
+          </a:p>
+        </p:txBody>
+      </p:sp>
+      <p:sp>
+        <p:nvSpPr>
+          <p:cNvPr id="31" name="Shape 28"/>
+          <p:cNvSpPr/>
+          <p:nvPr/>
+        </p:nvSpPr>
+        <p:spPr>
+          <a:xfrm>
+            <a:off x="3310814" y="5034534"/>
+            <a:ext cx="2716454" cy="1371600"/>
+          </a:xfrm>
+          <a:prstGeom prst="roundRect">
+            <a:avLst>
+              <a:gd name="adj" fmla="val 5333"/>
+            </a:avLst>
+          </a:prstGeom>
+          <a:solidFill>
+            <a:srgbClr val="FFFFFF"/>
+          </a:solidFill>
+          <a:ln w="9525">
+            <a:solidFill>
+              <a:srgbClr val="C8E6DF"/>
+            </a:solidFill>
+            <a:prstDash val="solid"/>
+          </a:ln>
+        </p:spPr>
+      </p:sp>
+      <p:sp>
+        <p:nvSpPr>
+          <p:cNvPr id="32" name="Shape 29"/>
+          <p:cNvSpPr/>
+          <p:nvPr/>
+        </p:nvSpPr>
+        <p:spPr>
+          <a:xfrm>
+            <a:off x="3310814" y="5034534"/>
+            <a:ext cx="2716454" cy="36576"/>
+          </a:xfrm>
+          <a:prstGeom prst="rect">
+            <a:avLst/>
+          </a:prstGeom>
+          <a:solidFill>
+            <a:srgbClr val="10A37F"/>
+          </a:solidFill>
+          <a:ln w="12700">
+            <a:solidFill>
+              <a:srgbClr val="10A37F"/>
+            </a:solidFill>
+            <a:prstDash val="solid"/>
+          </a:ln>
+        </p:spPr>
+      </p:sp>
+      <p:sp>
+        <p:nvSpPr>
+          <p:cNvPr id="33" name="Text 30"/>
+          <p:cNvSpPr/>
+          <p:nvPr/>
+        </p:nvSpPr>
+        <p:spPr>
+          <a:xfrm>
+            <a:off x="3420542" y="5144262"/>
+            <a:ext cx="2496998" cy="274320"/>
+          </a:xfrm>
+          <a:prstGeom prst="rect">
+            <a:avLst/>
+          </a:prstGeom>
+          <a:noFill/>
+          <a:ln/>
+        </p:spPr>
+        <p:txBody>
+          <a:bodyPr wrap="square" rtlCol="0" anchor="ctr"/>
+          <a:lstStyle/>
+          <a:p>
+            <a:pPr indent="0" marL="0">
+              <a:buNone/>
+            </a:pPr>
+            <a:r>
+              <a:rPr lang="en-US" sz="1400" b="1" dirty="0">
+                <a:solidFill>
+                  <a:srgbClr val="1A1A2E"/>
+                </a:solidFill>
+                <a:latin typeface="Malgun Gothic" pitchFamily="34" charset="0"/>
+                <a:ea typeface="Malgun Gothic" pitchFamily="34" charset="-122"/>
+                <a:cs typeface="Malgun Gothic" pitchFamily="34" charset="-120"/>
+              </a:rPr>
+              <a:t>🤝 팀 협업</a:t>
+            </a:r>
+            <a:endParaRPr lang="en-US" sz="1400" dirty="0"/>
+          </a:p>
+        </p:txBody>
+      </p:sp>
+      <p:sp>
+        <p:nvSpPr>
+          <p:cNvPr id="34" name="Text 31"/>
+          <p:cNvSpPr/>
+          <p:nvPr/>
+        </p:nvSpPr>
+        <p:spPr>
+          <a:xfrm>
+            <a:off x="3420542" y="5455158"/>
+            <a:ext cx="2496998" cy="877824"/>
+          </a:xfrm>
+          <a:prstGeom prst="rect">
+            <a:avLst/>
+          </a:prstGeom>
+          <a:noFill/>
+          <a:ln/>
+        </p:spPr>
+        <p:txBody>
+          <a:bodyPr wrap="square" rtlCol="0" anchor="t"/>
+          <a:lstStyle/>
+          <a:p>
+            <a:pPr indent="0" marL="0">
               <a:buNone/>
             </a:pPr>
             <a:r>
@@ -43570,7 +42184,7 @@
                 <a:ea typeface="Consolas" pitchFamily="34" charset="-122"/>
                 <a:cs typeface="Consolas" pitchFamily="34" charset="-120"/>
               </a:rPr>
-              <a:t>- icon: "21종"</a:t>
+              <a:t>- icon: "29종"</a:t>
             </a:r>
             <a:endParaRPr lang="en-US" sz="1000" dirty="0"/>
           </a:p>
@@ -43672,7 +42286,7 @@
                 <a:ea typeface="Consolas" pitchFamily="34" charset="-122"/>
                 <a:cs typeface="Consolas" pitchFamily="34" charset="-120"/>
               </a:rPr>
-              <a:t>- icon: "6개"</a:t>
+              <a:t>- icon: "8개"</a:t>
             </a:r>
             <a:endParaRPr lang="en-US" sz="1000" dirty="0"/>
           </a:p>
@@ -43706,7 +42320,7 @@
                 <a:ea typeface="Consolas" pitchFamily="34" charset="-122"/>
                 <a:cs typeface="Consolas" pitchFamily="34" charset="-120"/>
               </a:rPr>
-              <a:t>  desc: "icon, title, desc, tag, meta, color"</a:t>
+              <a:t>  desc: "icon·title·desc·tag·meta·note·color·bullet"</a:t>
             </a:r>
             <a:endParaRPr lang="en-US" sz="1000" dirty="0"/>
           </a:p>
@@ -43814,7 +42428,7 @@
                 <a:ea typeface="Malgun Gothic" pitchFamily="34" charset="-122"/>
                 <a:cs typeface="Malgun Gothic" pitchFamily="34" charset="-120"/>
               </a:rPr>
-              <a:t>21종</a:t>
+              <a:t>29종</a:t>
             </a:r>
             <a:endParaRPr lang="en-US" sz="2200" dirty="0"/>
           </a:p>
@@ -44152,7 +42766,7 @@
                 <a:ea typeface="Malgun Gothic" pitchFamily="34" charset="-122"/>
                 <a:cs typeface="Malgun Gothic" pitchFamily="34" charset="-120"/>
               </a:rPr>
-              <a:t>6개</a:t>
+              <a:t>8개</a:t>
             </a:r>
             <a:endParaRPr lang="en-US" sz="2200" dirty="0"/>
           </a:p>
@@ -44230,7 +42844,7 @@
                 <a:ea typeface="Malgun Gothic" pitchFamily="34" charset="-122"/>
                 <a:cs typeface="Malgun Gothic" pitchFamily="34" charset="-120"/>
               </a:rPr>
-              <a:t>icon, title, desc, tag, meta, color</a:t>
+              <a:t>icon·title·desc·tag·meta·note·color·bullet</a:t>
             </a:r>
             <a:endParaRPr lang="en-US" sz="800" dirty="0"/>
           </a:p>

--- a/public/showcase/showcase.pptx
+++ b/public/showcase/showcase.pptx
@@ -40513,7 +40513,41 @@
                 <a:ea typeface="Malgun Gothic" pitchFamily="34" charset="-122"/>
                 <a:cs typeface="Malgun Gothic" pitchFamily="34" charset="-120"/>
               </a:rPr>
-              <a:t>대용량 파일도 빠르게 처리\n병렬 처리 지원\n메모리 최적화</a:t>
+              <a:t>대용량 파일도 빠르게 처리</a:t>
+            </a:r>
+            <a:endParaRPr lang="en-US" sz="1000" dirty="0"/>
+          </a:p>
+          <a:p>
+            <a:pPr indent="0" marL="0">
+              <a:buNone/>
+            </a:pPr>
+            <a:r>
+              <a:rPr lang="en-US" sz="1000" dirty="0">
+                <a:solidFill>
+                  <a:srgbClr val="475569"/>
+                </a:solidFill>
+                <a:latin typeface="Malgun Gothic" pitchFamily="34" charset="0"/>
+                <a:ea typeface="Malgun Gothic" pitchFamily="34" charset="-122"/>
+                <a:cs typeface="Malgun Gothic" pitchFamily="34" charset="-120"/>
+              </a:rPr>
+              <a:t>병렬 처리 지원</a:t>
+            </a:r>
+            <a:endParaRPr lang="en-US" sz="1000" dirty="0"/>
+          </a:p>
+          <a:p>
+            <a:pPr indent="0" marL="0">
+              <a:buNone/>
+            </a:pPr>
+            <a:r>
+              <a:rPr lang="en-US" sz="1000" dirty="0">
+                <a:solidFill>
+                  <a:srgbClr val="475569"/>
+                </a:solidFill>
+                <a:latin typeface="Malgun Gothic" pitchFamily="34" charset="0"/>
+                <a:ea typeface="Malgun Gothic" pitchFamily="34" charset="-122"/>
+                <a:cs typeface="Malgun Gothic" pitchFamily="34" charset="-120"/>
+              </a:rPr>
+              <a:t>메모리 최적화</a:t>
             </a:r>
             <a:endParaRPr lang="en-US" sz="1000" dirty="0"/>
           </a:p>
@@ -40684,7 +40718,41 @@
                 <a:ea typeface="Malgun Gothic" pitchFamily="34" charset="-122"/>
                 <a:cs typeface="Malgun Gothic" pitchFamily="34" charset="-120"/>
               </a:rPr>
-              <a:t>엔드투엔드 암호화\n접근 권한 관리\n감사 로그 제공</a:t>
+              <a:t>엔드투엔드 암호화</a:t>
+            </a:r>
+            <a:endParaRPr lang="en-US" sz="1000" dirty="0"/>
+          </a:p>
+          <a:p>
+            <a:pPr indent="0" marL="0">
+              <a:buNone/>
+            </a:pPr>
+            <a:r>
+              <a:rPr lang="en-US" sz="1000" dirty="0">
+                <a:solidFill>
+                  <a:srgbClr val="475569"/>
+                </a:solidFill>
+                <a:latin typeface="Malgun Gothic" pitchFamily="34" charset="0"/>
+                <a:ea typeface="Malgun Gothic" pitchFamily="34" charset="-122"/>
+                <a:cs typeface="Malgun Gothic" pitchFamily="34" charset="-120"/>
+              </a:rPr>
+              <a:t>접근 권한 관리</a:t>
+            </a:r>
+            <a:endParaRPr lang="en-US" sz="1000" dirty="0"/>
+          </a:p>
+          <a:p>
+            <a:pPr indent="0" marL="0">
+              <a:buNone/>
+            </a:pPr>
+            <a:r>
+              <a:rPr lang="en-US" sz="1000" dirty="0">
+                <a:solidFill>
+                  <a:srgbClr val="475569"/>
+                </a:solidFill>
+                <a:latin typeface="Malgun Gothic" pitchFamily="34" charset="0"/>
+                <a:ea typeface="Malgun Gothic" pitchFamily="34" charset="-122"/>
+                <a:cs typeface="Malgun Gothic" pitchFamily="34" charset="-120"/>
+              </a:rPr>
+              <a:t>감사 로그 제공</a:t>
             </a:r>
             <a:endParaRPr lang="en-US" sz="1000" dirty="0"/>
           </a:p>
@@ -41326,7 +41394,41 @@
                 <a:ea typeface="Malgun Gothic" pitchFamily="34" charset="-122"/>
                 <a:cs typeface="Malgun Gothic" pitchFamily="34" charset="-120"/>
               </a:rPr>
-              <a:t>자동 생성\n버전 관리\n다국어 지원</a:t>
+              <a:t>자동 생성</a:t>
+            </a:r>
+            <a:endParaRPr lang="en-US" sz="1000" dirty="0"/>
+          </a:p>
+          <a:p>
+            <a:pPr algn="ctr" indent="0" marL="0">
+              <a:buNone/>
+            </a:pPr>
+            <a:r>
+              <a:rPr lang="en-US" sz="1000" dirty="0">
+                <a:solidFill>
+                  <a:srgbClr val="475569"/>
+                </a:solidFill>
+                <a:latin typeface="Malgun Gothic" pitchFamily="34" charset="0"/>
+                <a:ea typeface="Malgun Gothic" pitchFamily="34" charset="-122"/>
+                <a:cs typeface="Malgun Gothic" pitchFamily="34" charset="-120"/>
+              </a:rPr>
+              <a:t>버전 관리</a:t>
+            </a:r>
+            <a:endParaRPr lang="en-US" sz="1000" dirty="0"/>
+          </a:p>
+          <a:p>
+            <a:pPr algn="ctr" indent="0" marL="0">
+              <a:buNone/>
+            </a:pPr>
+            <a:r>
+              <a:rPr lang="en-US" sz="1000" dirty="0">
+                <a:solidFill>
+                  <a:srgbClr val="475569"/>
+                </a:solidFill>
+                <a:latin typeface="Malgun Gothic" pitchFamily="34" charset="0"/>
+                <a:ea typeface="Malgun Gothic" pitchFamily="34" charset="-122"/>
+                <a:cs typeface="Malgun Gothic" pitchFamily="34" charset="-120"/>
+              </a:rPr>
+              <a:t>다국어 지원</a:t>
             </a:r>
             <a:endParaRPr lang="en-US" sz="1000" dirty="0"/>
           </a:p>
@@ -41467,7 +41569,41 @@
                 <a:ea typeface="Malgun Gothic" pitchFamily="34" charset="-122"/>
                 <a:cs typeface="Malgun Gothic" pitchFamily="34" charset="-120"/>
               </a:rPr>
-              <a:t>CI/CD 통합\n테스트 자동화\n배포 스크립트</a:t>
+              <a:t>CI/CD 통합</a:t>
+            </a:r>
+            <a:endParaRPr lang="en-US" sz="1000" dirty="0"/>
+          </a:p>
+          <a:p>
+            <a:pPr algn="ctr" indent="0" marL="0">
+              <a:buNone/>
+            </a:pPr>
+            <a:r>
+              <a:rPr lang="en-US" sz="1000" dirty="0">
+                <a:solidFill>
+                  <a:srgbClr val="475569"/>
+                </a:solidFill>
+                <a:latin typeface="Malgun Gothic" pitchFamily="34" charset="0"/>
+                <a:ea typeface="Malgun Gothic" pitchFamily="34" charset="-122"/>
+                <a:cs typeface="Malgun Gothic" pitchFamily="34" charset="-120"/>
+              </a:rPr>
+              <a:t>테스트 자동화</a:t>
+            </a:r>
+            <a:endParaRPr lang="en-US" sz="1000" dirty="0"/>
+          </a:p>
+          <a:p>
+            <a:pPr algn="ctr" indent="0" marL="0">
+              <a:buNone/>
+            </a:pPr>
+            <a:r>
+              <a:rPr lang="en-US" sz="1000" dirty="0">
+                <a:solidFill>
+                  <a:srgbClr val="475569"/>
+                </a:solidFill>
+                <a:latin typeface="Malgun Gothic" pitchFamily="34" charset="0"/>
+                <a:ea typeface="Malgun Gothic" pitchFamily="34" charset="-122"/>
+                <a:cs typeface="Malgun Gothic" pitchFamily="34" charset="-120"/>
+              </a:rPr>
+              <a:t>배포 스크립트</a:t>
             </a:r>
             <a:endParaRPr lang="en-US" sz="1000" dirty="0"/>
           </a:p>
@@ -41608,7 +41744,41 @@
                 <a:ea typeface="Malgun Gothic" pitchFamily="34" charset="-122"/>
                 <a:cs typeface="Malgun Gothic" pitchFamily="34" charset="-120"/>
               </a:rPr>
-              <a:t>실시간 모니터링\n대시보드\n알림 설정</a:t>
+              <a:t>실시간 모니터링</a:t>
+            </a:r>
+            <a:endParaRPr lang="en-US" sz="1000" dirty="0"/>
+          </a:p>
+          <a:p>
+            <a:pPr algn="ctr" indent="0" marL="0">
+              <a:buNone/>
+            </a:pPr>
+            <a:r>
+              <a:rPr lang="en-US" sz="1000" dirty="0">
+                <a:solidFill>
+                  <a:srgbClr val="475569"/>
+                </a:solidFill>
+                <a:latin typeface="Malgun Gothic" pitchFamily="34" charset="0"/>
+                <a:ea typeface="Malgun Gothic" pitchFamily="34" charset="-122"/>
+                <a:cs typeface="Malgun Gothic" pitchFamily="34" charset="-120"/>
+              </a:rPr>
+              <a:t>대시보드</a:t>
+            </a:r>
+            <a:endParaRPr lang="en-US" sz="1000" dirty="0"/>
+          </a:p>
+          <a:p>
+            <a:pPr algn="ctr" indent="0" marL="0">
+              <a:buNone/>
+            </a:pPr>
+            <a:r>
+              <a:rPr lang="en-US" sz="1000" dirty="0">
+                <a:solidFill>
+                  <a:srgbClr val="475569"/>
+                </a:solidFill>
+                <a:latin typeface="Malgun Gothic" pitchFamily="34" charset="0"/>
+                <a:ea typeface="Malgun Gothic" pitchFamily="34" charset="-122"/>
+                <a:cs typeface="Malgun Gothic" pitchFamily="34" charset="-120"/>
+              </a:rPr>
+              <a:t>알림 설정</a:t>
             </a:r>
             <a:endParaRPr lang="en-US" sz="1000" dirty="0"/>
           </a:p>
@@ -42222,7 +42392,41 @@
                 <a:ea typeface="Malgun Gothic" pitchFamily="34" charset="-122"/>
                 <a:cs typeface="Malgun Gothic" pitchFamily="34" charset="-120"/>
               </a:rPr>
-              <a:t>원클릭 배포\n자동 롤백\n무중단 업데이트</a:t>
+              <a:t>원클릭 배포</a:t>
+            </a:r>
+            <a:endParaRPr lang="en-US" sz="1000" dirty="0"/>
+          </a:p>
+          <a:p>
+            <a:pPr indent="0" marL="0">
+              <a:buNone/>
+            </a:pPr>
+            <a:r>
+              <a:rPr lang="en-US" sz="1000" dirty="0">
+                <a:solidFill>
+                  <a:srgbClr val="475569"/>
+                </a:solidFill>
+                <a:latin typeface="Malgun Gothic" pitchFamily="34" charset="0"/>
+                <a:ea typeface="Malgun Gothic" pitchFamily="34" charset="-122"/>
+                <a:cs typeface="Malgun Gothic" pitchFamily="34" charset="-120"/>
+              </a:rPr>
+              <a:t>자동 롤백</a:t>
+            </a:r>
+            <a:endParaRPr lang="en-US" sz="1000" dirty="0"/>
+          </a:p>
+          <a:p>
+            <a:pPr indent="0" marL="0">
+              <a:buNone/>
+            </a:pPr>
+            <a:r>
+              <a:rPr lang="en-US" sz="1000" dirty="0">
+                <a:solidFill>
+                  <a:srgbClr val="475569"/>
+                </a:solidFill>
+                <a:latin typeface="Malgun Gothic" pitchFamily="34" charset="0"/>
+                <a:ea typeface="Malgun Gothic" pitchFamily="34" charset="-122"/>
+                <a:cs typeface="Malgun Gothic" pitchFamily="34" charset="-120"/>
+              </a:rPr>
+              <a:t>무중단 업데이트</a:t>
             </a:r>
             <a:endParaRPr lang="en-US" sz="1000" dirty="0"/>
           </a:p>
@@ -42352,7 +42556,41 @@
                 <a:ea typeface="Malgun Gothic" pitchFamily="34" charset="-122"/>
                 <a:cs typeface="Malgun Gothic" pitchFamily="34" charset="-120"/>
               </a:rPr>
-              <a:t>자동 인증서\n방화벽 내장\n취약점 스캔</a:t>
+              <a:t>자동 인증서</a:t>
+            </a:r>
+            <a:endParaRPr lang="en-US" sz="1000" dirty="0"/>
+          </a:p>
+          <a:p>
+            <a:pPr indent="0" marL="0">
+              <a:buNone/>
+            </a:pPr>
+            <a:r>
+              <a:rPr lang="en-US" sz="1000" dirty="0">
+                <a:solidFill>
+                  <a:srgbClr val="475569"/>
+                </a:solidFill>
+                <a:latin typeface="Malgun Gothic" pitchFamily="34" charset="0"/>
+                <a:ea typeface="Malgun Gothic" pitchFamily="34" charset="-122"/>
+                <a:cs typeface="Malgun Gothic" pitchFamily="34" charset="-120"/>
+              </a:rPr>
+              <a:t>방화벽 내장</a:t>
+            </a:r>
+            <a:endParaRPr lang="en-US" sz="1000" dirty="0"/>
+          </a:p>
+          <a:p>
+            <a:pPr indent="0" marL="0">
+              <a:buNone/>
+            </a:pPr>
+            <a:r>
+              <a:rPr lang="en-US" sz="1000" dirty="0">
+                <a:solidFill>
+                  <a:srgbClr val="475569"/>
+                </a:solidFill>
+                <a:latin typeface="Malgun Gothic" pitchFamily="34" charset="0"/>
+                <a:ea typeface="Malgun Gothic" pitchFamily="34" charset="-122"/>
+                <a:cs typeface="Malgun Gothic" pitchFamily="34" charset="-120"/>
+              </a:rPr>
+              <a:t>취약점 스캔</a:t>
             </a:r>
             <a:endParaRPr lang="en-US" sz="1000" dirty="0"/>
           </a:p>
